--- a/01-slides/W02-Object-Oriented-Foundations.pptx
+++ b/01-slides/W02-Object-Oriented-Foundations.pptx
@@ -35094,7 +35094,7 @@
   <p:cSld>
     <p:spTree>
       <p:nvGrpSpPr>
-        <p:cNvPr id="837" name="" descr="&lt;Slide style={{ background: '#FFFFFF', padding: 0 }}&gt;&#10;  &lt;Box style={{ padding: '26px 40px 8px 40px', flexDirection: 'row', alignItems: 'center', justifyContent: 'space-between' }}&gt;&#10;    &lt;Text style={{ fontSize: 34, fontWeight: 'bold', color: '#0E3F8C' }}&gt;Anatomy of an Object&lt;/Text&gt;&#10;    &lt;Text style={{ fontSize: 14, color: '#1E4FA8', fontWeight: 'bold' }}&gt;09 / 38&lt;/Text&gt;&#10;  &lt;/Box&gt;&#10;  &lt;Box style={{ flex: 1, padding: '8px 40px 0 40px', justifyContent: 'center', alignItems: 'center' }}&gt;&#10;    &lt;svg width={1180} height={430} viewBox='0 0 1180 430'&gt;&#10;      &lt;rect x='60' y='40' width='470' height='80' rx='8' fill='#0E3F8C' /&gt;&#10;      &lt;text x='295' y='76' textAnchor='middle' fill='#FFFFFF' fontSize='26' fontWeight='bold'&gt;Order #A-1024&lt;/text&gt;&#10;      &lt;text x='295' y='104' textAnchor='middle' fill='#FFC107' fontSize='16'&gt;identity — this order, not another&lt;/text&gt;&#10;      &lt;rect x='60' y='120' width='470' height='132' rx='8' fill='#E8EFF8' stroke='#3D7BD9' strokeWidth='2' /&gt;&#10;      &lt;text x='82' y='150' fill='#0E3F8C' fontSize='17' fontWeight='bold'&gt;state&lt;/text&gt;&#10;      &lt;text x='82' y='178' fill='#1A2230' fontSize='16'&gt;lines: List&amp;lt;OrderLine&amp;gt;&lt;/text&gt;&#10;      &lt;text x='82' y='204' fill='#1A2230' fontSize='16'&gt;status: OrderStatus&lt;/text&gt;&#10;      &lt;text x='82' y='230' fill='#1A2230' fontSize='16'&gt;placedAt: LocalDateTime&lt;/text&gt;&#10;      &lt;rect x='60' y='252' width='470' height='132' rx='8' fill='#F0F5FC' stroke='#1E4FA8' strokeWidth='2' /&gt;&#10;      &lt;text x='82' y='282' fill='#0E3F8C' fontSize='17' fontWeight='bold'&gt;behaviour&lt;/text&gt;&#10;      &lt;text x='82' y='310' fill='#1A2230' fontSize='16'&gt;addItem(item, qty)&lt;/text&gt;&#10;      &lt;text x='82' y='336' fill='#1A2230' fontSize='16'&gt;pay(method)&lt;/text&gt;&#10;      &lt;text x='82' y='362' fill='#1A2230' fontSize='16'&gt;cancel(reason)&lt;/text&gt;&#10;      &lt;rect x='640' y='40' width='470' height='86' rx='12' fill='#F7F9FC' stroke='#D6DCE5' strokeWidth='1' /&gt;&#10;      &lt;text x='668' y='76' fill='#0E3F8C' fontSize='20' fontWeight='bold'&gt;Identity&lt;/text&gt;&#10;      &lt;text x='668' y='106' fill='#4A5568' fontSize='16'&gt;Two objects with identical state are still two objects.&lt;/text&gt;&#10;      &lt;rect x='640' y='142' width='470' height='86' rx='12' fill='#F7F9FC' stroke='#D6DCE5' strokeWidth='1' /&gt;&#10;      &lt;text x='668' y='178' fill='#0E3F8C' fontSize='20' fontWeight='bold'&gt;State&lt;/text&gt;&#10;      &lt;text x='668' y='208' fill='#4A5568' fontSize='16'&gt;What the object remembers right now.&lt;/text&gt;&#10;      &lt;rect x='640' y='244' width='470' height='86' rx='12' fill='#F7F9FC' stroke='#D6DCE5' strokeWidth='1' /&gt;&#10;      &lt;text x='668' y='280' fill='#0E3F8C' fontSize='20' fontWeight='bold'&gt;Behaviour&lt;/text&gt;&#10;      &lt;text x='668' y='310' fill='#4A5568' fontSize='16'&gt;What the object can be asked to do.&lt;/text&gt;&#10;      &lt;rect x='640' y='346' width='470' height='38' rx='10' fill='#0E3F8C' /&gt;&#10;      &lt;text x='875' y='372' textAnchor='middle' fill='#FFC107' fontSize='16' fontWeight='bold'&gt;This three-part box is a UML class. Week 03.&lt;/text&gt;&#10;    &lt;/svg&gt;&#10;  &lt;/Box&gt;&#10;  &lt;Box style={{ height: 56, background: '#0E3F8C', padding: '0 40px', flexDirection: 'row', alignItems: 'center', justifyContent: 'center' }}&gt;&#10;    &lt;Text style={{ fontSize: 18, color: '#FFFFFF', fontWeight: '600' }}&gt;State alone is a data record. State plus behaviour is an object.&lt;/Text&gt;&#10;  &lt;/Box&gt;&#10;&lt;/Slide&gt;"/>
+        <p:cNvPr id="837" name="" descr="&lt;Slide style={{ background: '#FFFFFF', padding: 0 }}&gt;&#10;  &lt;Box style={{ padding: '26px 40px 8px 40px', flexDirection: 'row', alignItems: 'center', justifyContent: 'space-between' }}&gt;&#10;    &lt;Text style={{ fontSize: 34, fontWeight: 'bold', color: '#0E3F8C' }}&gt;Anatomy of an Object&lt;/Text&gt;&#10;    &lt;Text style={{ fontSize: 14, color: '#1E4FA8', fontWeight: 'bold' }}&gt;09 / 38&lt;/Text&gt;&#10;  &lt;/Box&gt;&#10;  &lt;Box style={{ flex: 1, padding: '8px 40px 0 40px', justifyContent: 'center', alignItems: 'center' }}&gt;&#10;    &lt;svg width={1180} height={430} viewBox='0 0 1180 430'&gt;&#10;      &lt;rect x='60' y='40' width='470' height='80' rx='8' fill='#0E3F8C' /&gt;&#10;      &lt;text x='295' y='76' textAnchor='middle' fill='#FFFFFF' fontSize='26' fontWeight='bold'&gt;Order #A-1024&lt;/text&gt;&#10;      &lt;text x='295' y='104' textAnchor='middle' fill='#FFC107' fontSize='16'&gt;identity — this order, not another&lt;/text&gt;&#10;      &lt;rect x='60' y='120' width='470' height='132' rx='8' fill='#E8EFF8' stroke='#3D7BD9' strokeWidth='2' /&gt;&#10;      &lt;text x='82' y='150' fill='#0E3F8C' fontSize='17' fontWeight='bold'&gt;state&lt;/text&gt;&#10;      &lt;text x='82' y='178' fill='#1A2230' fontSize='16'&gt;lines: List&amp;amp;lt;OrderLine&amp;amp;gt;&lt;/text&gt;&#10;      &lt;text x='82' y='204' fill='#1A2230' fontSize='16'&gt;status: OrderStatus&lt;/text&gt;&#10;      &lt;text x='82' y='230' fill='#1A2230' fontSize='16'&gt;placedAt: LocalDateTime&lt;/text&gt;&#10;      &lt;rect x='60' y='252' width='470' height='132' rx='8' fill='#F0F5FC' stroke='#1E4FA8' strokeWidth='2' /&gt;&#10;      &lt;text x='82' y='282' fill='#0E3F8C' fontSize='17' fontWeight='bold'&gt;behaviour&lt;/text&gt;&#10;      &lt;text x='82' y='310' fill='#1A2230' fontSize='16'&gt;addItem(item, qty)&lt;/text&gt;&#10;      &lt;text x='82' y='336' fill='#1A2230' fontSize='16'&gt;pay(method)&lt;/text&gt;&#10;      &lt;text x='82' y='362' fill='#1A2230' fontSize='16'&gt;cancel(reason)&lt;/text&gt;&#10;      &lt;rect x='640' y='40' width='470' height='86' rx='12' fill='#F7F9FC' stroke='#D6DCE5' strokeWidth='1' /&gt;&#10;      &lt;text x='668' y='76' fill='#0E3F8C' fontSize='20' fontWeight='bold'&gt;Identity&lt;/text&gt;&#10;      &lt;text x='668' y='106' fill='#4A5568' fontSize='16'&gt;Two objects with identical state are still two objects.&lt;/text&gt;&#10;      &lt;rect x='640' y='142' width='470' height='86' rx='12' fill='#F7F9FC' stroke='#D6DCE5' strokeWidth='1' /&gt;&#10;      &lt;text x='668' y='178' fill='#0E3F8C' fontSize='20' fontWeight='bold'&gt;State&lt;/text&gt;&#10;      &lt;text x='668' y='208' fill='#4A5568' fontSize='16'&gt;What the object remembers right now.&lt;/text&gt;&#10;      &lt;rect x='640' y='244' width='470' height='86' rx='12' fill='#F7F9FC' stroke='#D6DCE5' strokeWidth='1' /&gt;&#10;      &lt;text x='668' y='280' fill='#0E3F8C' fontSize='20' fontWeight='bold'&gt;Behaviour&lt;/text&gt;&#10;      &lt;text x='668' y='310' fill='#4A5568' fontSize='16'&gt;What the object can be asked to do.&lt;/text&gt;&#10;      &lt;rect x='640' y='346' width='470' height='38' rx='10' fill='#0E3F8C' /&gt;&#10;      &lt;text x='875' y='372' textAnchor='middle' fill='#FFC107' fontSize='16' fontWeight='bold'&gt;This three-part box is a UML class. Week 03.&lt;/text&gt;&#10;    &lt;/svg&gt;&#10;  &lt;/Box&gt;&#10;  &lt;Box style={{ height: 56, background: '#0E3F8C', padding: '0 40px', flexDirection: 'row', alignItems: 'center', justifyContent: 'center' }}&gt;&#10;    &lt;Text style={{ fontSize: 18, color: '#FFFFFF', fontWeight: '600' }}&gt;State alone is a data record. State plus behaviour is an object.&lt;/Text&gt;&#10;  &lt;/Box&gt;&#10;&lt;/Slide&gt;"/>
         <p:cNvGrpSpPr/>
         <p:nvPr/>
       </p:nvGrpSpPr>

--- a/01-slides/W02-Object-Oriented-Foundations.pptx
+++ b/01-slides/W02-Object-Oriented-Foundations.pptx
@@ -26952,7 +26952,7 @@
   <p:cSld>
     <p:spTree>
       <p:nvGrpSpPr>
-        <p:cNvPr id="589" name="" descr="&lt;Slide style={{ background: '#FFFFFF', padding: 0 }}&gt;&#10;  &lt;Box style={{ height: 72, background: '#1E4FA8', padding: '0 40px', flexDirection: 'row', alignItems: 'center', justifyContent: 'space-between' }}&gt;&#10;    &lt;Text style={{ fontSize: 15, color: '#B9CDF0', letterSpacing: 1 }}&gt;ISAD · INFORMATION SYSTEMS ANALYSIS &amp;amp; DESIGN&lt;/Text&gt;&#10;    &lt;Text style={{ fontSize: 15, color: '#B9CDF0' }}&gt;W02 · M0 · CHARTER&lt;/Text&gt;&#10;  &lt;/Box&gt;&#10;  &lt;Box style={{ padding: '20px 40px 0 40px' }}&gt;&#10;    &lt;Text style={{ fontSize: 32, fontWeight: 'bold', color: '#0E3F8C' }}&gt;Team Charter Essentials&lt;/Text&gt;&#10;  &lt;/Box&gt;&#10;  &lt;Box style={{ flex: 1, padding: '18px 40px 0 40px', flexDirection: 'row', gap: 26 }}&gt;&#10;    &lt;Box style={{ flex: 3, flexDirection: 'column', gap: 10, justifyContent: 'center' }}&gt;&#10;      {[&#10;        ['tag', 'Team name', 'One line. You will be called this all semester.'],&#10;        ['user-tag', 'Roles', 'Team Lead, Recorder, Reviewer — write down who starts in which.'],&#10;        ['comments', 'Communication rules', 'Where you talk, how fast you reply, what counts as an emergency.'],&#10;        ['sync', 'Role rotation', 'Rotate every milestone so nobody owns one job all term.'],&#10;        ['gavel', 'Conflict rule', 'What you do when two members disagree — decide now, not at 23:59.'],&#10;      ].map(([icon, t, d]) =&gt; (&#10;        &lt;Box key={t} style={{ flexDirection: 'row', gap: 13, alignItems: 'center', padding: '13px 17px', background: '#F7F9FC', borderRadius: 10, border: '1px solid #E5E7EB' }}&gt;&#10;          &lt;Box style={{ width: 40, height: 40, borderRadius: 9, background: '#E8EFF8', justifyContent: 'center', alignItems: 'center' }}&gt;&#10;            &lt;FAIcon name={icon} style={{ fill: '#1E4FA8', width: 20, height: 20 }} /&gt;&#10;          &lt;/Box&gt;&#10;          &lt;Box style={{ flex: 1, flexDirection: 'column', gap: 2 }}&gt;&#10;            &lt;Text style={{ fontSize: 16, fontWeight: 'bold', color: '#1A2230' }}&gt;{t}&lt;/Text&gt;&#10;            &lt;Text style={{ fontSize: 13, color: '#4A5568', lineHeight: 1.4 }}&gt;{d}&lt;/Text&gt;&#10;          &lt;/Box&gt;&#10;        &lt;/Box&gt;&#10;      ))}&#10;    &lt;/Box&gt;&#10;    &lt;Box style={{ flex: 2, padding: '26px 24px', background: '#0E3F8C', borderRadius: 12, flexDirection: 'column', justifyContent: 'center', gap: 14 }}&gt;&#10;      &lt;FAIcon name='handshake' style={{ fill: '#FFC107', width: 32, height: 32 }} /&gt;&#10;      &lt;Text style={{ fontSize: 21, fontWeight: 'bold', color: '#FFFFFF', lineHeight: 1.35 }}&gt;The charter is a contract between the three of you.&lt;/Text&gt;&#10;      &lt;Text style={{ fontSize: 15, color: '#C5D4EA', lineHeight: 1.55 }}&gt;Not with me. When a milestone slips, this document is what you point at.&lt;/Text&gt;&#10;      &lt;Box style={{ padding: '13px 16px', background: '#1E4FA8', borderRadius: 8 }}&gt;&#10;        &lt;Text style={{ fontSize: 14, color: '#B9CDF0', lineHeight: 1.45 }}&gt;Template: &lt;Text style={{ fontWeight: 'bold', color: '#FFFFFF' }}&gt;Project Guidebook, Appendix A&lt;/Text&gt;&lt;/Text&gt;&#10;      &lt;/Box&gt;&#10;    &lt;/Box&gt;&#10;  &lt;/Box&gt;&#10;  &lt;Box style={{ height: 40, padding: '0 40px', flexDirection: 'row', alignItems: 'center', justifyContent: 'space-between' }}&gt;&#10;    &lt;Text style={{ fontSize: 13, color: '#8B97A8' }}&gt;ISAD · Fall 2026&lt;/Text&gt;&#10;    &lt;Text style={{ fontSize: 14, color: '#1E4FA8', fontWeight: 'bold' }}&gt;34 / 38&lt;/Text&gt;&#10;  &lt;/Box&gt;&#10;&lt;/Slide&gt;"/>
+        <p:cNvPr id="589" name="" descr="&lt;Slide style={{ background: '#FFFFFF', padding: 0 }}&gt;&#10;  &lt;Box style={{ height: 72, background: '#1E4FA8', padding: '0 40px', flexDirection: 'row', alignItems: 'center', justifyContent: 'space-between' }}&gt;&#10;    &lt;Text style={{ fontSize: 15, color: '#B9CDF0', letterSpacing: 1 }}&gt;ISAD · INFORMATION SYSTEMS ANALYSIS &amp;amp; DESIGN&lt;/Text&gt;&#10;    &lt;Text style={{ fontSize: 15, color: '#B9CDF0' }}&gt;W02 · M0 · CHARTER&lt;/Text&gt;&#10;  &lt;/Box&gt;&#10;  &lt;Box style={{ padding: '20px 40px 0 40px' }}&gt;&#10;    &lt;Text style={{ fontSize: 32, fontWeight: 'bold', color: '#0E3F8C' }}&gt;Team Charter Essentials&lt;/Text&gt;&#10;  &lt;/Box&gt;&#10;  &lt;Box style={{ flex: 1, padding: '18px 40px 0 40px', flexDirection: 'row', gap: 26 }}&gt;&#10;    &lt;Box style={{ flex: 3, flexDirection: 'column', gap: 10, justifyContent: 'center' }}&gt;&#10;      {[&#10;        ['tag', 'Team name', 'One line. You will be called this all semester.'],&#10;        ['user-tag', 'Roles', 'Team Lead, Recorder, Reviewer — write down who starts in which.'],&#10;        ['comments', 'Communication rules', 'Where you talk, how fast you reply, what counts as an emergency.'],&#10;        ['sync', 'Role rotation', 'Rotate every milestone so nobody owns one job all term.'],&#10;        ['gavel', 'Conflict rule', 'What you do when two members disagree — decide now, not at 23:59.'],&#10;      ].map(([icon, t, d]) =&gt; (&#10;        &lt;Box key={t} style={{ flexDirection: 'row', gap: 13, alignItems: 'center', padding: '13px 17px', background: '#F7F9FC', borderRadius: 10, border: '1px solid #E5E7EB' }}&gt;&#10;          &lt;Box style={{ width: 40, height: 40, borderRadius: 9, background: '#E8EFF8', justifyContent: 'center', alignItems: 'center' }}&gt;&#10;            &lt;FAIcon name={icon} style={{ fill: '#1E4FA8', width: 20, height: 20 }} /&gt;&#10;          &lt;/Box&gt;&#10;          &lt;Box style={{ flex: 1, flexDirection: 'column', gap: 2 }}&gt;&#10;            &lt;Text style={{ fontSize: 16, fontWeight: 'bold', color: '#1A2230' }}&gt;{t}&lt;/Text&gt;&#10;            &lt;Text style={{ fontSize: 13, color: '#4A5568', lineHeight: 1.4 }}&gt;{d}&lt;/Text&gt;&#10;          &lt;/Box&gt;&#10;        &lt;/Box&gt;&#10;      ))}&#10;    &lt;/Box&gt;&#10;    &lt;Box style={{ flex: 2, padding: '26px 24px', background: '#0E3F8C', borderRadius: 12, flexDirection: 'column', justifyContent: 'center', gap: 14 }}&gt;&#10;      &lt;FAIcon name='handshake' style={{ fill: '#FFC107', width: 32, height: 32 }} /&gt;&#10;      &lt;Text style={{ fontSize: 21, fontWeight: 'bold', color: '#FFFFFF', lineHeight: 1.35 }}&gt;The charter is a contract between the four of you.&lt;/Text&gt;&#10;      &lt;Text style={{ fontSize: 15, color: '#C5D4EA', lineHeight: 1.55 }}&gt;Not with me. When a milestone slips, this document is what you point at.&lt;/Text&gt;&#10;      &lt;Box style={{ padding: '13px 16px', background: '#1E4FA8', borderRadius: 8 }}&gt;&#10;        &lt;Text style={{ fontSize: 14, color: '#B9CDF0', lineHeight: 1.45 }}&gt;Template: &lt;Text style={{ fontWeight: 'bold', color: '#FFFFFF' }}&gt;Project Guidebook, Appendix A&lt;/Text&gt;&lt;/Text&gt;&#10;      &lt;/Box&gt;&#10;    &lt;/Box&gt;&#10;  &lt;/Box&gt;&#10;  &lt;Box style={{ height: 40, padding: '0 40px', flexDirection: 'row', alignItems: 'center', justifyContent: 'space-between' }}&gt;&#10;    &lt;Text style={{ fontSize: 13, color: '#8B97A8' }}&gt;ISAD · Fall 2026&lt;/Text&gt;&#10;    &lt;Text style={{ fontSize: 14, color: '#1E4FA8', fontWeight: 'bold' }}&gt;34 / 38&lt;/Text&gt;&#10;  &lt;/Box&gt;&#10;&lt;/Slide&gt;"/>
         <p:cNvGrpSpPr/>
         <p:nvPr/>
       </p:nvGrpSpPr>
@@ -27995,7 +27995,7 @@
                 <a:latin typeface="Microsoft YaHei"/>
                 <a:ea typeface="Microsoft YaHei"/>
               </a:rPr>
-              <a:t>The charter is a contract between the three of you.</a:t>
+              <a:t>The charter is a contract between the four of you.</a:t>
             </a:r>
             <a:endParaRPr/>
           </a:p>
@@ -33003,7 +33003,7 @@
   <p:cSld>
     <p:spTree>
       <p:nvGrpSpPr>
-        <p:cNvPr id="773" name="" descr="&lt;Slide style={{ background: '#FFFFFF', padding: 0 }}&gt;&#10;  &lt;Box style={{ height: 72, background: '#1E4FA8', padding: '0 40px', flexDirection: 'row', alignItems: 'center', justifyContent: 'space-between' }}&gt;&#10;    &lt;Text style={{ fontSize: 15, color: '#B9CDF0', letterSpacing: 1 }}&gt;ISAD · INFORMATION SYSTEMS ANALYSIS &amp;amp; DESIGN&lt;/Text&gt;&#10;    &lt;Text style={{ fontSize: 15, color: '#B9CDF0' }}&gt;W02 · KICKOFF&lt;/Text&gt;&#10;  &lt;/Box&gt;&#10;  &lt;Box style={{ padding: '22px 40px 0 40px' }}&gt;&#10;    &lt;Text style={{ fontSize: 34, fontWeight: 'bold', color: '#0E3F8C' }}&gt;CampusBites Starts Today&lt;/Text&gt;&#10;  &lt;/Box&gt;&#10;  &lt;Box style={{ flex: 1, padding: '16px 40px 0 40px', flexDirection: 'row', gap: 26 }}&gt;&#10;    &lt;Box style={{ flex: 5, justifyContent: 'center', alignItems: 'center' }}&gt;&#10;      &lt;svg width={560} height={360} viewBox='0 0 560 360'&gt;&#10;        &lt;rect x='30' y='150' width='140' height='78' rx='12' fill='#E8EFF8' stroke='#3D7BD9' strokeWidth='2' /&gt;&#10;        &lt;text x='100' y='182' textAnchor='middle' fill='#0E3F8C' fontSize='19' fontWeight='bold'&gt;Student&lt;/text&gt;&#10;        &lt;text x='100' y='206' textAnchor='middle' fill='#8B97A8' fontSize='14'&gt;places the order&lt;/text&gt;&#10;        &lt;rect x='125' y='34' width='150' height='66' rx='12' fill='#E8EFF8' stroke='#3D7BD9' strokeWidth='2' /&gt;&#10;        &lt;text x='200' y='62' textAnchor='middle' fill='#0E3F8C' fontSize='19' fontWeight='bold'&gt;Restaurant&lt;/text&gt;&#10;        &lt;text x='200' y='84' textAnchor='middle' fill='#8B97A8' fontSize='14'&gt;prepares the food&lt;/text&gt;&#10;        &lt;rect x='125' y='266' width='150' height='66' rx='12' fill='#E8EFF8' stroke='#3D7BD9' strokeWidth='2' /&gt;&#10;        &lt;text x='200' y='294' textAnchor='middle' fill='#0E3F8C' fontSize='19' fontWeight='bold'&gt;Rider&lt;/text&gt;&#10;        &lt;text x='200' y='316' textAnchor='middle' fill='#8B97A8' fontSize='14'&gt;delivers to campus&lt;/text&gt;&#10;        &lt;rect x='360' y='150' width='160' height='78' rx='12' fill='#0E3F8C' /&gt;&#10;        &lt;text x='440' y='182' textAnchor='middle' fill='#FFFFFF' fontSize='19' fontWeight='bold'&gt;Order&lt;/text&gt;&#10;        &lt;text x='440' y='206' textAnchor='middle' fill='#FFC107' fontSize='15'&gt;state + payment&lt;/text&gt;&#10;        &lt;line x1='170' y1='168' x2='358' y2='178' stroke='#3D7BD9' strokeWidth='2' /&gt;&#10;        &lt;line x1='212' y1='100' x2='400' y2='172' stroke='#3D7BD9' strokeWidth='2' /&gt;&#10;        &lt;line x1='212' y1='266' x2='400' y2='212' stroke='#3D7BD9' strokeWidth='2' /&gt;&#10;        &lt;text x='440' y='268' textAnchor='middle' fill='#8B97A8' fontSize='14'&gt;campus food delivery&lt;/text&gt;&#10;      &lt;/svg&gt;&#10;    &lt;/Box&gt;&#10;    &lt;Box style={{ flex: 4, flexDirection: 'column', gap: 10, justifyContent: 'center' }}&gt;&#10;      &lt;Text style={{ fontSize: 17, fontWeight: 'bold', color: '#0E3F8C', marginBottom: 2 }}&gt;M0 — due Fri Sep 11 (pass / fail)&lt;/Text&gt;&#10;      {[&#10;        ['file-signature', 'Team charter', 'Name, roles, communication rules'],&#10;        ['users', 'Stakeholder list', 'Who cares about CampusBites'],&#10;        ['eye', 'One-paragraph vision', 'What it does, for whom'],&#10;        ['code-branch', 'Repository registered', 'Create repo, invite klausren'],&#10;      ].map(([icon, t, d]) =&gt; (&#10;        &lt;Box key={t} style={{ flexDirection: 'row', gap: 12, alignItems: 'center', padding: '12px 16px', background: '#F7F9FC', borderRadius: 9, border: '1px solid #E5E7EB' }}&gt;&#10;          &lt;Box style={{ width: 36, height: 36, borderRadius: 8, background: '#E8EFF8', justifyContent: 'center', alignItems: 'center' }}&gt;&#10;            &lt;FAIcon name={icon} style={{ fill: '#1E4FA8', width: 18, height: 18 }} /&gt;&#10;          &lt;/Box&gt;&#10;          &lt;Box style={{ flexDirection: 'column', gap: 1 }}&gt;&#10;            &lt;Text style={{ fontSize: 15, fontWeight: 'bold', color: '#1A2230' }}&gt;{t}&lt;/Text&gt;&#10;            &lt;Text style={{ fontSize: 13, color: '#4A5568' }}&gt;{d}&lt;/Text&gt;&#10;          &lt;/Box&gt;&#10;        &lt;/Box&gt;&#10;      ))}&#10;      &lt;Box style={{ marginTop: 4, padding: '11px 16px', background: '#FDF3F3', borderRadius: 9, borderLeft: '3px solid #D9534F' }}&gt;&#10;        &lt;Text style={{ fontSize: 14, color: '#D9534F', fontWeight: 'bold' }}&gt;2 teams × 3 students. You form them in this week's lab.&lt;/Text&gt;&#10;      &lt;/Box&gt;&#10;    &lt;/Box&gt;&#10;  &lt;/Box&gt;&#10;  &lt;Box style={{ height: 40, padding: '0 40px', flexDirection: 'row', alignItems: 'center', justifyContent: 'space-between' }}&gt;&#10;    &lt;Text style={{ fontSize: 13, color: '#8B97A8' }}&gt;Full brief: Project Guidebook · Deadline Schedule §4&lt;/Text&gt;&#10;    &lt;Text style={{ fontSize: 14, color: '#1E4FA8', fontWeight: 'bold' }}&gt;06 / 38&lt;/Text&gt;&#10;  &lt;/Box&gt;&#10;&lt;/Slide&gt;"/>
+        <p:cNvPr id="773" name="" descr="&lt;Slide style={{ background: '#FFFFFF', padding: 0 }}&gt;&#10;  &lt;Box style={{ height: 72, background: '#1E4FA8', padding: '0 40px', flexDirection: 'row', alignItems: 'center', justifyContent: 'space-between' }}&gt;&#10;    &lt;Text style={{ fontSize: 15, color: '#B9CDF0', letterSpacing: 1 }}&gt;ISAD · INFORMATION SYSTEMS ANALYSIS &amp;amp; DESIGN&lt;/Text&gt;&#10;    &lt;Text style={{ fontSize: 15, color: '#B9CDF0' }}&gt;W02 · KICKOFF&lt;/Text&gt;&#10;  &lt;/Box&gt;&#10;  &lt;Box style={{ padding: '22px 40px 0 40px' }}&gt;&#10;    &lt;Text style={{ fontSize: 34, fontWeight: 'bold', color: '#0E3F8C' }}&gt;CampusBites Starts Today&lt;/Text&gt;&#10;  &lt;/Box&gt;&#10;  &lt;Box style={{ flex: 1, padding: '16px 40px 0 40px', flexDirection: 'row', gap: 26 }}&gt;&#10;    &lt;Box style={{ flex: 5, justifyContent: 'center', alignItems: 'center' }}&gt;&#10;      &lt;svg width={560} height={360} viewBox='0 0 560 360'&gt;&#10;        &lt;rect x='30' y='150' width='140' height='78' rx='12' fill='#E8EFF8' stroke='#3D7BD9' strokeWidth='2' /&gt;&#10;        &lt;text x='100' y='182' textAnchor='middle' fill='#0E3F8C' fontSize='19' fontWeight='bold'&gt;Student&lt;/text&gt;&#10;        &lt;text x='100' y='206' textAnchor='middle' fill='#8B97A8' fontSize='14'&gt;places the order&lt;/text&gt;&#10;        &lt;rect x='125' y='34' width='150' height='66' rx='12' fill='#E8EFF8' stroke='#3D7BD9' strokeWidth='2' /&gt;&#10;        &lt;text x='200' y='62' textAnchor='middle' fill='#0E3F8C' fontSize='19' fontWeight='bold'&gt;Restaurant&lt;/text&gt;&#10;        &lt;text x='200' y='84' textAnchor='middle' fill='#8B97A8' fontSize='14'&gt;prepares the food&lt;/text&gt;&#10;        &lt;rect x='125' y='266' width='150' height='66' rx='12' fill='#E8EFF8' stroke='#3D7BD9' strokeWidth='2' /&gt;&#10;        &lt;text x='200' y='294' textAnchor='middle' fill='#0E3F8C' fontSize='19' fontWeight='bold'&gt;Rider&lt;/text&gt;&#10;        &lt;text x='200' y='316' textAnchor='middle' fill='#8B97A8' fontSize='14'&gt;delivers to campus&lt;/text&gt;&#10;        &lt;rect x='360' y='150' width='160' height='78' rx='12' fill='#0E3F8C' /&gt;&#10;        &lt;text x='440' y='182' textAnchor='middle' fill='#FFFFFF' fontSize='19' fontWeight='bold'&gt;Order&lt;/text&gt;&#10;        &lt;text x='440' y='206' textAnchor='middle' fill='#FFC107' fontSize='15'&gt;state + payment&lt;/text&gt;&#10;        &lt;line x1='170' y1='168' x2='358' y2='178' stroke='#3D7BD9' strokeWidth='2' /&gt;&#10;        &lt;line x1='212' y1='100' x2='400' y2='172' stroke='#3D7BD9' strokeWidth='2' /&gt;&#10;        &lt;line x1='212' y1='266' x2='400' y2='212' stroke='#3D7BD9' strokeWidth='2' /&gt;&#10;        &lt;text x='440' y='268' textAnchor='middle' fill='#8B97A8' fontSize='14'&gt;campus food delivery&lt;/text&gt;&#10;      &lt;/svg&gt;&#10;    &lt;/Box&gt;&#10;    &lt;Box style={{ flex: 4, flexDirection: 'column', gap: 10, justifyContent: 'center' }}&gt;&#10;      &lt;Text style={{ fontSize: 17, fontWeight: 'bold', color: '#0E3F8C', marginBottom: 2 }}&gt;M0 — due Fri Sep 11 (pass / fail)&lt;/Text&gt;&#10;      {[&#10;        ['file-signature', 'Team charter', 'Name, roles, communication rules'],&#10;        ['users', 'Stakeholder list', 'Who cares about CampusBites'],&#10;        ['eye', 'One-paragraph vision', 'What it does, for whom'],&#10;        ['code-branch', 'Repository registered', 'Create repo, invite klausren'],&#10;      ].map(([icon, t, d]) =&gt; (&#10;        &lt;Box key={t} style={{ flexDirection: 'row', gap: 12, alignItems: 'center', padding: '12px 16px', background: '#F7F9FC', borderRadius: 9, border: '1px solid #E5E7EB' }}&gt;&#10;          &lt;Box style={{ width: 36, height: 36, borderRadius: 8, background: '#E8EFF8', justifyContent: 'center', alignItems: 'center' }}&gt;&#10;            &lt;FAIcon name={icon} style={{ fill: '#1E4FA8', width: 18, height: 18 }} /&gt;&#10;          &lt;/Box&gt;&#10;          &lt;Box style={{ flexDirection: 'column', gap: 1 }}&gt;&#10;            &lt;Text style={{ fontSize: 15, fontWeight: 'bold', color: '#1A2230' }}&gt;{t}&lt;/Text&gt;&#10;            &lt;Text style={{ fontSize: 13, color: '#4A5568' }}&gt;{d}&lt;/Text&gt;&#10;          &lt;/Box&gt;&#10;        &lt;/Box&gt;&#10;      ))}&#10;      &lt;Box style={{ marginTop: 4, padding: '11px 16px', background: '#FDF3F3', borderRadius: 9, borderLeft: '3px solid #D9534F' }}&gt;&#10;        &lt;Text style={{ fontSize: 14, color: '#D9534F', fontWeight: 'bold' }}&gt;One team of four. You settle the roles in this week's lab.&lt;/Text&gt;&#10;      &lt;/Box&gt;&#10;    &lt;/Box&gt;&#10;  &lt;/Box&gt;&#10;  &lt;Box style={{ height: 40, padding: '0 40px', flexDirection: 'row', alignItems: 'center', justifyContent: 'space-between' }}&gt;&#10;    &lt;Text style={{ fontSize: 13, color: '#8B97A8' }}&gt;Full brief: Project Guidebook · Deadline Schedule §4&lt;/Text&gt;&#10;    &lt;Text style={{ fontSize: 14, color: '#1E4FA8', fontWeight: 'bold' }}&gt;06 / 38&lt;/Text&gt;&#10;  &lt;/Box&gt;&#10;&lt;/Slide&gt;"/>
         <p:cNvGrpSpPr/>
         <p:nvPr/>
       </p:nvGrpSpPr>
@@ -33978,7 +33978,7 @@
                 <a:latin typeface="Microsoft YaHei"/>
                 <a:ea typeface="Microsoft YaHei"/>
               </a:rPr>
-              <a:t>2 teams × 3 students. You form them in this week's lab.</a:t>
+              <a:t>One team of four. You settle the roles in this week's lab.</a:t>
             </a:r>
             <a:endParaRPr/>
           </a:p>

--- a/01-slides/W02-Object-Oriented-Foundations.pptx
+++ b/01-slides/W02-Object-Oriented-Foundations.pptx
@@ -4413,7 +4413,7 @@
   <p:cSld>
     <p:spTree>
       <p:nvGrpSpPr>
-        <p:cNvPr id="120" name="" descr="&lt;Slide style={{ background: '#FFFFFF', padding: 0 }}&gt;&#10;  &lt;Box style={{ height: 72, background: '#1E4FA8', padding: '0 40px', flexDirection: 'row', alignItems: 'center', justifyContent: 'space-between' }}&gt;&#10;    &lt;Text style={{ fontSize: 15, color: '#B9CDF0', letterSpacing: 1 }}&gt;ISAD · INFORMATION SYSTEMS ANALYSIS &amp;amp; DESIGN&lt;/Text&gt;&#10;    &lt;Text style={{ fontSize: 15, color: '#B9CDF0' }}&gt;W02 · ENCAPSULATION&lt;/Text&gt;&#10;  &lt;/Box&gt;&#10;  &lt;Box style={{ padding: '20px 40px 0 40px' }}&gt;&#10;    &lt;Text style={{ fontSize: 32, fontWeight: 'bold', color: '#0E3F8C' }}&gt;Encapsulation in Java&lt;/Text&gt;&#10;  &lt;/Box&gt;&#10;  &lt;Box style={{ flex: 1, padding: '16px 40px 0 40px', flexDirection: 'row', gap: 26 }}&gt;&#10;    &lt;Box style={{ flex: 3, justifyContent: 'center' }}&gt;&#10;      &lt;CodeBlock code={`public class Order {&#10;    private final List lines = new ArrayList();&#10;    private OrderStatus status = OrderStatus.DRAFT;&#10;&#10;    public void addItem(MenuItem item, int qty) {&#10;        if (status != OrderStatus.DRAFT) {&#10;            throw new IllegalStateException(&#10;                &quot;Order already placed&quot;);&#10;        }&#10;        lines.add(new OrderLine(item, qty));&#10;    }&#10;&#10;    public Money total() {&#10;        Money sum = Money.ZERO;&#10;        for (OrderLine l : lines) {&#10;            sum = sum.plus(l.subtotal());&#10;        }&#10;        return sum;&#10;    }&#10;}`} language='java' width={580} fontSize={13} /&gt;&#10;    &lt;/Box&gt;&#10;    &lt;Box style={{ flex: 2, flexDirection: 'column', gap: 11, justifyContent: 'center' }}&gt;&#10;      {[&#10;        ['lock', 'private fields', 'Nobody outside can set status to a nonsense value.'],&#10;        ['user-check', 'guarded method', 'addItem() refuses once the order is placed.'],&#10;        ['calculator', 'computed, not stored', 'total() is derived — there is no stale copy to drift.'],&#10;      ].map(([icon, t, d]) =&gt; (&#10;        &lt;Box key={t} style={{ flexDirection: 'row', gap: 12, alignItems: 'flex-start', padding: '14px 16px', background: '#F7F9FC', borderRadius: 10, border: '1px solid #E5E7EB' }}&gt;&#10;          &lt;Box style={{ width: 38, height: 38, borderRadius: 9, background: '#E8EFF8', justifyContent: 'center', alignItems: 'center' }}&gt;&#10;            &lt;FAIcon name={icon} style={{ fill: '#1E4FA8', width: 19, height: 19 }} /&gt;&#10;          &lt;/Box&gt;&#10;          &lt;Box style={{ flex: 1, flexDirection: 'column', gap: 2 }}&gt;&#10;            &lt;Text style={{ fontSize: 16, fontWeight: 'bold', color: '#0E3F8C' }}&gt;{t}&lt;/Text&gt;&#10;            &lt;Text style={{ fontSize: 14, color: '#4A5568', lineHeight: 1.45 }}&gt;{d}&lt;/Text&gt;&#10;          &lt;/Box&gt;&#10;        &lt;/Box&gt;&#10;      ))}&#10;    &lt;/Box&gt;&#10;  &lt;/Box&gt;&#10;  &lt;Box style={{ height: 40, padding: '0 40px', flexDirection: 'row', alignItems: 'center', justifyContent: 'space-between' }}&gt;&#10;    &lt;Text style={{ fontSize: 13, color: '#8B97A8' }}&gt;Generic types omitted for slide width; your lab code uses List&amp;lt;OrderLine&amp;gt;.&lt;/Text&gt;&#10;    &lt;Text style={{ fontSize: 14, color: '#1E4FA8', fontWeight: 'bold' }}&gt;14 / 38&lt;/Text&gt;&#10;  &lt;/Box&gt;&#10;&lt;/Slide&gt;"/>
+        <p:cNvPr id="120" name="" descr="&lt;Slide style={{ background: '#FFFFFF', padding: 0 }}&gt;&#10;  &lt;Box style={{ height: 72, background: '#1E4FA8', padding: '0 40px', flexDirection: 'row', alignItems: 'center', justifyContent: 'space-between' }}&gt;&#10;    &lt;Text style={{ fontSize: 15, color: '#B9CDF0', letterSpacing: 1 }}&gt;ISAD · INFORMATION SYSTEMS ANALYSIS &amp;amp; DESIGN&lt;/Text&gt;&#10;    &lt;Text style={{ fontSize: 15, color: '#B9CDF0' }}&gt;W02 · ENCAPSULATION&lt;/Text&gt;&#10;  &lt;/Box&gt;&#10;  &lt;Box style={{ padding: '20px 40px 0 40px' }}&gt;&#10;    &lt;Text style={{ fontSize: 32, fontWeight: 'bold', color: '#0E3F8C' }}&gt;Encapsulation in Java&lt;/Text&gt;&#10;  &lt;/Box&gt;&#10;  &lt;Box style={{ flex: 1, padding: '16px 40px 0 40px', flexDirection: 'row', gap: 26 }}&gt;&#10;    &lt;Box style={{ flex: 3, justifyContent: 'center' }}&gt;&#10;      &lt;CodeBlock code={`Class Order&#10;    - lines : OrderLine[0..*]&#10;    - status : OrderStatus = DRAFT&#10;&#10;    + addItem(item, qty)&#10;        if status is not DRAFT&#10;            refuse - order already placed&#10;        lines.add(a new OrderLine(item, qty))&#10;&#10;    + total() : Money&#10;        sum = ZERO&#10;        for each line in lines&#10;            sum = sum + line.subtotal()&#10;        return sum`} language='text' width={580} fontSize={13} /&gt;&#10;    &lt;/Box&gt;&#10;    &lt;Box style={{ flex: 2, flexDirection: 'column', gap: 11, justifyContent: 'center' }}&gt;&#10;      {[&#10;        ['lock', 'private fields', 'Nobody outside can set status to a nonsense value.'],&#10;        ['user-check', 'guarded method', 'addItem() refuses once the order is placed.'],&#10;        ['calculator', 'computed, not stored', 'total() is derived — there is no stale copy to drift.'],&#10;      ].map(([icon, t, d]) =&gt; (&#10;        &lt;Box key={t} style={{ flexDirection: 'row', gap: 12, alignItems: 'flex-start', padding: '14px 16px', background: '#F7F9FC', borderRadius: 10, border: '1px solid #E5E7EB' }}&gt;&#10;          &lt;Box style={{ width: 38, height: 38, borderRadius: 9, background: '#E8EFF8', justifyContent: 'center', alignItems: 'center' }}&gt;&#10;            &lt;FAIcon name={icon} style={{ fill: '#1E4FA8', width: 19, height: 19 }} /&gt;&#10;          &lt;/Box&gt;&#10;          &lt;Box style={{ flex: 1, flexDirection: 'column', gap: 2 }}&gt;&#10;            &lt;Text style={{ fontSize: 16, fontWeight: 'bold', color: '#0E3F8C' }}&gt;{t}&lt;/Text&gt;&#10;            &lt;Text style={{ fontSize: 14, color: '#4A5568', lineHeight: 1.45 }}&gt;{d}&lt;/Text&gt;&#10;          &lt;/Box&gt;&#10;        &lt;/Box&gt;&#10;      ))}&#10;    &lt;/Box&gt;&#10;  &lt;/Box&gt;&#10;  &lt;Box style={{ height: 40, padding: '0 40px', flexDirection: 'row', alignItems: 'center', justifyContent: 'space-between' }}&gt;&#10;    &lt;Text style={{ fontSize: 13, color: '#8B97A8' }}&gt;Generic types omitted for slide width; your lab code uses List&amp;lt;OrderLine&amp;gt;.&lt;/Text&gt;&#10;    &lt;Text style={{ fontSize: 14, color: '#1E4FA8', fontWeight: 'bold' }}&gt;14 / 38&lt;/Text&gt;&#10;  &lt;/Box&gt;&#10;&lt;/Slide&gt;"/>
         <p:cNvGrpSpPr/>
         <p:nvPr/>
       </p:nvGrpSpPr>
@@ -5130,12 +5130,12 @@
         </p:nvSpPr>
         <p:spPr>
           <a:xfrm rot="0" flipH="0" flipV="0">
-            <a:off x="381000" y="1724025"/>
-            <a:ext cx="6705600" cy="4429125"/>
+            <a:off x="381000" y="2352675"/>
+            <a:ext cx="6705600" cy="3181350"/>
           </a:xfrm>
           <a:prstGeom prst="roundRect">
             <a:avLst>
-              <a:gd name="adj" fmla="val 1720"/>
+              <a:gd name="adj" fmla="val 2395"/>
             </a:avLst>
           </a:prstGeom>
           <a:solidFill>
@@ -5156,8 +5156,8 @@
         </p:nvSpPr>
         <p:spPr>
           <a:xfrm rot="0" flipH="0" flipV="0">
-            <a:off x="533400" y="1857375"/>
-            <a:ext cx="6400800" cy="4162425"/>
+            <a:off x="533400" y="2486025"/>
+            <a:ext cx="6400800" cy="2914650"/>
           </a:xfrm>
           <a:prstGeom prst="rect"/>
         </p:spPr>
@@ -5174,62 +5174,110 @@
             <a:r>
               <a:rPr sz="975">
                 <a:solidFill>
-                  <a:srgbClr val="D73A49"/>
+                  <a:srgbClr val="E5E7EB"/>
                 </a:solidFill>
                 <a:latin typeface="Menlo"/>
                 <a:ea typeface="Menlo"/>
               </a:rPr>
-              <a:t>public</a:t>
-            </a:r>
+              <a:t>Class Order</a:t>
+            </a:r>
+            <a:endParaRPr/>
+          </a:p>
+          <a:p>
+            <a:pPr>
+              <a:lnSpc>
+                <a:spcPct val="140000"/>
+              </a:lnSpc>
+            </a:pPr>
             <a:r>
               <a:rPr sz="975">
                 <a:solidFill>
-                  <a:srgbClr val="24292E"/>
+                  <a:srgbClr val="E5E7EB"/>
                 </a:solidFill>
                 <a:latin typeface="Menlo"/>
                 <a:ea typeface="Menlo"/>
               </a:rPr>
-              <a:t> </a:t>
-            </a:r>
+              <a:t>    - lines : OrderLine[0..*]</a:t>
+            </a:r>
+            <a:endParaRPr/>
+          </a:p>
+          <a:p>
+            <a:pPr>
+              <a:lnSpc>
+                <a:spcPct val="140000"/>
+              </a:lnSpc>
+            </a:pPr>
             <a:r>
               <a:rPr sz="975">
                 <a:solidFill>
-                  <a:srgbClr val="D73A49"/>
+                  <a:srgbClr val="E5E7EB"/>
                 </a:solidFill>
                 <a:latin typeface="Menlo"/>
                 <a:ea typeface="Menlo"/>
               </a:rPr>
-              <a:t>class</a:t>
-            </a:r>
+              <a:t>    - status : OrderStatus = DRAFT</a:t>
+            </a:r>
+            <a:endParaRPr/>
+          </a:p>
+          <a:p>
+            <a:pPr>
+              <a:lnSpc>
+                <a:spcPct val="140000"/>
+              </a:lnSpc>
+            </a:pPr>
+            <a:endParaRPr/>
+          </a:p>
+          <a:p>
+            <a:pPr>
+              <a:lnSpc>
+                <a:spcPct val="140000"/>
+              </a:lnSpc>
+            </a:pPr>
             <a:r>
               <a:rPr sz="975">
                 <a:solidFill>
-                  <a:srgbClr val="24292E"/>
+                  <a:srgbClr val="E5E7EB"/>
                 </a:solidFill>
                 <a:latin typeface="Menlo"/>
                 <a:ea typeface="Menlo"/>
               </a:rPr>
-              <a:t> </a:t>
-            </a:r>
+              <a:t>    + addItem(item, qty)</a:t>
+            </a:r>
+            <a:endParaRPr/>
+          </a:p>
+          <a:p>
+            <a:pPr>
+              <a:lnSpc>
+                <a:spcPct val="140000"/>
+              </a:lnSpc>
+            </a:pPr>
             <a:r>
               <a:rPr sz="975">
                 <a:solidFill>
-                  <a:srgbClr val="6F42C1"/>
+                  <a:srgbClr val="E5E7EB"/>
                 </a:solidFill>
                 <a:latin typeface="Menlo"/>
                 <a:ea typeface="Menlo"/>
               </a:rPr>
-              <a:t>Order</a:t>
-            </a:r>
+              <a:t>        if status is not DRAFT</a:t>
+            </a:r>
+            <a:endParaRPr/>
+          </a:p>
+          <a:p>
+            <a:pPr>
+              <a:lnSpc>
+                <a:spcPct val="140000"/>
+              </a:lnSpc>
+            </a:pPr>
             <a:r>
               <a:rPr sz="975">
                 <a:solidFill>
-                  <a:srgbClr val="24292E"/>
+                  <a:srgbClr val="E5E7EB"/>
                 </a:solidFill>
                 <a:latin typeface="Menlo"/>
                 <a:ea typeface="Menlo"/>
               </a:rPr>
-              <a:t> {</a:t>
+              <a:t>            refuse - order already placed</a:t>
             </a:r>
             <a:endParaRPr/>
           </a:p>
@@ -5242,956 +5290,110 @@
             <a:r>
               <a:rPr sz="975">
                 <a:solidFill>
-                  <a:srgbClr val="24292E"/>
+                  <a:srgbClr val="E5E7EB"/>
                 </a:solidFill>
                 <a:latin typeface="Menlo"/>
                 <a:ea typeface="Menlo"/>
               </a:rPr>
-              <a:t>    </a:t>
-            </a:r>
+              <a:t>        lines.add(a new OrderLine(item, qty))</a:t>
+            </a:r>
+            <a:endParaRPr/>
+          </a:p>
+          <a:p>
+            <a:pPr>
+              <a:lnSpc>
+                <a:spcPct val="140000"/>
+              </a:lnSpc>
+            </a:pPr>
+            <a:endParaRPr/>
+          </a:p>
+          <a:p>
+            <a:pPr>
+              <a:lnSpc>
+                <a:spcPct val="140000"/>
+              </a:lnSpc>
+            </a:pPr>
             <a:r>
               <a:rPr sz="975">
                 <a:solidFill>
-                  <a:srgbClr val="D73A49"/>
+                  <a:srgbClr val="E5E7EB"/>
                 </a:solidFill>
                 <a:latin typeface="Menlo"/>
                 <a:ea typeface="Menlo"/>
               </a:rPr>
-              <a:t>private</a:t>
-            </a:r>
+              <a:t>    + total() : Money</a:t>
+            </a:r>
+            <a:endParaRPr/>
+          </a:p>
+          <a:p>
+            <a:pPr>
+              <a:lnSpc>
+                <a:spcPct val="140000"/>
+              </a:lnSpc>
+            </a:pPr>
             <a:r>
               <a:rPr sz="975">
                 <a:solidFill>
-                  <a:srgbClr val="24292E"/>
+                  <a:srgbClr val="E5E7EB"/>
                 </a:solidFill>
                 <a:latin typeface="Menlo"/>
                 <a:ea typeface="Menlo"/>
               </a:rPr>
-              <a:t> </a:t>
-            </a:r>
+              <a:t>        sum = ZERO</a:t>
+            </a:r>
+            <a:endParaRPr/>
+          </a:p>
+          <a:p>
+            <a:pPr>
+              <a:lnSpc>
+                <a:spcPct val="140000"/>
+              </a:lnSpc>
+            </a:pPr>
             <a:r>
               <a:rPr sz="975">
                 <a:solidFill>
-                  <a:srgbClr val="D73A49"/>
+                  <a:srgbClr val="E5E7EB"/>
                 </a:solidFill>
                 <a:latin typeface="Menlo"/>
                 <a:ea typeface="Menlo"/>
               </a:rPr>
-              <a:t>final</a:t>
-            </a:r>
+              <a:t>        for each line in lines</a:t>
+            </a:r>
+            <a:endParaRPr/>
+          </a:p>
+          <a:p>
+            <a:pPr>
+              <a:lnSpc>
+                <a:spcPct val="140000"/>
+              </a:lnSpc>
+            </a:pPr>
             <a:r>
               <a:rPr sz="975">
                 <a:solidFill>
-                  <a:srgbClr val="24292E"/>
+                  <a:srgbClr val="E5E7EB"/>
                 </a:solidFill>
                 <a:latin typeface="Menlo"/>
                 <a:ea typeface="Menlo"/>
               </a:rPr>
-              <a:t> List lines </a:t>
-            </a:r>
+              <a:t>            sum = sum + line.subtotal()</a:t>
+            </a:r>
+            <a:endParaRPr/>
+          </a:p>
+          <a:p>
+            <a:pPr>
+              <a:lnSpc>
+                <a:spcPct val="140000"/>
+              </a:lnSpc>
+            </a:pPr>
             <a:r>
               <a:rPr sz="975">
                 <a:solidFill>
-                  <a:srgbClr val="D73A49"/>
+                  <a:srgbClr val="E5E7EB"/>
                 </a:solidFill>
                 <a:latin typeface="Menlo"/>
                 <a:ea typeface="Menlo"/>
               </a:rPr>
-              <a:t>=</a:t>
-            </a:r>
-            <a:r>
-              <a:rPr sz="975">
-                <a:solidFill>
-                  <a:srgbClr val="24292E"/>
-                </a:solidFill>
-                <a:latin typeface="Menlo"/>
-                <a:ea typeface="Menlo"/>
-              </a:rPr>
-              <a:t> </a:t>
-            </a:r>
-            <a:r>
-              <a:rPr sz="975">
-                <a:solidFill>
-                  <a:srgbClr val="D73A49"/>
-                </a:solidFill>
-                <a:latin typeface="Menlo"/>
-                <a:ea typeface="Menlo"/>
-              </a:rPr>
-              <a:t>new</a:t>
-            </a:r>
-            <a:r>
-              <a:rPr sz="975">
-                <a:solidFill>
-                  <a:srgbClr val="24292E"/>
-                </a:solidFill>
-                <a:latin typeface="Menlo"/>
-                <a:ea typeface="Menlo"/>
-              </a:rPr>
-              <a:t> </a:t>
-            </a:r>
-            <a:r>
-              <a:rPr sz="975">
-                <a:solidFill>
-                  <a:srgbClr val="6F42C1"/>
-                </a:solidFill>
-                <a:latin typeface="Menlo"/>
-                <a:ea typeface="Menlo"/>
-              </a:rPr>
-              <a:t>ArrayList</a:t>
-            </a:r>
-            <a:r>
-              <a:rPr sz="975">
-                <a:solidFill>
-                  <a:srgbClr val="24292E"/>
-                </a:solidFill>
-                <a:latin typeface="Menlo"/>
-                <a:ea typeface="Menlo"/>
-              </a:rPr>
-              <a:t>();</a:t>
-            </a:r>
-            <a:endParaRPr/>
-          </a:p>
-          <a:p>
-            <a:pPr>
-              <a:lnSpc>
-                <a:spcPct val="140000"/>
-              </a:lnSpc>
-            </a:pPr>
-            <a:r>
-              <a:rPr sz="975">
-                <a:solidFill>
-                  <a:srgbClr val="24292E"/>
-                </a:solidFill>
-                <a:latin typeface="Menlo"/>
-                <a:ea typeface="Menlo"/>
-              </a:rPr>
-              <a:t>    </a:t>
-            </a:r>
-            <a:r>
-              <a:rPr sz="975">
-                <a:solidFill>
-                  <a:srgbClr val="D73A49"/>
-                </a:solidFill>
-                <a:latin typeface="Menlo"/>
-                <a:ea typeface="Menlo"/>
-              </a:rPr>
-              <a:t>private</a:t>
-            </a:r>
-            <a:r>
-              <a:rPr sz="975">
-                <a:solidFill>
-                  <a:srgbClr val="24292E"/>
-                </a:solidFill>
-                <a:latin typeface="Menlo"/>
-                <a:ea typeface="Menlo"/>
-              </a:rPr>
-              <a:t> OrderStatus status </a:t>
-            </a:r>
-            <a:r>
-              <a:rPr sz="975">
-                <a:solidFill>
-                  <a:srgbClr val="D73A49"/>
-                </a:solidFill>
-                <a:latin typeface="Menlo"/>
-                <a:ea typeface="Menlo"/>
-              </a:rPr>
-              <a:t>=</a:t>
-            </a:r>
-            <a:r>
-              <a:rPr sz="975">
-                <a:solidFill>
-                  <a:srgbClr val="24292E"/>
-                </a:solidFill>
-                <a:latin typeface="Menlo"/>
-                <a:ea typeface="Menlo"/>
-              </a:rPr>
-              <a:t> OrderStatus.DRAFT;</a:t>
-            </a:r>
-            <a:endParaRPr/>
-          </a:p>
-          <a:p>
-            <a:pPr>
-              <a:lnSpc>
-                <a:spcPct val="140000"/>
-              </a:lnSpc>
-            </a:pPr>
-            <a:r>
-              <a:rPr sz="975">
-                <a:solidFill>
-                  <a:srgbClr val="E5E7EB"/>
-                </a:solidFill>
-                <a:latin typeface="Menlo"/>
-                <a:ea typeface="Menlo"/>
-              </a:rPr>
-              <a:t> </a:t>
-            </a:r>
-            <a:endParaRPr/>
-          </a:p>
-          <a:p>
-            <a:pPr>
-              <a:lnSpc>
-                <a:spcPct val="140000"/>
-              </a:lnSpc>
-            </a:pPr>
-            <a:r>
-              <a:rPr sz="975">
-                <a:solidFill>
-                  <a:srgbClr val="24292E"/>
-                </a:solidFill>
-                <a:latin typeface="Menlo"/>
-                <a:ea typeface="Menlo"/>
-              </a:rPr>
-              <a:t>    </a:t>
-            </a:r>
-            <a:r>
-              <a:rPr sz="975">
-                <a:solidFill>
-                  <a:srgbClr val="D73A49"/>
-                </a:solidFill>
-                <a:latin typeface="Menlo"/>
-                <a:ea typeface="Menlo"/>
-              </a:rPr>
-              <a:t>public</a:t>
-            </a:r>
-            <a:r>
-              <a:rPr sz="975">
-                <a:solidFill>
-                  <a:srgbClr val="24292E"/>
-                </a:solidFill>
-                <a:latin typeface="Menlo"/>
-                <a:ea typeface="Menlo"/>
-              </a:rPr>
-              <a:t> </a:t>
-            </a:r>
-            <a:r>
-              <a:rPr sz="975">
-                <a:solidFill>
-                  <a:srgbClr val="D73A49"/>
-                </a:solidFill>
-                <a:latin typeface="Menlo"/>
-                <a:ea typeface="Menlo"/>
-              </a:rPr>
-              <a:t>void</a:t>
-            </a:r>
-            <a:r>
-              <a:rPr sz="975">
-                <a:solidFill>
-                  <a:srgbClr val="24292E"/>
-                </a:solidFill>
-                <a:latin typeface="Menlo"/>
-                <a:ea typeface="Menlo"/>
-              </a:rPr>
-              <a:t> </a:t>
-            </a:r>
-            <a:r>
-              <a:rPr sz="975">
-                <a:solidFill>
-                  <a:srgbClr val="6F42C1"/>
-                </a:solidFill>
-                <a:latin typeface="Menlo"/>
-                <a:ea typeface="Menlo"/>
-              </a:rPr>
-              <a:t>addItem</a:t>
-            </a:r>
-            <a:r>
-              <a:rPr sz="975">
-                <a:solidFill>
-                  <a:srgbClr val="24292E"/>
-                </a:solidFill>
-                <a:latin typeface="Menlo"/>
-                <a:ea typeface="Menlo"/>
-              </a:rPr>
-              <a:t>(MenuItem </a:t>
-            </a:r>
-            <a:r>
-              <a:rPr sz="975">
-                <a:solidFill>
-                  <a:srgbClr val="E36209"/>
-                </a:solidFill>
-                <a:latin typeface="Menlo"/>
-                <a:ea typeface="Menlo"/>
-              </a:rPr>
-              <a:t>item</a:t>
-            </a:r>
-            <a:r>
-              <a:rPr sz="975">
-                <a:solidFill>
-                  <a:srgbClr val="24292E"/>
-                </a:solidFill>
-                <a:latin typeface="Menlo"/>
-                <a:ea typeface="Menlo"/>
-              </a:rPr>
-              <a:t>, </a:t>
-            </a:r>
-            <a:r>
-              <a:rPr sz="975">
-                <a:solidFill>
-                  <a:srgbClr val="D73A49"/>
-                </a:solidFill>
-                <a:latin typeface="Menlo"/>
-                <a:ea typeface="Menlo"/>
-              </a:rPr>
-              <a:t>int</a:t>
-            </a:r>
-            <a:r>
-              <a:rPr sz="975">
-                <a:solidFill>
-                  <a:srgbClr val="24292E"/>
-                </a:solidFill>
-                <a:latin typeface="Menlo"/>
-                <a:ea typeface="Menlo"/>
-              </a:rPr>
-              <a:t> </a:t>
-            </a:r>
-            <a:r>
-              <a:rPr sz="975">
-                <a:solidFill>
-                  <a:srgbClr val="E36209"/>
-                </a:solidFill>
-                <a:latin typeface="Menlo"/>
-                <a:ea typeface="Menlo"/>
-              </a:rPr>
-              <a:t>qty</a:t>
-            </a:r>
-            <a:r>
-              <a:rPr sz="975">
-                <a:solidFill>
-                  <a:srgbClr val="24292E"/>
-                </a:solidFill>
-                <a:latin typeface="Menlo"/>
-                <a:ea typeface="Menlo"/>
-              </a:rPr>
-              <a:t>) {</a:t>
-            </a:r>
-            <a:endParaRPr/>
-          </a:p>
-          <a:p>
-            <a:pPr>
-              <a:lnSpc>
-                <a:spcPct val="140000"/>
-              </a:lnSpc>
-            </a:pPr>
-            <a:r>
-              <a:rPr sz="975">
-                <a:solidFill>
-                  <a:srgbClr val="24292E"/>
-                </a:solidFill>
-                <a:latin typeface="Menlo"/>
-                <a:ea typeface="Menlo"/>
-              </a:rPr>
-              <a:t>        </a:t>
-            </a:r>
-            <a:r>
-              <a:rPr sz="975">
-                <a:solidFill>
-                  <a:srgbClr val="D73A49"/>
-                </a:solidFill>
-                <a:latin typeface="Menlo"/>
-                <a:ea typeface="Menlo"/>
-              </a:rPr>
-              <a:t>if</a:t>
-            </a:r>
-            <a:r>
-              <a:rPr sz="975">
-                <a:solidFill>
-                  <a:srgbClr val="24292E"/>
-                </a:solidFill>
-                <a:latin typeface="Menlo"/>
-                <a:ea typeface="Menlo"/>
-              </a:rPr>
-              <a:t> (status </a:t>
-            </a:r>
-            <a:r>
-              <a:rPr sz="975">
-                <a:solidFill>
-                  <a:srgbClr val="D73A49"/>
-                </a:solidFill>
-                <a:latin typeface="Menlo"/>
-                <a:ea typeface="Menlo"/>
-              </a:rPr>
-              <a:t>!=</a:t>
-            </a:r>
-            <a:r>
-              <a:rPr sz="975">
-                <a:solidFill>
-                  <a:srgbClr val="24292E"/>
-                </a:solidFill>
-                <a:latin typeface="Menlo"/>
-                <a:ea typeface="Menlo"/>
-              </a:rPr>
-              <a:t> OrderStatus.DRAFT) {</a:t>
-            </a:r>
-            <a:endParaRPr/>
-          </a:p>
-          <a:p>
-            <a:pPr>
-              <a:lnSpc>
-                <a:spcPct val="140000"/>
-              </a:lnSpc>
-            </a:pPr>
-            <a:r>
-              <a:rPr sz="975">
-                <a:solidFill>
-                  <a:srgbClr val="24292E"/>
-                </a:solidFill>
-                <a:latin typeface="Menlo"/>
-                <a:ea typeface="Menlo"/>
-              </a:rPr>
-              <a:t>            </a:t>
-            </a:r>
-            <a:r>
-              <a:rPr sz="975">
-                <a:solidFill>
-                  <a:srgbClr val="D73A49"/>
-                </a:solidFill>
-                <a:latin typeface="Menlo"/>
-                <a:ea typeface="Menlo"/>
-              </a:rPr>
-              <a:t>throw</a:t>
-            </a:r>
-            <a:r>
-              <a:rPr sz="975">
-                <a:solidFill>
-                  <a:srgbClr val="24292E"/>
-                </a:solidFill>
-                <a:latin typeface="Menlo"/>
-                <a:ea typeface="Menlo"/>
-              </a:rPr>
-              <a:t> </a:t>
-            </a:r>
-            <a:r>
-              <a:rPr sz="975">
-                <a:solidFill>
-                  <a:srgbClr val="D73A49"/>
-                </a:solidFill>
-                <a:latin typeface="Menlo"/>
-                <a:ea typeface="Menlo"/>
-              </a:rPr>
-              <a:t>new</a:t>
-            </a:r>
-            <a:r>
-              <a:rPr sz="975">
-                <a:solidFill>
-                  <a:srgbClr val="24292E"/>
-                </a:solidFill>
-                <a:latin typeface="Menlo"/>
-                <a:ea typeface="Menlo"/>
-              </a:rPr>
-              <a:t> </a:t>
-            </a:r>
-            <a:r>
-              <a:rPr sz="975">
-                <a:solidFill>
-                  <a:srgbClr val="6F42C1"/>
-                </a:solidFill>
-                <a:latin typeface="Menlo"/>
-                <a:ea typeface="Menlo"/>
-              </a:rPr>
-              <a:t>IllegalStateException</a:t>
-            </a:r>
-            <a:r>
-              <a:rPr sz="975">
-                <a:solidFill>
-                  <a:srgbClr val="24292E"/>
-                </a:solidFill>
-                <a:latin typeface="Menlo"/>
-                <a:ea typeface="Menlo"/>
-              </a:rPr>
-              <a:t>(</a:t>
-            </a:r>
-            <a:endParaRPr/>
-          </a:p>
-          <a:p>
-            <a:pPr>
-              <a:lnSpc>
-                <a:spcPct val="140000"/>
-              </a:lnSpc>
-            </a:pPr>
-            <a:r>
-              <a:rPr sz="975">
-                <a:solidFill>
-                  <a:srgbClr val="24292E"/>
-                </a:solidFill>
-                <a:latin typeface="Menlo"/>
-                <a:ea typeface="Menlo"/>
-              </a:rPr>
-              <a:t>                </a:t>
-            </a:r>
-            <a:r>
-              <a:rPr sz="975">
-                <a:solidFill>
-                  <a:srgbClr val="032F62"/>
-                </a:solidFill>
-                <a:latin typeface="Menlo"/>
-                <a:ea typeface="Menlo"/>
-              </a:rPr>
-              <a:t>"Order already placed"</a:t>
-            </a:r>
-            <a:r>
-              <a:rPr sz="975">
-                <a:solidFill>
-                  <a:srgbClr val="24292E"/>
-                </a:solidFill>
-                <a:latin typeface="Menlo"/>
-                <a:ea typeface="Menlo"/>
-              </a:rPr>
-              <a:t>);</a:t>
-            </a:r>
-            <a:endParaRPr/>
-          </a:p>
-          <a:p>
-            <a:pPr>
-              <a:lnSpc>
-                <a:spcPct val="140000"/>
-              </a:lnSpc>
-            </a:pPr>
-            <a:r>
-              <a:rPr sz="975">
-                <a:solidFill>
-                  <a:srgbClr val="24292E"/>
-                </a:solidFill>
-                <a:latin typeface="Menlo"/>
-                <a:ea typeface="Menlo"/>
-              </a:rPr>
-              <a:t>        }</a:t>
-            </a:r>
-            <a:endParaRPr/>
-          </a:p>
-          <a:p>
-            <a:pPr>
-              <a:lnSpc>
-                <a:spcPct val="140000"/>
-              </a:lnSpc>
-            </a:pPr>
-            <a:r>
-              <a:rPr sz="975">
-                <a:solidFill>
-                  <a:srgbClr val="24292E"/>
-                </a:solidFill>
-                <a:latin typeface="Menlo"/>
-                <a:ea typeface="Menlo"/>
-              </a:rPr>
-              <a:t>        lines.</a:t>
-            </a:r>
-            <a:r>
-              <a:rPr sz="975">
-                <a:solidFill>
-                  <a:srgbClr val="6F42C1"/>
-                </a:solidFill>
-                <a:latin typeface="Menlo"/>
-                <a:ea typeface="Menlo"/>
-              </a:rPr>
-              <a:t>add</a:t>
-            </a:r>
-            <a:r>
-              <a:rPr sz="975">
-                <a:solidFill>
-                  <a:srgbClr val="24292E"/>
-                </a:solidFill>
-                <a:latin typeface="Menlo"/>
-                <a:ea typeface="Menlo"/>
-              </a:rPr>
-              <a:t>(</a:t>
-            </a:r>
-            <a:r>
-              <a:rPr sz="975">
-                <a:solidFill>
-                  <a:srgbClr val="D73A49"/>
-                </a:solidFill>
-                <a:latin typeface="Menlo"/>
-                <a:ea typeface="Menlo"/>
-              </a:rPr>
-              <a:t>new</a:t>
-            </a:r>
-            <a:r>
-              <a:rPr sz="975">
-                <a:solidFill>
-                  <a:srgbClr val="24292E"/>
-                </a:solidFill>
-                <a:latin typeface="Menlo"/>
-                <a:ea typeface="Menlo"/>
-              </a:rPr>
-              <a:t> </a:t>
-            </a:r>
-            <a:r>
-              <a:rPr sz="975">
-                <a:solidFill>
-                  <a:srgbClr val="6F42C1"/>
-                </a:solidFill>
-                <a:latin typeface="Menlo"/>
-                <a:ea typeface="Menlo"/>
-              </a:rPr>
-              <a:t>OrderLine</a:t>
-            </a:r>
-            <a:r>
-              <a:rPr sz="975">
-                <a:solidFill>
-                  <a:srgbClr val="24292E"/>
-                </a:solidFill>
-                <a:latin typeface="Menlo"/>
-                <a:ea typeface="Menlo"/>
-              </a:rPr>
-              <a:t>(item, qty));</a:t>
-            </a:r>
-            <a:endParaRPr/>
-          </a:p>
-          <a:p>
-            <a:pPr>
-              <a:lnSpc>
-                <a:spcPct val="140000"/>
-              </a:lnSpc>
-            </a:pPr>
-            <a:r>
-              <a:rPr sz="975">
-                <a:solidFill>
-                  <a:srgbClr val="24292E"/>
-                </a:solidFill>
-                <a:latin typeface="Menlo"/>
-                <a:ea typeface="Menlo"/>
-              </a:rPr>
-              <a:t>    }</a:t>
-            </a:r>
-            <a:endParaRPr/>
-          </a:p>
-          <a:p>
-            <a:pPr>
-              <a:lnSpc>
-                <a:spcPct val="140000"/>
-              </a:lnSpc>
-            </a:pPr>
-            <a:r>
-              <a:rPr sz="975">
-                <a:solidFill>
-                  <a:srgbClr val="E5E7EB"/>
-                </a:solidFill>
-                <a:latin typeface="Menlo"/>
-                <a:ea typeface="Menlo"/>
-              </a:rPr>
-              <a:t> </a:t>
-            </a:r>
-            <a:endParaRPr/>
-          </a:p>
-          <a:p>
-            <a:pPr>
-              <a:lnSpc>
-                <a:spcPct val="140000"/>
-              </a:lnSpc>
-            </a:pPr>
-            <a:r>
-              <a:rPr sz="975">
-                <a:solidFill>
-                  <a:srgbClr val="24292E"/>
-                </a:solidFill>
-                <a:latin typeface="Menlo"/>
-                <a:ea typeface="Menlo"/>
-              </a:rPr>
-              <a:t>    </a:t>
-            </a:r>
-            <a:r>
-              <a:rPr sz="975">
-                <a:solidFill>
-                  <a:srgbClr val="D73A49"/>
-                </a:solidFill>
-                <a:latin typeface="Menlo"/>
-                <a:ea typeface="Menlo"/>
-              </a:rPr>
-              <a:t>public</a:t>
-            </a:r>
-            <a:r>
-              <a:rPr sz="975">
-                <a:solidFill>
-                  <a:srgbClr val="24292E"/>
-                </a:solidFill>
-                <a:latin typeface="Menlo"/>
-                <a:ea typeface="Menlo"/>
-              </a:rPr>
-              <a:t> Money </a:t>
-            </a:r>
-            <a:r>
-              <a:rPr sz="975">
-                <a:solidFill>
-                  <a:srgbClr val="6F42C1"/>
-                </a:solidFill>
-                <a:latin typeface="Menlo"/>
-                <a:ea typeface="Menlo"/>
-              </a:rPr>
-              <a:t>total</a:t>
-            </a:r>
-            <a:r>
-              <a:rPr sz="975">
-                <a:solidFill>
-                  <a:srgbClr val="24292E"/>
-                </a:solidFill>
-                <a:latin typeface="Menlo"/>
-                <a:ea typeface="Menlo"/>
-              </a:rPr>
-              <a:t>() {</a:t>
-            </a:r>
-            <a:endParaRPr/>
-          </a:p>
-          <a:p>
-            <a:pPr>
-              <a:lnSpc>
-                <a:spcPct val="140000"/>
-              </a:lnSpc>
-            </a:pPr>
-            <a:r>
-              <a:rPr sz="975">
-                <a:solidFill>
-                  <a:srgbClr val="24292E"/>
-                </a:solidFill>
-                <a:latin typeface="Menlo"/>
-                <a:ea typeface="Menlo"/>
-              </a:rPr>
-              <a:t>        Money sum </a:t>
-            </a:r>
-            <a:r>
-              <a:rPr sz="975">
-                <a:solidFill>
-                  <a:srgbClr val="D73A49"/>
-                </a:solidFill>
-                <a:latin typeface="Menlo"/>
-                <a:ea typeface="Menlo"/>
-              </a:rPr>
-              <a:t>=</a:t>
-            </a:r>
-            <a:r>
-              <a:rPr sz="975">
-                <a:solidFill>
-                  <a:srgbClr val="24292E"/>
-                </a:solidFill>
-                <a:latin typeface="Menlo"/>
-                <a:ea typeface="Menlo"/>
-              </a:rPr>
-              <a:t> Money.ZERO;</a:t>
-            </a:r>
-            <a:endParaRPr/>
-          </a:p>
-          <a:p>
-            <a:pPr>
-              <a:lnSpc>
-                <a:spcPct val="140000"/>
-              </a:lnSpc>
-            </a:pPr>
-            <a:r>
-              <a:rPr sz="975">
-                <a:solidFill>
-                  <a:srgbClr val="24292E"/>
-                </a:solidFill>
-                <a:latin typeface="Menlo"/>
-                <a:ea typeface="Menlo"/>
-              </a:rPr>
-              <a:t>        </a:t>
-            </a:r>
-            <a:r>
-              <a:rPr sz="975">
-                <a:solidFill>
-                  <a:srgbClr val="D73A49"/>
-                </a:solidFill>
-                <a:latin typeface="Menlo"/>
-                <a:ea typeface="Menlo"/>
-              </a:rPr>
-              <a:t>for</a:t>
-            </a:r>
-            <a:r>
-              <a:rPr sz="975">
-                <a:solidFill>
-                  <a:srgbClr val="24292E"/>
-                </a:solidFill>
-                <a:latin typeface="Menlo"/>
-                <a:ea typeface="Menlo"/>
-              </a:rPr>
-              <a:t> (OrderLine l </a:t>
-            </a:r>
-            <a:r>
-              <a:rPr sz="975">
-                <a:solidFill>
-                  <a:srgbClr val="D73A49"/>
-                </a:solidFill>
-                <a:latin typeface="Menlo"/>
-                <a:ea typeface="Menlo"/>
-              </a:rPr>
-              <a:t>:</a:t>
-            </a:r>
-            <a:r>
-              <a:rPr sz="975">
-                <a:solidFill>
-                  <a:srgbClr val="24292E"/>
-                </a:solidFill>
-                <a:latin typeface="Menlo"/>
-                <a:ea typeface="Menlo"/>
-              </a:rPr>
-              <a:t> lines) {</a:t>
-            </a:r>
-            <a:endParaRPr/>
-          </a:p>
-          <a:p>
-            <a:pPr>
-              <a:lnSpc>
-                <a:spcPct val="140000"/>
-              </a:lnSpc>
-            </a:pPr>
-            <a:r>
-              <a:rPr sz="975">
-                <a:solidFill>
-                  <a:srgbClr val="24292E"/>
-                </a:solidFill>
-                <a:latin typeface="Menlo"/>
-                <a:ea typeface="Menlo"/>
-              </a:rPr>
-              <a:t>            sum </a:t>
-            </a:r>
-            <a:r>
-              <a:rPr sz="975">
-                <a:solidFill>
-                  <a:srgbClr val="D73A49"/>
-                </a:solidFill>
-                <a:latin typeface="Menlo"/>
-                <a:ea typeface="Menlo"/>
-              </a:rPr>
-              <a:t>=</a:t>
-            </a:r>
-            <a:r>
-              <a:rPr sz="975">
-                <a:solidFill>
-                  <a:srgbClr val="24292E"/>
-                </a:solidFill>
-                <a:latin typeface="Menlo"/>
-                <a:ea typeface="Menlo"/>
-              </a:rPr>
-              <a:t> sum.</a:t>
-            </a:r>
-            <a:r>
-              <a:rPr sz="975">
-                <a:solidFill>
-                  <a:srgbClr val="6F42C1"/>
-                </a:solidFill>
-                <a:latin typeface="Menlo"/>
-                <a:ea typeface="Menlo"/>
-              </a:rPr>
-              <a:t>plus</a:t>
-            </a:r>
-            <a:r>
-              <a:rPr sz="975">
-                <a:solidFill>
-                  <a:srgbClr val="24292E"/>
-                </a:solidFill>
-                <a:latin typeface="Menlo"/>
-                <a:ea typeface="Menlo"/>
-              </a:rPr>
-              <a:t>(l.</a:t>
-            </a:r>
-            <a:r>
-              <a:rPr sz="975">
-                <a:solidFill>
-                  <a:srgbClr val="6F42C1"/>
-                </a:solidFill>
-                <a:latin typeface="Menlo"/>
-                <a:ea typeface="Menlo"/>
-              </a:rPr>
-              <a:t>subtotal</a:t>
-            </a:r>
-            <a:r>
-              <a:rPr sz="975">
-                <a:solidFill>
-                  <a:srgbClr val="24292E"/>
-                </a:solidFill>
-                <a:latin typeface="Menlo"/>
-                <a:ea typeface="Menlo"/>
-              </a:rPr>
-              <a:t>());</a:t>
-            </a:r>
-            <a:endParaRPr/>
-          </a:p>
-          <a:p>
-            <a:pPr>
-              <a:lnSpc>
-                <a:spcPct val="140000"/>
-              </a:lnSpc>
-            </a:pPr>
-            <a:r>
-              <a:rPr sz="975">
-                <a:solidFill>
-                  <a:srgbClr val="24292E"/>
-                </a:solidFill>
-                <a:latin typeface="Menlo"/>
-                <a:ea typeface="Menlo"/>
-              </a:rPr>
-              <a:t>        }</a:t>
-            </a:r>
-            <a:endParaRPr/>
-          </a:p>
-          <a:p>
-            <a:pPr>
-              <a:lnSpc>
-                <a:spcPct val="140000"/>
-              </a:lnSpc>
-            </a:pPr>
-            <a:r>
-              <a:rPr sz="975">
-                <a:solidFill>
-                  <a:srgbClr val="24292E"/>
-                </a:solidFill>
-                <a:latin typeface="Menlo"/>
-                <a:ea typeface="Menlo"/>
-              </a:rPr>
-              <a:t>        </a:t>
-            </a:r>
-            <a:r>
-              <a:rPr sz="975">
-                <a:solidFill>
-                  <a:srgbClr val="D73A49"/>
-                </a:solidFill>
-                <a:latin typeface="Menlo"/>
-                <a:ea typeface="Menlo"/>
-              </a:rPr>
-              <a:t>return</a:t>
-            </a:r>
-            <a:r>
-              <a:rPr sz="975">
-                <a:solidFill>
-                  <a:srgbClr val="24292E"/>
-                </a:solidFill>
-                <a:latin typeface="Menlo"/>
-                <a:ea typeface="Menlo"/>
-              </a:rPr>
-              <a:t> sum;</a:t>
-            </a:r>
-            <a:endParaRPr/>
-          </a:p>
-          <a:p>
-            <a:pPr>
-              <a:lnSpc>
-                <a:spcPct val="140000"/>
-              </a:lnSpc>
-            </a:pPr>
-            <a:r>
-              <a:rPr sz="975">
-                <a:solidFill>
-                  <a:srgbClr val="24292E"/>
-                </a:solidFill>
-                <a:latin typeface="Menlo"/>
-                <a:ea typeface="Menlo"/>
-              </a:rPr>
-              <a:t>    }</a:t>
-            </a:r>
-            <a:endParaRPr/>
-          </a:p>
-          <a:p>
-            <a:pPr>
-              <a:lnSpc>
-                <a:spcPct val="140000"/>
-              </a:lnSpc>
-            </a:pPr>
-            <a:r>
-              <a:rPr sz="975">
-                <a:solidFill>
-                  <a:srgbClr val="24292E"/>
-                </a:solidFill>
-                <a:latin typeface="Menlo"/>
-                <a:ea typeface="Menlo"/>
-              </a:rPr>
-              <a:t>}</a:t>
+              <a:t>        return sum</a:t>
             </a:r>
             <a:endParaRPr/>
           </a:p>
@@ -6207,7 +5409,7 @@
   <p:cSld>
     <p:spTree>
       <p:nvGrpSpPr>
-        <p:cNvPr id="145" name="" descr="&lt;Slide style={{ background: '#FFFFFF', padding: 0 }}&gt;&#10;  &lt;Box style={{ height: 72, background: '#1E4FA8', padding: '0 40px', flexDirection: 'row', alignItems: 'center', justifyContent: 'space-between' }}&gt;&#10;    &lt;Text style={{ fontSize: 15, color: '#B9CDF0', letterSpacing: 1 }}&gt;ISAD · INFORMATION SYSTEMS ANALYSIS &amp;amp; DESIGN&lt;/Text&gt;&#10;    &lt;Text style={{ fontSize: 15, color: '#B9CDF0' }}&gt;W02 · ENCAPSULATION&lt;/Text&gt;&#10;  &lt;/Box&gt;&#10;  &lt;Box style={{ padding: '20px 40px 0 40px' }}&gt;&#10;    &lt;Text style={{ fontSize: 32, fontWeight: 'bold', color: '#0E3F8C' }}&gt;The Getter / Setter Debate&lt;/Text&gt;&#10;  &lt;/Box&gt;&#10;  &lt;Box style={{ flex: 1, padding: '16px 40px 0 40px', flexDirection: 'row', gap: 26 }}&gt;&#10;    &lt;Box style={{ flex: 3, flexDirection: 'column', gap: 12 }}&gt;&#10;      &lt;Box style={{ flex: 1, padding: '16px 18px', background: '#FDF3F3', borderRadius: 12, border: '1px solid #D9534F', flexDirection: 'column' }}&gt;&#10;        &lt;Box style={{ flexDirection: 'row', alignItems: 'center', gap: 10, marginBottom: 8 }}&gt;&#10;          &lt;FAIcon name='times-circle' style={{ fill: '#D9534F', width: 20, height: 20 }} /&gt;&#10;          &lt;Text style={{ fontSize: 16, fontWeight: 'bold', color: '#D9534F' }}&gt;Expose the fields — every caller re-implements the rule&lt;/Text&gt;&#10;        &lt;/Box&gt;&#10;        &lt;CodeBlock code={`public class Order {&#10;    public List lines;&#10;    public OrderStatus status;&#10;}&#10;&#10;// caller must know the rule — every time&#10;if (order.status == OrderStatus.DRAFT) {&#10;    order.lines.add(new OrderLine(item, qty));&#10;}&#10;// one caller forgets the check.&#10;// now the order is wrong.`} language='java' width={520} fontSize={12} /&gt;&#10;      &lt;/Box&gt;&#10;    &lt;/Box&gt;&#10;    &lt;Box style={{ flex: 2, flexDirection: 'column', gap: 12 }}&gt;&#10;      &lt;Box style={{ padding: '16px 18px', background: '#F0F5FC', borderRadius: 12, border: '1px solid #3D7BD9', flexDirection: 'column' }}&gt;&#10;        &lt;Box style={{ flexDirection: 'row', alignItems: 'center', gap: 10, marginBottom: 8 }}&gt;&#10;          &lt;FAIcon name='check-circle' style={{ fill: '#1E4FA8', width: 20, height: 20 }} /&gt;&#10;          &lt;Text style={{ fontSize: 16, fontWeight: 'bold', color: '#0E3F8C' }}&gt;Ask the object — the rule has one home&lt;/Text&gt;&#10;        &lt;/Box&gt;&#10;        &lt;CodeBlock code={`// the rule lives with the data&#10;order.addItem(item, qty);`} language='java' width={330} fontSize={12} /&gt;&#10;      &lt;/Box&gt;&#10;      &lt;Box style={{ flex: 1, padding: '20px 22px', background: '#0E3F8C', borderRadius: 12, flexDirection: 'column', justifyContent: 'center', gap: 12 }}&gt;&#10;        &lt;Text style={{ fontSize: 20, fontWeight: 'bold', color: '#FFFFFF', lineHeight: 1.35 }}&gt;A getter for everything is just public fields with extra steps.&lt;/Text&gt;&#10;        &lt;Text style={{ fontSize: 15, color: '#C5D4EA', lineHeight: 1.5 }}&gt;Ask what the object should &lt;Text style={{ fontWeight: 'bold', color: '#FFC107' }}&gt;do&lt;/Text&gt;, not what it should &lt;Text style={{ fontWeight: 'bold', color: '#FFC107' }}&gt;reveal&lt;/Text&gt;.&lt;/Text&gt;&#10;      &lt;/Box&gt;&#10;    &lt;/Box&gt;&#10;  &lt;/Box&gt;&#10;  &lt;Box style={{ height: 40, padding: '0 40px', flexDirection: 'row', alignItems: 'center', justifyContent: 'space-between' }}&gt;&#10;    &lt;Text style={{ fontSize: 13, color: '#8B97A8' }}&gt;Getters for reporting are fine. Getters that let callers enforce rules are not.&lt;/Text&gt;&#10;    &lt;Text style={{ fontSize: 14, color: '#1E4FA8', fontWeight: 'bold' }}&gt;15 / 38&lt;/Text&gt;&#10;  &lt;/Box&gt;&#10;&lt;/Slide&gt;"/>
+        <p:cNvPr id="145" name="" descr="&lt;Slide style={{ background: '#FFFFFF', padding: 0 }}&gt;&#10;  &lt;Box style={{ height: 72, background: '#1E4FA8', padding: '0 40px', flexDirection: 'row', alignItems: 'center', justifyContent: 'space-between' }}&gt;&#10;    &lt;Text style={{ fontSize: 15, color: '#B9CDF0', letterSpacing: 1 }}&gt;ISAD · INFORMATION SYSTEMS ANALYSIS &amp;amp; DESIGN&lt;/Text&gt;&#10;    &lt;Text style={{ fontSize: 15, color: '#B9CDF0' }}&gt;W02 · ENCAPSULATION&lt;/Text&gt;&#10;  &lt;/Box&gt;&#10;  &lt;Box style={{ padding: '20px 40px 0 40px' }}&gt;&#10;    &lt;Text style={{ fontSize: 32, fontWeight: 'bold', color: '#0E3F8C' }}&gt;The Getter / Setter Debate&lt;/Text&gt;&#10;  &lt;/Box&gt;&#10;  &lt;Box style={{ flex: 1, padding: '16px 40px 0 40px', flexDirection: 'row', gap: 26 }}&gt;&#10;    &lt;Box style={{ flex: 3, flexDirection: 'column', gap: 12 }}&gt;&#10;      &lt;Box style={{ flex: 1, padding: '16px 18px', background: '#FDF3F3', borderRadius: 12, border: '1px solid #D9534F', flexDirection: 'column' }}&gt;&#10;        &lt;Box style={{ flexDirection: 'row', alignItems: 'center', gap: 10, marginBottom: 8 }}&gt;&#10;          &lt;FAIcon name='times-circle' style={{ fill: '#D9534F', width: 20, height: 20 }} /&gt;&#10;          &lt;Text style={{ fontSize: 16, fontWeight: 'bold', color: '#D9534F' }}&gt;Expose the fields — every caller re-implements the rule&lt;/Text&gt;&#10;        &lt;/Box&gt;&#10;        &lt;CodeBlock code={`Class Order&#10;    + lines : OrderLine[0..*]&#10;    + status : OrderStatus&#10;&#10;# every caller must know the rule&#10;if order.status is DRAFT&#10;    order.lines.add(a new OrderLine(item, qty))&#10;# one caller forgets the check.&#10;# now the order is wrong.`} language='text' width={520} fontSize={12} /&gt;&#10;      &lt;/Box&gt;&#10;    &lt;/Box&gt;&#10;    &lt;Box style={{ flex: 2, flexDirection: 'column', gap: 12 }}&gt;&#10;      &lt;Box style={{ padding: '16px 18px', background: '#F0F5FC', borderRadius: 12, border: '1px solid #3D7BD9', flexDirection: 'column' }}&gt;&#10;        &lt;Box style={{ flexDirection: 'row', alignItems: 'center', gap: 10, marginBottom: 8 }}&gt;&#10;          &lt;FAIcon name='check-circle' style={{ fill: '#1E4FA8', width: 20, height: 20 }} /&gt;&#10;          &lt;Text style={{ fontSize: 16, fontWeight: 'bold', color: '#0E3F8C' }}&gt;Ask the object — the rule has one home&lt;/Text&gt;&#10;        &lt;/Box&gt;&#10;        &lt;CodeBlock code={`# the rule lives with the data&#10;order.addItem(item, qty)`} language='text' width={330} fontSize={12} /&gt;&#10;      &lt;/Box&gt;&#10;      &lt;Box style={{ flex: 1, padding: '20px 22px', background: '#0E3F8C', borderRadius: 12, flexDirection: 'column', justifyContent: 'center', gap: 12 }}&gt;&#10;        &lt;Text style={{ fontSize: 20, fontWeight: 'bold', color: '#FFFFFF', lineHeight: 1.35 }}&gt;A getter for everything is just public fields with extra steps.&lt;/Text&gt;&#10;        &lt;Text style={{ fontSize: 15, color: '#C5D4EA', lineHeight: 1.5 }}&gt;Ask what the object should &lt;Text style={{ fontWeight: 'bold', color: '#FFC107' }}&gt;do&lt;/Text&gt;, not what it should &lt;Text style={{ fontWeight: 'bold', color: '#FFC107' }}&gt;reveal&lt;/Text&gt;.&lt;/Text&gt;&#10;      &lt;/Box&gt;&#10;    &lt;/Box&gt;&#10;  &lt;/Box&gt;&#10;  &lt;Box style={{ height: 40, padding: '0 40px', flexDirection: 'row', alignItems: 'center', justifyContent: 'space-between' }}&gt;&#10;    &lt;Text style={{ fontSize: 13, color: '#8B97A8' }}&gt;Getters for reporting are fine. Getters that let callers enforce rules are not.&lt;/Text&gt;&#10;    &lt;Text style={{ fontSize: 14, color: '#1E4FA8', fontWeight: 'bold' }}&gt;15 / 38&lt;/Text&gt;&#10;  &lt;/Box&gt;&#10;&lt;/Slide&gt;"/>
         <p:cNvGrpSpPr/>
         <p:nvPr/>
       </p:nvGrpSpPr>
@@ -6783,11 +5985,11 @@
         <p:spPr>
           <a:xfrm rot="0" flipH="0" flipV="0">
             <a:off x="552450" y="1819275"/>
-            <a:ext cx="6362700" cy="2381250"/>
+            <a:ext cx="6362700" cy="2000250"/>
           </a:xfrm>
           <a:prstGeom prst="roundRect">
             <a:avLst>
-              <a:gd name="adj" fmla="val 3200"/>
+              <a:gd name="adj" fmla="val 3810"/>
             </a:avLst>
           </a:prstGeom>
           <a:solidFill>
@@ -6809,7 +6011,7 @@
         <p:spPr>
           <a:xfrm rot="0" flipH="0" flipV="0">
             <a:off x="704850" y="1952625"/>
-            <a:ext cx="6057900" cy="2114550"/>
+            <a:ext cx="6057900" cy="1733550"/>
           </a:xfrm>
           <a:prstGeom prst="rect"/>
         </p:spPr>
@@ -6826,62 +6028,110 @@
             <a:r>
               <a:rPr sz="900">
                 <a:solidFill>
-                  <a:srgbClr val="D73A49"/>
+                  <a:srgbClr val="E5E7EB"/>
                 </a:solidFill>
                 <a:latin typeface="Menlo"/>
                 <a:ea typeface="Menlo"/>
               </a:rPr>
-              <a:t>public</a:t>
-            </a:r>
+              <a:t>Class Order</a:t>
+            </a:r>
+            <a:endParaRPr/>
+          </a:p>
+          <a:p>
+            <a:pPr>
+              <a:lnSpc>
+                <a:spcPct val="140000"/>
+              </a:lnSpc>
+            </a:pPr>
             <a:r>
               <a:rPr sz="900">
                 <a:solidFill>
-                  <a:srgbClr val="24292E"/>
+                  <a:srgbClr val="E5E7EB"/>
                 </a:solidFill>
                 <a:latin typeface="Menlo"/>
                 <a:ea typeface="Menlo"/>
               </a:rPr>
-              <a:t> </a:t>
-            </a:r>
+              <a:t>    + lines : OrderLine[0..*]</a:t>
+            </a:r>
+            <a:endParaRPr/>
+          </a:p>
+          <a:p>
+            <a:pPr>
+              <a:lnSpc>
+                <a:spcPct val="140000"/>
+              </a:lnSpc>
+            </a:pPr>
             <a:r>
               <a:rPr sz="900">
                 <a:solidFill>
-                  <a:srgbClr val="D73A49"/>
+                  <a:srgbClr val="E5E7EB"/>
                 </a:solidFill>
                 <a:latin typeface="Menlo"/>
                 <a:ea typeface="Menlo"/>
               </a:rPr>
-              <a:t>class</a:t>
-            </a:r>
+              <a:t>    + status : OrderStatus</a:t>
+            </a:r>
+            <a:endParaRPr/>
+          </a:p>
+          <a:p>
+            <a:pPr>
+              <a:lnSpc>
+                <a:spcPct val="140000"/>
+              </a:lnSpc>
+            </a:pPr>
+            <a:endParaRPr/>
+          </a:p>
+          <a:p>
+            <a:pPr>
+              <a:lnSpc>
+                <a:spcPct val="140000"/>
+              </a:lnSpc>
+            </a:pPr>
             <a:r>
               <a:rPr sz="900">
                 <a:solidFill>
-                  <a:srgbClr val="24292E"/>
+                  <a:srgbClr val="E5E7EB"/>
                 </a:solidFill>
                 <a:latin typeface="Menlo"/>
                 <a:ea typeface="Menlo"/>
               </a:rPr>
-              <a:t> </a:t>
-            </a:r>
+              <a:t># every caller must know the rule</a:t>
+            </a:r>
+            <a:endParaRPr/>
+          </a:p>
+          <a:p>
+            <a:pPr>
+              <a:lnSpc>
+                <a:spcPct val="140000"/>
+              </a:lnSpc>
+            </a:pPr>
             <a:r>
               <a:rPr sz="900">
                 <a:solidFill>
-                  <a:srgbClr val="6F42C1"/>
+                  <a:srgbClr val="E5E7EB"/>
                 </a:solidFill>
                 <a:latin typeface="Menlo"/>
                 <a:ea typeface="Menlo"/>
               </a:rPr>
-              <a:t>Order</a:t>
-            </a:r>
+              <a:t>if order.status is DRAFT</a:t>
+            </a:r>
+            <a:endParaRPr/>
+          </a:p>
+          <a:p>
+            <a:pPr>
+              <a:lnSpc>
+                <a:spcPct val="140000"/>
+              </a:lnSpc>
+            </a:pPr>
             <a:r>
               <a:rPr sz="900">
                 <a:solidFill>
-                  <a:srgbClr val="24292E"/>
+                  <a:srgbClr val="E5E7EB"/>
                 </a:solidFill>
                 <a:latin typeface="Menlo"/>
                 <a:ea typeface="Menlo"/>
               </a:rPr>
-              <a:t> {</a:t>
+              <a:t>    order.lines.add(a new OrderLine(item, qty))</a:t>
             </a:r>
             <a:endParaRPr/>
           </a:p>
@@ -6894,304 +6144,30 @@
             <a:r>
               <a:rPr sz="900">
                 <a:solidFill>
-                  <a:srgbClr val="24292E"/>
+                  <a:srgbClr val="E5E7EB"/>
                 </a:solidFill>
                 <a:latin typeface="Menlo"/>
                 <a:ea typeface="Menlo"/>
               </a:rPr>
-              <a:t>    </a:t>
-            </a:r>
+              <a:t># one caller forgets the check.</a:t>
+            </a:r>
+            <a:endParaRPr/>
+          </a:p>
+          <a:p>
+            <a:pPr>
+              <a:lnSpc>
+                <a:spcPct val="140000"/>
+              </a:lnSpc>
+            </a:pPr>
             <a:r>
               <a:rPr sz="900">
                 <a:solidFill>
-                  <a:srgbClr val="D73A49"/>
+                  <a:srgbClr val="E5E7EB"/>
                 </a:solidFill>
                 <a:latin typeface="Menlo"/>
                 <a:ea typeface="Menlo"/>
               </a:rPr>
-              <a:t>public</a:t>
-            </a:r>
-            <a:r>
-              <a:rPr sz="900">
-                <a:solidFill>
-                  <a:srgbClr val="24292E"/>
-                </a:solidFill>
-                <a:latin typeface="Menlo"/>
-                <a:ea typeface="Menlo"/>
-              </a:rPr>
-              <a:t> List lines;</a:t>
-            </a:r>
-            <a:endParaRPr/>
-          </a:p>
-          <a:p>
-            <a:pPr>
-              <a:lnSpc>
-                <a:spcPct val="140000"/>
-              </a:lnSpc>
-            </a:pPr>
-            <a:r>
-              <a:rPr sz="900">
-                <a:solidFill>
-                  <a:srgbClr val="24292E"/>
-                </a:solidFill>
-                <a:latin typeface="Menlo"/>
-                <a:ea typeface="Menlo"/>
-              </a:rPr>
-              <a:t>    </a:t>
-            </a:r>
-            <a:r>
-              <a:rPr sz="900">
-                <a:solidFill>
-                  <a:srgbClr val="D73A49"/>
-                </a:solidFill>
-                <a:latin typeface="Menlo"/>
-                <a:ea typeface="Menlo"/>
-              </a:rPr>
-              <a:t>public</a:t>
-            </a:r>
-            <a:r>
-              <a:rPr sz="900">
-                <a:solidFill>
-                  <a:srgbClr val="24292E"/>
-                </a:solidFill>
-                <a:latin typeface="Menlo"/>
-                <a:ea typeface="Menlo"/>
-              </a:rPr>
-              <a:t> OrderStatus status;</a:t>
-            </a:r>
-            <a:endParaRPr/>
-          </a:p>
-          <a:p>
-            <a:pPr>
-              <a:lnSpc>
-                <a:spcPct val="140000"/>
-              </a:lnSpc>
-            </a:pPr>
-            <a:r>
-              <a:rPr sz="900">
-                <a:solidFill>
-                  <a:srgbClr val="24292E"/>
-                </a:solidFill>
-                <a:latin typeface="Menlo"/>
-                <a:ea typeface="Menlo"/>
-              </a:rPr>
-              <a:t>}</a:t>
-            </a:r>
-            <a:endParaRPr/>
-          </a:p>
-          <a:p>
-            <a:pPr>
-              <a:lnSpc>
-                <a:spcPct val="140000"/>
-              </a:lnSpc>
-            </a:pPr>
-            <a:r>
-              <a:rPr sz="900">
-                <a:solidFill>
-                  <a:srgbClr val="E5E7EB"/>
-                </a:solidFill>
-                <a:latin typeface="Menlo"/>
-                <a:ea typeface="Menlo"/>
-              </a:rPr>
-              <a:t> </a:t>
-            </a:r>
-            <a:endParaRPr/>
-          </a:p>
-          <a:p>
-            <a:pPr>
-              <a:lnSpc>
-                <a:spcPct val="140000"/>
-              </a:lnSpc>
-            </a:pPr>
-            <a:r>
-              <a:rPr sz="900">
-                <a:solidFill>
-                  <a:srgbClr val="6A737D"/>
-                </a:solidFill>
-                <a:latin typeface="Menlo"/>
-                <a:ea typeface="Menlo"/>
-              </a:rPr>
-              <a:t>// caller must know the rule — every time</a:t>
-            </a:r>
-            <a:endParaRPr/>
-          </a:p>
-          <a:p>
-            <a:pPr>
-              <a:lnSpc>
-                <a:spcPct val="140000"/>
-              </a:lnSpc>
-            </a:pPr>
-            <a:r>
-              <a:rPr sz="900">
-                <a:solidFill>
-                  <a:srgbClr val="D73A49"/>
-                </a:solidFill>
-                <a:latin typeface="Menlo"/>
-                <a:ea typeface="Menlo"/>
-              </a:rPr>
-              <a:t>if</a:t>
-            </a:r>
-            <a:r>
-              <a:rPr sz="900">
-                <a:solidFill>
-                  <a:srgbClr val="24292E"/>
-                </a:solidFill>
-                <a:latin typeface="Menlo"/>
-                <a:ea typeface="Menlo"/>
-              </a:rPr>
-              <a:t> (order.status </a:t>
-            </a:r>
-            <a:r>
-              <a:rPr sz="900">
-                <a:solidFill>
-                  <a:srgbClr val="D73A49"/>
-                </a:solidFill>
-                <a:latin typeface="Menlo"/>
-                <a:ea typeface="Menlo"/>
-              </a:rPr>
-              <a:t>==</a:t>
-            </a:r>
-            <a:r>
-              <a:rPr sz="900">
-                <a:solidFill>
-                  <a:srgbClr val="24292E"/>
-                </a:solidFill>
-                <a:latin typeface="Menlo"/>
-                <a:ea typeface="Menlo"/>
-              </a:rPr>
-              <a:t> OrderStatus.DRAFT) {</a:t>
-            </a:r>
-            <a:endParaRPr/>
-          </a:p>
-          <a:p>
-            <a:pPr>
-              <a:lnSpc>
-                <a:spcPct val="140000"/>
-              </a:lnSpc>
-            </a:pPr>
-            <a:r>
-              <a:rPr sz="900">
-                <a:solidFill>
-                  <a:srgbClr val="24292E"/>
-                </a:solidFill>
-                <a:latin typeface="Menlo"/>
-                <a:ea typeface="Menlo"/>
-              </a:rPr>
-              <a:t>    order.lines.</a:t>
-            </a:r>
-            <a:r>
-              <a:rPr sz="900">
-                <a:solidFill>
-                  <a:srgbClr val="6F42C1"/>
-                </a:solidFill>
-                <a:latin typeface="Menlo"/>
-                <a:ea typeface="Menlo"/>
-              </a:rPr>
-              <a:t>add</a:t>
-            </a:r>
-            <a:r>
-              <a:rPr sz="900">
-                <a:solidFill>
-                  <a:srgbClr val="24292E"/>
-                </a:solidFill>
-                <a:latin typeface="Menlo"/>
-                <a:ea typeface="Menlo"/>
-              </a:rPr>
-              <a:t>(</a:t>
-            </a:r>
-            <a:r>
-              <a:rPr sz="900">
-                <a:solidFill>
-                  <a:srgbClr val="D73A49"/>
-                </a:solidFill>
-                <a:latin typeface="Menlo"/>
-                <a:ea typeface="Menlo"/>
-              </a:rPr>
-              <a:t>new</a:t>
-            </a:r>
-            <a:r>
-              <a:rPr sz="900">
-                <a:solidFill>
-                  <a:srgbClr val="24292E"/>
-                </a:solidFill>
-                <a:latin typeface="Menlo"/>
-                <a:ea typeface="Menlo"/>
-              </a:rPr>
-              <a:t> </a:t>
-            </a:r>
-            <a:r>
-              <a:rPr sz="900">
-                <a:solidFill>
-                  <a:srgbClr val="6F42C1"/>
-                </a:solidFill>
-                <a:latin typeface="Menlo"/>
-                <a:ea typeface="Menlo"/>
-              </a:rPr>
-              <a:t>OrderLine</a:t>
-            </a:r>
-            <a:r>
-              <a:rPr sz="900">
-                <a:solidFill>
-                  <a:srgbClr val="24292E"/>
-                </a:solidFill>
-                <a:latin typeface="Menlo"/>
-                <a:ea typeface="Menlo"/>
-              </a:rPr>
-              <a:t>(item, qty));</a:t>
-            </a:r>
-            <a:endParaRPr/>
-          </a:p>
-          <a:p>
-            <a:pPr>
-              <a:lnSpc>
-                <a:spcPct val="140000"/>
-              </a:lnSpc>
-            </a:pPr>
-            <a:r>
-              <a:rPr sz="900">
-                <a:solidFill>
-                  <a:srgbClr val="24292E"/>
-                </a:solidFill>
-                <a:latin typeface="Menlo"/>
-                <a:ea typeface="Menlo"/>
-              </a:rPr>
-              <a:t>}</a:t>
-            </a:r>
-            <a:endParaRPr/>
-          </a:p>
-          <a:p>
-            <a:pPr>
-              <a:lnSpc>
-                <a:spcPct val="140000"/>
-              </a:lnSpc>
-            </a:pPr>
-            <a:r>
-              <a:rPr sz="900">
-                <a:solidFill>
-                  <a:srgbClr val="6A737D"/>
-                </a:solidFill>
-                <a:latin typeface="Menlo"/>
-                <a:ea typeface="Menlo"/>
-              </a:rPr>
-              <a:t>// one caller forgets the check.</a:t>
-            </a:r>
-            <a:endParaRPr/>
-          </a:p>
-          <a:p>
-            <a:pPr>
-              <a:lnSpc>
-                <a:spcPct val="140000"/>
-              </a:lnSpc>
-            </a:pPr>
-            <a:r>
-              <a:rPr sz="900">
-                <a:solidFill>
-                  <a:srgbClr val="6A737D"/>
-                </a:solidFill>
-                <a:latin typeface="Menlo"/>
-                <a:ea typeface="Menlo"/>
-              </a:rPr>
-              <a:t>// now the order is wrong.</a:t>
+              <a:t># now the order is wrong.</a:t>
             </a:r>
             <a:endParaRPr/>
           </a:p>
@@ -7249,12 +6225,12 @@
             <a:r>
               <a:rPr sz="900">
                 <a:solidFill>
-                  <a:srgbClr val="6A737D"/>
+                  <a:srgbClr val="E5E7EB"/>
                 </a:solidFill>
                 <a:latin typeface="Menlo"/>
                 <a:ea typeface="Menlo"/>
               </a:rPr>
-              <a:t>// the rule lives with the data</a:t>
+              <a:t># the rule lives with the data</a:t>
             </a:r>
             <a:endParaRPr/>
           </a:p>
@@ -7267,32 +6243,12 @@
             <a:r>
               <a:rPr sz="900">
                 <a:solidFill>
-                  <a:srgbClr val="24292E"/>
+                  <a:srgbClr val="E5E7EB"/>
                 </a:solidFill>
                 <a:latin typeface="Menlo"/>
                 <a:ea typeface="Menlo"/>
               </a:rPr>
-              <a:t>order.</a:t>
-            </a:r>
-            <a:r>
-              <a:rPr sz="900">
-                <a:solidFill>
-                  <a:srgbClr val="6F42C1"/>
-                </a:solidFill>
-                <a:latin typeface="Menlo"/>
-                <a:ea typeface="Menlo"/>
-              </a:rPr>
-              <a:t>addItem</a:t>
-            </a:r>
-            <a:r>
-              <a:rPr sz="900">
-                <a:solidFill>
-                  <a:srgbClr val="24292E"/>
-                </a:solidFill>
-                <a:latin typeface="Menlo"/>
-                <a:ea typeface="Menlo"/>
-              </a:rPr>
-              <a:t>(item, qty);</a:t>
+              <a:t>order.addItem(item, qty)</a:t>
             </a:r>
             <a:endParaRPr/>
           </a:p>
@@ -7308,7 +6264,7 @@
   <p:cSld>
     <p:spTree>
       <p:nvGrpSpPr>
-        <p:cNvPr id="166" name="" descr="&lt;Slide style={{ background: '#FFFFFF', padding: 0 }}&gt;&#10;  &lt;Box style={{ height: 72, background: '#1E4FA8', padding: '0 40px', flexDirection: 'row', alignItems: 'center', justifyContent: 'space-between' }}&gt;&#10;    &lt;Text style={{ fontSize: 15, color: '#B9CDF0', letterSpacing: 1 }}&gt;ISAD · INFORMATION SYSTEMS ANALYSIS &amp;amp; DESIGN&lt;/Text&gt;&#10;    &lt;Text style={{ fontSize: 15, color: '#B9CDF0' }}&gt;W02 · ENCAPSULATION&lt;/Text&gt;&#10;  &lt;/Box&gt;&#10;  &lt;Box style={{ padding: '22px 40px 0 40px' }}&gt;&#10;    &lt;Text style={{ fontSize: 32, fontWeight: 'bold', color: '#0E3F8C' }}&gt;Why Hiding State Matters&lt;/Text&gt;&#10;  &lt;/Box&gt;&#10;  &lt;Box style={{ flex: 1, padding: '14px 40px 0 40px', flexDirection: 'row', gap: 26 }}&gt;&#10;    &lt;Box style={{ flex: 5, justifyContent: 'center', alignItems: 'center' }}&gt;&#10;      &lt;svg width={600} height={340} viewBox='0 0 600 340'&gt;&#10;        &lt;text x='300' y='26' textAnchor='middle' fill='#0E3F8C' fontSize='19' fontWeight='bold'&gt;An invariant the object must protect&lt;/text&gt;&#10;        &lt;text x='300' y='52' textAnchor='middle' fill='#8B97A8' fontSize='15'&gt;&quot;A placed order can no longer accept new items.&quot;&lt;/text&gt;&#10;        &lt;rect x='30' y='78' width='250' height='118' rx='12' fill='#FDF3F3' stroke='#D9534F' strokeWidth='2' /&gt;&#10;        &lt;text x='155' y='108' textAnchor='middle' fill='#D9534F' fontSize='17' fontWeight='bold'&gt;public fields&lt;/text&gt;&#10;        &lt;text x='155' y='136' textAnchor='middle' fill='#4A5568' fontSize='14'&gt;order.status = PLACED;&lt;/text&gt;&#10;        &lt;text x='155' y='158' textAnchor='middle' fill='#4A5568' fontSize='14'&gt;order.lines.add(...)&lt;/text&gt;&#10;        &lt;text x='155' y='184' textAnchor='middle' fill='#D9534F' fontSize='14' fontWeight='bold'&gt;invariant broken&lt;/text&gt;&#10;        &lt;rect x='320' y='78' width='250' height='118' rx='12' fill='#E8EFF8' stroke='#1E4FA8' strokeWidth='2' /&gt;&#10;        &lt;text x='445' y='108' textAnchor='middle' fill='#0E3F8C' fontSize='17' fontWeight='bold'&gt;private + guard&lt;/text&gt;&#10;        &lt;text x='445' y='136' textAnchor='middle' fill='#4A5568' fontSize='14'&gt;order.addItem(...)&lt;/text&gt;&#10;        &lt;text x='445' y='158' textAnchor='middle' fill='#4A5568' fontSize='14'&gt;→ IllegalStateException&lt;/text&gt;&#10;        &lt;text x='445' y='184' textAnchor='middle' fill='#1E4FA8' fontSize='14' fontWeight='bold'&gt;invariant held&lt;/text&gt;&#10;        &lt;line x1='155' y1='196' x2='155' y2='228' stroke='#D9534F' strokeWidth='2' /&gt;&#10;        &lt;line x1='445' y1='196' x2='445' y2='228' stroke='#1E4FA8' strokeWidth='2' /&gt;&#10;        &lt;rect x='30' y='228' width='540' height='86' rx='12' fill='#0E3F8C' /&gt;&#10;        &lt;text x='300' y='258' textAnchor='middle' fill='#FFFFFF' fontSize='17' fontWeight='bold'&gt;Encapsulation is not politeness.&lt;/text&gt;&#10;        &lt;text x='300' y='286' textAnchor='middle' fill='#C5D4EA' fontSize='15'&gt;It is the only place a business rule can be enforced once.&lt;/text&gt;&#10;        &lt;text x='300' y='306' textAnchor='middle' fill='#FFC107' fontSize='14'&gt;Ask yourself: who is allowed to change this field?&lt;/text&gt;&#10;      &lt;/svg&gt;&#10;    &lt;/Box&gt;&#10;    &lt;Box style={{ flex: 4, flexDirection: 'column', gap: 12, justifyContent: 'center' }}&gt;&#10;      {[&#10;        ['balance-scale', 'Invariant', 'A rule that must hold at every moment — not just after a good call.'],&#10;        ['search', 'One place to look', 'When a rule can only be broken in one method, debugging is short.'],&#10;        ['code-branch', 'Safe to refactor', 'Callers depend on the method, never on the fields behind it.'],&#10;      ].map(([icon, t, d]) =&gt; (&#10;        &lt;Box key={t} style={{ flexDirection: 'row', gap: 13, alignItems: 'flex-start', padding: '15px 17px', background: '#F7F9FC', borderRadius: 10, border: '1px solid #E5E7EB' }}&gt;&#10;          &lt;Box style={{ width: 40, height: 40, borderRadius: 9, background: '#E8EFF8', justifyContent: 'center', alignItems: 'center' }}&gt;&#10;            &lt;FAIcon name={icon} style={{ fill: '#1E4FA8', width: 20, height: 20 }} /&gt;&#10;          &lt;/Box&gt;&#10;          &lt;Box style={{ flex: 1, flexDirection: 'column', gap: 3 }}&gt;&#10;            &lt;Text style={{ fontSize: 17, fontWeight: 'bold', color: '#1A2230' }}&gt;{t}&lt;/Text&gt;&#10;            &lt;Text style={{ fontSize: 14, color: '#4A5568', lineHeight: 1.5 }}&gt;{d}&lt;/Text&gt;&#10;          &lt;/Box&gt;&#10;        &lt;/Box&gt;&#10;      ))}&#10;    &lt;/Box&gt;&#10;  &lt;/Box&gt;&#10;  &lt;Box style={{ height: 40, padding: '0 40px', flexDirection: 'row', alignItems: 'center', justifyContent: 'space-between' }}&gt;&#10;    &lt;Text style={{ fontSize: 13, color: '#8B97A8' }}&gt;ISAD · Fall 2026&lt;/Text&gt;&#10;    &lt;Text style={{ fontSize: 14, color: '#1E4FA8', fontWeight: 'bold' }}&gt;16 / 38&lt;/Text&gt;&#10;  &lt;/Box&gt;&#10;&lt;/Slide&gt;"/>
+        <p:cNvPr id="166" name="" descr="&lt;Slide style={{ background: '#FFFFFF', padding: 0 }}&gt;&#10;  &lt;Box style={{ height: 72, background: '#1E4FA8', padding: '0 40px', flexDirection: 'row', alignItems: 'center', justifyContent: 'space-between' }}&gt;&#10;    &lt;Text style={{ fontSize: 15, color: '#B9CDF0', letterSpacing: 1 }}&gt;ISAD · INFORMATION SYSTEMS ANALYSIS &amp;amp; DESIGN&lt;/Text&gt;&#10;    &lt;Text style={{ fontSize: 15, color: '#B9CDF0' }}&gt;W02 · ENCAPSULATION&lt;/Text&gt;&#10;  &lt;/Box&gt;&#10;  &lt;Box style={{ padding: '22px 40px 0 40px' }}&gt;&#10;    &lt;Text style={{ fontSize: 32, fontWeight: 'bold', color: '#0E3F8C' }}&gt;Why Hiding State Matters&lt;/Text&gt;&#10;  &lt;/Box&gt;&#10;  &lt;Box style={{ flex: 1, padding: '14px 40px 0 40px', flexDirection: 'row', gap: 26 }}&gt;&#10;    &lt;Box style={{ flex: 5, justifyContent: 'center', alignItems: 'center' }}&gt;&#10;      &lt;svg width={600} height={340} viewBox='0 0 600 340'&gt;&#10;        &lt;text x='300' y='26' textAnchor='middle' fill='#0E3F8C' fontSize='19' fontWeight='bold'&gt;An invariant the object must protect&lt;/text&gt;&#10;        &lt;text x='300' y='52' textAnchor='middle' fill='#8B97A8' fontSize='15'&gt;&quot;A placed order can no longer accept new items.&quot;&lt;/text&gt;&#10;        &lt;rect x='30' y='78' width='250' height='118' rx='12' fill='#FDF3F3' stroke='#D9534F' strokeWidth='2' /&gt;&#10;        &lt;text x='155' y='108' textAnchor='middle' fill='#D9534F' fontSize='17' fontWeight='bold'&gt;+ fields (open)&lt;/text&gt;&#10;        &lt;text x='155' y='136' textAnchor='middle' fill='#4A5568' fontSize='14'&gt;order.status = PLACED;&lt;/text&gt;&#10;        &lt;text x='155' y='158' textAnchor='middle' fill='#4A5568' fontSize='14'&gt;order.lines.add(...)&lt;/text&gt;&#10;        &lt;text x='155' y='184' textAnchor='middle' fill='#D9534F' fontSize='14' fontWeight='bold'&gt;invariant broken&lt;/text&gt;&#10;        &lt;rect x='320' y='78' width='250' height='118' rx='12' fill='#E8EFF8' stroke='#1E4FA8' strokeWidth='2' /&gt;&#10;        &lt;text x='445' y='108' textAnchor='middle' fill='#0E3F8C' fontSize='17' fontWeight='bold'&gt;&amp;#8722; fields + guard&lt;/text&gt;&#10;        &lt;text x='445' y='136' textAnchor='middle' fill='#4A5568' fontSize='14'&gt;order.addItem(...)&lt;/text&gt;&#10;        &lt;text x='445' y='158' textAnchor='middle' fill='#4A5568' fontSize='14'&gt;→ IllegalStateException&lt;/text&gt;&#10;        &lt;text x='445' y='184' textAnchor='middle' fill='#1E4FA8' fontSize='14' fontWeight='bold'&gt;invariant held&lt;/text&gt;&#10;        &lt;line x1='155' y1='196' x2='155' y2='228' stroke='#D9534F' strokeWidth='2' /&gt;&#10;        &lt;line x1='445' y1='196' x2='445' y2='228' stroke='#1E4FA8' strokeWidth='2' /&gt;&#10;        &lt;rect x='30' y='228' width='540' height='86' rx='12' fill='#0E3F8C' /&gt;&#10;        &lt;text x='300' y='258' textAnchor='middle' fill='#FFFFFF' fontSize='17' fontWeight='bold'&gt;Encapsulation is not politeness.&lt;/text&gt;&#10;        &lt;text x='300' y='286' textAnchor='middle' fill='#C5D4EA' fontSize='15'&gt;It is the only place a business rule can be enforced once.&lt;/text&gt;&#10;        &lt;text x='300' y='306' textAnchor='middle' fill='#FFC107' fontSize='14'&gt;Ask yourself: who is allowed to change this field?&lt;/text&gt;&#10;      &lt;/svg&gt;&#10;    &lt;/Box&gt;&#10;    &lt;Box style={{ flex: 4, flexDirection: 'column', gap: 12, justifyContent: 'center' }}&gt;&#10;      {[&#10;        ['balance-scale', 'Invariant', 'A rule that must hold at every moment — not just after a good call.'],&#10;        ['search', 'One place to look', 'When a rule can only be broken in one method, debugging is short.'],&#10;        ['code-branch', 'Safe to refactor', 'Callers depend on the method, never on the fields behind it.'],&#10;      ].map(([icon, t, d]) =&gt; (&#10;        &lt;Box key={t} style={{ flexDirection: 'row', gap: 13, alignItems: 'flex-start', padding: '15px 17px', background: '#F7F9FC', borderRadius: 10, border: '1px solid #E5E7EB' }}&gt;&#10;          &lt;Box style={{ width: 40, height: 40, borderRadius: 9, background: '#E8EFF8', justifyContent: 'center', alignItems: 'center' }}&gt;&#10;            &lt;FAIcon name={icon} style={{ fill: '#1E4FA8', width: 20, height: 20 }} /&gt;&#10;          &lt;/Box&gt;&#10;          &lt;Box style={{ flex: 1, flexDirection: 'column', gap: 3 }}&gt;&#10;            &lt;Text style={{ fontSize: 17, fontWeight: 'bold', color: '#1A2230' }}&gt;{t}&lt;/Text&gt;&#10;            &lt;Text style={{ fontSize: 14, color: '#4A5568', lineHeight: 1.5 }}&gt;{d}&lt;/Text&gt;&#10;          &lt;/Box&gt;&#10;        &lt;/Box&gt;&#10;      ))}&#10;    &lt;/Box&gt;&#10;  &lt;/Box&gt;&#10;  &lt;Box style={{ height: 40, padding: '0 40px', flexDirection: 'row', alignItems: 'center', justifyContent: 'space-between' }}&gt;&#10;    &lt;Text style={{ fontSize: 13, color: '#8B97A8' }}&gt;ISAD · Fall 2026&lt;/Text&gt;&#10;    &lt;Text style={{ fontSize: 14, color: '#1E4FA8', fontWeight: 'bold' }}&gt;16 / 38&lt;/Text&gt;&#10;  &lt;/Box&gt;&#10;&lt;/Slide&gt;"/>
         <p:cNvGrpSpPr/>
         <p:nvPr/>
       </p:nvGrpSpPr>
@@ -8498,7 +7454,7 @@
   <p:cSld>
     <p:spTree>
       <p:nvGrpSpPr>
-        <p:cNvPr id="204" name="" descr="&lt;Slide style={{ background: '#FFFFFF', padding: 0 }}&gt;&#10;  &lt;Box style={{ height: 72, background: '#1E4FA8', padding: '0 40px', flexDirection: 'row', alignItems: 'center', justifyContent: 'space-between' }}&gt;&#10;    &lt;Text style={{ fontSize: 15, color: '#B9CDF0', letterSpacing: 1 }}&gt;ISAD · INFORMATION SYSTEMS ANALYSIS &amp;amp; DESIGN&lt;/Text&gt;&#10;    &lt;Text style={{ fontSize: 15, color: '#B9CDF0' }}&gt;W02 · REUSE&lt;/Text&gt;&#10;  &lt;/Box&gt;&#10;  &lt;Box style={{ padding: '20px 40px 0 40px' }}&gt;&#10;    &lt;Text style={{ fontSize: 32, fontWeight: 'bold', color: '#0E3F8C' }}&gt;Two Ways to Reuse&lt;/Text&gt;&#10;  &lt;/Box&gt;&#10;  &lt;Box style={{ flex: 1, padding: '18px 40px 0 40px', flexDirection: 'row', gap: 26 }}&gt;&#10;    &lt;Box style={{ flex: 3, padding: '22px 24px', background: '#E8EFF8', borderRadius: 12, borderLeft: '5px solid #3D7BD9', flexDirection: 'column', gap: 12 }}&gt;&#10;      &lt;Box style={{ flexDirection: 'row', alignItems: 'center', gap: 11 }}&gt;&#10;        &lt;FAIcon name='sitemap' style={{ fill: '#1E4FA8', width: 24, height: 24 }} /&gt;&#10;        &lt;Text style={{ fontSize: 22, fontWeight: 'bold', color: '#0E3F8C' }}&gt;Inheritance&lt;/Text&gt;&#10;      &lt;/Box&gt;&#10;      &lt;Text style={{ fontSize: 16, color: '#4A5568', lineHeight: 1.55 }}&gt;A subclass extends a superclass and inherits its methods. The subclass &lt;Text style={{ fontWeight: 'bold', color: '#1A2230' }}&gt;is a&lt;/Text&gt; kind of the parent.&lt;/Text&gt;&#10;      &lt;Box style={{ padding: '12px 15px', background: '#FFFFFF', borderRadius: 8 }}&gt;&#10;        &lt;Text style={{ fontSize: 15, color: '#1A2230' }}&gt;class Wallet extends PaymentMethod&lt;/Text&gt;&#10;      &lt;/Box&gt;&#10;      &lt;Box style={{ flexDirection: 'column', gap: 6 }}&gt;&#10;        &lt;Text style={{ fontSize: 15, color: '#4A5568', lineHeight: 1.45 }}&gt;+ Reuse is automatic, no wiring needed&lt;/Text&gt;&#10;        &lt;Text style={{ fontSize: 15, color: '#4A5568', lineHeight: 1.45 }}&gt;+ Substitutability comes for free&lt;/Text&gt;&#10;        &lt;Text style={{ fontSize: 15, color: '#D9534F', lineHeight: 1.45 }}&gt;− White-box: the parent's internals leak in&lt;/Text&gt;&#10;        &lt;Text style={{ fontSize: 15, color: '#D9534F', lineHeight: 1.45 }}&gt;− Fixed at compile time; hard to change&lt;/Text&gt;&#10;      &lt;/Box&gt;&#10;    &lt;/Box&gt;&#10;    &lt;Box style={{ flex: 3, padding: '22px 24px', background: '#F0F5FC', borderRadius: 12, borderLeft: '5px solid #0E3F8C', flexDirection: 'column', gap: 12 }}&gt;&#10;      &lt;Box style={{ flexDirection: 'row', alignItems: 'center', gap: 11 }}&gt;&#10;        &lt;FAIcon name='cubes' style={{ fill: '#0E3F8C', width: 24, height: 24 }} /&gt;&#10;        &lt;Text style={{ fontSize: 22, fontWeight: 'bold', color: '#0E3F8C' }}&gt;Composition&lt;/Text&gt;&#10;      &lt;/Box&gt;&#10;      &lt;Text style={{ fontSize: 16, color: '#4A5568', lineHeight: 1.55 }}&gt;An object &lt;Text style={{ fontWeight: 'bold', color: '#1A2230' }}&gt;holds a reference&lt;/Text&gt; to another and forwards work to it. It &lt;Text style={{ fontWeight: 'bold', color: '#1A2230' }}&gt;has a&lt;/Text&gt; collaborator.&lt;/Text&gt;&#10;      &lt;Box style={{ padding: '12px 15px', background: '#FFFFFF', borderRadius: 8 }}&gt;&#10;        &lt;Text style={{ fontSize: 15, color: '#1A2230' }}&gt;private PaymentMethod payment;   // a field inside Order&lt;/Text&gt;&#10;      &lt;/Box&gt;&#10;      &lt;Box style={{ flexDirection: 'column', gap: 6 }}&gt;&#10;        &lt;Text style={{ fontSize: 15, color: '#4A5568', lineHeight: 1.45 }}&gt;+ Black-box: only the interface is visible&lt;/Text&gt;&#10;        &lt;Text style={{ fontSize: 15, color: '#4A5568', lineHeight: 1.45 }}&gt;+ Can be swapped at runtime&lt;/Text&gt;&#10;        &lt;Text style={{ fontSize: 15, color: '#D9534F', lineHeight: 1.45 }}&gt;− Needs an interface to be worthwhile&lt;/Text&gt;&#10;        &lt;Text style={{ fontSize: 15, color: '#D9534F', lineHeight: 1.45 }}&gt;− Slightly more wiring code up front&lt;/Text&gt;&#10;      &lt;/Box&gt;&#10;    &lt;/Box&gt;&#10;  &lt;/Box&gt;&#10;  &lt;Box style={{ height: 40, padding: '0 40px', flexDirection: 'row', alignItems: 'center', justifyContent: 'space-between' }}&gt;&#10;    &lt;Text style={{ fontSize: 13, color: '#8B97A8' }}&gt;Both are legitimate. The skill is knowing which one the situation calls for.&lt;/Text&gt;&#10;    &lt;Text style={{ fontSize: 14, color: '#1E4FA8', fontWeight: 'bold' }}&gt;18 / 38&lt;/Text&gt;&#10;  &lt;/Box&gt;&#10;&lt;/Slide&gt;"/>
+        <p:cNvPr id="204" name="" descr="&lt;Slide style={{ background: '#FFFFFF', padding: 0 }}&gt;&#10;  &lt;Box style={{ height: 72, background: '#1E4FA8', padding: '0 40px', flexDirection: 'row', alignItems: 'center', justifyContent: 'space-between' }}&gt;&#10;    &lt;Text style={{ fontSize: 15, color: '#B9CDF0', letterSpacing: 1 }}&gt;ISAD · INFORMATION SYSTEMS ANALYSIS &amp;amp; DESIGN&lt;/Text&gt;&#10;    &lt;Text style={{ fontSize: 15, color: '#B9CDF0' }}&gt;W02 · REUSE&lt;/Text&gt;&#10;  &lt;/Box&gt;&#10;  &lt;Box style={{ padding: '20px 40px 0 40px' }}&gt;&#10;    &lt;Text style={{ fontSize: 32, fontWeight: 'bold', color: '#0E3F8C' }}&gt;Two Ways to Reuse&lt;/Text&gt;&#10;  &lt;/Box&gt;&#10;  &lt;Box style={{ flex: 1, padding: '18px 40px 0 40px', flexDirection: 'row', gap: 26 }}&gt;&#10;    &lt;Box style={{ flex: 3, padding: '22px 24px', background: '#E8EFF8', borderRadius: 12, borderLeft: '5px solid #3D7BD9', flexDirection: 'column', gap: 12 }}&gt;&#10;      &lt;Box style={{ flexDirection: 'row', alignItems: 'center', gap: 11 }}&gt;&#10;        &lt;FAIcon name='sitemap' style={{ fill: '#1E4FA8', width: 24, height: 24 }} /&gt;&#10;        &lt;Text style={{ fontSize: 22, fontWeight: 'bold', color: '#0E3F8C' }}&gt;Inheritance&lt;/Text&gt;&#10;      &lt;/Box&gt;&#10;      &lt;Text style={{ fontSize: 16, color: '#4A5568', lineHeight: 1.55 }}&gt;A subclass extends a superclass and inherits its methods. The subclass &lt;Text style={{ fontWeight: 'bold', color: '#1A2230' }}&gt;is a&lt;/Text&gt; kind of the parent.&lt;/Text&gt;&#10;      &lt;Box style={{ padding: '12px 15px', background: '#FFFFFF', borderRadius: 8 }}&gt;&#10;        &lt;Text style={{ fontSize: 15, color: '#1A2230' }}&gt;Wallet extends PaymentMethod&lt;/Text&gt;&#10;      &lt;/Box&gt;&#10;      &lt;Box style={{ flexDirection: 'column', gap: 6 }}&gt;&#10;        &lt;Text style={{ fontSize: 15, color: '#4A5568', lineHeight: 1.45 }}&gt;+ Reuse is automatic, no wiring needed&lt;/Text&gt;&#10;        &lt;Text style={{ fontSize: 15, color: '#4A5568', lineHeight: 1.45 }}&gt;+ Substitutability comes for free&lt;/Text&gt;&#10;        &lt;Text style={{ fontSize: 15, color: '#D9534F', lineHeight: 1.45 }}&gt;− White-box: the parent's internals leak in&lt;/Text&gt;&#10;        &lt;Text style={{ fontSize: 15, color: '#D9534F', lineHeight: 1.45 }}&gt;− Fixed at compile time; hard to change&lt;/Text&gt;&#10;      &lt;/Box&gt;&#10;    &lt;/Box&gt;&#10;    &lt;Box style={{ flex: 3, padding: '22px 24px', background: '#F0F5FC', borderRadius: 12, borderLeft: '5px solid #0E3F8C', flexDirection: 'column', gap: 12 }}&gt;&#10;      &lt;Box style={{ flexDirection: 'row', alignItems: 'center', gap: 11 }}&gt;&#10;        &lt;FAIcon name='cubes' style={{ fill: '#0E3F8C', width: 24, height: 24 }} /&gt;&#10;        &lt;Text style={{ fontSize: 22, fontWeight: 'bold', color: '#0E3F8C' }}&gt;Composition&lt;/Text&gt;&#10;      &lt;/Box&gt;&#10;      &lt;Text style={{ fontSize: 16, color: '#4A5568', lineHeight: 1.55 }}&gt;An object &lt;Text style={{ fontWeight: 'bold', color: '#1A2230' }}&gt;holds a reference&lt;/Text&gt; to another and forwards work to it. It &lt;Text style={{ fontWeight: 'bold', color: '#1A2230' }}&gt;has a&lt;/Text&gt; collaborator.&lt;/Text&gt;&#10;      &lt;Box style={{ padding: '12px 15px', background: '#FFFFFF', borderRadius: 8 }}&gt;&#10;        &lt;Text style={{ fontSize: 15, color: '#1A2230' }}&gt;&amp;#8722; payment : PaymentMethod   # a slot inside Order&lt;/Text&gt;&#10;      &lt;/Box&gt;&#10;      &lt;Box style={{ flexDirection: 'column', gap: 6 }}&gt;&#10;        &lt;Text style={{ fontSize: 15, color: '#4A5568', lineHeight: 1.45 }}&gt;+ Black-box: only the interface is visible&lt;/Text&gt;&#10;        &lt;Text style={{ fontSize: 15, color: '#4A5568', lineHeight: 1.45 }}&gt;+ Can be swapped at runtime&lt;/Text&gt;&#10;        &lt;Text style={{ fontSize: 15, color: '#D9534F', lineHeight: 1.45 }}&gt;− Needs an interface to be worthwhile&lt;/Text&gt;&#10;        &lt;Text style={{ fontSize: 15, color: '#D9534F', lineHeight: 1.45 }}&gt;− Slightly more wiring code up front&lt;/Text&gt;&#10;      &lt;/Box&gt;&#10;    &lt;/Box&gt;&#10;  &lt;/Box&gt;&#10;  &lt;Box style={{ height: 40, padding: '0 40px', flexDirection: 'row', alignItems: 'center', justifyContent: 'space-between' }}&gt;&#10;    &lt;Text style={{ fontSize: 13, color: '#8B97A8' }}&gt;Both are legitimate. The skill is knowing which one the situation calls for.&lt;/Text&gt;&#10;    &lt;Text style={{ fontSize: 14, color: '#1E4FA8', fontWeight: 'bold' }}&gt;18 / 38&lt;/Text&gt;&#10;  &lt;/Box&gt;&#10;&lt;/Slide&gt;"/>
         <p:cNvGrpSpPr/>
         <p:nvPr/>
       </p:nvGrpSpPr>
@@ -8924,7 +7880,7 @@
                 <a:latin typeface="Microsoft YaHei"/>
                 <a:ea typeface="Microsoft YaHei"/>
               </a:rPr>
-              <a:t>class Wallet extends PaymentMethod</a:t>
+              <a:t>Wallet extends PaymentMethod</a:t>
             </a:r>
             <a:endParaRPr/>
           </a:p>
@@ -9351,7 +8307,7 @@
                 <a:latin typeface="Microsoft YaHei"/>
                 <a:ea typeface="Microsoft YaHei"/>
               </a:rPr>
-              <a:t>private PaymentMethod payment;   // a field inside Order</a:t>
+              <a:t>− payment : PaymentMethod   # a slot inside Order</a:t>
             </a:r>
             <a:endParaRPr/>
           </a:p>
@@ -10972,7 +9928,7 @@
   <p:cSld>
     <p:spTree>
       <p:nvGrpSpPr>
-        <p:cNvPr id="278" name="" descr="&lt;Slide style={{ background: '#FFFFFF', padding: 0 }}&gt;&#10;  &lt;Box style={{ height: 72, background: '#1E4FA8', padding: '0 40px', flexDirection: 'row', alignItems: 'center', justifyContent: 'space-between' }}&gt;&#10;    &lt;Text style={{ fontSize: 15, color: '#B9CDF0', letterSpacing: 1 }}&gt;ISAD · INFORMATION SYSTEMS ANALYSIS &amp;amp; DESIGN&lt;/Text&gt;&#10;    &lt;Text style={{ fontSize: 15, color: '#B9CDF0' }}&gt;W02 · REUSE&lt;/Text&gt;&#10;  &lt;/Box&gt;&#10;  &lt;Box style={{ padding: '20px 40px 0 40px' }}&gt;&#10;    &lt;Text style={{ fontSize: 32, fontWeight: 'bold', color: '#0E3F8C' }}&gt;The Circle–Ellipse Trap&lt;/Text&gt;&#10;  &lt;/Box&gt;&#10;  &lt;Box style={{ flex: 1, padding: '14px 40px 0 40px', flexDirection: 'row', gap: 26 }}&gt;&#10;    &lt;Box style={{ flex: 3, justifyContent: 'center' }}&gt;&#10;      &lt;CodeBlock code={`class Ellipse {&#10;    void setMajorAxis(double a) { ... }&#10;    void setMinorAxis(double b) { ... }&#10;}&#10;&#10;// In geometry, a circle IS an ellipse.&#10;class Circle extends Ellipse {&#10;    void setMajorAxis(double a) {&#10;        super.setMajorAxis(a);&#10;        super.setMinorAxis(a);   // stay round&#10;    }&#10;    void setMinorAxis(double b) {&#10;        throw new UnsupportedOperationException();&#10;    }&#10;}&#10;&#10;// ...so why does this break?&#10;Ellipse e = new Circle();&#10;e.setMinorAxis(3.0);      // crashes`} language='java' width={560} fontSize={12} /&gt;&#10;    &lt;/Box&gt;&#10;    &lt;Box style={{ flex: 2, flexDirection: 'column', gap: 11, justifyContent: 'center' }}&gt;&#10;      &lt;Box style={{ padding: '16px 18px', background: '#FDF3F3', borderRadius: 10, borderLeft: '4px solid #D9534F' }}&gt;&#10;        &lt;Text style={{ fontSize: 17, fontWeight: 'bold', color: '#D9534F', marginBottom: 5 }}&gt;What went wrong&lt;/Text&gt;&#10;        &lt;Text style={{ fontSize: 15, color: '#4A5568', lineHeight: 1.5 }}&gt;The subclass &lt;Text style={{ fontWeight: 'bold', color: '#1A2230' }}&gt;refuses&lt;/Text&gt; a method the parent promises. Code written against Ellipse now breaks on a Circle.&lt;/Text&gt;&#10;      &lt;/Box&gt;&#10;      {[&#10;        ['shapes', 'True in maths, false in code', 'A circle has fewer degrees of freedom than an ellipse.'],&#10;        ['unlink', 'Substitutability is the real test', 'Not &quot;is it a kind of&quot; but &quot;can it stand in anywhere?&quot;'],&#10;        ['clock', 'Liskov, Week 12', 'This has a name: the Liskov Substitution Principle.'],&#10;      ].map(([icon, t, d]) =&gt; (&#10;        &lt;Box key={t} style={{ flexDirection: 'row', gap: 12, alignItems: 'flex-start', padding: '13px 16px', background: '#F7F9FC', borderRadius: 10, border: '1px solid #E5E7EB' }}&gt;&#10;          &lt;Box style={{ width: 36, height: 36, borderRadius: 9, background: '#E8EFF8', justifyContent: 'center', alignItems: 'center' }}&gt;&#10;            &lt;FAIcon name={icon} style={{ fill: '#1E4FA8', width: 18, height: 18 }} /&gt;&#10;          &lt;/Box&gt;&#10;          &lt;Box style={{ flex: 1, flexDirection: 'column', gap: 2 }}&gt;&#10;            &lt;Text style={{ fontSize: 15, fontWeight: 'bold', color: '#1A2230' }}&gt;{t}&lt;/Text&gt;&#10;            &lt;Text style={{ fontSize: 13, color: '#4A5568', lineHeight: 1.45 }}&gt;{d}&lt;/Text&gt;&#10;          &lt;/Box&gt;&#10;        &lt;/Box&gt;&#10;      ))}&#10;    &lt;/Box&gt;&#10;  &lt;/Box&gt;&#10;  &lt;Box style={{ height: 40, padding: '0 40px', flexDirection: 'row', alignItems: 'center', justifyContent: 'space-between' }}&gt;&#10;    &lt;Text style={{ fontSize: 13, color: '#8B97A8' }}&gt;Full treatment in Week 12 (LSP). Today: notice that &quot;is-a&quot; is not enough.&lt;/Text&gt;&#10;    &lt;Text style={{ fontSize: 14, color: '#1E4FA8', fontWeight: 'bold' }}&gt;20 / 38&lt;/Text&gt;&#10;  &lt;/Box&gt;&#10;&lt;/Slide&gt;"/>
+        <p:cNvPr id="278" name="" descr="&lt;Slide style={{ background: '#FFFFFF', padding: 0 }}&gt;&#10;  &lt;Box style={{ height: 72, background: '#1E4FA8', padding: '0 40px', flexDirection: 'row', alignItems: 'center', justifyContent: 'space-between' }}&gt;&#10;    &lt;Text style={{ fontSize: 15, color: '#B9CDF0', letterSpacing: 1 }}&gt;ISAD · INFORMATION SYSTEMS ANALYSIS &amp;amp; DESIGN&lt;/Text&gt;&#10;    &lt;Text style={{ fontSize: 15, color: '#B9CDF0' }}&gt;W02 · REUSE&lt;/Text&gt;&#10;  &lt;/Box&gt;&#10;  &lt;Box style={{ padding: '20px 40px 0 40px' }}&gt;&#10;    &lt;Text style={{ fontSize: 32, fontWeight: 'bold', color: '#0E3F8C' }}&gt;The Circle–Ellipse Trap&lt;/Text&gt;&#10;  &lt;/Box&gt;&#10;  &lt;Box style={{ flex: 1, padding: '14px 40px 0 40px', flexDirection: 'row', gap: 26 }}&gt;&#10;    &lt;Box style={{ flex: 3, justifyContent: 'center' }}&gt;&#10;      &lt;CodeBlock code={`Class Ellipse&#10;    + setMajorAxis(a)&#10;    + setMinorAxis(b)&#10;&#10;# In geometry, a circle IS an ellipse.&#10;Class Circle extends Ellipse&#10;    + setMajorAxis(a)&#10;        set both axes to a        # stay round&#10;    + setMinorAxis(b)&#10;        refuse - a circle cannot  # breaks the promise&#10;&#10;# ...so why does this break?&#10;e = a new Circle&#10;e.setMinorAxis(3.0)              # fails`} language='text' width={560} fontSize={12} /&gt;&#10;    &lt;/Box&gt;&#10;    &lt;Box style={{ flex: 2, flexDirection: 'column', gap: 11, justifyContent: 'center' }}&gt;&#10;      &lt;Box style={{ padding: '16px 18px', background: '#FDF3F3', borderRadius: 10, borderLeft: '4px solid #D9534F' }}&gt;&#10;        &lt;Text style={{ fontSize: 17, fontWeight: 'bold', color: '#D9534F', marginBottom: 5 }}&gt;What went wrong&lt;/Text&gt;&#10;        &lt;Text style={{ fontSize: 15, color: '#4A5568', lineHeight: 1.5 }}&gt;The subclass &lt;Text style={{ fontWeight: 'bold', color: '#1A2230' }}&gt;refuses&lt;/Text&gt; a method the parent promises. Code written against Ellipse now breaks on a Circle.&lt;/Text&gt;&#10;      &lt;/Box&gt;&#10;      {[&#10;        ['shapes', 'True in maths, false in code', 'A circle has fewer degrees of freedom than an ellipse.'],&#10;        ['unlink', 'Substitutability is the real test', 'Not &quot;is it a kind of&quot; but &quot;can it stand in anywhere?&quot;'],&#10;        ['clock', 'Liskov, Week 12', 'This has a name: the Liskov Substitution Principle.'],&#10;      ].map(([icon, t, d]) =&gt; (&#10;        &lt;Box key={t} style={{ flexDirection: 'row', gap: 12, alignItems: 'flex-start', padding: '13px 16px', background: '#F7F9FC', borderRadius: 10, border: '1px solid #E5E7EB' }}&gt;&#10;          &lt;Box style={{ width: 36, height: 36, borderRadius: 9, background: '#E8EFF8', justifyContent: 'center', alignItems: 'center' }}&gt;&#10;            &lt;FAIcon name={icon} style={{ fill: '#1E4FA8', width: 18, height: 18 }} /&gt;&#10;          &lt;/Box&gt;&#10;          &lt;Box style={{ flex: 1, flexDirection: 'column', gap: 2 }}&gt;&#10;            &lt;Text style={{ fontSize: 15, fontWeight: 'bold', color: '#1A2230' }}&gt;{t}&lt;/Text&gt;&#10;            &lt;Text style={{ fontSize: 13, color: '#4A5568', lineHeight: 1.45 }}&gt;{d}&lt;/Text&gt;&#10;          &lt;/Box&gt;&#10;        &lt;/Box&gt;&#10;      ))}&#10;    &lt;/Box&gt;&#10;  &lt;/Box&gt;&#10;  &lt;Box style={{ height: 40, padding: '0 40px', flexDirection: 'row', alignItems: 'center', justifyContent: 'space-between' }}&gt;&#10;    &lt;Text style={{ fontSize: 13, color: '#8B97A8' }}&gt;Full treatment in Week 12 (LSP). Today: notice that &quot;is-a&quot; is not enough.&lt;/Text&gt;&#10;    &lt;Text style={{ fontSize: 14, color: '#1E4FA8', fontWeight: 'bold' }}&gt;20 / 38&lt;/Text&gt;&#10;  &lt;/Box&gt;&#10;&lt;/Slide&gt;"/>
         <p:cNvGrpSpPr/>
         <p:nvPr/>
       </p:nvGrpSpPr>
@@ -11864,12 +10820,12 @@
         </p:nvSpPr>
         <p:spPr>
           <a:xfrm rot="0" flipH="0" flipV="0">
-            <a:off x="381000" y="1971675"/>
-            <a:ext cx="6705600" cy="3924300"/>
+            <a:off x="381000" y="2447925"/>
+            <a:ext cx="6705600" cy="2962275"/>
           </a:xfrm>
           <a:prstGeom prst="roundRect">
             <a:avLst>
-              <a:gd name="adj" fmla="val 1942"/>
+              <a:gd name="adj" fmla="val 2572"/>
             </a:avLst>
           </a:prstGeom>
           <a:solidFill>
@@ -11890,8 +10846,8 @@
         </p:nvSpPr>
         <p:spPr>
           <a:xfrm rot="0" flipH="0" flipV="0">
-            <a:off x="533400" y="2105025"/>
-            <a:ext cx="6400800" cy="3657600"/>
+            <a:off x="533400" y="2581275"/>
+            <a:ext cx="6400800" cy="2695575"/>
           </a:xfrm>
           <a:prstGeom prst="rect"/>
         </p:spPr>
@@ -11908,42 +10864,74 @@
             <a:r>
               <a:rPr sz="900">
                 <a:solidFill>
-                  <a:srgbClr val="D73A49"/>
+                  <a:srgbClr val="E5E7EB"/>
                 </a:solidFill>
                 <a:latin typeface="Menlo"/>
                 <a:ea typeface="Menlo"/>
               </a:rPr>
-              <a:t>class</a:t>
-            </a:r>
+              <a:t>Class Ellipse</a:t>
+            </a:r>
+            <a:endParaRPr/>
+          </a:p>
+          <a:p>
+            <a:pPr>
+              <a:lnSpc>
+                <a:spcPct val="140000"/>
+              </a:lnSpc>
+            </a:pPr>
             <a:r>
               <a:rPr sz="900">
                 <a:solidFill>
-                  <a:srgbClr val="24292E"/>
+                  <a:srgbClr val="E5E7EB"/>
                 </a:solidFill>
                 <a:latin typeface="Menlo"/>
                 <a:ea typeface="Menlo"/>
               </a:rPr>
-              <a:t> </a:t>
-            </a:r>
+              <a:t>    + setMajorAxis(a)</a:t>
+            </a:r>
+            <a:endParaRPr/>
+          </a:p>
+          <a:p>
+            <a:pPr>
+              <a:lnSpc>
+                <a:spcPct val="140000"/>
+              </a:lnSpc>
+            </a:pPr>
             <a:r>
               <a:rPr sz="900">
                 <a:solidFill>
-                  <a:srgbClr val="6F42C1"/>
+                  <a:srgbClr val="E5E7EB"/>
                 </a:solidFill>
                 <a:latin typeface="Menlo"/>
                 <a:ea typeface="Menlo"/>
               </a:rPr>
-              <a:t>Ellipse</a:t>
-            </a:r>
+              <a:t>    + setMinorAxis(b)</a:t>
+            </a:r>
+            <a:endParaRPr/>
+          </a:p>
+          <a:p>
+            <a:pPr>
+              <a:lnSpc>
+                <a:spcPct val="140000"/>
+              </a:lnSpc>
+            </a:pPr>
+            <a:endParaRPr/>
+          </a:p>
+          <a:p>
+            <a:pPr>
+              <a:lnSpc>
+                <a:spcPct val="140000"/>
+              </a:lnSpc>
+            </a:pPr>
             <a:r>
               <a:rPr sz="900">
                 <a:solidFill>
-                  <a:srgbClr val="24292E"/>
+                  <a:srgbClr val="E5E7EB"/>
                 </a:solidFill>
                 <a:latin typeface="Menlo"/>
                 <a:ea typeface="Menlo"/>
               </a:rPr>
-              <a:t> {</a:t>
+              <a:t># In geometry, a circle IS an ellipse.</a:t>
             </a:r>
             <a:endParaRPr/>
           </a:p>
@@ -11956,968 +10944,146 @@
             <a:r>
               <a:rPr sz="900">
                 <a:solidFill>
-                  <a:srgbClr val="24292E"/>
+                  <a:srgbClr val="E5E7EB"/>
                 </a:solidFill>
                 <a:latin typeface="Menlo"/>
                 <a:ea typeface="Menlo"/>
               </a:rPr>
-              <a:t>    </a:t>
-            </a:r>
+              <a:t>Class Circle extends Ellipse</a:t>
+            </a:r>
+            <a:endParaRPr/>
+          </a:p>
+          <a:p>
+            <a:pPr>
+              <a:lnSpc>
+                <a:spcPct val="140000"/>
+              </a:lnSpc>
+            </a:pPr>
             <a:r>
               <a:rPr sz="900">
                 <a:solidFill>
-                  <a:srgbClr val="D73A49"/>
+                  <a:srgbClr val="E5E7EB"/>
                 </a:solidFill>
                 <a:latin typeface="Menlo"/>
                 <a:ea typeface="Menlo"/>
               </a:rPr>
-              <a:t>void</a:t>
-            </a:r>
+              <a:t>    + setMajorAxis(a)</a:t>
+            </a:r>
+            <a:endParaRPr/>
+          </a:p>
+          <a:p>
+            <a:pPr>
+              <a:lnSpc>
+                <a:spcPct val="140000"/>
+              </a:lnSpc>
+            </a:pPr>
             <a:r>
               <a:rPr sz="900">
                 <a:solidFill>
-                  <a:srgbClr val="24292E"/>
+                  <a:srgbClr val="E5E7EB"/>
                 </a:solidFill>
                 <a:latin typeface="Menlo"/>
                 <a:ea typeface="Menlo"/>
               </a:rPr>
-              <a:t> </a:t>
-            </a:r>
+              <a:t>        set both axes to a        # stay round</a:t>
+            </a:r>
+            <a:endParaRPr/>
+          </a:p>
+          <a:p>
+            <a:pPr>
+              <a:lnSpc>
+                <a:spcPct val="140000"/>
+              </a:lnSpc>
+            </a:pPr>
             <a:r>
               <a:rPr sz="900">
                 <a:solidFill>
-                  <a:srgbClr val="6F42C1"/>
+                  <a:srgbClr val="E5E7EB"/>
                 </a:solidFill>
                 <a:latin typeface="Menlo"/>
                 <a:ea typeface="Menlo"/>
               </a:rPr>
-              <a:t>setMajorAxis</a:t>
-            </a:r>
+              <a:t>    + setMinorAxis(b)</a:t>
+            </a:r>
+            <a:endParaRPr/>
+          </a:p>
+          <a:p>
+            <a:pPr>
+              <a:lnSpc>
+                <a:spcPct val="140000"/>
+              </a:lnSpc>
+            </a:pPr>
             <a:r>
               <a:rPr sz="900">
                 <a:solidFill>
-                  <a:srgbClr val="24292E"/>
+                  <a:srgbClr val="E5E7EB"/>
                 </a:solidFill>
                 <a:latin typeface="Menlo"/>
                 <a:ea typeface="Menlo"/>
               </a:rPr>
-              <a:t>(</a:t>
-            </a:r>
+              <a:t>        refuse - a circle cannot  # breaks the promise</a:t>
+            </a:r>
+            <a:endParaRPr/>
+          </a:p>
+          <a:p>
+            <a:pPr>
+              <a:lnSpc>
+                <a:spcPct val="140000"/>
+              </a:lnSpc>
+            </a:pPr>
+            <a:endParaRPr/>
+          </a:p>
+          <a:p>
+            <a:pPr>
+              <a:lnSpc>
+                <a:spcPct val="140000"/>
+              </a:lnSpc>
+            </a:pPr>
             <a:r>
               <a:rPr sz="900">
                 <a:solidFill>
-                  <a:srgbClr val="D73A49"/>
+                  <a:srgbClr val="E5E7EB"/>
                 </a:solidFill>
                 <a:latin typeface="Menlo"/>
                 <a:ea typeface="Menlo"/>
               </a:rPr>
-              <a:t>double</a:t>
-            </a:r>
+              <a:t># ...so why does this break?</a:t>
+            </a:r>
+            <a:endParaRPr/>
+          </a:p>
+          <a:p>
+            <a:pPr>
+              <a:lnSpc>
+                <a:spcPct val="140000"/>
+              </a:lnSpc>
+            </a:pPr>
             <a:r>
               <a:rPr sz="900">
                 <a:solidFill>
-                  <a:srgbClr val="24292E"/>
+                  <a:srgbClr val="E5E7EB"/>
                 </a:solidFill>
                 <a:latin typeface="Menlo"/>
                 <a:ea typeface="Menlo"/>
               </a:rPr>
-              <a:t> </a:t>
-            </a:r>
+              <a:t>e = a new Circle</a:t>
+            </a:r>
+            <a:endParaRPr/>
+          </a:p>
+          <a:p>
+            <a:pPr>
+              <a:lnSpc>
+                <a:spcPct val="140000"/>
+              </a:lnSpc>
+            </a:pPr>
             <a:r>
               <a:rPr sz="900">
                 <a:solidFill>
-                  <a:srgbClr val="E36209"/>
+                  <a:srgbClr val="E5E7EB"/>
                 </a:solidFill>
                 <a:latin typeface="Menlo"/>
                 <a:ea typeface="Menlo"/>
               </a:rPr>
-              <a:t>a</a:t>
-            </a:r>
-            <a:r>
-              <a:rPr sz="900">
-                <a:solidFill>
-                  <a:srgbClr val="24292E"/>
-                </a:solidFill>
-                <a:latin typeface="Menlo"/>
-                <a:ea typeface="Menlo"/>
-              </a:rPr>
-              <a:t>) { ... }</a:t>
-            </a:r>
-            <a:endParaRPr/>
-          </a:p>
-          <a:p>
-            <a:pPr>
-              <a:lnSpc>
-                <a:spcPct val="140000"/>
-              </a:lnSpc>
-            </a:pPr>
-            <a:r>
-              <a:rPr sz="900">
-                <a:solidFill>
-                  <a:srgbClr val="24292E"/>
-                </a:solidFill>
-                <a:latin typeface="Menlo"/>
-                <a:ea typeface="Menlo"/>
-              </a:rPr>
-              <a:t>    </a:t>
-            </a:r>
-            <a:r>
-              <a:rPr sz="900">
-                <a:solidFill>
-                  <a:srgbClr val="D73A49"/>
-                </a:solidFill>
-                <a:latin typeface="Menlo"/>
-                <a:ea typeface="Menlo"/>
-              </a:rPr>
-              <a:t>void</a:t>
-            </a:r>
-            <a:r>
-              <a:rPr sz="900">
-                <a:solidFill>
-                  <a:srgbClr val="24292E"/>
-                </a:solidFill>
-                <a:latin typeface="Menlo"/>
-                <a:ea typeface="Menlo"/>
-              </a:rPr>
-              <a:t> </a:t>
-            </a:r>
-            <a:r>
-              <a:rPr sz="900">
-                <a:solidFill>
-                  <a:srgbClr val="6F42C1"/>
-                </a:solidFill>
-                <a:latin typeface="Menlo"/>
-                <a:ea typeface="Menlo"/>
-              </a:rPr>
-              <a:t>setMinorAxis</a:t>
-            </a:r>
-            <a:r>
-              <a:rPr sz="900">
-                <a:solidFill>
-                  <a:srgbClr val="24292E"/>
-                </a:solidFill>
-                <a:latin typeface="Menlo"/>
-                <a:ea typeface="Menlo"/>
-              </a:rPr>
-              <a:t>(</a:t>
-            </a:r>
-            <a:r>
-              <a:rPr sz="900">
-                <a:solidFill>
-                  <a:srgbClr val="D73A49"/>
-                </a:solidFill>
-                <a:latin typeface="Menlo"/>
-                <a:ea typeface="Menlo"/>
-              </a:rPr>
-              <a:t>double</a:t>
-            </a:r>
-            <a:r>
-              <a:rPr sz="900">
-                <a:solidFill>
-                  <a:srgbClr val="24292E"/>
-                </a:solidFill>
-                <a:latin typeface="Menlo"/>
-                <a:ea typeface="Menlo"/>
-              </a:rPr>
-              <a:t> </a:t>
-            </a:r>
-            <a:r>
-              <a:rPr sz="900">
-                <a:solidFill>
-                  <a:srgbClr val="E36209"/>
-                </a:solidFill>
-                <a:latin typeface="Menlo"/>
-                <a:ea typeface="Menlo"/>
-              </a:rPr>
-              <a:t>b</a:t>
-            </a:r>
-            <a:r>
-              <a:rPr sz="900">
-                <a:solidFill>
-                  <a:srgbClr val="24292E"/>
-                </a:solidFill>
-                <a:latin typeface="Menlo"/>
-                <a:ea typeface="Menlo"/>
-              </a:rPr>
-              <a:t>) { ... }</a:t>
-            </a:r>
-            <a:endParaRPr/>
-          </a:p>
-          <a:p>
-            <a:pPr>
-              <a:lnSpc>
-                <a:spcPct val="140000"/>
-              </a:lnSpc>
-            </a:pPr>
-            <a:r>
-              <a:rPr sz="900">
-                <a:solidFill>
-                  <a:srgbClr val="24292E"/>
-                </a:solidFill>
-                <a:latin typeface="Menlo"/>
-                <a:ea typeface="Menlo"/>
-              </a:rPr>
-              <a:t>}</a:t>
-            </a:r>
-            <a:endParaRPr/>
-          </a:p>
-          <a:p>
-            <a:pPr>
-              <a:lnSpc>
-                <a:spcPct val="140000"/>
-              </a:lnSpc>
-            </a:pPr>
-            <a:r>
-              <a:rPr sz="900">
-                <a:solidFill>
-                  <a:srgbClr val="E5E7EB"/>
-                </a:solidFill>
-                <a:latin typeface="Menlo"/>
-                <a:ea typeface="Menlo"/>
-              </a:rPr>
-              <a:t> </a:t>
-            </a:r>
-            <a:endParaRPr/>
-          </a:p>
-          <a:p>
-            <a:pPr>
-              <a:lnSpc>
-                <a:spcPct val="140000"/>
-              </a:lnSpc>
-            </a:pPr>
-            <a:r>
-              <a:rPr sz="900">
-                <a:solidFill>
-                  <a:srgbClr val="6A737D"/>
-                </a:solidFill>
-                <a:latin typeface="Menlo"/>
-                <a:ea typeface="Menlo"/>
-              </a:rPr>
-              <a:t>// In geometry, a circle IS an ellipse.</a:t>
-            </a:r>
-            <a:endParaRPr/>
-          </a:p>
-          <a:p>
-            <a:pPr>
-              <a:lnSpc>
-                <a:spcPct val="140000"/>
-              </a:lnSpc>
-            </a:pPr>
-            <a:r>
-              <a:rPr sz="900">
-                <a:solidFill>
-                  <a:srgbClr val="D73A49"/>
-                </a:solidFill>
-                <a:latin typeface="Menlo"/>
-                <a:ea typeface="Menlo"/>
-              </a:rPr>
-              <a:t>class</a:t>
-            </a:r>
-            <a:r>
-              <a:rPr sz="900">
-                <a:solidFill>
-                  <a:srgbClr val="24292E"/>
-                </a:solidFill>
-                <a:latin typeface="Menlo"/>
-                <a:ea typeface="Menlo"/>
-              </a:rPr>
-              <a:t> </a:t>
-            </a:r>
-            <a:r>
-              <a:rPr sz="900">
-                <a:solidFill>
-                  <a:srgbClr val="6F42C1"/>
-                </a:solidFill>
-                <a:latin typeface="Menlo"/>
-                <a:ea typeface="Menlo"/>
-              </a:rPr>
-              <a:t>Circle</a:t>
-            </a:r>
-            <a:r>
-              <a:rPr sz="900">
-                <a:solidFill>
-                  <a:srgbClr val="24292E"/>
-                </a:solidFill>
-                <a:latin typeface="Menlo"/>
-                <a:ea typeface="Menlo"/>
-              </a:rPr>
-              <a:t> </a:t>
-            </a:r>
-            <a:r>
-              <a:rPr sz="900">
-                <a:solidFill>
-                  <a:srgbClr val="D73A49"/>
-                </a:solidFill>
-                <a:latin typeface="Menlo"/>
-                <a:ea typeface="Menlo"/>
-              </a:rPr>
-              <a:t>extends</a:t>
-            </a:r>
-            <a:r>
-              <a:rPr sz="900">
-                <a:solidFill>
-                  <a:srgbClr val="24292E"/>
-                </a:solidFill>
-                <a:latin typeface="Menlo"/>
-                <a:ea typeface="Menlo"/>
-              </a:rPr>
-              <a:t> </a:t>
-            </a:r>
-            <a:r>
-              <a:rPr sz="900">
-                <a:solidFill>
-                  <a:srgbClr val="6F42C1"/>
-                </a:solidFill>
-                <a:latin typeface="Menlo"/>
-                <a:ea typeface="Menlo"/>
-              </a:rPr>
-              <a:t>Ellipse</a:t>
-            </a:r>
-            <a:r>
-              <a:rPr sz="900">
-                <a:solidFill>
-                  <a:srgbClr val="24292E"/>
-                </a:solidFill>
-                <a:latin typeface="Menlo"/>
-                <a:ea typeface="Menlo"/>
-              </a:rPr>
-              <a:t> {</a:t>
-            </a:r>
-            <a:endParaRPr/>
-          </a:p>
-          <a:p>
-            <a:pPr>
-              <a:lnSpc>
-                <a:spcPct val="140000"/>
-              </a:lnSpc>
-            </a:pPr>
-            <a:r>
-              <a:rPr sz="900">
-                <a:solidFill>
-                  <a:srgbClr val="24292E"/>
-                </a:solidFill>
-                <a:latin typeface="Menlo"/>
-                <a:ea typeface="Menlo"/>
-              </a:rPr>
-              <a:t>    </a:t>
-            </a:r>
-            <a:r>
-              <a:rPr sz="900">
-                <a:solidFill>
-                  <a:srgbClr val="D73A49"/>
-                </a:solidFill>
-                <a:latin typeface="Menlo"/>
-                <a:ea typeface="Menlo"/>
-              </a:rPr>
-              <a:t>void</a:t>
-            </a:r>
-            <a:r>
-              <a:rPr sz="900">
-                <a:solidFill>
-                  <a:srgbClr val="24292E"/>
-                </a:solidFill>
-                <a:latin typeface="Menlo"/>
-                <a:ea typeface="Menlo"/>
-              </a:rPr>
-              <a:t> </a:t>
-            </a:r>
-            <a:r>
-              <a:rPr sz="900">
-                <a:solidFill>
-                  <a:srgbClr val="6F42C1"/>
-                </a:solidFill>
-                <a:latin typeface="Menlo"/>
-                <a:ea typeface="Menlo"/>
-              </a:rPr>
-              <a:t>setMajorAxis</a:t>
-            </a:r>
-            <a:r>
-              <a:rPr sz="900">
-                <a:solidFill>
-                  <a:srgbClr val="24292E"/>
-                </a:solidFill>
-                <a:latin typeface="Menlo"/>
-                <a:ea typeface="Menlo"/>
-              </a:rPr>
-              <a:t>(</a:t>
-            </a:r>
-            <a:r>
-              <a:rPr sz="900">
-                <a:solidFill>
-                  <a:srgbClr val="D73A49"/>
-                </a:solidFill>
-                <a:latin typeface="Menlo"/>
-                <a:ea typeface="Menlo"/>
-              </a:rPr>
-              <a:t>double</a:t>
-            </a:r>
-            <a:r>
-              <a:rPr sz="900">
-                <a:solidFill>
-                  <a:srgbClr val="24292E"/>
-                </a:solidFill>
-                <a:latin typeface="Menlo"/>
-                <a:ea typeface="Menlo"/>
-              </a:rPr>
-              <a:t> </a:t>
-            </a:r>
-            <a:r>
-              <a:rPr sz="900">
-                <a:solidFill>
-                  <a:srgbClr val="E36209"/>
-                </a:solidFill>
-                <a:latin typeface="Menlo"/>
-                <a:ea typeface="Menlo"/>
-              </a:rPr>
-              <a:t>a</a:t>
-            </a:r>
-            <a:r>
-              <a:rPr sz="900">
-                <a:solidFill>
-                  <a:srgbClr val="24292E"/>
-                </a:solidFill>
-                <a:latin typeface="Menlo"/>
-                <a:ea typeface="Menlo"/>
-              </a:rPr>
-              <a:t>) {</a:t>
-            </a:r>
-            <a:endParaRPr/>
-          </a:p>
-          <a:p>
-            <a:pPr>
-              <a:lnSpc>
-                <a:spcPct val="140000"/>
-              </a:lnSpc>
-            </a:pPr>
-            <a:r>
-              <a:rPr sz="900">
-                <a:solidFill>
-                  <a:srgbClr val="24292E"/>
-                </a:solidFill>
-                <a:latin typeface="Menlo"/>
-                <a:ea typeface="Menlo"/>
-              </a:rPr>
-              <a:t>        </a:t>
-            </a:r>
-            <a:r>
-              <a:rPr sz="900">
-                <a:solidFill>
-                  <a:srgbClr val="005CC5"/>
-                </a:solidFill>
-                <a:latin typeface="Menlo"/>
-                <a:ea typeface="Menlo"/>
-              </a:rPr>
-              <a:t>super</a:t>
-            </a:r>
-            <a:r>
-              <a:rPr sz="900">
-                <a:solidFill>
-                  <a:srgbClr val="24292E"/>
-                </a:solidFill>
-                <a:latin typeface="Menlo"/>
-                <a:ea typeface="Menlo"/>
-              </a:rPr>
-              <a:t>.</a:t>
-            </a:r>
-            <a:r>
-              <a:rPr sz="900">
-                <a:solidFill>
-                  <a:srgbClr val="6F42C1"/>
-                </a:solidFill>
-                <a:latin typeface="Menlo"/>
-                <a:ea typeface="Menlo"/>
-              </a:rPr>
-              <a:t>setMajorAxis</a:t>
-            </a:r>
-            <a:r>
-              <a:rPr sz="900">
-                <a:solidFill>
-                  <a:srgbClr val="24292E"/>
-                </a:solidFill>
-                <a:latin typeface="Menlo"/>
-                <a:ea typeface="Menlo"/>
-              </a:rPr>
-              <a:t>(a);</a:t>
-            </a:r>
-            <a:endParaRPr/>
-          </a:p>
-          <a:p>
-            <a:pPr>
-              <a:lnSpc>
-                <a:spcPct val="140000"/>
-              </a:lnSpc>
-            </a:pPr>
-            <a:r>
-              <a:rPr sz="900">
-                <a:solidFill>
-                  <a:srgbClr val="24292E"/>
-                </a:solidFill>
-                <a:latin typeface="Menlo"/>
-                <a:ea typeface="Menlo"/>
-              </a:rPr>
-              <a:t>        </a:t>
-            </a:r>
-            <a:r>
-              <a:rPr sz="900">
-                <a:solidFill>
-                  <a:srgbClr val="005CC5"/>
-                </a:solidFill>
-                <a:latin typeface="Menlo"/>
-                <a:ea typeface="Menlo"/>
-              </a:rPr>
-              <a:t>super</a:t>
-            </a:r>
-            <a:r>
-              <a:rPr sz="900">
-                <a:solidFill>
-                  <a:srgbClr val="24292E"/>
-                </a:solidFill>
-                <a:latin typeface="Menlo"/>
-                <a:ea typeface="Menlo"/>
-              </a:rPr>
-              <a:t>.</a:t>
-            </a:r>
-            <a:r>
-              <a:rPr sz="900">
-                <a:solidFill>
-                  <a:srgbClr val="6F42C1"/>
-                </a:solidFill>
-                <a:latin typeface="Menlo"/>
-                <a:ea typeface="Menlo"/>
-              </a:rPr>
-              <a:t>setMinorAxis</a:t>
-            </a:r>
-            <a:r>
-              <a:rPr sz="900">
-                <a:solidFill>
-                  <a:srgbClr val="24292E"/>
-                </a:solidFill>
-                <a:latin typeface="Menlo"/>
-                <a:ea typeface="Menlo"/>
-              </a:rPr>
-              <a:t>(a);   </a:t>
-            </a:r>
-            <a:r>
-              <a:rPr sz="900">
-                <a:solidFill>
-                  <a:srgbClr val="6A737D"/>
-                </a:solidFill>
-                <a:latin typeface="Menlo"/>
-                <a:ea typeface="Menlo"/>
-              </a:rPr>
-              <a:t>// stay round</a:t>
-            </a:r>
-            <a:endParaRPr/>
-          </a:p>
-          <a:p>
-            <a:pPr>
-              <a:lnSpc>
-                <a:spcPct val="140000"/>
-              </a:lnSpc>
-            </a:pPr>
-            <a:r>
-              <a:rPr sz="900">
-                <a:solidFill>
-                  <a:srgbClr val="24292E"/>
-                </a:solidFill>
-                <a:latin typeface="Menlo"/>
-                <a:ea typeface="Menlo"/>
-              </a:rPr>
-              <a:t>    }</a:t>
-            </a:r>
-            <a:endParaRPr/>
-          </a:p>
-          <a:p>
-            <a:pPr>
-              <a:lnSpc>
-                <a:spcPct val="140000"/>
-              </a:lnSpc>
-            </a:pPr>
-            <a:r>
-              <a:rPr sz="900">
-                <a:solidFill>
-                  <a:srgbClr val="24292E"/>
-                </a:solidFill>
-                <a:latin typeface="Menlo"/>
-                <a:ea typeface="Menlo"/>
-              </a:rPr>
-              <a:t>    </a:t>
-            </a:r>
-            <a:r>
-              <a:rPr sz="900">
-                <a:solidFill>
-                  <a:srgbClr val="D73A49"/>
-                </a:solidFill>
-                <a:latin typeface="Menlo"/>
-                <a:ea typeface="Menlo"/>
-              </a:rPr>
-              <a:t>void</a:t>
-            </a:r>
-            <a:r>
-              <a:rPr sz="900">
-                <a:solidFill>
-                  <a:srgbClr val="24292E"/>
-                </a:solidFill>
-                <a:latin typeface="Menlo"/>
-                <a:ea typeface="Menlo"/>
-              </a:rPr>
-              <a:t> </a:t>
-            </a:r>
-            <a:r>
-              <a:rPr sz="900">
-                <a:solidFill>
-                  <a:srgbClr val="6F42C1"/>
-                </a:solidFill>
-                <a:latin typeface="Menlo"/>
-                <a:ea typeface="Menlo"/>
-              </a:rPr>
-              <a:t>setMinorAxis</a:t>
-            </a:r>
-            <a:r>
-              <a:rPr sz="900">
-                <a:solidFill>
-                  <a:srgbClr val="24292E"/>
-                </a:solidFill>
-                <a:latin typeface="Menlo"/>
-                <a:ea typeface="Menlo"/>
-              </a:rPr>
-              <a:t>(</a:t>
-            </a:r>
-            <a:r>
-              <a:rPr sz="900">
-                <a:solidFill>
-                  <a:srgbClr val="D73A49"/>
-                </a:solidFill>
-                <a:latin typeface="Menlo"/>
-                <a:ea typeface="Menlo"/>
-              </a:rPr>
-              <a:t>double</a:t>
-            </a:r>
-            <a:r>
-              <a:rPr sz="900">
-                <a:solidFill>
-                  <a:srgbClr val="24292E"/>
-                </a:solidFill>
-                <a:latin typeface="Menlo"/>
-                <a:ea typeface="Menlo"/>
-              </a:rPr>
-              <a:t> </a:t>
-            </a:r>
-            <a:r>
-              <a:rPr sz="900">
-                <a:solidFill>
-                  <a:srgbClr val="E36209"/>
-                </a:solidFill>
-                <a:latin typeface="Menlo"/>
-                <a:ea typeface="Menlo"/>
-              </a:rPr>
-              <a:t>b</a:t>
-            </a:r>
-            <a:r>
-              <a:rPr sz="900">
-                <a:solidFill>
-                  <a:srgbClr val="24292E"/>
-                </a:solidFill>
-                <a:latin typeface="Menlo"/>
-                <a:ea typeface="Menlo"/>
-              </a:rPr>
-              <a:t>) {</a:t>
-            </a:r>
-            <a:endParaRPr/>
-          </a:p>
-          <a:p>
-            <a:pPr>
-              <a:lnSpc>
-                <a:spcPct val="140000"/>
-              </a:lnSpc>
-            </a:pPr>
-            <a:r>
-              <a:rPr sz="900">
-                <a:solidFill>
-                  <a:srgbClr val="24292E"/>
-                </a:solidFill>
-                <a:latin typeface="Menlo"/>
-                <a:ea typeface="Menlo"/>
-              </a:rPr>
-              <a:t>        </a:t>
-            </a:r>
-            <a:r>
-              <a:rPr sz="900">
-                <a:solidFill>
-                  <a:srgbClr val="D73A49"/>
-                </a:solidFill>
-                <a:latin typeface="Menlo"/>
-                <a:ea typeface="Menlo"/>
-              </a:rPr>
-              <a:t>throw</a:t>
-            </a:r>
-            <a:r>
-              <a:rPr sz="900">
-                <a:solidFill>
-                  <a:srgbClr val="24292E"/>
-                </a:solidFill>
-                <a:latin typeface="Menlo"/>
-                <a:ea typeface="Menlo"/>
-              </a:rPr>
-              <a:t> </a:t>
-            </a:r>
-            <a:r>
-              <a:rPr sz="900">
-                <a:solidFill>
-                  <a:srgbClr val="D73A49"/>
-                </a:solidFill>
-                <a:latin typeface="Menlo"/>
-                <a:ea typeface="Menlo"/>
-              </a:rPr>
-              <a:t>new</a:t>
-            </a:r>
-            <a:r>
-              <a:rPr sz="900">
-                <a:solidFill>
-                  <a:srgbClr val="24292E"/>
-                </a:solidFill>
-                <a:latin typeface="Menlo"/>
-                <a:ea typeface="Menlo"/>
-              </a:rPr>
-              <a:t> </a:t>
-            </a:r>
-            <a:r>
-              <a:rPr sz="900">
-                <a:solidFill>
-                  <a:srgbClr val="6F42C1"/>
-                </a:solidFill>
-                <a:latin typeface="Menlo"/>
-                <a:ea typeface="Menlo"/>
-              </a:rPr>
-              <a:t>UnsupportedOperationException</a:t>
-            </a:r>
-            <a:r>
-              <a:rPr sz="900">
-                <a:solidFill>
-                  <a:srgbClr val="24292E"/>
-                </a:solidFill>
-                <a:latin typeface="Menlo"/>
-                <a:ea typeface="Menlo"/>
-              </a:rPr>
-              <a:t>();</a:t>
-            </a:r>
-            <a:endParaRPr/>
-          </a:p>
-          <a:p>
-            <a:pPr>
-              <a:lnSpc>
-                <a:spcPct val="140000"/>
-              </a:lnSpc>
-            </a:pPr>
-            <a:r>
-              <a:rPr sz="900">
-                <a:solidFill>
-                  <a:srgbClr val="24292E"/>
-                </a:solidFill>
-                <a:latin typeface="Menlo"/>
-                <a:ea typeface="Menlo"/>
-              </a:rPr>
-              <a:t>    }</a:t>
-            </a:r>
-            <a:endParaRPr/>
-          </a:p>
-          <a:p>
-            <a:pPr>
-              <a:lnSpc>
-                <a:spcPct val="140000"/>
-              </a:lnSpc>
-            </a:pPr>
-            <a:r>
-              <a:rPr sz="900">
-                <a:solidFill>
-                  <a:srgbClr val="24292E"/>
-                </a:solidFill>
-                <a:latin typeface="Menlo"/>
-                <a:ea typeface="Menlo"/>
-              </a:rPr>
-              <a:t>}</a:t>
-            </a:r>
-            <a:endParaRPr/>
-          </a:p>
-          <a:p>
-            <a:pPr>
-              <a:lnSpc>
-                <a:spcPct val="140000"/>
-              </a:lnSpc>
-            </a:pPr>
-            <a:r>
-              <a:rPr sz="900">
-                <a:solidFill>
-                  <a:srgbClr val="E5E7EB"/>
-                </a:solidFill>
-                <a:latin typeface="Menlo"/>
-                <a:ea typeface="Menlo"/>
-              </a:rPr>
-              <a:t> </a:t>
-            </a:r>
-            <a:endParaRPr/>
-          </a:p>
-          <a:p>
-            <a:pPr>
-              <a:lnSpc>
-                <a:spcPct val="140000"/>
-              </a:lnSpc>
-            </a:pPr>
-            <a:r>
-              <a:rPr sz="900">
-                <a:solidFill>
-                  <a:srgbClr val="6A737D"/>
-                </a:solidFill>
-                <a:latin typeface="Menlo"/>
-                <a:ea typeface="Menlo"/>
-              </a:rPr>
-              <a:t>// ...so why does this break?</a:t>
-            </a:r>
-            <a:endParaRPr/>
-          </a:p>
-          <a:p>
-            <a:pPr>
-              <a:lnSpc>
-                <a:spcPct val="140000"/>
-              </a:lnSpc>
-            </a:pPr>
-            <a:r>
-              <a:rPr sz="900">
-                <a:solidFill>
-                  <a:srgbClr val="24292E"/>
-                </a:solidFill>
-                <a:latin typeface="Menlo"/>
-                <a:ea typeface="Menlo"/>
-              </a:rPr>
-              <a:t>Ellipse e </a:t>
-            </a:r>
-            <a:r>
-              <a:rPr sz="900">
-                <a:solidFill>
-                  <a:srgbClr val="D73A49"/>
-                </a:solidFill>
-                <a:latin typeface="Menlo"/>
-                <a:ea typeface="Menlo"/>
-              </a:rPr>
-              <a:t>=</a:t>
-            </a:r>
-            <a:r>
-              <a:rPr sz="900">
-                <a:solidFill>
-                  <a:srgbClr val="24292E"/>
-                </a:solidFill>
-                <a:latin typeface="Menlo"/>
-                <a:ea typeface="Menlo"/>
-              </a:rPr>
-              <a:t> </a:t>
-            </a:r>
-            <a:r>
-              <a:rPr sz="900">
-                <a:solidFill>
-                  <a:srgbClr val="D73A49"/>
-                </a:solidFill>
-                <a:latin typeface="Menlo"/>
-                <a:ea typeface="Menlo"/>
-              </a:rPr>
-              <a:t>new</a:t>
-            </a:r>
-            <a:r>
-              <a:rPr sz="900">
-                <a:solidFill>
-                  <a:srgbClr val="24292E"/>
-                </a:solidFill>
-                <a:latin typeface="Menlo"/>
-                <a:ea typeface="Menlo"/>
-              </a:rPr>
-              <a:t> </a:t>
-            </a:r>
-            <a:r>
-              <a:rPr sz="900">
-                <a:solidFill>
-                  <a:srgbClr val="6F42C1"/>
-                </a:solidFill>
-                <a:latin typeface="Menlo"/>
-                <a:ea typeface="Menlo"/>
-              </a:rPr>
-              <a:t>Circle</a:t>
-            </a:r>
-            <a:r>
-              <a:rPr sz="900">
-                <a:solidFill>
-                  <a:srgbClr val="24292E"/>
-                </a:solidFill>
-                <a:latin typeface="Menlo"/>
-                <a:ea typeface="Menlo"/>
-              </a:rPr>
-              <a:t>();</a:t>
-            </a:r>
-            <a:endParaRPr/>
-          </a:p>
-          <a:p>
-            <a:pPr>
-              <a:lnSpc>
-                <a:spcPct val="140000"/>
-              </a:lnSpc>
-            </a:pPr>
-            <a:r>
-              <a:rPr sz="900">
-                <a:solidFill>
-                  <a:srgbClr val="24292E"/>
-                </a:solidFill>
-                <a:latin typeface="Menlo"/>
-                <a:ea typeface="Menlo"/>
-              </a:rPr>
-              <a:t>e.</a:t>
-            </a:r>
-            <a:r>
-              <a:rPr sz="900">
-                <a:solidFill>
-                  <a:srgbClr val="6F42C1"/>
-                </a:solidFill>
-                <a:latin typeface="Menlo"/>
-                <a:ea typeface="Menlo"/>
-              </a:rPr>
-              <a:t>setMinorAxis</a:t>
-            </a:r>
-            <a:r>
-              <a:rPr sz="900">
-                <a:solidFill>
-                  <a:srgbClr val="24292E"/>
-                </a:solidFill>
-                <a:latin typeface="Menlo"/>
-                <a:ea typeface="Menlo"/>
-              </a:rPr>
-              <a:t>(</a:t>
-            </a:r>
-            <a:r>
-              <a:rPr sz="900">
-                <a:solidFill>
-                  <a:srgbClr val="005CC5"/>
-                </a:solidFill>
-                <a:latin typeface="Menlo"/>
-                <a:ea typeface="Menlo"/>
-              </a:rPr>
-              <a:t>3.0</a:t>
-            </a:r>
-            <a:r>
-              <a:rPr sz="900">
-                <a:solidFill>
-                  <a:srgbClr val="24292E"/>
-                </a:solidFill>
-                <a:latin typeface="Menlo"/>
-                <a:ea typeface="Menlo"/>
-              </a:rPr>
-              <a:t>);      </a:t>
-            </a:r>
-            <a:r>
-              <a:rPr sz="900">
-                <a:solidFill>
-                  <a:srgbClr val="6A737D"/>
-                </a:solidFill>
-                <a:latin typeface="Menlo"/>
-                <a:ea typeface="Menlo"/>
-              </a:rPr>
-              <a:t>// crashes</a:t>
+              <a:t>e.setMinorAxis(3.0)              # fails</a:t>
             </a:r>
             <a:endParaRPr/>
           </a:p>
@@ -13788,7 +11954,7 @@
   <p:cSld>
     <p:spTree>
       <p:nvGrpSpPr>
-        <p:cNvPr id="334" name="" descr="&lt;Slide style={{ background: '#FFFFFF', padding: 0 }}&gt;&#10;  &lt;Box style={{ height: 72, background: '#1E4FA8', padding: '0 40px', flexDirection: 'row', alignItems: 'center', justifyContent: 'space-between' }}&gt;&#10;    &lt;Text style={{ fontSize: 15, color: '#B9CDF0', letterSpacing: 1 }}&gt;ISAD · INFORMATION SYSTEMS ANALYSIS &amp;amp; DESIGN&lt;/Text&gt;&#10;    &lt;Text style={{ fontSize: 15, color: '#B9CDF0' }}&gt;W02 · REUSE&lt;/Text&gt;&#10;  &lt;/Box&gt;&#10;  &lt;Box style={{ padding: '20px 40px 0 40px' }}&gt;&#10;    &lt;Text style={{ fontSize: 32, fontWeight: 'bold', color: '#0E3F8C' }}&gt;Composition in Java&lt;/Text&gt;&#10;  &lt;/Box&gt;&#10;  &lt;Box style={{ flex: 1, padding: '14px 40px 0 40px', flexDirection: 'row', gap: 26 }}&gt;&#10;    &lt;Box style={{ flex: 1, flexDirection: 'column', gap: 10 }}&gt;&#10;      &lt;Box style={{ flexDirection: 'row', alignItems: 'center', gap: 9 }}&gt;&#10;        &lt;FAIcon name='times-circle' style={{ fill: '#D9534F', width: 19, height: 19 }} /&gt;&#10;        &lt;Text style={{ fontSize: 16, fontWeight: 'bold', color: '#D9534F' }}&gt;Inheriting for convenience&lt;/Text&gt;&#10;      &lt;/Box&gt;&#10;      &lt;CodeBlock code={`// &quot;an order is just a list of lines&quot;&#10;class Order extends ArrayList {&#10;    void place() { ... }&#10;}&#10;&#10;// now Order inherits 20+ list methods&#10;// that make no sense for an order&#10;order.sort(...);&#10;order.clear();      // wipes a paid order&#10;order.addAll(...);  // bypasses the guard`} language='java' width={520} fontSize={12} /&gt;&#10;    &lt;/Box&gt;&#10;    &lt;Box style={{ flex: 1, flexDirection: 'column', gap: 10 }}&gt;&#10;      &lt;Box style={{ flexDirection: 'row', alignItems: 'center', gap: 9 }}&gt;&#10;        &lt;FAIcon name='check-circle' style={{ fill: '#1E4FA8', width: 19, height: 19 }} /&gt;&#10;        &lt;Text style={{ fontSize: 16, fontWeight: 'bold', color: '#0E3F8C' }}&gt;Composing with collaborators&lt;/Text&gt;&#10;      &lt;/Box&gt;&#10;      &lt;CodeBlock code={`class Order {&#10;    private final List lines = new ArrayList();&#10;    private PaymentMethod payment;&#10;    private DeliveryRoute route;&#10;&#10;    public Money total() { ... }&#10;    public Receipt pay() {&#10;        return payment.pay(total());&#10;    }&#10;}&#10;&#10;// Order exposes only what an order does&#10;order.pay();        // yes&#10;order.clear();      // no such method`} language='java' width={520} fontSize={12} /&gt;&#10;    &lt;/Box&gt;&#10;  &lt;/Box&gt;&#10;  &lt;Box style={{ height: 44, background: '#0E3F8C', padding: '0 40px', flexDirection: 'row', alignItems: 'center', justifyContent: 'center' }}&gt;&#10;    &lt;Text style={{ fontSize: 17, color: '#FFFFFF', fontWeight: '600' }}&gt;Inheritance reuses everything — including the parts that make no sense. Composition lets you choose.&lt;/Text&gt;&#10;  &lt;/Box&gt;&#10;&lt;/Slide&gt;"/>
+        <p:cNvPr id="334" name="" descr="&lt;Slide style={{ background: '#FFFFFF', padding: 0 }}&gt;&#10;  &lt;Box style={{ height: 72, background: '#1E4FA8', padding: '0 40px', flexDirection: 'row', alignItems: 'center', justifyContent: 'space-between' }}&gt;&#10;    &lt;Text style={{ fontSize: 15, color: '#B9CDF0', letterSpacing: 1 }}&gt;ISAD · INFORMATION SYSTEMS ANALYSIS &amp;amp; DESIGN&lt;/Text&gt;&#10;    &lt;Text style={{ fontSize: 15, color: '#B9CDF0' }}&gt;W02 · REUSE&lt;/Text&gt;&#10;  &lt;/Box&gt;&#10;  &lt;Box style={{ padding: '20px 40px 0 40px' }}&gt;&#10;    &lt;Text style={{ fontSize: 32, fontWeight: 'bold', color: '#0E3F8C' }}&gt;Composition in Java&lt;/Text&gt;&#10;  &lt;/Box&gt;&#10;  &lt;Box style={{ flex: 1, padding: '14px 40px 0 40px', flexDirection: 'row', gap: 26 }}&gt;&#10;    &lt;Box style={{ flex: 1, flexDirection: 'column', gap: 10 }}&gt;&#10;      &lt;Box style={{ flexDirection: 'row', alignItems: 'center', gap: 9 }}&gt;&#10;        &lt;FAIcon name='times-circle' style={{ fill: '#D9534F', width: 19, height: 19 }} /&gt;&#10;        &lt;Text style={{ fontSize: 16, fontWeight: 'bold', color: '#D9534F' }}&gt;Inheriting for convenience&lt;/Text&gt;&#10;      &lt;/Box&gt;&#10;      &lt;CodeBlock code={`# &quot;an order is just a list of lines&quot;&#10;Class Order extends List&#10;    + place()&#10;&#10;# now Order inherits 20+ list operations&#10;# that make no sense for an order&#10;order.sort(...)&#10;order.clear()      # wipes a paid order&#10;order.addAll(...)  # bypasses the guard`} language='text' width={520} fontSize={12} /&gt;&#10;    &lt;/Box&gt;&#10;    &lt;Box style={{ flex: 1, flexDirection: 'column', gap: 10 }}&gt;&#10;      &lt;Box style={{ flexDirection: 'row', alignItems: 'center', gap: 9 }}&gt;&#10;        &lt;FAIcon name='check-circle' style={{ fill: '#1E4FA8', width: 19, height: 19 }} /&gt;&#10;        &lt;Text style={{ fontSize: 16, fontWeight: 'bold', color: '#0E3F8C' }}&gt;Composing with collaborators&lt;/Text&gt;&#10;      &lt;/Box&gt;&#10;      &lt;CodeBlock code={`Class Order&#10;    - lines : OrderLine[0..*]&#10;    - payment : PaymentMethod&#10;    - route : DeliveryRoute&#10;&#10;    + total() : Money&#10;    + pay() : Receipt&#10;        return payment.pay(total())&#10;&#10;# Order offers only what an order does&#10;order.pay()        # yes&#10;order.clear()      # no such operation`} language='text' width={520} fontSize={12} /&gt;&#10;    &lt;/Box&gt;&#10;  &lt;/Box&gt;&#10;  &lt;Box style={{ height: 44, background: '#0E3F8C', padding: '0 40px', flexDirection: 'row', alignItems: 'center', justifyContent: 'center' }}&gt;&#10;    &lt;Text style={{ fontSize: 17, color: '#FFFFFF', fontWeight: '600' }}&gt;Inheritance reuses everything — including the parts that make no sense. Composition lets you choose.&lt;/Text&gt;&#10;  &lt;/Box&gt;&#10;&lt;/Slide&gt;"/>
         <p:cNvGrpSpPr/>
         <p:nvPr/>
       </p:nvGrpSpPr>
@@ -14153,11 +12319,11 @@
         <p:spPr>
           <a:xfrm rot="0" flipH="0" flipV="0">
             <a:off x="381000" y="1666875"/>
-            <a:ext cx="5591175" cy="2190750"/>
+            <a:ext cx="5591175" cy="2000250"/>
           </a:xfrm>
           <a:prstGeom prst="roundRect">
             <a:avLst>
-              <a:gd name="adj" fmla="val 3478"/>
+              <a:gd name="adj" fmla="val 3810"/>
             </a:avLst>
           </a:prstGeom>
           <a:solidFill>
@@ -14179,7 +12345,7 @@
         <p:spPr>
           <a:xfrm rot="0" flipH="0" flipV="0">
             <a:off x="533400" y="1800225"/>
-            <a:ext cx="5286375" cy="1924050"/>
+            <a:ext cx="5286375" cy="1733550"/>
           </a:xfrm>
           <a:prstGeom prst="rect"/>
         </p:spPr>
@@ -14196,12 +12362,12 @@
             <a:r>
               <a:rPr sz="900">
                 <a:solidFill>
-                  <a:srgbClr val="6A737D"/>
+                  <a:srgbClr val="E5E7EB"/>
                 </a:solidFill>
                 <a:latin typeface="Menlo"/>
                 <a:ea typeface="Menlo"/>
               </a:rPr>
-              <a:t>// "an order is just a list of lines"</a:t>
+              <a:t># "an order is just a list of lines"</a:t>
             </a:r>
             <a:endParaRPr/>
           </a:p>
@@ -14214,346 +12380,128 @@
             <a:r>
               <a:rPr sz="900">
                 <a:solidFill>
-                  <a:srgbClr val="D73A49"/>
+                  <a:srgbClr val="E5E7EB"/>
                 </a:solidFill>
                 <a:latin typeface="Menlo"/>
                 <a:ea typeface="Menlo"/>
               </a:rPr>
-              <a:t>class</a:t>
-            </a:r>
+              <a:t>Class Order extends List</a:t>
+            </a:r>
+            <a:endParaRPr/>
+          </a:p>
+          <a:p>
+            <a:pPr>
+              <a:lnSpc>
+                <a:spcPct val="140000"/>
+              </a:lnSpc>
+            </a:pPr>
             <a:r>
               <a:rPr sz="900">
                 <a:solidFill>
-                  <a:srgbClr val="24292E"/>
+                  <a:srgbClr val="E5E7EB"/>
                 </a:solidFill>
                 <a:latin typeface="Menlo"/>
                 <a:ea typeface="Menlo"/>
               </a:rPr>
-              <a:t> </a:t>
-            </a:r>
+              <a:t>    + place()</a:t>
+            </a:r>
+            <a:endParaRPr/>
+          </a:p>
+          <a:p>
+            <a:pPr>
+              <a:lnSpc>
+                <a:spcPct val="140000"/>
+              </a:lnSpc>
+            </a:pPr>
+            <a:endParaRPr/>
+          </a:p>
+          <a:p>
+            <a:pPr>
+              <a:lnSpc>
+                <a:spcPct val="140000"/>
+              </a:lnSpc>
+            </a:pPr>
             <a:r>
               <a:rPr sz="900">
                 <a:solidFill>
-                  <a:srgbClr val="6F42C1"/>
+                  <a:srgbClr val="E5E7EB"/>
                 </a:solidFill>
                 <a:latin typeface="Menlo"/>
                 <a:ea typeface="Menlo"/>
               </a:rPr>
-              <a:t>Order</a:t>
-            </a:r>
+              <a:t># now Order inherits 20+ list operations</a:t>
+            </a:r>
+            <a:endParaRPr/>
+          </a:p>
+          <a:p>
+            <a:pPr>
+              <a:lnSpc>
+                <a:spcPct val="140000"/>
+              </a:lnSpc>
+            </a:pPr>
             <a:r>
               <a:rPr sz="900">
                 <a:solidFill>
-                  <a:srgbClr val="24292E"/>
+                  <a:srgbClr val="E5E7EB"/>
                 </a:solidFill>
                 <a:latin typeface="Menlo"/>
                 <a:ea typeface="Menlo"/>
               </a:rPr>
-              <a:t> </a:t>
-            </a:r>
+              <a:t># that make no sense for an order</a:t>
+            </a:r>
+            <a:endParaRPr/>
+          </a:p>
+          <a:p>
+            <a:pPr>
+              <a:lnSpc>
+                <a:spcPct val="140000"/>
+              </a:lnSpc>
+            </a:pPr>
             <a:r>
               <a:rPr sz="900">
                 <a:solidFill>
-                  <a:srgbClr val="D73A49"/>
+                  <a:srgbClr val="E5E7EB"/>
                 </a:solidFill>
                 <a:latin typeface="Menlo"/>
                 <a:ea typeface="Menlo"/>
               </a:rPr>
-              <a:t>extends</a:t>
-            </a:r>
+              <a:t>order.sort(...)</a:t>
+            </a:r>
+            <a:endParaRPr/>
+          </a:p>
+          <a:p>
+            <a:pPr>
+              <a:lnSpc>
+                <a:spcPct val="140000"/>
+              </a:lnSpc>
+            </a:pPr>
             <a:r>
               <a:rPr sz="900">
                 <a:solidFill>
-                  <a:srgbClr val="24292E"/>
+                  <a:srgbClr val="E5E7EB"/>
                 </a:solidFill>
                 <a:latin typeface="Menlo"/>
                 <a:ea typeface="Menlo"/>
               </a:rPr>
-              <a:t> </a:t>
-            </a:r>
+              <a:t>order.clear()      # wipes a paid order</a:t>
+            </a:r>
+            <a:endParaRPr/>
+          </a:p>
+          <a:p>
+            <a:pPr>
+              <a:lnSpc>
+                <a:spcPct val="140000"/>
+              </a:lnSpc>
+            </a:pPr>
             <a:r>
               <a:rPr sz="900">
                 <a:solidFill>
-                  <a:srgbClr val="6F42C1"/>
+                  <a:srgbClr val="E5E7EB"/>
                 </a:solidFill>
                 <a:latin typeface="Menlo"/>
                 <a:ea typeface="Menlo"/>
               </a:rPr>
-              <a:t>ArrayList</a:t>
-            </a:r>
-            <a:r>
-              <a:rPr sz="900">
-                <a:solidFill>
-                  <a:srgbClr val="24292E"/>
-                </a:solidFill>
-                <a:latin typeface="Menlo"/>
-                <a:ea typeface="Menlo"/>
-              </a:rPr>
-              <a:t> {</a:t>
-            </a:r>
-            <a:endParaRPr/>
-          </a:p>
-          <a:p>
-            <a:pPr>
-              <a:lnSpc>
-                <a:spcPct val="140000"/>
-              </a:lnSpc>
-            </a:pPr>
-            <a:r>
-              <a:rPr sz="900">
-                <a:solidFill>
-                  <a:srgbClr val="24292E"/>
-                </a:solidFill>
-                <a:latin typeface="Menlo"/>
-                <a:ea typeface="Menlo"/>
-              </a:rPr>
-              <a:t>    </a:t>
-            </a:r>
-            <a:r>
-              <a:rPr sz="900">
-                <a:solidFill>
-                  <a:srgbClr val="D73A49"/>
-                </a:solidFill>
-                <a:latin typeface="Menlo"/>
-                <a:ea typeface="Menlo"/>
-              </a:rPr>
-              <a:t>void</a:t>
-            </a:r>
-            <a:r>
-              <a:rPr sz="900">
-                <a:solidFill>
-                  <a:srgbClr val="24292E"/>
-                </a:solidFill>
-                <a:latin typeface="Menlo"/>
-                <a:ea typeface="Menlo"/>
-              </a:rPr>
-              <a:t> </a:t>
-            </a:r>
-            <a:r>
-              <a:rPr sz="900">
-                <a:solidFill>
-                  <a:srgbClr val="6F42C1"/>
-                </a:solidFill>
-                <a:latin typeface="Menlo"/>
-                <a:ea typeface="Menlo"/>
-              </a:rPr>
-              <a:t>place</a:t>
-            </a:r>
-            <a:r>
-              <a:rPr sz="900">
-                <a:solidFill>
-                  <a:srgbClr val="24292E"/>
-                </a:solidFill>
-                <a:latin typeface="Menlo"/>
-                <a:ea typeface="Menlo"/>
-              </a:rPr>
-              <a:t>() { ... }</a:t>
-            </a:r>
-            <a:endParaRPr/>
-          </a:p>
-          <a:p>
-            <a:pPr>
-              <a:lnSpc>
-                <a:spcPct val="140000"/>
-              </a:lnSpc>
-            </a:pPr>
-            <a:r>
-              <a:rPr sz="900">
-                <a:solidFill>
-                  <a:srgbClr val="24292E"/>
-                </a:solidFill>
-                <a:latin typeface="Menlo"/>
-                <a:ea typeface="Menlo"/>
-              </a:rPr>
-              <a:t>}</a:t>
-            </a:r>
-            <a:endParaRPr/>
-          </a:p>
-          <a:p>
-            <a:pPr>
-              <a:lnSpc>
-                <a:spcPct val="140000"/>
-              </a:lnSpc>
-            </a:pPr>
-            <a:r>
-              <a:rPr sz="900">
-                <a:solidFill>
-                  <a:srgbClr val="E5E7EB"/>
-                </a:solidFill>
-                <a:latin typeface="Menlo"/>
-                <a:ea typeface="Menlo"/>
-              </a:rPr>
-              <a:t> </a:t>
-            </a:r>
-            <a:endParaRPr/>
-          </a:p>
-          <a:p>
-            <a:pPr>
-              <a:lnSpc>
-                <a:spcPct val="140000"/>
-              </a:lnSpc>
-            </a:pPr>
-            <a:r>
-              <a:rPr sz="900">
-                <a:solidFill>
-                  <a:srgbClr val="6A737D"/>
-                </a:solidFill>
-                <a:latin typeface="Menlo"/>
-                <a:ea typeface="Menlo"/>
-              </a:rPr>
-              <a:t>// now Order inherits 20+ list methods</a:t>
-            </a:r>
-            <a:endParaRPr/>
-          </a:p>
-          <a:p>
-            <a:pPr>
-              <a:lnSpc>
-                <a:spcPct val="140000"/>
-              </a:lnSpc>
-            </a:pPr>
-            <a:r>
-              <a:rPr sz="900">
-                <a:solidFill>
-                  <a:srgbClr val="6A737D"/>
-                </a:solidFill>
-                <a:latin typeface="Menlo"/>
-                <a:ea typeface="Menlo"/>
-              </a:rPr>
-              <a:t>// that make no sense for an order</a:t>
-            </a:r>
-            <a:endParaRPr/>
-          </a:p>
-          <a:p>
-            <a:pPr>
-              <a:lnSpc>
-                <a:spcPct val="140000"/>
-              </a:lnSpc>
-            </a:pPr>
-            <a:r>
-              <a:rPr sz="900">
-                <a:solidFill>
-                  <a:srgbClr val="24292E"/>
-                </a:solidFill>
-                <a:latin typeface="Menlo"/>
-                <a:ea typeface="Menlo"/>
-              </a:rPr>
-              <a:t>order.</a:t>
-            </a:r>
-            <a:r>
-              <a:rPr sz="900">
-                <a:solidFill>
-                  <a:srgbClr val="6F42C1"/>
-                </a:solidFill>
-                <a:latin typeface="Menlo"/>
-                <a:ea typeface="Menlo"/>
-              </a:rPr>
-              <a:t>sort</a:t>
-            </a:r>
-            <a:r>
-              <a:rPr sz="900">
-                <a:solidFill>
-                  <a:srgbClr val="24292E"/>
-                </a:solidFill>
-                <a:latin typeface="Menlo"/>
-                <a:ea typeface="Menlo"/>
-              </a:rPr>
-              <a:t>(...);</a:t>
-            </a:r>
-            <a:endParaRPr/>
-          </a:p>
-          <a:p>
-            <a:pPr>
-              <a:lnSpc>
-                <a:spcPct val="140000"/>
-              </a:lnSpc>
-            </a:pPr>
-            <a:r>
-              <a:rPr sz="900">
-                <a:solidFill>
-                  <a:srgbClr val="24292E"/>
-                </a:solidFill>
-                <a:latin typeface="Menlo"/>
-                <a:ea typeface="Menlo"/>
-              </a:rPr>
-              <a:t>order.</a:t>
-            </a:r>
-            <a:r>
-              <a:rPr sz="900">
-                <a:solidFill>
-                  <a:srgbClr val="6F42C1"/>
-                </a:solidFill>
-                <a:latin typeface="Menlo"/>
-                <a:ea typeface="Menlo"/>
-              </a:rPr>
-              <a:t>clear</a:t>
-            </a:r>
-            <a:r>
-              <a:rPr sz="900">
-                <a:solidFill>
-                  <a:srgbClr val="24292E"/>
-                </a:solidFill>
-                <a:latin typeface="Menlo"/>
-                <a:ea typeface="Menlo"/>
-              </a:rPr>
-              <a:t>();      </a:t>
-            </a:r>
-            <a:r>
-              <a:rPr sz="900">
-                <a:solidFill>
-                  <a:srgbClr val="6A737D"/>
-                </a:solidFill>
-                <a:latin typeface="Menlo"/>
-                <a:ea typeface="Menlo"/>
-              </a:rPr>
-              <a:t>// wipes a paid order</a:t>
-            </a:r>
-            <a:endParaRPr/>
-          </a:p>
-          <a:p>
-            <a:pPr>
-              <a:lnSpc>
-                <a:spcPct val="140000"/>
-              </a:lnSpc>
-            </a:pPr>
-            <a:r>
-              <a:rPr sz="900">
-                <a:solidFill>
-                  <a:srgbClr val="24292E"/>
-                </a:solidFill>
-                <a:latin typeface="Menlo"/>
-                <a:ea typeface="Menlo"/>
-              </a:rPr>
-              <a:t>order.</a:t>
-            </a:r>
-            <a:r>
-              <a:rPr sz="900">
-                <a:solidFill>
-                  <a:srgbClr val="6F42C1"/>
-                </a:solidFill>
-                <a:latin typeface="Menlo"/>
-                <a:ea typeface="Menlo"/>
-              </a:rPr>
-              <a:t>addAll</a:t>
-            </a:r>
-            <a:r>
-              <a:rPr sz="900">
-                <a:solidFill>
-                  <a:srgbClr val="24292E"/>
-                </a:solidFill>
-                <a:latin typeface="Menlo"/>
-                <a:ea typeface="Menlo"/>
-              </a:rPr>
-              <a:t>(...);  </a:t>
-            </a:r>
-            <a:r>
-              <a:rPr sz="900">
-                <a:solidFill>
-                  <a:srgbClr val="6A737D"/>
-                </a:solidFill>
-                <a:latin typeface="Menlo"/>
-                <a:ea typeface="Menlo"/>
-              </a:rPr>
-              <a:t>// bypasses the guard</a:t>
+              <a:t>order.addAll(...)  # bypasses the guard</a:t>
             </a:r>
             <a:endParaRPr/>
           </a:p>
@@ -14568,11 +12516,11 @@
         <p:spPr>
           <a:xfrm rot="0" flipH="0" flipV="0">
             <a:off x="6219825" y="1666875"/>
-            <a:ext cx="5591175" cy="2962275"/>
+            <a:ext cx="5591175" cy="2571750"/>
           </a:xfrm>
           <a:prstGeom prst="roundRect">
             <a:avLst>
-              <a:gd name="adj" fmla="val 2572"/>
+              <a:gd name="adj" fmla="val 2963"/>
             </a:avLst>
           </a:prstGeom>
           <a:solidFill>
@@ -14594,7 +12542,7 @@
         <p:spPr>
           <a:xfrm rot="0" flipH="0" flipV="0">
             <a:off x="6372225" y="1800225"/>
-            <a:ext cx="5286375" cy="2695575"/>
+            <a:ext cx="5286375" cy="2305050"/>
           </a:xfrm>
           <a:prstGeom prst="rect"/>
         </p:spPr>
@@ -14611,42 +12559,66 @@
             <a:r>
               <a:rPr sz="900">
                 <a:solidFill>
-                  <a:srgbClr val="D73A49"/>
+                  <a:srgbClr val="E5E7EB"/>
                 </a:solidFill>
                 <a:latin typeface="Menlo"/>
                 <a:ea typeface="Menlo"/>
               </a:rPr>
-              <a:t>class</a:t>
-            </a:r>
+              <a:t>Class Order</a:t>
+            </a:r>
+            <a:endParaRPr/>
+          </a:p>
+          <a:p>
+            <a:pPr>
+              <a:lnSpc>
+                <a:spcPct val="140000"/>
+              </a:lnSpc>
+            </a:pPr>
             <a:r>
               <a:rPr sz="900">
                 <a:solidFill>
-                  <a:srgbClr val="24292E"/>
+                  <a:srgbClr val="E5E7EB"/>
                 </a:solidFill>
                 <a:latin typeface="Menlo"/>
                 <a:ea typeface="Menlo"/>
               </a:rPr>
-              <a:t> </a:t>
-            </a:r>
+              <a:t>    - lines : OrderLine[0..*]</a:t>
+            </a:r>
+            <a:endParaRPr/>
+          </a:p>
+          <a:p>
+            <a:pPr>
+              <a:lnSpc>
+                <a:spcPct val="140000"/>
+              </a:lnSpc>
+            </a:pPr>
             <a:r>
               <a:rPr sz="900">
                 <a:solidFill>
-                  <a:srgbClr val="6F42C1"/>
+                  <a:srgbClr val="E5E7EB"/>
                 </a:solidFill>
                 <a:latin typeface="Menlo"/>
                 <a:ea typeface="Menlo"/>
               </a:rPr>
-              <a:t>Order</a:t>
-            </a:r>
+              <a:t>    - payment : PaymentMethod</a:t>
+            </a:r>
+            <a:endParaRPr/>
+          </a:p>
+          <a:p>
+            <a:pPr>
+              <a:lnSpc>
+                <a:spcPct val="140000"/>
+              </a:lnSpc>
+            </a:pPr>
             <a:r>
               <a:rPr sz="900">
                 <a:solidFill>
-                  <a:srgbClr val="24292E"/>
+                  <a:srgbClr val="E5E7EB"/>
                 </a:solidFill>
                 <a:latin typeface="Menlo"/>
                 <a:ea typeface="Menlo"/>
               </a:rPr>
-              <a:t> {</a:t>
+              <a:t>    - route : DeliveryRoute</a:t>
             </a:r>
             <a:endParaRPr/>
           </a:p>
@@ -14656,571 +12628,121 @@
                 <a:spcPct val="140000"/>
               </a:lnSpc>
             </a:pPr>
+            <a:endParaRPr/>
+          </a:p>
+          <a:p>
+            <a:pPr>
+              <a:lnSpc>
+                <a:spcPct val="140000"/>
+              </a:lnSpc>
+            </a:pPr>
             <a:r>
               <a:rPr sz="900">
                 <a:solidFill>
-                  <a:srgbClr val="24292E"/>
+                  <a:srgbClr val="E5E7EB"/>
                 </a:solidFill>
                 <a:latin typeface="Menlo"/>
                 <a:ea typeface="Menlo"/>
               </a:rPr>
-              <a:t>    </a:t>
-            </a:r>
+              <a:t>    + total() : Money</a:t>
+            </a:r>
+            <a:endParaRPr/>
+          </a:p>
+          <a:p>
+            <a:pPr>
+              <a:lnSpc>
+                <a:spcPct val="140000"/>
+              </a:lnSpc>
+            </a:pPr>
             <a:r>
               <a:rPr sz="900">
                 <a:solidFill>
-                  <a:srgbClr val="D73A49"/>
+                  <a:srgbClr val="E5E7EB"/>
                 </a:solidFill>
                 <a:latin typeface="Menlo"/>
                 <a:ea typeface="Menlo"/>
               </a:rPr>
-              <a:t>private</a:t>
-            </a:r>
+              <a:t>    + pay() : Receipt</a:t>
+            </a:r>
+            <a:endParaRPr/>
+          </a:p>
+          <a:p>
+            <a:pPr>
+              <a:lnSpc>
+                <a:spcPct val="140000"/>
+              </a:lnSpc>
+            </a:pPr>
             <a:r>
               <a:rPr sz="900">
                 <a:solidFill>
-                  <a:srgbClr val="24292E"/>
+                  <a:srgbClr val="E5E7EB"/>
                 </a:solidFill>
                 <a:latin typeface="Menlo"/>
                 <a:ea typeface="Menlo"/>
               </a:rPr>
-              <a:t> </a:t>
-            </a:r>
+              <a:t>        return payment.pay(total())</a:t>
+            </a:r>
+            <a:endParaRPr/>
+          </a:p>
+          <a:p>
+            <a:pPr>
+              <a:lnSpc>
+                <a:spcPct val="140000"/>
+              </a:lnSpc>
+            </a:pPr>
+            <a:endParaRPr/>
+          </a:p>
+          <a:p>
+            <a:pPr>
+              <a:lnSpc>
+                <a:spcPct val="140000"/>
+              </a:lnSpc>
+            </a:pPr>
             <a:r>
               <a:rPr sz="900">
                 <a:solidFill>
-                  <a:srgbClr val="D73A49"/>
+                  <a:srgbClr val="E5E7EB"/>
                 </a:solidFill>
                 <a:latin typeface="Menlo"/>
                 <a:ea typeface="Menlo"/>
               </a:rPr>
-              <a:t>final</a:t>
-            </a:r>
+              <a:t># Order offers only what an order does</a:t>
+            </a:r>
+            <a:endParaRPr/>
+          </a:p>
+          <a:p>
+            <a:pPr>
+              <a:lnSpc>
+                <a:spcPct val="140000"/>
+              </a:lnSpc>
+            </a:pPr>
             <a:r>
               <a:rPr sz="900">
                 <a:solidFill>
-                  <a:srgbClr val="24292E"/>
+                  <a:srgbClr val="E5E7EB"/>
                 </a:solidFill>
                 <a:latin typeface="Menlo"/>
                 <a:ea typeface="Menlo"/>
               </a:rPr>
-              <a:t> List lines </a:t>
-            </a:r>
+              <a:t>order.pay()        # yes</a:t>
+            </a:r>
+            <a:endParaRPr/>
+          </a:p>
+          <a:p>
+            <a:pPr>
+              <a:lnSpc>
+                <a:spcPct val="140000"/>
+              </a:lnSpc>
+            </a:pPr>
             <a:r>
               <a:rPr sz="900">
                 <a:solidFill>
-                  <a:srgbClr val="D73A49"/>
+                  <a:srgbClr val="E5E7EB"/>
                 </a:solidFill>
                 <a:latin typeface="Menlo"/>
                 <a:ea typeface="Menlo"/>
               </a:rPr>
-              <a:t>=</a:t>
-            </a:r>
-            <a:r>
-              <a:rPr sz="900">
-                <a:solidFill>
-                  <a:srgbClr val="24292E"/>
-                </a:solidFill>
-                <a:latin typeface="Menlo"/>
-                <a:ea typeface="Menlo"/>
-              </a:rPr>
-              <a:t> </a:t>
-            </a:r>
-            <a:r>
-              <a:rPr sz="900">
-                <a:solidFill>
-                  <a:srgbClr val="D73A49"/>
-                </a:solidFill>
-                <a:latin typeface="Menlo"/>
-                <a:ea typeface="Menlo"/>
-              </a:rPr>
-              <a:t>new</a:t>
-            </a:r>
-            <a:r>
-              <a:rPr sz="900">
-                <a:solidFill>
-                  <a:srgbClr val="24292E"/>
-                </a:solidFill>
-                <a:latin typeface="Menlo"/>
-                <a:ea typeface="Menlo"/>
-              </a:rPr>
-              <a:t> </a:t>
-            </a:r>
-            <a:r>
-              <a:rPr sz="900">
-                <a:solidFill>
-                  <a:srgbClr val="6F42C1"/>
-                </a:solidFill>
-                <a:latin typeface="Menlo"/>
-                <a:ea typeface="Menlo"/>
-              </a:rPr>
-              <a:t>ArrayList</a:t>
-            </a:r>
-            <a:r>
-              <a:rPr sz="900">
-                <a:solidFill>
-                  <a:srgbClr val="24292E"/>
-                </a:solidFill>
-                <a:latin typeface="Menlo"/>
-                <a:ea typeface="Menlo"/>
-              </a:rPr>
-              <a:t>();</a:t>
-            </a:r>
-            <a:endParaRPr/>
-          </a:p>
-          <a:p>
-            <a:pPr>
-              <a:lnSpc>
-                <a:spcPct val="140000"/>
-              </a:lnSpc>
-            </a:pPr>
-            <a:r>
-              <a:rPr sz="900">
-                <a:solidFill>
-                  <a:srgbClr val="24292E"/>
-                </a:solidFill>
-                <a:latin typeface="Menlo"/>
-                <a:ea typeface="Menlo"/>
-              </a:rPr>
-              <a:t>    </a:t>
-            </a:r>
-            <a:r>
-              <a:rPr sz="900">
-                <a:solidFill>
-                  <a:srgbClr val="D73A49"/>
-                </a:solidFill>
-                <a:latin typeface="Menlo"/>
-                <a:ea typeface="Menlo"/>
-              </a:rPr>
-              <a:t>private</a:t>
-            </a:r>
-            <a:r>
-              <a:rPr sz="900">
-                <a:solidFill>
-                  <a:srgbClr val="24292E"/>
-                </a:solidFill>
-                <a:latin typeface="Menlo"/>
-                <a:ea typeface="Menlo"/>
-              </a:rPr>
-              <a:t> PaymentMethod payment;</a:t>
-            </a:r>
-            <a:endParaRPr/>
-          </a:p>
-          <a:p>
-            <a:pPr>
-              <a:lnSpc>
-                <a:spcPct val="140000"/>
-              </a:lnSpc>
-            </a:pPr>
-            <a:r>
-              <a:rPr sz="900">
-                <a:solidFill>
-                  <a:srgbClr val="24292E"/>
-                </a:solidFill>
-                <a:latin typeface="Menlo"/>
-                <a:ea typeface="Menlo"/>
-              </a:rPr>
-              <a:t>    </a:t>
-            </a:r>
-            <a:r>
-              <a:rPr sz="900">
-                <a:solidFill>
-                  <a:srgbClr val="D73A49"/>
-                </a:solidFill>
-                <a:latin typeface="Menlo"/>
-                <a:ea typeface="Menlo"/>
-              </a:rPr>
-              <a:t>private</a:t>
-            </a:r>
-            <a:r>
-              <a:rPr sz="900">
-                <a:solidFill>
-                  <a:srgbClr val="24292E"/>
-                </a:solidFill>
-                <a:latin typeface="Menlo"/>
-                <a:ea typeface="Menlo"/>
-              </a:rPr>
-              <a:t> DeliveryRoute route;</a:t>
-            </a:r>
-            <a:endParaRPr/>
-          </a:p>
-          <a:p>
-            <a:pPr>
-              <a:lnSpc>
-                <a:spcPct val="140000"/>
-              </a:lnSpc>
-            </a:pPr>
-            <a:r>
-              <a:rPr sz="900">
-                <a:solidFill>
-                  <a:srgbClr val="E5E7EB"/>
-                </a:solidFill>
-                <a:latin typeface="Menlo"/>
-                <a:ea typeface="Menlo"/>
-              </a:rPr>
-              <a:t> </a:t>
-            </a:r>
-            <a:endParaRPr/>
-          </a:p>
-          <a:p>
-            <a:pPr>
-              <a:lnSpc>
-                <a:spcPct val="140000"/>
-              </a:lnSpc>
-            </a:pPr>
-            <a:r>
-              <a:rPr sz="900">
-                <a:solidFill>
-                  <a:srgbClr val="24292E"/>
-                </a:solidFill>
-                <a:latin typeface="Menlo"/>
-                <a:ea typeface="Menlo"/>
-              </a:rPr>
-              <a:t>    </a:t>
-            </a:r>
-            <a:r>
-              <a:rPr sz="900">
-                <a:solidFill>
-                  <a:srgbClr val="D73A49"/>
-                </a:solidFill>
-                <a:latin typeface="Menlo"/>
-                <a:ea typeface="Menlo"/>
-              </a:rPr>
-              <a:t>public</a:t>
-            </a:r>
-            <a:r>
-              <a:rPr sz="900">
-                <a:solidFill>
-                  <a:srgbClr val="24292E"/>
-                </a:solidFill>
-                <a:latin typeface="Menlo"/>
-                <a:ea typeface="Menlo"/>
-              </a:rPr>
-              <a:t> Money </a:t>
-            </a:r>
-            <a:r>
-              <a:rPr sz="900">
-                <a:solidFill>
-                  <a:srgbClr val="6F42C1"/>
-                </a:solidFill>
-                <a:latin typeface="Menlo"/>
-                <a:ea typeface="Menlo"/>
-              </a:rPr>
-              <a:t>total</a:t>
-            </a:r>
-            <a:r>
-              <a:rPr sz="900">
-                <a:solidFill>
-                  <a:srgbClr val="24292E"/>
-                </a:solidFill>
-                <a:latin typeface="Menlo"/>
-                <a:ea typeface="Menlo"/>
-              </a:rPr>
-              <a:t>() { ... }</a:t>
-            </a:r>
-            <a:endParaRPr/>
-          </a:p>
-          <a:p>
-            <a:pPr>
-              <a:lnSpc>
-                <a:spcPct val="140000"/>
-              </a:lnSpc>
-            </a:pPr>
-            <a:r>
-              <a:rPr sz="900">
-                <a:solidFill>
-                  <a:srgbClr val="24292E"/>
-                </a:solidFill>
-                <a:latin typeface="Menlo"/>
-                <a:ea typeface="Menlo"/>
-              </a:rPr>
-              <a:t>    </a:t>
-            </a:r>
-            <a:r>
-              <a:rPr sz="900">
-                <a:solidFill>
-                  <a:srgbClr val="D73A49"/>
-                </a:solidFill>
-                <a:latin typeface="Menlo"/>
-                <a:ea typeface="Menlo"/>
-              </a:rPr>
-              <a:t>public</a:t>
-            </a:r>
-            <a:r>
-              <a:rPr sz="900">
-                <a:solidFill>
-                  <a:srgbClr val="24292E"/>
-                </a:solidFill>
-                <a:latin typeface="Menlo"/>
-                <a:ea typeface="Menlo"/>
-              </a:rPr>
-              <a:t> Receipt </a:t>
-            </a:r>
-            <a:r>
-              <a:rPr sz="900">
-                <a:solidFill>
-                  <a:srgbClr val="6F42C1"/>
-                </a:solidFill>
-                <a:latin typeface="Menlo"/>
-                <a:ea typeface="Menlo"/>
-              </a:rPr>
-              <a:t>pay</a:t>
-            </a:r>
-            <a:r>
-              <a:rPr sz="900">
-                <a:solidFill>
-                  <a:srgbClr val="24292E"/>
-                </a:solidFill>
-                <a:latin typeface="Menlo"/>
-                <a:ea typeface="Menlo"/>
-              </a:rPr>
-              <a:t>() {</a:t>
-            </a:r>
-            <a:endParaRPr/>
-          </a:p>
-          <a:p>
-            <a:pPr>
-              <a:lnSpc>
-                <a:spcPct val="140000"/>
-              </a:lnSpc>
-            </a:pPr>
-            <a:r>
-              <a:rPr sz="900">
-                <a:solidFill>
-                  <a:srgbClr val="24292E"/>
-                </a:solidFill>
-                <a:latin typeface="Menlo"/>
-                <a:ea typeface="Menlo"/>
-              </a:rPr>
-              <a:t>        </a:t>
-            </a:r>
-            <a:r>
-              <a:rPr sz="900">
-                <a:solidFill>
-                  <a:srgbClr val="D73A49"/>
-                </a:solidFill>
-                <a:latin typeface="Menlo"/>
-                <a:ea typeface="Menlo"/>
-              </a:rPr>
-              <a:t>return</a:t>
-            </a:r>
-            <a:r>
-              <a:rPr sz="900">
-                <a:solidFill>
-                  <a:srgbClr val="24292E"/>
-                </a:solidFill>
-                <a:latin typeface="Menlo"/>
-                <a:ea typeface="Menlo"/>
-              </a:rPr>
-              <a:t> payment.</a:t>
-            </a:r>
-            <a:r>
-              <a:rPr sz="900">
-                <a:solidFill>
-                  <a:srgbClr val="6F42C1"/>
-                </a:solidFill>
-                <a:latin typeface="Menlo"/>
-                <a:ea typeface="Menlo"/>
-              </a:rPr>
-              <a:t>pay</a:t>
-            </a:r>
-            <a:r>
-              <a:rPr sz="900">
-                <a:solidFill>
-                  <a:srgbClr val="24292E"/>
-                </a:solidFill>
-                <a:latin typeface="Menlo"/>
-                <a:ea typeface="Menlo"/>
-              </a:rPr>
-              <a:t>(</a:t>
-            </a:r>
-            <a:r>
-              <a:rPr sz="900">
-                <a:solidFill>
-                  <a:srgbClr val="6F42C1"/>
-                </a:solidFill>
-                <a:latin typeface="Menlo"/>
-                <a:ea typeface="Menlo"/>
-              </a:rPr>
-              <a:t>total</a:t>
-            </a:r>
-            <a:r>
-              <a:rPr sz="900">
-                <a:solidFill>
-                  <a:srgbClr val="24292E"/>
-                </a:solidFill>
-                <a:latin typeface="Menlo"/>
-                <a:ea typeface="Menlo"/>
-              </a:rPr>
-              <a:t>());</a:t>
-            </a:r>
-            <a:endParaRPr/>
-          </a:p>
-          <a:p>
-            <a:pPr>
-              <a:lnSpc>
-                <a:spcPct val="140000"/>
-              </a:lnSpc>
-            </a:pPr>
-            <a:r>
-              <a:rPr sz="900">
-                <a:solidFill>
-                  <a:srgbClr val="24292E"/>
-                </a:solidFill>
-                <a:latin typeface="Menlo"/>
-                <a:ea typeface="Menlo"/>
-              </a:rPr>
-              <a:t>    }</a:t>
-            </a:r>
-            <a:endParaRPr/>
-          </a:p>
-          <a:p>
-            <a:pPr>
-              <a:lnSpc>
-                <a:spcPct val="140000"/>
-              </a:lnSpc>
-            </a:pPr>
-            <a:r>
-              <a:rPr sz="900">
-                <a:solidFill>
-                  <a:srgbClr val="24292E"/>
-                </a:solidFill>
-                <a:latin typeface="Menlo"/>
-                <a:ea typeface="Menlo"/>
-              </a:rPr>
-              <a:t>}</a:t>
-            </a:r>
-            <a:endParaRPr/>
-          </a:p>
-          <a:p>
-            <a:pPr>
-              <a:lnSpc>
-                <a:spcPct val="140000"/>
-              </a:lnSpc>
-            </a:pPr>
-            <a:r>
-              <a:rPr sz="900">
-                <a:solidFill>
-                  <a:srgbClr val="E5E7EB"/>
-                </a:solidFill>
-                <a:latin typeface="Menlo"/>
-                <a:ea typeface="Menlo"/>
-              </a:rPr>
-              <a:t> </a:t>
-            </a:r>
-            <a:endParaRPr/>
-          </a:p>
-          <a:p>
-            <a:pPr>
-              <a:lnSpc>
-                <a:spcPct val="140000"/>
-              </a:lnSpc>
-            </a:pPr>
-            <a:r>
-              <a:rPr sz="900">
-                <a:solidFill>
-                  <a:srgbClr val="6A737D"/>
-                </a:solidFill>
-                <a:latin typeface="Menlo"/>
-                <a:ea typeface="Menlo"/>
-              </a:rPr>
-              <a:t>// Order exposes only what an order does</a:t>
-            </a:r>
-            <a:endParaRPr/>
-          </a:p>
-          <a:p>
-            <a:pPr>
-              <a:lnSpc>
-                <a:spcPct val="140000"/>
-              </a:lnSpc>
-            </a:pPr>
-            <a:r>
-              <a:rPr sz="900">
-                <a:solidFill>
-                  <a:srgbClr val="24292E"/>
-                </a:solidFill>
-                <a:latin typeface="Menlo"/>
-                <a:ea typeface="Menlo"/>
-              </a:rPr>
-              <a:t>order.</a:t>
-            </a:r>
-            <a:r>
-              <a:rPr sz="900">
-                <a:solidFill>
-                  <a:srgbClr val="6F42C1"/>
-                </a:solidFill>
-                <a:latin typeface="Menlo"/>
-                <a:ea typeface="Menlo"/>
-              </a:rPr>
-              <a:t>pay</a:t>
-            </a:r>
-            <a:r>
-              <a:rPr sz="900">
-                <a:solidFill>
-                  <a:srgbClr val="24292E"/>
-                </a:solidFill>
-                <a:latin typeface="Menlo"/>
-                <a:ea typeface="Menlo"/>
-              </a:rPr>
-              <a:t>();        </a:t>
-            </a:r>
-            <a:r>
-              <a:rPr sz="900">
-                <a:solidFill>
-                  <a:srgbClr val="6A737D"/>
-                </a:solidFill>
-                <a:latin typeface="Menlo"/>
-                <a:ea typeface="Menlo"/>
-              </a:rPr>
-              <a:t>// yes</a:t>
-            </a:r>
-            <a:endParaRPr/>
-          </a:p>
-          <a:p>
-            <a:pPr>
-              <a:lnSpc>
-                <a:spcPct val="140000"/>
-              </a:lnSpc>
-            </a:pPr>
-            <a:r>
-              <a:rPr sz="900">
-                <a:solidFill>
-                  <a:srgbClr val="24292E"/>
-                </a:solidFill>
-                <a:latin typeface="Menlo"/>
-                <a:ea typeface="Menlo"/>
-              </a:rPr>
-              <a:t>order.</a:t>
-            </a:r>
-            <a:r>
-              <a:rPr sz="900">
-                <a:solidFill>
-                  <a:srgbClr val="6F42C1"/>
-                </a:solidFill>
-                <a:latin typeface="Menlo"/>
-                <a:ea typeface="Menlo"/>
-              </a:rPr>
-              <a:t>clear</a:t>
-            </a:r>
-            <a:r>
-              <a:rPr sz="900">
-                <a:solidFill>
-                  <a:srgbClr val="24292E"/>
-                </a:solidFill>
-                <a:latin typeface="Menlo"/>
-                <a:ea typeface="Menlo"/>
-              </a:rPr>
-              <a:t>();      </a:t>
-            </a:r>
-            <a:r>
-              <a:rPr sz="900">
-                <a:solidFill>
-                  <a:srgbClr val="6A737D"/>
-                </a:solidFill>
-                <a:latin typeface="Menlo"/>
-                <a:ea typeface="Menlo"/>
-              </a:rPr>
-              <a:t>// no such method</a:t>
+              <a:t>order.clear()      # no such operation</a:t>
             </a:r>
             <a:endParaRPr/>
           </a:p>
@@ -16507,7 +14029,7 @@
   <p:cSld>
     <p:spTree>
       <p:nvGrpSpPr>
-        <p:cNvPr id="390" name="" descr="&lt;Slide style={{ background: '#FFFFFF', padding: 0 }}&gt;&#10;  &lt;Box style={{ padding: '22px 40px 6px 40px', flexDirection: 'row', alignItems: 'center', justifyContent: 'space-between' }}&gt;&#10;    &lt;Text style={{ fontSize: 33, fontWeight: 'bold', color: '#0E3F8C' }}&gt;PaymentMethod — Polymorphism in Java&lt;/Text&gt;&#10;    &lt;Text style={{ fontSize: 14, color: '#1E4FA8', fontWeight: 'bold' }}&gt;25 / 38&lt;/Text&gt;&#10;  &lt;/Box&gt;&#10;  &lt;Box style={{ flex: 1, padding: '10px 40px 0 40px', flexDirection: 'row', gap: 26 }}&gt;&#10;    &lt;Box style={{ flex: 3, justifyContent: 'center' }}&gt;&#10;      &lt;CodeBlock code={`public interface PaymentMethod {&#10;    Receipt pay(Money amount);&#10;}&#10;&#10;public class CampusCard implements PaymentMethod {&#10;    public Receipt pay(Money amount) {&#10;        return cardTerminal.deduct(amount);&#10;    }&#10;}&#10;&#10;public class Wallet implements PaymentMethod {&#10;    public Receipt pay(Money amount) {&#10;        return balance.debit(amount);&#10;    }&#10;}&#10;&#10;public class Cash implements PaymentMethod {&#10;    public Receipt pay(Money amount) {&#10;        return Receipt.payOnDelivery(amount);&#10;    }&#10;}&#10;&#10;// the call site — one stable line&#10;Receipt r = method.pay(order.total());`} language='java' width={580} fontSize={11} /&gt;&#10;    &lt;/Box&gt;&#10;    &lt;Box style={{ flex: 2, flexDirection: 'column', gap: 12, justifyContent: 'center' }}&gt;&#10;      &lt;Box style={{ padding: '20px 22px', background: '#0E3F8C', borderRadius: 12, flexDirection: 'column', gap: 12 }}&gt;&#10;        &lt;Text style={{ fontSize: 16, color: '#7FA2D6', letterSpacing: 1 }}&gt;THE ONE LINE THAT MATTERS&lt;/Text&gt;&#10;        &lt;Text style={{ fontSize: 17, color: '#FFFFFF', lineHeight: 1.4, fontWeight: 'bold' }}&gt;method.pay(order.total())&lt;/Text&gt;&#10;        &lt;Box style={{ width: 44, height: 4, background: '#FFC107' }} /&gt;&#10;        &lt;Text style={{ fontSize: 15, color: '#C5D4EA', lineHeight: 1.5 }}&gt;It does not say which payment type. It does not need to. Adding a fourth method changes nothing here.&lt;/Text&gt;&#10;      &lt;/Box&gt;&#10;      &lt;Box style={{ padding: '14px 17px', background: '#F0F5FC', borderRadius: 10, border: '1px solid #3D7BD9' }}&gt;&#10;        &lt;Text style={{ fontSize: 15, color: '#4A5568', lineHeight: 1.5 }}&gt;&lt;Text style={{ fontWeight: 'bold', color: '#0E3F8C' }}&gt;The interface is the contract.&lt;/Text&gt; Each class decides how to honour it.&lt;/Text&gt;&#10;      &lt;/Box&gt;&#10;      &lt;Box style={{ padding: '14px 17px', background: '#FDF3F3', borderRadius: 10, borderLeft: '4px solid #D9534F' }}&gt;&#10;        &lt;Text style={{ fontSize: 15, color: '#4A5568', lineHeight: 1.5 }}&gt;No &lt;Text style={{ fontWeight: 'bold', color: '#D9534F' }}&gt;if&lt;/Text&gt; and no &lt;Text style={{ fontWeight: 'bold', color: '#D9534F' }}&gt;switch&lt;/Text&gt; anywhere in Order.&lt;/Text&gt;&#10;      &lt;/Box&gt;&#10;    &lt;/Box&gt;&#10;  &lt;/Box&gt;&#10;  &lt;Box style={{ height: 44, background: '#0E3F8C', padding: '0 40px', flexDirection: 'row', alignItems: 'center', justifyContent: 'center' }}&gt;&#10;    &lt;Text style={{ fontSize: 17, color: '#FFFFFF', fontWeight: '600' }}&gt;CampusBites uses this exact shape. Your M1 models will too.&lt;/Text&gt;&#10;  &lt;/Box&gt;&#10;&lt;/Slide&gt;"/>
+        <p:cNvPr id="390" name="" descr="&lt;Slide style={{ background: '#FFFFFF', padding: 0 }}&gt;&#10;  &lt;Box style={{ padding: '22px 40px 6px 40px', flexDirection: 'row', alignItems: 'center', justifyContent: 'space-between' }}&gt;&#10;    &lt;Text style={{ fontSize: 33, fontWeight: 'bold', color: '#0E3F8C' }}&gt;PaymentMethod — Polymorphism in Java&lt;/Text&gt;&#10;    &lt;Text style={{ fontSize: 14, color: '#1E4FA8', fontWeight: 'bold' }}&gt;25 / 38&lt;/Text&gt;&#10;  &lt;/Box&gt;&#10;  &lt;Box style={{ flex: 1, padding: '10px 40px 0 40px', flexDirection: 'row', gap: 26 }}&gt;&#10;    &lt;Box style={{ flex: 3, justifyContent: 'center' }}&gt;&#10;      &lt;CodeBlock code={`PaymentMethod (interface)&#10;    + pay(amount) : Receipt&#10;&#10;Class CampusCard implements PaymentMethod&#10;    + pay(amount) : Receipt&#10;        return cardTerminal.deduct(amount)&#10;&#10;Class Wallet implements PaymentMethod&#10;    + pay(amount) : Receipt&#10;        return balance.debit(amount)&#10;&#10;Class Cash implements PaymentMethod&#10;    + pay(amount) : Receipt&#10;        return Receipt.payOnDelivery(amount)&#10;&#10;# the call site - one stable line&#10;r = method.pay(order.total())`} language='text' width={580} fontSize={11} /&gt;&#10;    &lt;/Box&gt;&#10;    &lt;Box style={{ flex: 2, flexDirection: 'column', gap: 12, justifyContent: 'center' }}&gt;&#10;      &lt;Box style={{ padding: '20px 22px', background: '#0E3F8C', borderRadius: 12, flexDirection: 'column', gap: 12 }}&gt;&#10;        &lt;Text style={{ fontSize: 16, color: '#7FA2D6', letterSpacing: 1 }}&gt;THE ONE LINE THAT MATTERS&lt;/Text&gt;&#10;        &lt;Text style={{ fontSize: 17, color: '#FFFFFF', lineHeight: 1.4, fontWeight: 'bold' }}&gt;method.pay(order.total())&lt;/Text&gt;&#10;        &lt;Box style={{ width: 44, height: 4, background: '#FFC107' }} /&gt;&#10;        &lt;Text style={{ fontSize: 15, color: '#C5D4EA', lineHeight: 1.5 }}&gt;It does not say which payment type. It does not need to. Adding a fourth method changes nothing here.&lt;/Text&gt;&#10;      &lt;/Box&gt;&#10;      &lt;Box style={{ padding: '14px 17px', background: '#F0F5FC', borderRadius: 10, border: '1px solid #3D7BD9' }}&gt;&#10;        &lt;Text style={{ fontSize: 15, color: '#4A5568', lineHeight: 1.5 }}&gt;&lt;Text style={{ fontWeight: 'bold', color: '#0E3F8C' }}&gt;The interface is the contract.&lt;/Text&gt; Each class decides how to honour it.&lt;/Text&gt;&#10;      &lt;/Box&gt;&#10;      &lt;Box style={{ padding: '14px 17px', background: '#FDF3F3', borderRadius: 10, borderLeft: '4px solid #D9534F' }}&gt;&#10;        &lt;Text style={{ fontSize: 15, color: '#4A5568', lineHeight: 1.5 }}&gt;No &lt;Text style={{ fontWeight: 'bold', color: '#D9534F' }}&gt;if&lt;/Text&gt; and no &lt;Text style={{ fontWeight: 'bold', color: '#D9534F' }}&gt;switch&lt;/Text&gt; anywhere in Order.&lt;/Text&gt;&#10;      &lt;/Box&gt;&#10;    &lt;/Box&gt;&#10;  &lt;/Box&gt;&#10;  &lt;Box style={{ height: 44, background: '#0E3F8C', padding: '0 40px', flexDirection: 'row', alignItems: 'center', justifyContent: 'center' }}&gt;&#10;    &lt;Text style={{ fontSize: 17, color: '#FFFFFF', fontWeight: '600' }}&gt;CampusBites uses this exact shape. Your M1 models will too.&lt;/Text&gt;&#10;  &lt;/Box&gt;&#10;&lt;/Slide&gt;"/>
         <p:cNvGrpSpPr/>
         <p:nvPr/>
       </p:nvGrpSpPr>
@@ -17073,12 +14595,12 @@
         </p:nvSpPr>
         <p:spPr>
           <a:xfrm rot="0" flipH="0" flipV="0">
-            <a:off x="381000" y="1343025"/>
-            <a:ext cx="6705600" cy="4495800"/>
+            <a:off x="381000" y="1962150"/>
+            <a:ext cx="6705600" cy="3267075"/>
           </a:xfrm>
           <a:prstGeom prst="roundRect">
             <a:avLst>
-              <a:gd name="adj" fmla="val 1695"/>
+              <a:gd name="adj" fmla="val 2332"/>
             </a:avLst>
           </a:prstGeom>
           <a:solidFill>
@@ -17099,8 +14621,8 @@
         </p:nvSpPr>
         <p:spPr>
           <a:xfrm rot="0" flipH="0" flipV="0">
-            <a:off x="533400" y="1476375"/>
-            <a:ext cx="6400800" cy="4229100"/>
+            <a:off x="533400" y="2095500"/>
+            <a:ext cx="6400800" cy="3000375"/>
           </a:xfrm>
           <a:prstGeom prst="rect"/>
         </p:spPr>
@@ -17117,62 +14639,118 @@
             <a:r>
               <a:rPr sz="825">
                 <a:solidFill>
-                  <a:srgbClr val="D73A49"/>
+                  <a:srgbClr val="E5E7EB"/>
                 </a:solidFill>
                 <a:latin typeface="Menlo"/>
                 <a:ea typeface="Menlo"/>
               </a:rPr>
-              <a:t>public</a:t>
-            </a:r>
+              <a:t>PaymentMethod (interface)</a:t>
+            </a:r>
+            <a:endParaRPr/>
+          </a:p>
+          <a:p>
+            <a:pPr>
+              <a:lnSpc>
+                <a:spcPct val="140000"/>
+              </a:lnSpc>
+            </a:pPr>
             <a:r>
               <a:rPr sz="825">
                 <a:solidFill>
-                  <a:srgbClr val="24292E"/>
+                  <a:srgbClr val="E5E7EB"/>
                 </a:solidFill>
                 <a:latin typeface="Menlo"/>
                 <a:ea typeface="Menlo"/>
               </a:rPr>
-              <a:t> </a:t>
-            </a:r>
+              <a:t>    + pay(amount) : Receipt</a:t>
+            </a:r>
+            <a:endParaRPr/>
+          </a:p>
+          <a:p>
+            <a:pPr>
+              <a:lnSpc>
+                <a:spcPct val="140000"/>
+              </a:lnSpc>
+            </a:pPr>
+            <a:endParaRPr/>
+          </a:p>
+          <a:p>
+            <a:pPr>
+              <a:lnSpc>
+                <a:spcPct val="140000"/>
+              </a:lnSpc>
+            </a:pPr>
             <a:r>
               <a:rPr sz="825">
                 <a:solidFill>
-                  <a:srgbClr val="D73A49"/>
+                  <a:srgbClr val="E5E7EB"/>
                 </a:solidFill>
                 <a:latin typeface="Menlo"/>
                 <a:ea typeface="Menlo"/>
               </a:rPr>
-              <a:t>interface</a:t>
-            </a:r>
+              <a:t>Class CampusCard implements PaymentMethod</a:t>
+            </a:r>
+            <a:endParaRPr/>
+          </a:p>
+          <a:p>
+            <a:pPr>
+              <a:lnSpc>
+                <a:spcPct val="140000"/>
+              </a:lnSpc>
+            </a:pPr>
             <a:r>
               <a:rPr sz="825">
                 <a:solidFill>
-                  <a:srgbClr val="24292E"/>
+                  <a:srgbClr val="E5E7EB"/>
                 </a:solidFill>
                 <a:latin typeface="Menlo"/>
                 <a:ea typeface="Menlo"/>
               </a:rPr>
-              <a:t> </a:t>
-            </a:r>
+              <a:t>    + pay(amount) : Receipt</a:t>
+            </a:r>
+            <a:endParaRPr/>
+          </a:p>
+          <a:p>
+            <a:pPr>
+              <a:lnSpc>
+                <a:spcPct val="140000"/>
+              </a:lnSpc>
+            </a:pPr>
             <a:r>
               <a:rPr sz="825">
                 <a:solidFill>
-                  <a:srgbClr val="6F42C1"/>
+                  <a:srgbClr val="E5E7EB"/>
                 </a:solidFill>
                 <a:latin typeface="Menlo"/>
                 <a:ea typeface="Menlo"/>
               </a:rPr>
-              <a:t>PaymentMethod</a:t>
-            </a:r>
+              <a:t>        return cardTerminal.deduct(amount)</a:t>
+            </a:r>
+            <a:endParaRPr/>
+          </a:p>
+          <a:p>
+            <a:pPr>
+              <a:lnSpc>
+                <a:spcPct val="140000"/>
+              </a:lnSpc>
+            </a:pPr>
+            <a:endParaRPr/>
+          </a:p>
+          <a:p>
+            <a:pPr>
+              <a:lnSpc>
+                <a:spcPct val="140000"/>
+              </a:lnSpc>
+            </a:pPr>
             <a:r>
               <a:rPr sz="825">
                 <a:solidFill>
-                  <a:srgbClr val="24292E"/>
+                  <a:srgbClr val="E5E7EB"/>
                 </a:solidFill>
                 <a:latin typeface="Menlo"/>
                 <a:ea typeface="Menlo"/>
               </a:rPr>
-              <a:t> {</a:t>
+              <a:t>Class Wallet implements PaymentMethod</a:t>
             </a:r>
             <a:endParaRPr/>
           </a:p>
@@ -17185,52 +14763,92 @@
             <a:r>
               <a:rPr sz="825">
                 <a:solidFill>
-                  <a:srgbClr val="24292E"/>
+                  <a:srgbClr val="E5E7EB"/>
                 </a:solidFill>
                 <a:latin typeface="Menlo"/>
                 <a:ea typeface="Menlo"/>
               </a:rPr>
-              <a:t>    Receipt </a:t>
-            </a:r>
+              <a:t>    + pay(amount) : Receipt</a:t>
+            </a:r>
+            <a:endParaRPr/>
+          </a:p>
+          <a:p>
+            <a:pPr>
+              <a:lnSpc>
+                <a:spcPct val="140000"/>
+              </a:lnSpc>
+            </a:pPr>
             <a:r>
               <a:rPr sz="825">
                 <a:solidFill>
-                  <a:srgbClr val="6F42C1"/>
+                  <a:srgbClr val="E5E7EB"/>
                 </a:solidFill>
                 <a:latin typeface="Menlo"/>
                 <a:ea typeface="Menlo"/>
               </a:rPr>
-              <a:t>pay</a:t>
-            </a:r>
+              <a:t>        return balance.debit(amount)</a:t>
+            </a:r>
+            <a:endParaRPr/>
+          </a:p>
+          <a:p>
+            <a:pPr>
+              <a:lnSpc>
+                <a:spcPct val="140000"/>
+              </a:lnSpc>
+            </a:pPr>
+            <a:endParaRPr/>
+          </a:p>
+          <a:p>
+            <a:pPr>
+              <a:lnSpc>
+                <a:spcPct val="140000"/>
+              </a:lnSpc>
+            </a:pPr>
             <a:r>
               <a:rPr sz="825">
                 <a:solidFill>
-                  <a:srgbClr val="24292E"/>
+                  <a:srgbClr val="E5E7EB"/>
                 </a:solidFill>
                 <a:latin typeface="Menlo"/>
                 <a:ea typeface="Menlo"/>
               </a:rPr>
-              <a:t>(Money </a:t>
-            </a:r>
+              <a:t>Class Cash implements PaymentMethod</a:t>
+            </a:r>
+            <a:endParaRPr/>
+          </a:p>
+          <a:p>
+            <a:pPr>
+              <a:lnSpc>
+                <a:spcPct val="140000"/>
+              </a:lnSpc>
+            </a:pPr>
             <a:r>
               <a:rPr sz="825">
                 <a:solidFill>
-                  <a:srgbClr val="E36209"/>
+                  <a:srgbClr val="E5E7EB"/>
                 </a:solidFill>
                 <a:latin typeface="Menlo"/>
                 <a:ea typeface="Menlo"/>
               </a:rPr>
-              <a:t>amount</a:t>
-            </a:r>
+              <a:t>    + pay(amount) : Receipt</a:t>
+            </a:r>
+            <a:endParaRPr/>
+          </a:p>
+          <a:p>
+            <a:pPr>
+              <a:lnSpc>
+                <a:spcPct val="140000"/>
+              </a:lnSpc>
+            </a:pPr>
             <a:r>
               <a:rPr sz="825">
                 <a:solidFill>
-                  <a:srgbClr val="24292E"/>
+                  <a:srgbClr val="E5E7EB"/>
                 </a:solidFill>
                 <a:latin typeface="Menlo"/>
                 <a:ea typeface="Menlo"/>
               </a:rPr>
-              <a:t>);</a:t>
+              <a:t>        return Receipt.payOnDelivery(amount)</a:t>
             </a:r>
             <a:endParaRPr/>
           </a:p>
@@ -17240,15 +14858,23 @@
                 <a:spcPct val="140000"/>
               </a:lnSpc>
             </a:pPr>
+            <a:endParaRPr/>
+          </a:p>
+          <a:p>
+            <a:pPr>
+              <a:lnSpc>
+                <a:spcPct val="140000"/>
+              </a:lnSpc>
+            </a:pPr>
             <a:r>
               <a:rPr sz="825">
                 <a:solidFill>
-                  <a:srgbClr val="24292E"/>
+                  <a:srgbClr val="E5E7EB"/>
                 </a:solidFill>
                 <a:latin typeface="Menlo"/>
                 <a:ea typeface="Menlo"/>
               </a:rPr>
-              <a:t>}</a:t>
+              <a:t># the call site - one stable line</a:t>
             </a:r>
             <a:endParaRPr/>
           </a:p>
@@ -17266,997 +14892,7 @@
                 <a:latin typeface="Menlo"/>
                 <a:ea typeface="Menlo"/>
               </a:rPr>
-              <a:t> </a:t>
-            </a:r>
-            <a:endParaRPr/>
-          </a:p>
-          <a:p>
-            <a:pPr>
-              <a:lnSpc>
-                <a:spcPct val="140000"/>
-              </a:lnSpc>
-            </a:pPr>
-            <a:r>
-              <a:rPr sz="825">
-                <a:solidFill>
-                  <a:srgbClr val="D73A49"/>
-                </a:solidFill>
-                <a:latin typeface="Menlo"/>
-                <a:ea typeface="Menlo"/>
-              </a:rPr>
-              <a:t>public</a:t>
-            </a:r>
-            <a:r>
-              <a:rPr sz="825">
-                <a:solidFill>
-                  <a:srgbClr val="24292E"/>
-                </a:solidFill>
-                <a:latin typeface="Menlo"/>
-                <a:ea typeface="Menlo"/>
-              </a:rPr>
-              <a:t> </a:t>
-            </a:r>
-            <a:r>
-              <a:rPr sz="825">
-                <a:solidFill>
-                  <a:srgbClr val="D73A49"/>
-                </a:solidFill>
-                <a:latin typeface="Menlo"/>
-                <a:ea typeface="Menlo"/>
-              </a:rPr>
-              <a:t>class</a:t>
-            </a:r>
-            <a:r>
-              <a:rPr sz="825">
-                <a:solidFill>
-                  <a:srgbClr val="24292E"/>
-                </a:solidFill>
-                <a:latin typeface="Menlo"/>
-                <a:ea typeface="Menlo"/>
-              </a:rPr>
-              <a:t> </a:t>
-            </a:r>
-            <a:r>
-              <a:rPr sz="825">
-                <a:solidFill>
-                  <a:srgbClr val="6F42C1"/>
-                </a:solidFill>
-                <a:latin typeface="Menlo"/>
-                <a:ea typeface="Menlo"/>
-              </a:rPr>
-              <a:t>CampusCard</a:t>
-            </a:r>
-            <a:r>
-              <a:rPr sz="825">
-                <a:solidFill>
-                  <a:srgbClr val="24292E"/>
-                </a:solidFill>
-                <a:latin typeface="Menlo"/>
-                <a:ea typeface="Menlo"/>
-              </a:rPr>
-              <a:t> </a:t>
-            </a:r>
-            <a:r>
-              <a:rPr sz="825">
-                <a:solidFill>
-                  <a:srgbClr val="D73A49"/>
-                </a:solidFill>
-                <a:latin typeface="Menlo"/>
-                <a:ea typeface="Menlo"/>
-              </a:rPr>
-              <a:t>implements</a:t>
-            </a:r>
-            <a:r>
-              <a:rPr sz="825">
-                <a:solidFill>
-                  <a:srgbClr val="24292E"/>
-                </a:solidFill>
-                <a:latin typeface="Menlo"/>
-                <a:ea typeface="Menlo"/>
-              </a:rPr>
-              <a:t> </a:t>
-            </a:r>
-            <a:r>
-              <a:rPr sz="825">
-                <a:solidFill>
-                  <a:srgbClr val="6F42C1"/>
-                </a:solidFill>
-                <a:latin typeface="Menlo"/>
-                <a:ea typeface="Menlo"/>
-              </a:rPr>
-              <a:t>PaymentMethod</a:t>
-            </a:r>
-            <a:r>
-              <a:rPr sz="825">
-                <a:solidFill>
-                  <a:srgbClr val="24292E"/>
-                </a:solidFill>
-                <a:latin typeface="Menlo"/>
-                <a:ea typeface="Menlo"/>
-              </a:rPr>
-              <a:t> {</a:t>
-            </a:r>
-            <a:endParaRPr/>
-          </a:p>
-          <a:p>
-            <a:pPr>
-              <a:lnSpc>
-                <a:spcPct val="140000"/>
-              </a:lnSpc>
-            </a:pPr>
-            <a:r>
-              <a:rPr sz="825">
-                <a:solidFill>
-                  <a:srgbClr val="24292E"/>
-                </a:solidFill>
-                <a:latin typeface="Menlo"/>
-                <a:ea typeface="Menlo"/>
-              </a:rPr>
-              <a:t>    </a:t>
-            </a:r>
-            <a:r>
-              <a:rPr sz="825">
-                <a:solidFill>
-                  <a:srgbClr val="D73A49"/>
-                </a:solidFill>
-                <a:latin typeface="Menlo"/>
-                <a:ea typeface="Menlo"/>
-              </a:rPr>
-              <a:t>public</a:t>
-            </a:r>
-            <a:r>
-              <a:rPr sz="825">
-                <a:solidFill>
-                  <a:srgbClr val="24292E"/>
-                </a:solidFill>
-                <a:latin typeface="Menlo"/>
-                <a:ea typeface="Menlo"/>
-              </a:rPr>
-              <a:t> Receipt </a:t>
-            </a:r>
-            <a:r>
-              <a:rPr sz="825">
-                <a:solidFill>
-                  <a:srgbClr val="6F42C1"/>
-                </a:solidFill>
-                <a:latin typeface="Menlo"/>
-                <a:ea typeface="Menlo"/>
-              </a:rPr>
-              <a:t>pay</a:t>
-            </a:r>
-            <a:r>
-              <a:rPr sz="825">
-                <a:solidFill>
-                  <a:srgbClr val="24292E"/>
-                </a:solidFill>
-                <a:latin typeface="Menlo"/>
-                <a:ea typeface="Menlo"/>
-              </a:rPr>
-              <a:t>(Money </a:t>
-            </a:r>
-            <a:r>
-              <a:rPr sz="825">
-                <a:solidFill>
-                  <a:srgbClr val="E36209"/>
-                </a:solidFill>
-                <a:latin typeface="Menlo"/>
-                <a:ea typeface="Menlo"/>
-              </a:rPr>
-              <a:t>amount</a:t>
-            </a:r>
-            <a:r>
-              <a:rPr sz="825">
-                <a:solidFill>
-                  <a:srgbClr val="24292E"/>
-                </a:solidFill>
-                <a:latin typeface="Menlo"/>
-                <a:ea typeface="Menlo"/>
-              </a:rPr>
-              <a:t>) {</a:t>
-            </a:r>
-            <a:endParaRPr/>
-          </a:p>
-          <a:p>
-            <a:pPr>
-              <a:lnSpc>
-                <a:spcPct val="140000"/>
-              </a:lnSpc>
-            </a:pPr>
-            <a:r>
-              <a:rPr sz="825">
-                <a:solidFill>
-                  <a:srgbClr val="24292E"/>
-                </a:solidFill>
-                <a:latin typeface="Menlo"/>
-                <a:ea typeface="Menlo"/>
-              </a:rPr>
-              <a:t>        </a:t>
-            </a:r>
-            <a:r>
-              <a:rPr sz="825">
-                <a:solidFill>
-                  <a:srgbClr val="D73A49"/>
-                </a:solidFill>
-                <a:latin typeface="Menlo"/>
-                <a:ea typeface="Menlo"/>
-              </a:rPr>
-              <a:t>return</a:t>
-            </a:r>
-            <a:r>
-              <a:rPr sz="825">
-                <a:solidFill>
-                  <a:srgbClr val="24292E"/>
-                </a:solidFill>
-                <a:latin typeface="Menlo"/>
-                <a:ea typeface="Menlo"/>
-              </a:rPr>
-              <a:t> cardTerminal.</a:t>
-            </a:r>
-            <a:r>
-              <a:rPr sz="825">
-                <a:solidFill>
-                  <a:srgbClr val="6F42C1"/>
-                </a:solidFill>
-                <a:latin typeface="Menlo"/>
-                <a:ea typeface="Menlo"/>
-              </a:rPr>
-              <a:t>deduct</a:t>
-            </a:r>
-            <a:r>
-              <a:rPr sz="825">
-                <a:solidFill>
-                  <a:srgbClr val="24292E"/>
-                </a:solidFill>
-                <a:latin typeface="Menlo"/>
-                <a:ea typeface="Menlo"/>
-              </a:rPr>
-              <a:t>(amount);</a:t>
-            </a:r>
-            <a:endParaRPr/>
-          </a:p>
-          <a:p>
-            <a:pPr>
-              <a:lnSpc>
-                <a:spcPct val="140000"/>
-              </a:lnSpc>
-            </a:pPr>
-            <a:r>
-              <a:rPr sz="825">
-                <a:solidFill>
-                  <a:srgbClr val="24292E"/>
-                </a:solidFill>
-                <a:latin typeface="Menlo"/>
-                <a:ea typeface="Menlo"/>
-              </a:rPr>
-              <a:t>    }</a:t>
-            </a:r>
-            <a:endParaRPr/>
-          </a:p>
-          <a:p>
-            <a:pPr>
-              <a:lnSpc>
-                <a:spcPct val="140000"/>
-              </a:lnSpc>
-            </a:pPr>
-            <a:r>
-              <a:rPr sz="825">
-                <a:solidFill>
-                  <a:srgbClr val="24292E"/>
-                </a:solidFill>
-                <a:latin typeface="Menlo"/>
-                <a:ea typeface="Menlo"/>
-              </a:rPr>
-              <a:t>}</a:t>
-            </a:r>
-            <a:endParaRPr/>
-          </a:p>
-          <a:p>
-            <a:pPr>
-              <a:lnSpc>
-                <a:spcPct val="140000"/>
-              </a:lnSpc>
-            </a:pPr>
-            <a:r>
-              <a:rPr sz="825">
-                <a:solidFill>
-                  <a:srgbClr val="E5E7EB"/>
-                </a:solidFill>
-                <a:latin typeface="Menlo"/>
-                <a:ea typeface="Menlo"/>
-              </a:rPr>
-              <a:t> </a:t>
-            </a:r>
-            <a:endParaRPr/>
-          </a:p>
-          <a:p>
-            <a:pPr>
-              <a:lnSpc>
-                <a:spcPct val="140000"/>
-              </a:lnSpc>
-            </a:pPr>
-            <a:r>
-              <a:rPr sz="825">
-                <a:solidFill>
-                  <a:srgbClr val="D73A49"/>
-                </a:solidFill>
-                <a:latin typeface="Menlo"/>
-                <a:ea typeface="Menlo"/>
-              </a:rPr>
-              <a:t>public</a:t>
-            </a:r>
-            <a:r>
-              <a:rPr sz="825">
-                <a:solidFill>
-                  <a:srgbClr val="24292E"/>
-                </a:solidFill>
-                <a:latin typeface="Menlo"/>
-                <a:ea typeface="Menlo"/>
-              </a:rPr>
-              <a:t> </a:t>
-            </a:r>
-            <a:r>
-              <a:rPr sz="825">
-                <a:solidFill>
-                  <a:srgbClr val="D73A49"/>
-                </a:solidFill>
-                <a:latin typeface="Menlo"/>
-                <a:ea typeface="Menlo"/>
-              </a:rPr>
-              <a:t>class</a:t>
-            </a:r>
-            <a:r>
-              <a:rPr sz="825">
-                <a:solidFill>
-                  <a:srgbClr val="24292E"/>
-                </a:solidFill>
-                <a:latin typeface="Menlo"/>
-                <a:ea typeface="Menlo"/>
-              </a:rPr>
-              <a:t> </a:t>
-            </a:r>
-            <a:r>
-              <a:rPr sz="825">
-                <a:solidFill>
-                  <a:srgbClr val="6F42C1"/>
-                </a:solidFill>
-                <a:latin typeface="Menlo"/>
-                <a:ea typeface="Menlo"/>
-              </a:rPr>
-              <a:t>Wallet</a:t>
-            </a:r>
-            <a:r>
-              <a:rPr sz="825">
-                <a:solidFill>
-                  <a:srgbClr val="24292E"/>
-                </a:solidFill>
-                <a:latin typeface="Menlo"/>
-                <a:ea typeface="Menlo"/>
-              </a:rPr>
-              <a:t> </a:t>
-            </a:r>
-            <a:r>
-              <a:rPr sz="825">
-                <a:solidFill>
-                  <a:srgbClr val="D73A49"/>
-                </a:solidFill>
-                <a:latin typeface="Menlo"/>
-                <a:ea typeface="Menlo"/>
-              </a:rPr>
-              <a:t>implements</a:t>
-            </a:r>
-            <a:r>
-              <a:rPr sz="825">
-                <a:solidFill>
-                  <a:srgbClr val="24292E"/>
-                </a:solidFill>
-                <a:latin typeface="Menlo"/>
-                <a:ea typeface="Menlo"/>
-              </a:rPr>
-              <a:t> </a:t>
-            </a:r>
-            <a:r>
-              <a:rPr sz="825">
-                <a:solidFill>
-                  <a:srgbClr val="6F42C1"/>
-                </a:solidFill>
-                <a:latin typeface="Menlo"/>
-                <a:ea typeface="Menlo"/>
-              </a:rPr>
-              <a:t>PaymentMethod</a:t>
-            </a:r>
-            <a:r>
-              <a:rPr sz="825">
-                <a:solidFill>
-                  <a:srgbClr val="24292E"/>
-                </a:solidFill>
-                <a:latin typeface="Menlo"/>
-                <a:ea typeface="Menlo"/>
-              </a:rPr>
-              <a:t> {</a:t>
-            </a:r>
-            <a:endParaRPr/>
-          </a:p>
-          <a:p>
-            <a:pPr>
-              <a:lnSpc>
-                <a:spcPct val="140000"/>
-              </a:lnSpc>
-            </a:pPr>
-            <a:r>
-              <a:rPr sz="825">
-                <a:solidFill>
-                  <a:srgbClr val="24292E"/>
-                </a:solidFill>
-                <a:latin typeface="Menlo"/>
-                <a:ea typeface="Menlo"/>
-              </a:rPr>
-              <a:t>    </a:t>
-            </a:r>
-            <a:r>
-              <a:rPr sz="825">
-                <a:solidFill>
-                  <a:srgbClr val="D73A49"/>
-                </a:solidFill>
-                <a:latin typeface="Menlo"/>
-                <a:ea typeface="Menlo"/>
-              </a:rPr>
-              <a:t>public</a:t>
-            </a:r>
-            <a:r>
-              <a:rPr sz="825">
-                <a:solidFill>
-                  <a:srgbClr val="24292E"/>
-                </a:solidFill>
-                <a:latin typeface="Menlo"/>
-                <a:ea typeface="Menlo"/>
-              </a:rPr>
-              <a:t> Receipt </a:t>
-            </a:r>
-            <a:r>
-              <a:rPr sz="825">
-                <a:solidFill>
-                  <a:srgbClr val="6F42C1"/>
-                </a:solidFill>
-                <a:latin typeface="Menlo"/>
-                <a:ea typeface="Menlo"/>
-              </a:rPr>
-              <a:t>pay</a:t>
-            </a:r>
-            <a:r>
-              <a:rPr sz="825">
-                <a:solidFill>
-                  <a:srgbClr val="24292E"/>
-                </a:solidFill>
-                <a:latin typeface="Menlo"/>
-                <a:ea typeface="Menlo"/>
-              </a:rPr>
-              <a:t>(Money </a:t>
-            </a:r>
-            <a:r>
-              <a:rPr sz="825">
-                <a:solidFill>
-                  <a:srgbClr val="E36209"/>
-                </a:solidFill>
-                <a:latin typeface="Menlo"/>
-                <a:ea typeface="Menlo"/>
-              </a:rPr>
-              <a:t>amount</a:t>
-            </a:r>
-            <a:r>
-              <a:rPr sz="825">
-                <a:solidFill>
-                  <a:srgbClr val="24292E"/>
-                </a:solidFill>
-                <a:latin typeface="Menlo"/>
-                <a:ea typeface="Menlo"/>
-              </a:rPr>
-              <a:t>) {</a:t>
-            </a:r>
-            <a:endParaRPr/>
-          </a:p>
-          <a:p>
-            <a:pPr>
-              <a:lnSpc>
-                <a:spcPct val="140000"/>
-              </a:lnSpc>
-            </a:pPr>
-            <a:r>
-              <a:rPr sz="825">
-                <a:solidFill>
-                  <a:srgbClr val="24292E"/>
-                </a:solidFill>
-                <a:latin typeface="Menlo"/>
-                <a:ea typeface="Menlo"/>
-              </a:rPr>
-              <a:t>        </a:t>
-            </a:r>
-            <a:r>
-              <a:rPr sz="825">
-                <a:solidFill>
-                  <a:srgbClr val="D73A49"/>
-                </a:solidFill>
-                <a:latin typeface="Menlo"/>
-                <a:ea typeface="Menlo"/>
-              </a:rPr>
-              <a:t>return</a:t>
-            </a:r>
-            <a:r>
-              <a:rPr sz="825">
-                <a:solidFill>
-                  <a:srgbClr val="24292E"/>
-                </a:solidFill>
-                <a:latin typeface="Menlo"/>
-                <a:ea typeface="Menlo"/>
-              </a:rPr>
-              <a:t> balance.</a:t>
-            </a:r>
-            <a:r>
-              <a:rPr sz="825">
-                <a:solidFill>
-                  <a:srgbClr val="6F42C1"/>
-                </a:solidFill>
-                <a:latin typeface="Menlo"/>
-                <a:ea typeface="Menlo"/>
-              </a:rPr>
-              <a:t>debit</a:t>
-            </a:r>
-            <a:r>
-              <a:rPr sz="825">
-                <a:solidFill>
-                  <a:srgbClr val="24292E"/>
-                </a:solidFill>
-                <a:latin typeface="Menlo"/>
-                <a:ea typeface="Menlo"/>
-              </a:rPr>
-              <a:t>(amount);</a:t>
-            </a:r>
-            <a:endParaRPr/>
-          </a:p>
-          <a:p>
-            <a:pPr>
-              <a:lnSpc>
-                <a:spcPct val="140000"/>
-              </a:lnSpc>
-            </a:pPr>
-            <a:r>
-              <a:rPr sz="825">
-                <a:solidFill>
-                  <a:srgbClr val="24292E"/>
-                </a:solidFill>
-                <a:latin typeface="Menlo"/>
-                <a:ea typeface="Menlo"/>
-              </a:rPr>
-              <a:t>    }</a:t>
-            </a:r>
-            <a:endParaRPr/>
-          </a:p>
-          <a:p>
-            <a:pPr>
-              <a:lnSpc>
-                <a:spcPct val="140000"/>
-              </a:lnSpc>
-            </a:pPr>
-            <a:r>
-              <a:rPr sz="825">
-                <a:solidFill>
-                  <a:srgbClr val="24292E"/>
-                </a:solidFill>
-                <a:latin typeface="Menlo"/>
-                <a:ea typeface="Menlo"/>
-              </a:rPr>
-              <a:t>}</a:t>
-            </a:r>
-            <a:endParaRPr/>
-          </a:p>
-          <a:p>
-            <a:pPr>
-              <a:lnSpc>
-                <a:spcPct val="140000"/>
-              </a:lnSpc>
-            </a:pPr>
-            <a:r>
-              <a:rPr sz="825">
-                <a:solidFill>
-                  <a:srgbClr val="E5E7EB"/>
-                </a:solidFill>
-                <a:latin typeface="Menlo"/>
-                <a:ea typeface="Menlo"/>
-              </a:rPr>
-              <a:t> </a:t>
-            </a:r>
-            <a:endParaRPr/>
-          </a:p>
-          <a:p>
-            <a:pPr>
-              <a:lnSpc>
-                <a:spcPct val="140000"/>
-              </a:lnSpc>
-            </a:pPr>
-            <a:r>
-              <a:rPr sz="825">
-                <a:solidFill>
-                  <a:srgbClr val="D73A49"/>
-                </a:solidFill>
-                <a:latin typeface="Menlo"/>
-                <a:ea typeface="Menlo"/>
-              </a:rPr>
-              <a:t>public</a:t>
-            </a:r>
-            <a:r>
-              <a:rPr sz="825">
-                <a:solidFill>
-                  <a:srgbClr val="24292E"/>
-                </a:solidFill>
-                <a:latin typeface="Menlo"/>
-                <a:ea typeface="Menlo"/>
-              </a:rPr>
-              <a:t> </a:t>
-            </a:r>
-            <a:r>
-              <a:rPr sz="825">
-                <a:solidFill>
-                  <a:srgbClr val="D73A49"/>
-                </a:solidFill>
-                <a:latin typeface="Menlo"/>
-                <a:ea typeface="Menlo"/>
-              </a:rPr>
-              <a:t>class</a:t>
-            </a:r>
-            <a:r>
-              <a:rPr sz="825">
-                <a:solidFill>
-                  <a:srgbClr val="24292E"/>
-                </a:solidFill>
-                <a:latin typeface="Menlo"/>
-                <a:ea typeface="Menlo"/>
-              </a:rPr>
-              <a:t> </a:t>
-            </a:r>
-            <a:r>
-              <a:rPr sz="825">
-                <a:solidFill>
-                  <a:srgbClr val="6F42C1"/>
-                </a:solidFill>
-                <a:latin typeface="Menlo"/>
-                <a:ea typeface="Menlo"/>
-              </a:rPr>
-              <a:t>Cash</a:t>
-            </a:r>
-            <a:r>
-              <a:rPr sz="825">
-                <a:solidFill>
-                  <a:srgbClr val="24292E"/>
-                </a:solidFill>
-                <a:latin typeface="Menlo"/>
-                <a:ea typeface="Menlo"/>
-              </a:rPr>
-              <a:t> </a:t>
-            </a:r>
-            <a:r>
-              <a:rPr sz="825">
-                <a:solidFill>
-                  <a:srgbClr val="D73A49"/>
-                </a:solidFill>
-                <a:latin typeface="Menlo"/>
-                <a:ea typeface="Menlo"/>
-              </a:rPr>
-              <a:t>implements</a:t>
-            </a:r>
-            <a:r>
-              <a:rPr sz="825">
-                <a:solidFill>
-                  <a:srgbClr val="24292E"/>
-                </a:solidFill>
-                <a:latin typeface="Menlo"/>
-                <a:ea typeface="Menlo"/>
-              </a:rPr>
-              <a:t> </a:t>
-            </a:r>
-            <a:r>
-              <a:rPr sz="825">
-                <a:solidFill>
-                  <a:srgbClr val="6F42C1"/>
-                </a:solidFill>
-                <a:latin typeface="Menlo"/>
-                <a:ea typeface="Menlo"/>
-              </a:rPr>
-              <a:t>PaymentMethod</a:t>
-            </a:r>
-            <a:r>
-              <a:rPr sz="825">
-                <a:solidFill>
-                  <a:srgbClr val="24292E"/>
-                </a:solidFill>
-                <a:latin typeface="Menlo"/>
-                <a:ea typeface="Menlo"/>
-              </a:rPr>
-              <a:t> {</a:t>
-            </a:r>
-            <a:endParaRPr/>
-          </a:p>
-          <a:p>
-            <a:pPr>
-              <a:lnSpc>
-                <a:spcPct val="140000"/>
-              </a:lnSpc>
-            </a:pPr>
-            <a:r>
-              <a:rPr sz="825">
-                <a:solidFill>
-                  <a:srgbClr val="24292E"/>
-                </a:solidFill>
-                <a:latin typeface="Menlo"/>
-                <a:ea typeface="Menlo"/>
-              </a:rPr>
-              <a:t>    </a:t>
-            </a:r>
-            <a:r>
-              <a:rPr sz="825">
-                <a:solidFill>
-                  <a:srgbClr val="D73A49"/>
-                </a:solidFill>
-                <a:latin typeface="Menlo"/>
-                <a:ea typeface="Menlo"/>
-              </a:rPr>
-              <a:t>public</a:t>
-            </a:r>
-            <a:r>
-              <a:rPr sz="825">
-                <a:solidFill>
-                  <a:srgbClr val="24292E"/>
-                </a:solidFill>
-                <a:latin typeface="Menlo"/>
-                <a:ea typeface="Menlo"/>
-              </a:rPr>
-              <a:t> Receipt </a:t>
-            </a:r>
-            <a:r>
-              <a:rPr sz="825">
-                <a:solidFill>
-                  <a:srgbClr val="6F42C1"/>
-                </a:solidFill>
-                <a:latin typeface="Menlo"/>
-                <a:ea typeface="Menlo"/>
-              </a:rPr>
-              <a:t>pay</a:t>
-            </a:r>
-            <a:r>
-              <a:rPr sz="825">
-                <a:solidFill>
-                  <a:srgbClr val="24292E"/>
-                </a:solidFill>
-                <a:latin typeface="Menlo"/>
-                <a:ea typeface="Menlo"/>
-              </a:rPr>
-              <a:t>(Money </a:t>
-            </a:r>
-            <a:r>
-              <a:rPr sz="825">
-                <a:solidFill>
-                  <a:srgbClr val="E36209"/>
-                </a:solidFill>
-                <a:latin typeface="Menlo"/>
-                <a:ea typeface="Menlo"/>
-              </a:rPr>
-              <a:t>amount</a:t>
-            </a:r>
-            <a:r>
-              <a:rPr sz="825">
-                <a:solidFill>
-                  <a:srgbClr val="24292E"/>
-                </a:solidFill>
-                <a:latin typeface="Menlo"/>
-                <a:ea typeface="Menlo"/>
-              </a:rPr>
-              <a:t>) {</a:t>
-            </a:r>
-            <a:endParaRPr/>
-          </a:p>
-          <a:p>
-            <a:pPr>
-              <a:lnSpc>
-                <a:spcPct val="140000"/>
-              </a:lnSpc>
-            </a:pPr>
-            <a:r>
-              <a:rPr sz="825">
-                <a:solidFill>
-                  <a:srgbClr val="24292E"/>
-                </a:solidFill>
-                <a:latin typeface="Menlo"/>
-                <a:ea typeface="Menlo"/>
-              </a:rPr>
-              <a:t>        </a:t>
-            </a:r>
-            <a:r>
-              <a:rPr sz="825">
-                <a:solidFill>
-                  <a:srgbClr val="D73A49"/>
-                </a:solidFill>
-                <a:latin typeface="Menlo"/>
-                <a:ea typeface="Menlo"/>
-              </a:rPr>
-              <a:t>return</a:t>
-            </a:r>
-            <a:r>
-              <a:rPr sz="825">
-                <a:solidFill>
-                  <a:srgbClr val="24292E"/>
-                </a:solidFill>
-                <a:latin typeface="Menlo"/>
-                <a:ea typeface="Menlo"/>
-              </a:rPr>
-              <a:t> Receipt.</a:t>
-            </a:r>
-            <a:r>
-              <a:rPr sz="825">
-                <a:solidFill>
-                  <a:srgbClr val="6F42C1"/>
-                </a:solidFill>
-                <a:latin typeface="Menlo"/>
-                <a:ea typeface="Menlo"/>
-              </a:rPr>
-              <a:t>payOnDelivery</a:t>
-            </a:r>
-            <a:r>
-              <a:rPr sz="825">
-                <a:solidFill>
-                  <a:srgbClr val="24292E"/>
-                </a:solidFill>
-                <a:latin typeface="Menlo"/>
-                <a:ea typeface="Menlo"/>
-              </a:rPr>
-              <a:t>(amount);</a:t>
-            </a:r>
-            <a:endParaRPr/>
-          </a:p>
-          <a:p>
-            <a:pPr>
-              <a:lnSpc>
-                <a:spcPct val="140000"/>
-              </a:lnSpc>
-            </a:pPr>
-            <a:r>
-              <a:rPr sz="825">
-                <a:solidFill>
-                  <a:srgbClr val="24292E"/>
-                </a:solidFill>
-                <a:latin typeface="Menlo"/>
-                <a:ea typeface="Menlo"/>
-              </a:rPr>
-              <a:t>    }</a:t>
-            </a:r>
-            <a:endParaRPr/>
-          </a:p>
-          <a:p>
-            <a:pPr>
-              <a:lnSpc>
-                <a:spcPct val="140000"/>
-              </a:lnSpc>
-            </a:pPr>
-            <a:r>
-              <a:rPr sz="825">
-                <a:solidFill>
-                  <a:srgbClr val="24292E"/>
-                </a:solidFill>
-                <a:latin typeface="Menlo"/>
-                <a:ea typeface="Menlo"/>
-              </a:rPr>
-              <a:t>}</a:t>
-            </a:r>
-            <a:endParaRPr/>
-          </a:p>
-          <a:p>
-            <a:pPr>
-              <a:lnSpc>
-                <a:spcPct val="140000"/>
-              </a:lnSpc>
-            </a:pPr>
-            <a:r>
-              <a:rPr sz="825">
-                <a:solidFill>
-                  <a:srgbClr val="E5E7EB"/>
-                </a:solidFill>
-                <a:latin typeface="Menlo"/>
-                <a:ea typeface="Menlo"/>
-              </a:rPr>
-              <a:t> </a:t>
-            </a:r>
-            <a:endParaRPr/>
-          </a:p>
-          <a:p>
-            <a:pPr>
-              <a:lnSpc>
-                <a:spcPct val="140000"/>
-              </a:lnSpc>
-            </a:pPr>
-            <a:r>
-              <a:rPr sz="825">
-                <a:solidFill>
-                  <a:srgbClr val="6A737D"/>
-                </a:solidFill>
-                <a:latin typeface="Menlo"/>
-                <a:ea typeface="Menlo"/>
-              </a:rPr>
-              <a:t>// the call site — one stable line</a:t>
-            </a:r>
-            <a:endParaRPr/>
-          </a:p>
-          <a:p>
-            <a:pPr>
-              <a:lnSpc>
-                <a:spcPct val="140000"/>
-              </a:lnSpc>
-            </a:pPr>
-            <a:r>
-              <a:rPr sz="825">
-                <a:solidFill>
-                  <a:srgbClr val="24292E"/>
-                </a:solidFill>
-                <a:latin typeface="Menlo"/>
-                <a:ea typeface="Menlo"/>
-              </a:rPr>
-              <a:t>Receipt r </a:t>
-            </a:r>
-            <a:r>
-              <a:rPr sz="825">
-                <a:solidFill>
-                  <a:srgbClr val="D73A49"/>
-                </a:solidFill>
-                <a:latin typeface="Menlo"/>
-                <a:ea typeface="Menlo"/>
-              </a:rPr>
-              <a:t>=</a:t>
-            </a:r>
-            <a:r>
-              <a:rPr sz="825">
-                <a:solidFill>
-                  <a:srgbClr val="24292E"/>
-                </a:solidFill>
-                <a:latin typeface="Menlo"/>
-                <a:ea typeface="Menlo"/>
-              </a:rPr>
-              <a:t> method.</a:t>
-            </a:r>
-            <a:r>
-              <a:rPr sz="825">
-                <a:solidFill>
-                  <a:srgbClr val="6F42C1"/>
-                </a:solidFill>
-                <a:latin typeface="Menlo"/>
-                <a:ea typeface="Menlo"/>
-              </a:rPr>
-              <a:t>pay</a:t>
-            </a:r>
-            <a:r>
-              <a:rPr sz="825">
-                <a:solidFill>
-                  <a:srgbClr val="24292E"/>
-                </a:solidFill>
-                <a:latin typeface="Menlo"/>
-                <a:ea typeface="Menlo"/>
-              </a:rPr>
-              <a:t>(order.</a:t>
-            </a:r>
-            <a:r>
-              <a:rPr sz="825">
-                <a:solidFill>
-                  <a:srgbClr val="6F42C1"/>
-                </a:solidFill>
-                <a:latin typeface="Menlo"/>
-                <a:ea typeface="Menlo"/>
-              </a:rPr>
-              <a:t>total</a:t>
-            </a:r>
-            <a:r>
-              <a:rPr sz="825">
-                <a:solidFill>
-                  <a:srgbClr val="24292E"/>
-                </a:solidFill>
-                <a:latin typeface="Menlo"/>
-                <a:ea typeface="Menlo"/>
-              </a:rPr>
-              <a:t>());</a:t>
+              <a:t>r = method.pay(order.total())</a:t>
             </a:r>
             <a:endParaRPr/>
           </a:p>
@@ -19485,7 +16121,7 @@
   <p:cSld>
     <p:spTree>
       <p:nvGrpSpPr>
-        <p:cNvPr id="418" name="" descr="&lt;Slide style={{ background: '#FFFFFF', padding: 0 }}&gt;&#10;  &lt;Box style={{ height: 72, background: '#1E4FA8', padding: '0 40px', flexDirection: 'row', alignItems: 'center', justifyContent: 'space-between' }}&gt;&#10;    &lt;Text style={{ fontSize: 15, color: '#B9CDF0', letterSpacing: 1 }}&gt;ISAD · INFORMATION SYSTEMS ANALYSIS &amp;amp; DESIGN&lt;/Text&gt;&#10;    &lt;Text style={{ fontSize: 15, color: '#B9CDF0' }}&gt;W02 · INTERFACES&lt;/Text&gt;&#10;  &lt;/Box&gt;&#10;  &lt;Box style={{ padding: '22px 40px 0 40px' }}&gt;&#10;    &lt;Text style={{ fontSize: 32, fontWeight: 'bold', color: '#0E3F8C' }}&gt;Program to an Interface&lt;/Text&gt;&#10;  &lt;/Box&gt;&#10;  &lt;Box style={{ flex: 1, padding: '18px 40px 0 40px', flexDirection: 'row', gap: 26 }}&gt;&#10;    &lt;Box style={{ flex: 3, flexDirection: 'column', gap: 12 }}&gt;&#10;      &lt;Box style={{ flex: 1, padding: '16px 18px', background: '#FDF3F3', borderRadius: 12, border: '1px solid #D9534F', flexDirection: 'column' }}&gt;&#10;        &lt;Box style={{ flexDirection: 'row', alignItems: 'center', gap: 10, marginBottom: 8 }}&gt;&#10;          &lt;FAIcon name='times-circle' style={{ fill: '#D9534F', width: 20, height: 20 }} /&gt;&#10;          &lt;Text style={{ fontSize: 16, fontWeight: 'bold', color: '#D9534F' }}&gt;Dependent on a concrete class&lt;/Text&gt;&#10;        &lt;/Box&gt;&#10;        &lt;CodeBlock code={`class OrderService {&#10;    private CampusCard card;   // one type only&#10;&#10;    void checkout(Order o) {&#10;        card.pay(o.total());&#10;    }&#10;}&#10;// adding Wallet means editing OrderService&#10;// and re-testing everything`} language='java' width={520} fontSize={12} /&gt;&#10;      &lt;/Box&gt;&#10;    &lt;/Box&gt;&#10;    &lt;Box style={{ flex: 3, flexDirection: 'column', gap: 12 }}&gt;&#10;      &lt;Box style={{ flex: 1, padding: '16px 18px', background: '#F0F5FC', borderRadius: 12, border: '1px solid #1E4FA8', flexDirection: 'column' }}&gt;&#10;        &lt;Box style={{ flexDirection: 'row', alignItems: 'center', gap: 10, marginBottom: 8 }}&gt;&#10;          &lt;FAIcon name='check-circle' style={{ fill: '#1E4FA8', width: 20, height: 20 }} /&gt;&#10;          &lt;Text style={{ fontSize: 16, fontWeight: 'bold', color: '#0E3F8C' }}&gt;Dependent on an interface&lt;/Text&gt;&#10;        &lt;/Box&gt;&#10;        &lt;CodeBlock code={`class OrderService {&#10;    private PaymentMethod method;   // any type&#10;&#10;    void checkout(Order o) {&#10;        method.pay(o.total());&#10;    }&#10;}&#10;// adding Wallet changes nothing here.&#10;// new class, same contract.`} language='java' width={520} fontSize={12} /&gt;&#10;      &lt;/Box&gt;&#10;    &lt;/Box&gt;&#10;  &lt;/Box&gt;&#10;  &lt;Box style={{ height: 52, padding: '0 40px', flexDirection: 'row', alignItems: 'center', gap: 14 }}&gt;&#10;    &lt;FAIcon name='lightbulb' style={{ fill: '#FFC107', width: 22, height: 22 }} /&gt;&#10;    &lt;Text style={{ fontSize: 17, color: '#4A5568' }}&gt;Declare the variable by what it must &lt;Text style={{ fontWeight: 'bold', color: '#0E3F8C' }}&gt;do&lt;/Text&gt;, not by what it &lt;Text style={{ fontWeight: 'bold', color: '#0E3F8C' }}&gt;is&lt;/Text&gt;.&lt;/Text&gt;&#10;    &lt;Text style={{ fontSize: 14, color: '#1E4FA8', fontWeight: 'bold', marginLeft: 'auto' }}&gt;27 / 38&lt;/Text&gt;&#10;  &lt;/Box&gt;&#10;&lt;/Slide&gt;"/>
+        <p:cNvPr id="418" name="" descr="&lt;Slide style={{ background: '#FFFFFF', padding: 0 }}&gt;&#10;  &lt;Box style={{ height: 72, background: '#1E4FA8', padding: '0 40px', flexDirection: 'row', alignItems: 'center', justifyContent: 'space-between' }}&gt;&#10;    &lt;Text style={{ fontSize: 15, color: '#B9CDF0', letterSpacing: 1 }}&gt;ISAD · INFORMATION SYSTEMS ANALYSIS &amp;amp; DESIGN&lt;/Text&gt;&#10;    &lt;Text style={{ fontSize: 15, color: '#B9CDF0' }}&gt;W02 · INTERFACES&lt;/Text&gt;&#10;  &lt;/Box&gt;&#10;  &lt;Box style={{ padding: '22px 40px 0 40px' }}&gt;&#10;    &lt;Text style={{ fontSize: 32, fontWeight: 'bold', color: '#0E3F8C' }}&gt;Program to an Interface&lt;/Text&gt;&#10;  &lt;/Box&gt;&#10;  &lt;Box style={{ flex: 1, padding: '18px 40px 0 40px', flexDirection: 'row', gap: 26 }}&gt;&#10;    &lt;Box style={{ flex: 3, flexDirection: 'column', gap: 12 }}&gt;&#10;      &lt;Box style={{ flex: 1, padding: '16px 18px', background: '#FDF3F3', borderRadius: 12, border: '1px solid #D9534F', flexDirection: 'column' }}&gt;&#10;        &lt;Box style={{ flexDirection: 'row', alignItems: 'center', gap: 10, marginBottom: 8 }}&gt;&#10;          &lt;FAIcon name='times-circle' style={{ fill: '#D9534F', width: 20, height: 20 }} /&gt;&#10;          &lt;Text style={{ fontSize: 16, fontWeight: 'bold', color: '#D9534F' }}&gt;Dependent on a concrete class&lt;/Text&gt;&#10;        &lt;/Box&gt;&#10;        &lt;CodeBlock code={`Class OrderService&#10;    - card : CampusCard       # one type only&#10;&#10;    + checkout(order)&#10;        card.pay(order.total())&#10;&#10;# adding Wallet means editing OrderService&#10;# and re-testing everything`} language='text' width={520} fontSize={12} /&gt;&#10;      &lt;/Box&gt;&#10;    &lt;/Box&gt;&#10;    &lt;Box style={{ flex: 3, flexDirection: 'column', gap: 12 }}&gt;&#10;      &lt;Box style={{ flex: 1, padding: '16px 18px', background: '#F0F5FC', borderRadius: 12, border: '1px solid #1E4FA8', flexDirection: 'column' }}&gt;&#10;        &lt;Box style={{ flexDirection: 'row', alignItems: 'center', gap: 10, marginBottom: 8 }}&gt;&#10;          &lt;FAIcon name='check-circle' style={{ fill: '#1E4FA8', width: 20, height: 20 }} /&gt;&#10;          &lt;Text style={{ fontSize: 16, fontWeight: 'bold', color: '#0E3F8C' }}&gt;Dependent on an interface&lt;/Text&gt;&#10;        &lt;/Box&gt;&#10;        &lt;CodeBlock code={`Class OrderService&#10;    - method : PaymentMethod  # any type&#10;&#10;    + checkout(order)&#10;        method.pay(order.total())&#10;&#10;# adding Wallet changes nothing here.&#10;# new class, same contract.`} language='text' width={520} fontSize={12} /&gt;&#10;      &lt;/Box&gt;&#10;    &lt;/Box&gt;&#10;  &lt;/Box&gt;&#10;  &lt;Box style={{ height: 52, padding: '0 40px', flexDirection: 'row', alignItems: 'center', gap: 14 }}&gt;&#10;    &lt;FAIcon name='lightbulb' style={{ fill: '#FFC107', width: 22, height: 22 }} /&gt;&#10;    &lt;Text style={{ fontSize: 17, color: '#4A5568' }}&gt;Declare the variable by what it must &lt;Text style={{ fontWeight: 'bold', color: '#0E3F8C' }}&gt;do&lt;/Text&gt;, not by what it &lt;Text style={{ fontWeight: 'bold', color: '#0E3F8C' }}&gt;is&lt;/Text&gt;.&lt;/Text&gt;&#10;    &lt;Text style={{ fontSize: 14, color: '#1E4FA8', fontWeight: 'bold', marginLeft: 'auto' }}&gt;27 / 38&lt;/Text&gt;&#10;  &lt;/Box&gt;&#10;&lt;/Slide&gt;"/>
         <p:cNvGrpSpPr/>
         <p:nvPr/>
       </p:nvGrpSpPr>
@@ -19994,11 +16630,11 @@
         <p:spPr>
           <a:xfrm rot="0" flipH="0" flipV="0">
             <a:off x="552450" y="1857375"/>
-            <a:ext cx="5248275" cy="2000250"/>
+            <a:ext cx="5248275" cy="1809750"/>
           </a:xfrm>
           <a:prstGeom prst="roundRect">
             <a:avLst>
-              <a:gd name="adj" fmla="val 3810"/>
+              <a:gd name="adj" fmla="val 4211"/>
             </a:avLst>
           </a:prstGeom>
           <a:solidFill>
@@ -20020,7 +16656,7 @@
         <p:spPr>
           <a:xfrm rot="0" flipH="0" flipV="0">
             <a:off x="704850" y="1990725"/>
-            <a:ext cx="4943475" cy="1733550"/>
+            <a:ext cx="4943475" cy="1543050"/>
           </a:xfrm>
           <a:prstGeom prst="rect"/>
         </p:spPr>
@@ -20037,42 +16673,74 @@
             <a:r>
               <a:rPr sz="900">
                 <a:solidFill>
-                  <a:srgbClr val="D73A49"/>
+                  <a:srgbClr val="E5E7EB"/>
                 </a:solidFill>
                 <a:latin typeface="Menlo"/>
                 <a:ea typeface="Menlo"/>
               </a:rPr>
-              <a:t>class</a:t>
-            </a:r>
+              <a:t>Class OrderService</a:t>
+            </a:r>
+            <a:endParaRPr/>
+          </a:p>
+          <a:p>
+            <a:pPr>
+              <a:lnSpc>
+                <a:spcPct val="140000"/>
+              </a:lnSpc>
+            </a:pPr>
             <a:r>
               <a:rPr sz="900">
                 <a:solidFill>
-                  <a:srgbClr val="24292E"/>
+                  <a:srgbClr val="E5E7EB"/>
                 </a:solidFill>
                 <a:latin typeface="Menlo"/>
                 <a:ea typeface="Menlo"/>
               </a:rPr>
-              <a:t> </a:t>
-            </a:r>
+              <a:t>    - card : CampusCard       # one type only</a:t>
+            </a:r>
+            <a:endParaRPr/>
+          </a:p>
+          <a:p>
+            <a:pPr>
+              <a:lnSpc>
+                <a:spcPct val="140000"/>
+              </a:lnSpc>
+            </a:pPr>
+            <a:endParaRPr/>
+          </a:p>
+          <a:p>
+            <a:pPr>
+              <a:lnSpc>
+                <a:spcPct val="140000"/>
+              </a:lnSpc>
+            </a:pPr>
             <a:r>
               <a:rPr sz="900">
                 <a:solidFill>
-                  <a:srgbClr val="6F42C1"/>
+                  <a:srgbClr val="E5E7EB"/>
                 </a:solidFill>
                 <a:latin typeface="Menlo"/>
                 <a:ea typeface="Menlo"/>
               </a:rPr>
-              <a:t>OrderService</a:t>
-            </a:r>
+              <a:t>    + checkout(order)</a:t>
+            </a:r>
+            <a:endParaRPr/>
+          </a:p>
+          <a:p>
+            <a:pPr>
+              <a:lnSpc>
+                <a:spcPct val="140000"/>
+              </a:lnSpc>
+            </a:pPr>
             <a:r>
               <a:rPr sz="900">
                 <a:solidFill>
-                  <a:srgbClr val="24292E"/>
+                  <a:srgbClr val="E5E7EB"/>
                 </a:solidFill>
                 <a:latin typeface="Menlo"/>
                 <a:ea typeface="Menlo"/>
               </a:rPr>
-              <a:t> {</a:t>
+              <a:t>        card.pay(order.total())</a:t>
             </a:r>
             <a:endParaRPr/>
           </a:p>
@@ -20082,271 +16750,41 @@
                 <a:spcPct val="140000"/>
               </a:lnSpc>
             </a:pPr>
+            <a:endParaRPr/>
+          </a:p>
+          <a:p>
+            <a:pPr>
+              <a:lnSpc>
+                <a:spcPct val="140000"/>
+              </a:lnSpc>
+            </a:pPr>
             <a:r>
               <a:rPr sz="900">
                 <a:solidFill>
-                  <a:srgbClr val="24292E"/>
+                  <a:srgbClr val="E5E7EB"/>
                 </a:solidFill>
                 <a:latin typeface="Menlo"/>
                 <a:ea typeface="Menlo"/>
               </a:rPr>
-              <a:t>    </a:t>
-            </a:r>
+              <a:t># adding Wallet means editing OrderService</a:t>
+            </a:r>
+            <a:endParaRPr/>
+          </a:p>
+          <a:p>
+            <a:pPr>
+              <a:lnSpc>
+                <a:spcPct val="140000"/>
+              </a:lnSpc>
+            </a:pPr>
             <a:r>
               <a:rPr sz="900">
                 <a:solidFill>
-                  <a:srgbClr val="D73A49"/>
+                  <a:srgbClr val="E5E7EB"/>
                 </a:solidFill>
                 <a:latin typeface="Menlo"/>
                 <a:ea typeface="Menlo"/>
               </a:rPr>
-              <a:t>private</a:t>
-            </a:r>
-            <a:r>
-              <a:rPr sz="900">
-                <a:solidFill>
-                  <a:srgbClr val="24292E"/>
-                </a:solidFill>
-                <a:latin typeface="Menlo"/>
-                <a:ea typeface="Menlo"/>
-              </a:rPr>
-              <a:t> CampusCard card;   </a:t>
-            </a:r>
-            <a:r>
-              <a:rPr sz="900">
-                <a:solidFill>
-                  <a:srgbClr val="6A737D"/>
-                </a:solidFill>
-                <a:latin typeface="Menlo"/>
-                <a:ea typeface="Menlo"/>
-              </a:rPr>
-              <a:t>// one type only</a:t>
-            </a:r>
-            <a:endParaRPr/>
-          </a:p>
-          <a:p>
-            <a:pPr>
-              <a:lnSpc>
-                <a:spcPct val="140000"/>
-              </a:lnSpc>
-            </a:pPr>
-            <a:r>
-              <a:rPr sz="900">
-                <a:solidFill>
-                  <a:srgbClr val="E5E7EB"/>
-                </a:solidFill>
-                <a:latin typeface="Menlo"/>
-                <a:ea typeface="Menlo"/>
-              </a:rPr>
-              <a:t> </a:t>
-            </a:r>
-            <a:endParaRPr/>
-          </a:p>
-          <a:p>
-            <a:pPr>
-              <a:lnSpc>
-                <a:spcPct val="140000"/>
-              </a:lnSpc>
-            </a:pPr>
-            <a:r>
-              <a:rPr sz="900">
-                <a:solidFill>
-                  <a:srgbClr val="24292E"/>
-                </a:solidFill>
-                <a:latin typeface="Menlo"/>
-                <a:ea typeface="Menlo"/>
-              </a:rPr>
-              <a:t>    </a:t>
-            </a:r>
-            <a:r>
-              <a:rPr sz="900">
-                <a:solidFill>
-                  <a:srgbClr val="D73A49"/>
-                </a:solidFill>
-                <a:latin typeface="Menlo"/>
-                <a:ea typeface="Menlo"/>
-              </a:rPr>
-              <a:t>void</a:t>
-            </a:r>
-            <a:r>
-              <a:rPr sz="900">
-                <a:solidFill>
-                  <a:srgbClr val="24292E"/>
-                </a:solidFill>
-                <a:latin typeface="Menlo"/>
-                <a:ea typeface="Menlo"/>
-              </a:rPr>
-              <a:t> </a:t>
-            </a:r>
-            <a:r>
-              <a:rPr sz="900">
-                <a:solidFill>
-                  <a:srgbClr val="6F42C1"/>
-                </a:solidFill>
-                <a:latin typeface="Menlo"/>
-                <a:ea typeface="Menlo"/>
-              </a:rPr>
-              <a:t>checkout</a:t>
-            </a:r>
-            <a:r>
-              <a:rPr sz="900">
-                <a:solidFill>
-                  <a:srgbClr val="24292E"/>
-                </a:solidFill>
-                <a:latin typeface="Menlo"/>
-                <a:ea typeface="Menlo"/>
-              </a:rPr>
-              <a:t>(Order </a:t>
-            </a:r>
-            <a:r>
-              <a:rPr sz="900">
-                <a:solidFill>
-                  <a:srgbClr val="E36209"/>
-                </a:solidFill>
-                <a:latin typeface="Menlo"/>
-                <a:ea typeface="Menlo"/>
-              </a:rPr>
-              <a:t>o</a:t>
-            </a:r>
-            <a:r>
-              <a:rPr sz="900">
-                <a:solidFill>
-                  <a:srgbClr val="24292E"/>
-                </a:solidFill>
-                <a:latin typeface="Menlo"/>
-                <a:ea typeface="Menlo"/>
-              </a:rPr>
-              <a:t>) {</a:t>
-            </a:r>
-            <a:endParaRPr/>
-          </a:p>
-          <a:p>
-            <a:pPr>
-              <a:lnSpc>
-                <a:spcPct val="140000"/>
-              </a:lnSpc>
-            </a:pPr>
-            <a:r>
-              <a:rPr sz="900">
-                <a:solidFill>
-                  <a:srgbClr val="24292E"/>
-                </a:solidFill>
-                <a:latin typeface="Menlo"/>
-                <a:ea typeface="Menlo"/>
-              </a:rPr>
-              <a:t>        card.</a:t>
-            </a:r>
-            <a:r>
-              <a:rPr sz="900">
-                <a:solidFill>
-                  <a:srgbClr val="6F42C1"/>
-                </a:solidFill>
-                <a:latin typeface="Menlo"/>
-                <a:ea typeface="Menlo"/>
-              </a:rPr>
-              <a:t>pay</a:t>
-            </a:r>
-            <a:r>
-              <a:rPr sz="900">
-                <a:solidFill>
-                  <a:srgbClr val="24292E"/>
-                </a:solidFill>
-                <a:latin typeface="Menlo"/>
-                <a:ea typeface="Menlo"/>
-              </a:rPr>
-              <a:t>(o.</a:t>
-            </a:r>
-            <a:r>
-              <a:rPr sz="900">
-                <a:solidFill>
-                  <a:srgbClr val="6F42C1"/>
-                </a:solidFill>
-                <a:latin typeface="Menlo"/>
-                <a:ea typeface="Menlo"/>
-              </a:rPr>
-              <a:t>total</a:t>
-            </a:r>
-            <a:r>
-              <a:rPr sz="900">
-                <a:solidFill>
-                  <a:srgbClr val="24292E"/>
-                </a:solidFill>
-                <a:latin typeface="Menlo"/>
-                <a:ea typeface="Menlo"/>
-              </a:rPr>
-              <a:t>());</a:t>
-            </a:r>
-            <a:endParaRPr/>
-          </a:p>
-          <a:p>
-            <a:pPr>
-              <a:lnSpc>
-                <a:spcPct val="140000"/>
-              </a:lnSpc>
-            </a:pPr>
-            <a:r>
-              <a:rPr sz="900">
-                <a:solidFill>
-                  <a:srgbClr val="24292E"/>
-                </a:solidFill>
-                <a:latin typeface="Menlo"/>
-                <a:ea typeface="Menlo"/>
-              </a:rPr>
-              <a:t>    }</a:t>
-            </a:r>
-            <a:endParaRPr/>
-          </a:p>
-          <a:p>
-            <a:pPr>
-              <a:lnSpc>
-                <a:spcPct val="140000"/>
-              </a:lnSpc>
-            </a:pPr>
-            <a:r>
-              <a:rPr sz="900">
-                <a:solidFill>
-                  <a:srgbClr val="24292E"/>
-                </a:solidFill>
-                <a:latin typeface="Menlo"/>
-                <a:ea typeface="Menlo"/>
-              </a:rPr>
-              <a:t>}</a:t>
-            </a:r>
-            <a:endParaRPr/>
-          </a:p>
-          <a:p>
-            <a:pPr>
-              <a:lnSpc>
-                <a:spcPct val="140000"/>
-              </a:lnSpc>
-            </a:pPr>
-            <a:r>
-              <a:rPr sz="900">
-                <a:solidFill>
-                  <a:srgbClr val="6A737D"/>
-                </a:solidFill>
-                <a:latin typeface="Menlo"/>
-                <a:ea typeface="Menlo"/>
-              </a:rPr>
-              <a:t>// adding Wallet means editing OrderService</a:t>
-            </a:r>
-            <a:endParaRPr/>
-          </a:p>
-          <a:p>
-            <a:pPr>
-              <a:lnSpc>
-                <a:spcPct val="140000"/>
-              </a:lnSpc>
-            </a:pPr>
-            <a:r>
-              <a:rPr sz="900">
-                <a:solidFill>
-                  <a:srgbClr val="6A737D"/>
-                </a:solidFill>
-                <a:latin typeface="Menlo"/>
-                <a:ea typeface="Menlo"/>
-              </a:rPr>
-              <a:t>// and re-testing everything</a:t>
+              <a:t># and re-testing everything</a:t>
             </a:r>
             <a:endParaRPr/>
           </a:p>
@@ -20361,11 +16799,11 @@
         <p:spPr>
           <a:xfrm rot="0" flipH="0" flipV="0">
             <a:off x="6391275" y="1857375"/>
-            <a:ext cx="5248275" cy="2000250"/>
+            <a:ext cx="5248275" cy="1809750"/>
           </a:xfrm>
           <a:prstGeom prst="roundRect">
             <a:avLst>
-              <a:gd name="adj" fmla="val 3810"/>
+              <a:gd name="adj" fmla="val 4211"/>
             </a:avLst>
           </a:prstGeom>
           <a:solidFill>
@@ -20387,7 +16825,7 @@
         <p:spPr>
           <a:xfrm rot="0" flipH="0" flipV="0">
             <a:off x="6543675" y="1990725"/>
-            <a:ext cx="4943475" cy="1733550"/>
+            <a:ext cx="4943475" cy="1543050"/>
           </a:xfrm>
           <a:prstGeom prst="rect"/>
         </p:spPr>
@@ -20404,42 +16842,74 @@
             <a:r>
               <a:rPr sz="900">
                 <a:solidFill>
-                  <a:srgbClr val="D73A49"/>
+                  <a:srgbClr val="E5E7EB"/>
                 </a:solidFill>
                 <a:latin typeface="Menlo"/>
                 <a:ea typeface="Menlo"/>
               </a:rPr>
-              <a:t>class</a:t>
-            </a:r>
+              <a:t>Class OrderService</a:t>
+            </a:r>
+            <a:endParaRPr/>
+          </a:p>
+          <a:p>
+            <a:pPr>
+              <a:lnSpc>
+                <a:spcPct val="140000"/>
+              </a:lnSpc>
+            </a:pPr>
             <a:r>
               <a:rPr sz="900">
                 <a:solidFill>
-                  <a:srgbClr val="24292E"/>
+                  <a:srgbClr val="E5E7EB"/>
                 </a:solidFill>
                 <a:latin typeface="Menlo"/>
                 <a:ea typeface="Menlo"/>
               </a:rPr>
-              <a:t> </a:t>
-            </a:r>
+              <a:t>    - method : PaymentMethod  # any type</a:t>
+            </a:r>
+            <a:endParaRPr/>
+          </a:p>
+          <a:p>
+            <a:pPr>
+              <a:lnSpc>
+                <a:spcPct val="140000"/>
+              </a:lnSpc>
+            </a:pPr>
+            <a:endParaRPr/>
+          </a:p>
+          <a:p>
+            <a:pPr>
+              <a:lnSpc>
+                <a:spcPct val="140000"/>
+              </a:lnSpc>
+            </a:pPr>
             <a:r>
               <a:rPr sz="900">
                 <a:solidFill>
-                  <a:srgbClr val="6F42C1"/>
+                  <a:srgbClr val="E5E7EB"/>
                 </a:solidFill>
                 <a:latin typeface="Menlo"/>
                 <a:ea typeface="Menlo"/>
               </a:rPr>
-              <a:t>OrderService</a:t>
-            </a:r>
+              <a:t>    + checkout(order)</a:t>
+            </a:r>
+            <a:endParaRPr/>
+          </a:p>
+          <a:p>
+            <a:pPr>
+              <a:lnSpc>
+                <a:spcPct val="140000"/>
+              </a:lnSpc>
+            </a:pPr>
             <a:r>
               <a:rPr sz="900">
                 <a:solidFill>
-                  <a:srgbClr val="24292E"/>
+                  <a:srgbClr val="E5E7EB"/>
                 </a:solidFill>
                 <a:latin typeface="Menlo"/>
                 <a:ea typeface="Menlo"/>
               </a:rPr>
-              <a:t> {</a:t>
+              <a:t>        method.pay(order.total())</a:t>
             </a:r>
             <a:endParaRPr/>
           </a:p>
@@ -20449,271 +16919,41 @@
                 <a:spcPct val="140000"/>
               </a:lnSpc>
             </a:pPr>
+            <a:endParaRPr/>
+          </a:p>
+          <a:p>
+            <a:pPr>
+              <a:lnSpc>
+                <a:spcPct val="140000"/>
+              </a:lnSpc>
+            </a:pPr>
             <a:r>
               <a:rPr sz="900">
                 <a:solidFill>
-                  <a:srgbClr val="24292E"/>
+                  <a:srgbClr val="E5E7EB"/>
                 </a:solidFill>
                 <a:latin typeface="Menlo"/>
                 <a:ea typeface="Menlo"/>
               </a:rPr>
-              <a:t>    </a:t>
-            </a:r>
+              <a:t># adding Wallet changes nothing here.</a:t>
+            </a:r>
+            <a:endParaRPr/>
+          </a:p>
+          <a:p>
+            <a:pPr>
+              <a:lnSpc>
+                <a:spcPct val="140000"/>
+              </a:lnSpc>
+            </a:pPr>
             <a:r>
               <a:rPr sz="900">
                 <a:solidFill>
-                  <a:srgbClr val="D73A49"/>
+                  <a:srgbClr val="E5E7EB"/>
                 </a:solidFill>
                 <a:latin typeface="Menlo"/>
                 <a:ea typeface="Menlo"/>
               </a:rPr>
-              <a:t>private</a:t>
-            </a:r>
-            <a:r>
-              <a:rPr sz="900">
-                <a:solidFill>
-                  <a:srgbClr val="24292E"/>
-                </a:solidFill>
-                <a:latin typeface="Menlo"/>
-                <a:ea typeface="Menlo"/>
-              </a:rPr>
-              <a:t> PaymentMethod method;   </a:t>
-            </a:r>
-            <a:r>
-              <a:rPr sz="900">
-                <a:solidFill>
-                  <a:srgbClr val="6A737D"/>
-                </a:solidFill>
-                <a:latin typeface="Menlo"/>
-                <a:ea typeface="Menlo"/>
-              </a:rPr>
-              <a:t>// any type</a:t>
-            </a:r>
-            <a:endParaRPr/>
-          </a:p>
-          <a:p>
-            <a:pPr>
-              <a:lnSpc>
-                <a:spcPct val="140000"/>
-              </a:lnSpc>
-            </a:pPr>
-            <a:r>
-              <a:rPr sz="900">
-                <a:solidFill>
-                  <a:srgbClr val="E5E7EB"/>
-                </a:solidFill>
-                <a:latin typeface="Menlo"/>
-                <a:ea typeface="Menlo"/>
-              </a:rPr>
-              <a:t> </a:t>
-            </a:r>
-            <a:endParaRPr/>
-          </a:p>
-          <a:p>
-            <a:pPr>
-              <a:lnSpc>
-                <a:spcPct val="140000"/>
-              </a:lnSpc>
-            </a:pPr>
-            <a:r>
-              <a:rPr sz="900">
-                <a:solidFill>
-                  <a:srgbClr val="24292E"/>
-                </a:solidFill>
-                <a:latin typeface="Menlo"/>
-                <a:ea typeface="Menlo"/>
-              </a:rPr>
-              <a:t>    </a:t>
-            </a:r>
-            <a:r>
-              <a:rPr sz="900">
-                <a:solidFill>
-                  <a:srgbClr val="D73A49"/>
-                </a:solidFill>
-                <a:latin typeface="Menlo"/>
-                <a:ea typeface="Menlo"/>
-              </a:rPr>
-              <a:t>void</a:t>
-            </a:r>
-            <a:r>
-              <a:rPr sz="900">
-                <a:solidFill>
-                  <a:srgbClr val="24292E"/>
-                </a:solidFill>
-                <a:latin typeface="Menlo"/>
-                <a:ea typeface="Menlo"/>
-              </a:rPr>
-              <a:t> </a:t>
-            </a:r>
-            <a:r>
-              <a:rPr sz="900">
-                <a:solidFill>
-                  <a:srgbClr val="6F42C1"/>
-                </a:solidFill>
-                <a:latin typeface="Menlo"/>
-                <a:ea typeface="Menlo"/>
-              </a:rPr>
-              <a:t>checkout</a:t>
-            </a:r>
-            <a:r>
-              <a:rPr sz="900">
-                <a:solidFill>
-                  <a:srgbClr val="24292E"/>
-                </a:solidFill>
-                <a:latin typeface="Menlo"/>
-                <a:ea typeface="Menlo"/>
-              </a:rPr>
-              <a:t>(Order </a:t>
-            </a:r>
-            <a:r>
-              <a:rPr sz="900">
-                <a:solidFill>
-                  <a:srgbClr val="E36209"/>
-                </a:solidFill>
-                <a:latin typeface="Menlo"/>
-                <a:ea typeface="Menlo"/>
-              </a:rPr>
-              <a:t>o</a:t>
-            </a:r>
-            <a:r>
-              <a:rPr sz="900">
-                <a:solidFill>
-                  <a:srgbClr val="24292E"/>
-                </a:solidFill>
-                <a:latin typeface="Menlo"/>
-                <a:ea typeface="Menlo"/>
-              </a:rPr>
-              <a:t>) {</a:t>
-            </a:r>
-            <a:endParaRPr/>
-          </a:p>
-          <a:p>
-            <a:pPr>
-              <a:lnSpc>
-                <a:spcPct val="140000"/>
-              </a:lnSpc>
-            </a:pPr>
-            <a:r>
-              <a:rPr sz="900">
-                <a:solidFill>
-                  <a:srgbClr val="24292E"/>
-                </a:solidFill>
-                <a:latin typeface="Menlo"/>
-                <a:ea typeface="Menlo"/>
-              </a:rPr>
-              <a:t>        method.</a:t>
-            </a:r>
-            <a:r>
-              <a:rPr sz="900">
-                <a:solidFill>
-                  <a:srgbClr val="6F42C1"/>
-                </a:solidFill>
-                <a:latin typeface="Menlo"/>
-                <a:ea typeface="Menlo"/>
-              </a:rPr>
-              <a:t>pay</a:t>
-            </a:r>
-            <a:r>
-              <a:rPr sz="900">
-                <a:solidFill>
-                  <a:srgbClr val="24292E"/>
-                </a:solidFill>
-                <a:latin typeface="Menlo"/>
-                <a:ea typeface="Menlo"/>
-              </a:rPr>
-              <a:t>(o.</a:t>
-            </a:r>
-            <a:r>
-              <a:rPr sz="900">
-                <a:solidFill>
-                  <a:srgbClr val="6F42C1"/>
-                </a:solidFill>
-                <a:latin typeface="Menlo"/>
-                <a:ea typeface="Menlo"/>
-              </a:rPr>
-              <a:t>total</a:t>
-            </a:r>
-            <a:r>
-              <a:rPr sz="900">
-                <a:solidFill>
-                  <a:srgbClr val="24292E"/>
-                </a:solidFill>
-                <a:latin typeface="Menlo"/>
-                <a:ea typeface="Menlo"/>
-              </a:rPr>
-              <a:t>());</a:t>
-            </a:r>
-            <a:endParaRPr/>
-          </a:p>
-          <a:p>
-            <a:pPr>
-              <a:lnSpc>
-                <a:spcPct val="140000"/>
-              </a:lnSpc>
-            </a:pPr>
-            <a:r>
-              <a:rPr sz="900">
-                <a:solidFill>
-                  <a:srgbClr val="24292E"/>
-                </a:solidFill>
-                <a:latin typeface="Menlo"/>
-                <a:ea typeface="Menlo"/>
-              </a:rPr>
-              <a:t>    }</a:t>
-            </a:r>
-            <a:endParaRPr/>
-          </a:p>
-          <a:p>
-            <a:pPr>
-              <a:lnSpc>
-                <a:spcPct val="140000"/>
-              </a:lnSpc>
-            </a:pPr>
-            <a:r>
-              <a:rPr sz="900">
-                <a:solidFill>
-                  <a:srgbClr val="24292E"/>
-                </a:solidFill>
-                <a:latin typeface="Menlo"/>
-                <a:ea typeface="Menlo"/>
-              </a:rPr>
-              <a:t>}</a:t>
-            </a:r>
-            <a:endParaRPr/>
-          </a:p>
-          <a:p>
-            <a:pPr>
-              <a:lnSpc>
-                <a:spcPct val="140000"/>
-              </a:lnSpc>
-            </a:pPr>
-            <a:r>
-              <a:rPr sz="900">
-                <a:solidFill>
-                  <a:srgbClr val="6A737D"/>
-                </a:solidFill>
-                <a:latin typeface="Menlo"/>
-                <a:ea typeface="Menlo"/>
-              </a:rPr>
-              <a:t>// adding Wallet changes nothing here.</a:t>
-            </a:r>
-            <a:endParaRPr/>
-          </a:p>
-          <a:p>
-            <a:pPr>
-              <a:lnSpc>
-                <a:spcPct val="140000"/>
-              </a:lnSpc>
-            </a:pPr>
-            <a:r>
-              <a:rPr sz="900">
-                <a:solidFill>
-                  <a:srgbClr val="6A737D"/>
-                </a:solidFill>
-                <a:latin typeface="Menlo"/>
-                <a:ea typeface="Menlo"/>
-              </a:rPr>
-              <a:t>// new class, same contract.</a:t>
+              <a:t># new class, same contract.</a:t>
             </a:r>
             <a:endParaRPr/>
           </a:p>
@@ -20729,7 +16969,7 @@
   <p:cSld>
     <p:spTree>
       <p:nvGrpSpPr>
-        <p:cNvPr id="437" name="" descr="&lt;Slide style={{ background: '#FFFFFF', padding: 0 }}&gt;&#10;  &lt;Box style={{ height: 72, background: '#1E4FA8', padding: '0 40px', flexDirection: 'row', alignItems: 'center', justifyContent: 'space-between' }}&gt;&#10;    &lt;Text style={{ fontSize: 15, color: '#B9CDF0', letterSpacing: 1 }}&gt;ISAD · INFORMATION SYSTEMS ANALYSIS &amp;amp; DESIGN&lt;/Text&gt;&#10;    &lt;Text style={{ fontSize: 15, color: '#B9CDF0' }}&gt;W02 · PAYOFF&lt;/Text&gt;&#10;  &lt;/Box&gt;&#10;  &lt;Box style={{ padding: '20px 40px 0 40px', flexDirection: 'row', alignItems: 'center', justifyContent: 'space-between' }}&gt;&#10;    &lt;Text style={{ fontSize: 32, fontWeight: 'bold', color: '#0E3F8C' }}&gt;Closing the Loop from Week 01&lt;/Text&gt;&#10;    &lt;Box style={{ padding: '5px 14px', background: '#E8EFF8', borderRadius: 14 }}&gt;&#10;      &lt;Text style={{ fontSize: 13, color: '#1E4FA8', fontWeight: 'bold' }}&gt;W01 PROBLEM → W02 TOOL&lt;/Text&gt;&#10;    &lt;/Box&gt;&#10;  &lt;/Box&gt;&#10;  &lt;Box style={{ flex: 1, padding: '14px 40px 0 40px', flexDirection: 'row', gap: 22 }}&gt;&#10;    &lt;Box style={{ flex: 1, flexDirection: 'column', gap: 9 }}&gt;&#10;      &lt;Box style={{ flexDirection: 'row', alignItems: 'center', gap: 9 }}&gt;&#10;        &lt;FAIcon name='times-circle' style={{ fill: '#D9534F', width: 18, height: 18 }} /&gt;&#10;        &lt;Text style={{ fontSize: 16, fontWeight: 'bold', color: '#D9534F' }}&gt;Last week: the smell&lt;/Text&gt;&#10;      &lt;/Box&gt;&#10;      &lt;CodeBlock code={`if (type.equals(&quot;CARD&quot;)) {&#10;    chargeCard(order);&#10;} else if (type.equals(&quot;WECHAT&quot;)) {&#10;    chargeWechat(order);&#10;} else if (type.equals(&quot;ALIPAY&quot;)) {&#10;    chargeAlipay(order);&#10;} else {&#10;    throw new UnsupportedException();&#10;}&#10;&#10;// every new type = edit this method&#10;// and re-test every branch`} language='java' width={500} fontSize={11} /&gt;&#10;    &lt;/Box&gt;&#10;    &lt;Box style={{ width: 52, justifyContent: 'center', alignItems: 'center' }}&gt;&#10;      &lt;FAIcon name='long-arrow-alt-right' style={{ fill: '#3D7BD9', width: 34, height: 34 }} /&gt;&#10;    &lt;/Box&gt;&#10;    &lt;Box style={{ flex: 1, flexDirection: 'column', gap: 9 }}&gt;&#10;      &lt;Box style={{ flexDirection: 'row', alignItems: 'center', gap: 9 }}&gt;&#10;        &lt;FAIcon name='check-circle' style={{ fill: '#1E4FA8', width: 18, height: 18 }} /&gt;&#10;        &lt;Text style={{ fontSize: 16, fontWeight: 'bold', color: '#0E3F8C' }}&gt;This week: the tool&lt;/Text&gt;&#10;      &lt;/Box&gt;&#10;      &lt;CodeBlock code={`Receipt r = method.pay(order.total());&#10;&#10;// a new payment type?&#10;class Bursary implements PaymentMethod {&#10;    public Receipt pay(Money amount) {&#10;        return award.deduct(amount);&#10;    }&#10;}&#10;&#10;// no existing line edited.&#10;// no existing test rewritten.`} language='java' width={500} fontSize={11} /&gt;&#10;    &lt;/Box&gt;&#10;  &lt;/Box&gt;&#10;  &lt;Box style={{ height: 48, background: '#0E3F8C', padding: '0 40px', flexDirection: 'row', alignItems: 'center', justifyContent: 'center' }}&gt;&#10;    &lt;Text style={{ fontSize: 17, color: '#FFFFFF', fontWeight: '600' }}&gt;Same problem, one week apart. That gap is what this course is training.&lt;/Text&gt;&#10;  &lt;/Box&gt;&#10;&lt;/Slide&gt;"/>
+        <p:cNvPr id="437" name="" descr="&lt;Slide style={{ background: '#FFFFFF', padding: 0 }}&gt;&#10;  &lt;Box style={{ height: 72, background: '#1E4FA8', padding: '0 40px', flexDirection: 'row', alignItems: 'center', justifyContent: 'space-between' }}&gt;&#10;    &lt;Text style={{ fontSize: 15, color: '#B9CDF0', letterSpacing: 1 }}&gt;ISAD · INFORMATION SYSTEMS ANALYSIS &amp;amp; DESIGN&lt;/Text&gt;&#10;    &lt;Text style={{ fontSize: 15, color: '#B9CDF0' }}&gt;W02 · PAYOFF&lt;/Text&gt;&#10;  &lt;/Box&gt;&#10;  &lt;Box style={{ padding: '20px 40px 0 40px', flexDirection: 'row', alignItems: 'center', justifyContent: 'space-between' }}&gt;&#10;    &lt;Text style={{ fontSize: 32, fontWeight: 'bold', color: '#0E3F8C' }}&gt;Closing the Loop from Week 01&lt;/Text&gt;&#10;    &lt;Box style={{ padding: '5px 14px', background: '#E8EFF8', borderRadius: 14 }}&gt;&#10;      &lt;Text style={{ fontSize: 13, color: '#1E4FA8', fontWeight: 'bold' }}&gt;W01 PROBLEM → W02 TOOL&lt;/Text&gt;&#10;    &lt;/Box&gt;&#10;  &lt;/Box&gt;&#10;  &lt;Box style={{ flex: 1, padding: '14px 40px 0 40px', flexDirection: 'row', gap: 22 }}&gt;&#10;    &lt;Box style={{ flex: 1, flexDirection: 'column', gap: 9 }}&gt;&#10;      &lt;Box style={{ flexDirection: 'row', alignItems: 'center', gap: 9 }}&gt;&#10;        &lt;FAIcon name='times-circle' style={{ fill: '#D9534F', width: 18, height: 18 }} /&gt;&#10;        &lt;Text style={{ fontSize: 16, fontWeight: 'bold', color: '#D9534F' }}&gt;Last week: the smell&lt;/Text&gt;&#10;      &lt;/Box&gt;&#10;      &lt;CodeBlock code={`if type = CARD    -&gt; chargeCard(order)&#10;if type = WECHAT  -&gt; chargeWechat(order)&#10;if type = ALIPAY  -&gt; chargeAlipay(order)&#10;otherwise         -&gt; refuse: no such type&#10;&#10;# every new type = edit this method&#10;# and re-test every branch`} language='text' width={500} fontSize={11} /&gt;&#10;    &lt;/Box&gt;&#10;    &lt;Box style={{ width: 52, justifyContent: 'center', alignItems: 'center' }}&gt;&#10;      &lt;FAIcon name='long-arrow-alt-right' style={{ fill: '#3D7BD9', width: 34, height: 34 }} /&gt;&#10;    &lt;/Box&gt;&#10;    &lt;Box style={{ flex: 1, flexDirection: 'column', gap: 9 }}&gt;&#10;      &lt;Box style={{ flexDirection: 'row', alignItems: 'center', gap: 9 }}&gt;&#10;        &lt;FAIcon name='check-circle' style={{ fill: '#1E4FA8', width: 18, height: 18 }} /&gt;&#10;        &lt;Text style={{ fontSize: 16, fontWeight: 'bold', color: '#0E3F8C' }}&gt;This week: the tool&lt;/Text&gt;&#10;      &lt;/Box&gt;&#10;      &lt;CodeBlock code={`r = method.pay(order.total())&#10;&#10;# a new payment type?&#10;Class Bursary implements PaymentMethod&#10;    + pay(amount) : Receipt&#10;        return award.deduct(amount)&#10;&#10;# no existing line edited.&#10;# no existing test rewritten.`} language='text' width={500} fontSize={11} /&gt;&#10;    &lt;/Box&gt;&#10;  &lt;/Box&gt;&#10;  &lt;Box style={{ height: 48, background: '#0E3F8C', padding: '0 40px', flexDirection: 'row', alignItems: 'center', justifyContent: 'center' }}&gt;&#10;    &lt;Text style={{ fontSize: 17, color: '#FFFFFF', fontWeight: '600' }}&gt;Same problem, one week apart. That gap is what this course is training.&lt;/Text&gt;&#10;  &lt;/Box&gt;&#10;&lt;/Slide&gt;"/>
         <p:cNvGrpSpPr/>
         <p:nvPr/>
       </p:nvGrpSpPr>
@@ -21186,11 +17426,11 @@
         <p:spPr>
           <a:xfrm rot="0" flipH="0" flipV="0">
             <a:off x="381000" y="1657350"/>
-            <a:ext cx="5257800" cy="2381250"/>
+            <a:ext cx="5257800" cy="1504950"/>
           </a:xfrm>
           <a:prstGeom prst="roundRect">
             <a:avLst>
-              <a:gd name="adj" fmla="val 3200"/>
+              <a:gd name="adj" fmla="val 5063"/>
             </a:avLst>
           </a:prstGeom>
           <a:solidFill>
@@ -21212,7 +17452,7 @@
         <p:spPr>
           <a:xfrm rot="0" flipH="0" flipV="0">
             <a:off x="533400" y="1790700"/>
-            <a:ext cx="4953000" cy="2114550"/>
+            <a:ext cx="4953000" cy="1238250"/>
           </a:xfrm>
           <a:prstGeom prst="rect"/>
         </p:spPr>
@@ -21229,560 +17469,110 @@
             <a:r>
               <a:rPr sz="825">
                 <a:solidFill>
-                  <a:srgbClr val="D73A49"/>
+                  <a:srgbClr val="E5E7EB"/>
                 </a:solidFill>
                 <a:latin typeface="Menlo"/>
                 <a:ea typeface="Menlo"/>
               </a:rPr>
-              <a:t>if</a:t>
-            </a:r>
+              <a:t>if type = CARD    -&gt; chargeCard(order)</a:t>
+            </a:r>
+            <a:endParaRPr/>
+          </a:p>
+          <a:p>
+            <a:pPr>
+              <a:lnSpc>
+                <a:spcPct val="140000"/>
+              </a:lnSpc>
+            </a:pPr>
             <a:r>
               <a:rPr sz="825">
                 <a:solidFill>
-                  <a:srgbClr val="24292E"/>
+                  <a:srgbClr val="E5E7EB"/>
                 </a:solidFill>
                 <a:latin typeface="Menlo"/>
                 <a:ea typeface="Menlo"/>
               </a:rPr>
-              <a:t> (type.</a:t>
-            </a:r>
+              <a:t>if type = WECHAT  -&gt; chargeWechat(order)</a:t>
+            </a:r>
+            <a:endParaRPr/>
+          </a:p>
+          <a:p>
+            <a:pPr>
+              <a:lnSpc>
+                <a:spcPct val="140000"/>
+              </a:lnSpc>
+            </a:pPr>
             <a:r>
               <a:rPr sz="825">
                 <a:solidFill>
-                  <a:srgbClr val="6F42C1"/>
+                  <a:srgbClr val="E5E7EB"/>
                 </a:solidFill>
                 <a:latin typeface="Menlo"/>
                 <a:ea typeface="Menlo"/>
               </a:rPr>
-              <a:t>equals</a:t>
-            </a:r>
+              <a:t>if type = ALIPAY  -&gt; chargeAlipay(order)</a:t>
+            </a:r>
+            <a:endParaRPr/>
+          </a:p>
+          <a:p>
+            <a:pPr>
+              <a:lnSpc>
+                <a:spcPct val="140000"/>
+              </a:lnSpc>
+            </a:pPr>
             <a:r>
               <a:rPr sz="825">
                 <a:solidFill>
-                  <a:srgbClr val="24292E"/>
+                  <a:srgbClr val="E5E7EB"/>
                 </a:solidFill>
                 <a:latin typeface="Menlo"/>
                 <a:ea typeface="Menlo"/>
               </a:rPr>
-              <a:t>(</a:t>
-            </a:r>
+              <a:t>otherwise         -&gt; refuse: no such type</a:t>
+            </a:r>
+            <a:endParaRPr/>
+          </a:p>
+          <a:p>
+            <a:pPr>
+              <a:lnSpc>
+                <a:spcPct val="140000"/>
+              </a:lnSpc>
+            </a:pPr>
+            <a:endParaRPr/>
+          </a:p>
+          <a:p>
+            <a:pPr>
+              <a:lnSpc>
+                <a:spcPct val="140000"/>
+              </a:lnSpc>
+            </a:pPr>
             <a:r>
               <a:rPr sz="825">
                 <a:solidFill>
-                  <a:srgbClr val="032F62"/>
+                  <a:srgbClr val="E5E7EB"/>
                 </a:solidFill>
                 <a:latin typeface="Menlo"/>
                 <a:ea typeface="Menlo"/>
               </a:rPr>
-              <a:t>"CARD"</a:t>
-            </a:r>
+              <a:t># every new type = edit this method</a:t>
+            </a:r>
+            <a:endParaRPr/>
+          </a:p>
+          <a:p>
+            <a:pPr>
+              <a:lnSpc>
+                <a:spcPct val="140000"/>
+              </a:lnSpc>
+            </a:pPr>
             <a:r>
               <a:rPr sz="825">
                 <a:solidFill>
-                  <a:srgbClr val="24292E"/>
+                  <a:srgbClr val="E5E7EB"/>
                 </a:solidFill>
                 <a:latin typeface="Menlo"/>
                 <a:ea typeface="Menlo"/>
               </a:rPr>
-              <a:t>)) {</a:t>
-            </a:r>
-            <a:endParaRPr/>
-          </a:p>
-          <a:p>
-            <a:pPr>
-              <a:lnSpc>
-                <a:spcPct val="140000"/>
-              </a:lnSpc>
-            </a:pPr>
-            <a:r>
-              <a:rPr sz="825">
-                <a:solidFill>
-                  <a:srgbClr val="24292E"/>
-                </a:solidFill>
-                <a:latin typeface="Menlo"/>
-                <a:ea typeface="Menlo"/>
-              </a:rPr>
-              <a:t>    </a:t>
-            </a:r>
-            <a:r>
-              <a:rPr sz="825">
-                <a:solidFill>
-                  <a:srgbClr val="6F42C1"/>
-                </a:solidFill>
-                <a:latin typeface="Menlo"/>
-                <a:ea typeface="Menlo"/>
-              </a:rPr>
-              <a:t>chargeCard</a:t>
-            </a:r>
-            <a:r>
-              <a:rPr sz="825">
-                <a:solidFill>
-                  <a:srgbClr val="24292E"/>
-                </a:solidFill>
-                <a:latin typeface="Menlo"/>
-                <a:ea typeface="Menlo"/>
-              </a:rPr>
-              <a:t>(order);</a:t>
-            </a:r>
-            <a:endParaRPr/>
-          </a:p>
-          <a:p>
-            <a:pPr>
-              <a:lnSpc>
-                <a:spcPct val="140000"/>
-              </a:lnSpc>
-            </a:pPr>
-            <a:r>
-              <a:rPr sz="825">
-                <a:solidFill>
-                  <a:srgbClr val="24292E"/>
-                </a:solidFill>
-                <a:latin typeface="Menlo"/>
-                <a:ea typeface="Menlo"/>
-              </a:rPr>
-              <a:t>} </a:t>
-            </a:r>
-            <a:r>
-              <a:rPr sz="825">
-                <a:solidFill>
-                  <a:srgbClr val="D73A49"/>
-                </a:solidFill>
-                <a:latin typeface="Menlo"/>
-                <a:ea typeface="Menlo"/>
-              </a:rPr>
-              <a:t>else</a:t>
-            </a:r>
-            <a:r>
-              <a:rPr sz="825">
-                <a:solidFill>
-                  <a:srgbClr val="24292E"/>
-                </a:solidFill>
-                <a:latin typeface="Menlo"/>
-                <a:ea typeface="Menlo"/>
-              </a:rPr>
-              <a:t> </a:t>
-            </a:r>
-            <a:r>
-              <a:rPr sz="825">
-                <a:solidFill>
-                  <a:srgbClr val="D73A49"/>
-                </a:solidFill>
-                <a:latin typeface="Menlo"/>
-                <a:ea typeface="Menlo"/>
-              </a:rPr>
-              <a:t>if</a:t>
-            </a:r>
-            <a:r>
-              <a:rPr sz="825">
-                <a:solidFill>
-                  <a:srgbClr val="24292E"/>
-                </a:solidFill>
-                <a:latin typeface="Menlo"/>
-                <a:ea typeface="Menlo"/>
-              </a:rPr>
-              <a:t> (type.</a:t>
-            </a:r>
-            <a:r>
-              <a:rPr sz="825">
-                <a:solidFill>
-                  <a:srgbClr val="6F42C1"/>
-                </a:solidFill>
-                <a:latin typeface="Menlo"/>
-                <a:ea typeface="Menlo"/>
-              </a:rPr>
-              <a:t>equals</a:t>
-            </a:r>
-            <a:r>
-              <a:rPr sz="825">
-                <a:solidFill>
-                  <a:srgbClr val="24292E"/>
-                </a:solidFill>
-                <a:latin typeface="Menlo"/>
-                <a:ea typeface="Menlo"/>
-              </a:rPr>
-              <a:t>(</a:t>
-            </a:r>
-            <a:r>
-              <a:rPr sz="825">
-                <a:solidFill>
-                  <a:srgbClr val="032F62"/>
-                </a:solidFill>
-                <a:latin typeface="Menlo"/>
-                <a:ea typeface="Menlo"/>
-              </a:rPr>
-              <a:t>"WECHAT"</a:t>
-            </a:r>
-            <a:r>
-              <a:rPr sz="825">
-                <a:solidFill>
-                  <a:srgbClr val="24292E"/>
-                </a:solidFill>
-                <a:latin typeface="Menlo"/>
-                <a:ea typeface="Menlo"/>
-              </a:rPr>
-              <a:t>)) {</a:t>
-            </a:r>
-            <a:endParaRPr/>
-          </a:p>
-          <a:p>
-            <a:pPr>
-              <a:lnSpc>
-                <a:spcPct val="140000"/>
-              </a:lnSpc>
-            </a:pPr>
-            <a:r>
-              <a:rPr sz="825">
-                <a:solidFill>
-                  <a:srgbClr val="24292E"/>
-                </a:solidFill>
-                <a:latin typeface="Menlo"/>
-                <a:ea typeface="Menlo"/>
-              </a:rPr>
-              <a:t>    </a:t>
-            </a:r>
-            <a:r>
-              <a:rPr sz="825">
-                <a:solidFill>
-                  <a:srgbClr val="6F42C1"/>
-                </a:solidFill>
-                <a:latin typeface="Menlo"/>
-                <a:ea typeface="Menlo"/>
-              </a:rPr>
-              <a:t>chargeWechat</a:t>
-            </a:r>
-            <a:r>
-              <a:rPr sz="825">
-                <a:solidFill>
-                  <a:srgbClr val="24292E"/>
-                </a:solidFill>
-                <a:latin typeface="Menlo"/>
-                <a:ea typeface="Menlo"/>
-              </a:rPr>
-              <a:t>(order);</a:t>
-            </a:r>
-            <a:endParaRPr/>
-          </a:p>
-          <a:p>
-            <a:pPr>
-              <a:lnSpc>
-                <a:spcPct val="140000"/>
-              </a:lnSpc>
-            </a:pPr>
-            <a:r>
-              <a:rPr sz="825">
-                <a:solidFill>
-                  <a:srgbClr val="24292E"/>
-                </a:solidFill>
-                <a:latin typeface="Menlo"/>
-                <a:ea typeface="Menlo"/>
-              </a:rPr>
-              <a:t>} </a:t>
-            </a:r>
-            <a:r>
-              <a:rPr sz="825">
-                <a:solidFill>
-                  <a:srgbClr val="D73A49"/>
-                </a:solidFill>
-                <a:latin typeface="Menlo"/>
-                <a:ea typeface="Menlo"/>
-              </a:rPr>
-              <a:t>else</a:t>
-            </a:r>
-            <a:r>
-              <a:rPr sz="825">
-                <a:solidFill>
-                  <a:srgbClr val="24292E"/>
-                </a:solidFill>
-                <a:latin typeface="Menlo"/>
-                <a:ea typeface="Menlo"/>
-              </a:rPr>
-              <a:t> </a:t>
-            </a:r>
-            <a:r>
-              <a:rPr sz="825">
-                <a:solidFill>
-                  <a:srgbClr val="D73A49"/>
-                </a:solidFill>
-                <a:latin typeface="Menlo"/>
-                <a:ea typeface="Menlo"/>
-              </a:rPr>
-              <a:t>if</a:t>
-            </a:r>
-            <a:r>
-              <a:rPr sz="825">
-                <a:solidFill>
-                  <a:srgbClr val="24292E"/>
-                </a:solidFill>
-                <a:latin typeface="Menlo"/>
-                <a:ea typeface="Menlo"/>
-              </a:rPr>
-              <a:t> (type.</a:t>
-            </a:r>
-            <a:r>
-              <a:rPr sz="825">
-                <a:solidFill>
-                  <a:srgbClr val="6F42C1"/>
-                </a:solidFill>
-                <a:latin typeface="Menlo"/>
-                <a:ea typeface="Menlo"/>
-              </a:rPr>
-              <a:t>equals</a:t>
-            </a:r>
-            <a:r>
-              <a:rPr sz="825">
-                <a:solidFill>
-                  <a:srgbClr val="24292E"/>
-                </a:solidFill>
-                <a:latin typeface="Menlo"/>
-                <a:ea typeface="Menlo"/>
-              </a:rPr>
-              <a:t>(</a:t>
-            </a:r>
-            <a:r>
-              <a:rPr sz="825">
-                <a:solidFill>
-                  <a:srgbClr val="032F62"/>
-                </a:solidFill>
-                <a:latin typeface="Menlo"/>
-                <a:ea typeface="Menlo"/>
-              </a:rPr>
-              <a:t>"ALIPAY"</a:t>
-            </a:r>
-            <a:r>
-              <a:rPr sz="825">
-                <a:solidFill>
-                  <a:srgbClr val="24292E"/>
-                </a:solidFill>
-                <a:latin typeface="Menlo"/>
-                <a:ea typeface="Menlo"/>
-              </a:rPr>
-              <a:t>)) {</a:t>
-            </a:r>
-            <a:endParaRPr/>
-          </a:p>
-          <a:p>
-            <a:pPr>
-              <a:lnSpc>
-                <a:spcPct val="140000"/>
-              </a:lnSpc>
-            </a:pPr>
-            <a:r>
-              <a:rPr sz="825">
-                <a:solidFill>
-                  <a:srgbClr val="24292E"/>
-                </a:solidFill>
-                <a:latin typeface="Menlo"/>
-                <a:ea typeface="Menlo"/>
-              </a:rPr>
-              <a:t>    </a:t>
-            </a:r>
-            <a:r>
-              <a:rPr sz="825">
-                <a:solidFill>
-                  <a:srgbClr val="6F42C1"/>
-                </a:solidFill>
-                <a:latin typeface="Menlo"/>
-                <a:ea typeface="Menlo"/>
-              </a:rPr>
-              <a:t>chargeAlipay</a:t>
-            </a:r>
-            <a:r>
-              <a:rPr sz="825">
-                <a:solidFill>
-                  <a:srgbClr val="24292E"/>
-                </a:solidFill>
-                <a:latin typeface="Menlo"/>
-                <a:ea typeface="Menlo"/>
-              </a:rPr>
-              <a:t>(order);</a:t>
-            </a:r>
-            <a:endParaRPr/>
-          </a:p>
-          <a:p>
-            <a:pPr>
-              <a:lnSpc>
-                <a:spcPct val="140000"/>
-              </a:lnSpc>
-            </a:pPr>
-            <a:r>
-              <a:rPr sz="825">
-                <a:solidFill>
-                  <a:srgbClr val="24292E"/>
-                </a:solidFill>
-                <a:latin typeface="Menlo"/>
-                <a:ea typeface="Menlo"/>
-              </a:rPr>
-              <a:t>} </a:t>
-            </a:r>
-            <a:r>
-              <a:rPr sz="825">
-                <a:solidFill>
-                  <a:srgbClr val="D73A49"/>
-                </a:solidFill>
-                <a:latin typeface="Menlo"/>
-                <a:ea typeface="Menlo"/>
-              </a:rPr>
-              <a:t>else</a:t>
-            </a:r>
-            <a:r>
-              <a:rPr sz="825">
-                <a:solidFill>
-                  <a:srgbClr val="24292E"/>
-                </a:solidFill>
-                <a:latin typeface="Menlo"/>
-                <a:ea typeface="Menlo"/>
-              </a:rPr>
-              <a:t> {</a:t>
-            </a:r>
-            <a:endParaRPr/>
-          </a:p>
-          <a:p>
-            <a:pPr>
-              <a:lnSpc>
-                <a:spcPct val="140000"/>
-              </a:lnSpc>
-            </a:pPr>
-            <a:r>
-              <a:rPr sz="825">
-                <a:solidFill>
-                  <a:srgbClr val="24292E"/>
-                </a:solidFill>
-                <a:latin typeface="Menlo"/>
-                <a:ea typeface="Menlo"/>
-              </a:rPr>
-              <a:t>    </a:t>
-            </a:r>
-            <a:r>
-              <a:rPr sz="825">
-                <a:solidFill>
-                  <a:srgbClr val="D73A49"/>
-                </a:solidFill>
-                <a:latin typeface="Menlo"/>
-                <a:ea typeface="Menlo"/>
-              </a:rPr>
-              <a:t>throw</a:t>
-            </a:r>
-            <a:r>
-              <a:rPr sz="825">
-                <a:solidFill>
-                  <a:srgbClr val="24292E"/>
-                </a:solidFill>
-                <a:latin typeface="Menlo"/>
-                <a:ea typeface="Menlo"/>
-              </a:rPr>
-              <a:t> </a:t>
-            </a:r>
-            <a:r>
-              <a:rPr sz="825">
-                <a:solidFill>
-                  <a:srgbClr val="D73A49"/>
-                </a:solidFill>
-                <a:latin typeface="Menlo"/>
-                <a:ea typeface="Menlo"/>
-              </a:rPr>
-              <a:t>new</a:t>
-            </a:r>
-            <a:r>
-              <a:rPr sz="825">
-                <a:solidFill>
-                  <a:srgbClr val="24292E"/>
-                </a:solidFill>
-                <a:latin typeface="Menlo"/>
-                <a:ea typeface="Menlo"/>
-              </a:rPr>
-              <a:t> </a:t>
-            </a:r>
-            <a:r>
-              <a:rPr sz="825">
-                <a:solidFill>
-                  <a:srgbClr val="6F42C1"/>
-                </a:solidFill>
-                <a:latin typeface="Menlo"/>
-                <a:ea typeface="Menlo"/>
-              </a:rPr>
-              <a:t>UnsupportedException</a:t>
-            </a:r>
-            <a:r>
-              <a:rPr sz="825">
-                <a:solidFill>
-                  <a:srgbClr val="24292E"/>
-                </a:solidFill>
-                <a:latin typeface="Menlo"/>
-                <a:ea typeface="Menlo"/>
-              </a:rPr>
-              <a:t>();</a:t>
-            </a:r>
-            <a:endParaRPr/>
-          </a:p>
-          <a:p>
-            <a:pPr>
-              <a:lnSpc>
-                <a:spcPct val="140000"/>
-              </a:lnSpc>
-            </a:pPr>
-            <a:r>
-              <a:rPr sz="825">
-                <a:solidFill>
-                  <a:srgbClr val="24292E"/>
-                </a:solidFill>
-                <a:latin typeface="Menlo"/>
-                <a:ea typeface="Menlo"/>
-              </a:rPr>
-              <a:t>}</a:t>
-            </a:r>
-            <a:endParaRPr/>
-          </a:p>
-          <a:p>
-            <a:pPr>
-              <a:lnSpc>
-                <a:spcPct val="140000"/>
-              </a:lnSpc>
-            </a:pPr>
-            <a:r>
-              <a:rPr sz="825">
-                <a:solidFill>
-                  <a:srgbClr val="E5E7EB"/>
-                </a:solidFill>
-                <a:latin typeface="Menlo"/>
-                <a:ea typeface="Menlo"/>
-              </a:rPr>
-              <a:t> </a:t>
-            </a:r>
-            <a:endParaRPr/>
-          </a:p>
-          <a:p>
-            <a:pPr>
-              <a:lnSpc>
-                <a:spcPct val="140000"/>
-              </a:lnSpc>
-            </a:pPr>
-            <a:r>
-              <a:rPr sz="825">
-                <a:solidFill>
-                  <a:srgbClr val="6A737D"/>
-                </a:solidFill>
-                <a:latin typeface="Menlo"/>
-                <a:ea typeface="Menlo"/>
-              </a:rPr>
-              <a:t>// every new type = edit this method</a:t>
-            </a:r>
-            <a:endParaRPr/>
-          </a:p>
-          <a:p>
-            <a:pPr>
-              <a:lnSpc>
-                <a:spcPct val="140000"/>
-              </a:lnSpc>
-            </a:pPr>
-            <a:r>
-              <a:rPr sz="825">
-                <a:solidFill>
-                  <a:srgbClr val="6A737D"/>
-                </a:solidFill>
-                <a:latin typeface="Menlo"/>
-                <a:ea typeface="Menlo"/>
-              </a:rPr>
-              <a:t>// and re-test every branch</a:t>
+              <a:t># and re-test every branch</a:t>
             </a:r>
             <a:endParaRPr/>
           </a:p>
@@ -21797,11 +17587,11 @@
         <p:spPr>
           <a:xfrm rot="0" flipH="0" flipV="0">
             <a:off x="6553200" y="1657350"/>
-            <a:ext cx="5257800" cy="2209800"/>
+            <a:ext cx="5257800" cy="1857375"/>
           </a:xfrm>
           <a:prstGeom prst="roundRect">
             <a:avLst>
-              <a:gd name="adj" fmla="val 3448"/>
+              <a:gd name="adj" fmla="val 4103"/>
             </a:avLst>
           </a:prstGeom>
           <a:solidFill>
@@ -21823,7 +17613,7 @@
         <p:spPr>
           <a:xfrm rot="0" flipH="0" flipV="0">
             <a:off x="6705600" y="1790700"/>
-            <a:ext cx="4953000" cy="1943100"/>
+            <a:ext cx="4953000" cy="1590675"/>
           </a:xfrm>
           <a:prstGeom prst="rect"/>
         </p:spPr>
@@ -21840,422 +17630,136 @@
             <a:r>
               <a:rPr sz="825">
                 <a:solidFill>
-                  <a:srgbClr val="24292E"/>
+                  <a:srgbClr val="E5E7EB"/>
                 </a:solidFill>
                 <a:latin typeface="Menlo"/>
                 <a:ea typeface="Menlo"/>
               </a:rPr>
-              <a:t>Receipt r </a:t>
-            </a:r>
+              <a:t>r = method.pay(order.total())</a:t>
+            </a:r>
+            <a:endParaRPr/>
+          </a:p>
+          <a:p>
+            <a:pPr>
+              <a:lnSpc>
+                <a:spcPct val="140000"/>
+              </a:lnSpc>
+            </a:pPr>
+            <a:endParaRPr/>
+          </a:p>
+          <a:p>
+            <a:pPr>
+              <a:lnSpc>
+                <a:spcPct val="140000"/>
+              </a:lnSpc>
+            </a:pPr>
             <a:r>
               <a:rPr sz="825">
                 <a:solidFill>
-                  <a:srgbClr val="D73A49"/>
+                  <a:srgbClr val="E5E7EB"/>
                 </a:solidFill>
                 <a:latin typeface="Menlo"/>
                 <a:ea typeface="Menlo"/>
               </a:rPr>
-              <a:t>=</a:t>
-            </a:r>
+              <a:t># a new payment type?</a:t>
+            </a:r>
+            <a:endParaRPr/>
+          </a:p>
+          <a:p>
+            <a:pPr>
+              <a:lnSpc>
+                <a:spcPct val="140000"/>
+              </a:lnSpc>
+            </a:pPr>
             <a:r>
               <a:rPr sz="825">
                 <a:solidFill>
-                  <a:srgbClr val="24292E"/>
+                  <a:srgbClr val="E5E7EB"/>
                 </a:solidFill>
                 <a:latin typeface="Menlo"/>
                 <a:ea typeface="Menlo"/>
               </a:rPr>
-              <a:t> method.</a:t>
-            </a:r>
+              <a:t>Class Bursary implements PaymentMethod</a:t>
+            </a:r>
+            <a:endParaRPr/>
+          </a:p>
+          <a:p>
+            <a:pPr>
+              <a:lnSpc>
+                <a:spcPct val="140000"/>
+              </a:lnSpc>
+            </a:pPr>
             <a:r>
               <a:rPr sz="825">
                 <a:solidFill>
-                  <a:srgbClr val="6F42C1"/>
+                  <a:srgbClr val="E5E7EB"/>
                 </a:solidFill>
                 <a:latin typeface="Menlo"/>
                 <a:ea typeface="Menlo"/>
               </a:rPr>
-              <a:t>pay</a:t>
-            </a:r>
+              <a:t>    + pay(amount) : Receipt</a:t>
+            </a:r>
+            <a:endParaRPr/>
+          </a:p>
+          <a:p>
+            <a:pPr>
+              <a:lnSpc>
+                <a:spcPct val="140000"/>
+              </a:lnSpc>
+            </a:pPr>
             <a:r>
               <a:rPr sz="825">
                 <a:solidFill>
-                  <a:srgbClr val="24292E"/>
+                  <a:srgbClr val="E5E7EB"/>
                 </a:solidFill>
                 <a:latin typeface="Menlo"/>
                 <a:ea typeface="Menlo"/>
               </a:rPr>
-              <a:t>(order.</a:t>
-            </a:r>
+              <a:t>        return award.deduct(amount)</a:t>
+            </a:r>
+            <a:endParaRPr/>
+          </a:p>
+          <a:p>
+            <a:pPr>
+              <a:lnSpc>
+                <a:spcPct val="140000"/>
+              </a:lnSpc>
+            </a:pPr>
+            <a:endParaRPr/>
+          </a:p>
+          <a:p>
+            <a:pPr>
+              <a:lnSpc>
+                <a:spcPct val="140000"/>
+              </a:lnSpc>
+            </a:pPr>
             <a:r>
               <a:rPr sz="825">
                 <a:solidFill>
-                  <a:srgbClr val="6F42C1"/>
+                  <a:srgbClr val="E5E7EB"/>
                 </a:solidFill>
                 <a:latin typeface="Menlo"/>
                 <a:ea typeface="Menlo"/>
               </a:rPr>
-              <a:t>total</a:t>
-            </a:r>
+              <a:t># no existing line edited.</a:t>
+            </a:r>
+            <a:endParaRPr/>
+          </a:p>
+          <a:p>
+            <a:pPr>
+              <a:lnSpc>
+                <a:spcPct val="140000"/>
+              </a:lnSpc>
+            </a:pPr>
             <a:r>
               <a:rPr sz="825">
                 <a:solidFill>
-                  <a:srgbClr val="24292E"/>
+                  <a:srgbClr val="E5E7EB"/>
                 </a:solidFill>
                 <a:latin typeface="Menlo"/>
                 <a:ea typeface="Menlo"/>
               </a:rPr>
-              <a:t>());</a:t>
-            </a:r>
-            <a:endParaRPr/>
-          </a:p>
-          <a:p>
-            <a:pPr>
-              <a:lnSpc>
-                <a:spcPct val="140000"/>
-              </a:lnSpc>
-            </a:pPr>
-            <a:r>
-              <a:rPr sz="825">
-                <a:solidFill>
-                  <a:srgbClr val="E5E7EB"/>
-                </a:solidFill>
-                <a:latin typeface="Menlo"/>
-                <a:ea typeface="Menlo"/>
-              </a:rPr>
-              <a:t> </a:t>
-            </a:r>
-            <a:endParaRPr/>
-          </a:p>
-          <a:p>
-            <a:pPr>
-              <a:lnSpc>
-                <a:spcPct val="140000"/>
-              </a:lnSpc>
-            </a:pPr>
-            <a:r>
-              <a:rPr sz="825">
-                <a:solidFill>
-                  <a:srgbClr val="6A737D"/>
-                </a:solidFill>
-                <a:latin typeface="Menlo"/>
-                <a:ea typeface="Menlo"/>
-              </a:rPr>
-              <a:t>// a new payment type?</a:t>
-            </a:r>
-            <a:endParaRPr/>
-          </a:p>
-          <a:p>
-            <a:pPr>
-              <a:lnSpc>
-                <a:spcPct val="140000"/>
-              </a:lnSpc>
-            </a:pPr>
-            <a:r>
-              <a:rPr sz="825">
-                <a:solidFill>
-                  <a:srgbClr val="D73A49"/>
-                </a:solidFill>
-                <a:latin typeface="Menlo"/>
-                <a:ea typeface="Menlo"/>
-              </a:rPr>
-              <a:t>class</a:t>
-            </a:r>
-            <a:r>
-              <a:rPr sz="825">
-                <a:solidFill>
-                  <a:srgbClr val="24292E"/>
-                </a:solidFill>
-                <a:latin typeface="Menlo"/>
-                <a:ea typeface="Menlo"/>
-              </a:rPr>
-              <a:t> </a:t>
-            </a:r>
-            <a:r>
-              <a:rPr sz="825">
-                <a:solidFill>
-                  <a:srgbClr val="6F42C1"/>
-                </a:solidFill>
-                <a:latin typeface="Menlo"/>
-                <a:ea typeface="Menlo"/>
-              </a:rPr>
-              <a:t>Bursary</a:t>
-            </a:r>
-            <a:r>
-              <a:rPr sz="825">
-                <a:solidFill>
-                  <a:srgbClr val="24292E"/>
-                </a:solidFill>
-                <a:latin typeface="Menlo"/>
-                <a:ea typeface="Menlo"/>
-              </a:rPr>
-              <a:t> </a:t>
-            </a:r>
-            <a:r>
-              <a:rPr sz="825">
-                <a:solidFill>
-                  <a:srgbClr val="D73A49"/>
-                </a:solidFill>
-                <a:latin typeface="Menlo"/>
-                <a:ea typeface="Menlo"/>
-              </a:rPr>
-              <a:t>implements</a:t>
-            </a:r>
-            <a:r>
-              <a:rPr sz="825">
-                <a:solidFill>
-                  <a:srgbClr val="24292E"/>
-                </a:solidFill>
-                <a:latin typeface="Menlo"/>
-                <a:ea typeface="Menlo"/>
-              </a:rPr>
-              <a:t> </a:t>
-            </a:r>
-            <a:r>
-              <a:rPr sz="825">
-                <a:solidFill>
-                  <a:srgbClr val="6F42C1"/>
-                </a:solidFill>
-                <a:latin typeface="Menlo"/>
-                <a:ea typeface="Menlo"/>
-              </a:rPr>
-              <a:t>PaymentMethod</a:t>
-            </a:r>
-            <a:r>
-              <a:rPr sz="825">
-                <a:solidFill>
-                  <a:srgbClr val="24292E"/>
-                </a:solidFill>
-                <a:latin typeface="Menlo"/>
-                <a:ea typeface="Menlo"/>
-              </a:rPr>
-              <a:t> {</a:t>
-            </a:r>
-            <a:endParaRPr/>
-          </a:p>
-          <a:p>
-            <a:pPr>
-              <a:lnSpc>
-                <a:spcPct val="140000"/>
-              </a:lnSpc>
-            </a:pPr>
-            <a:r>
-              <a:rPr sz="825">
-                <a:solidFill>
-                  <a:srgbClr val="24292E"/>
-                </a:solidFill>
-                <a:latin typeface="Menlo"/>
-                <a:ea typeface="Menlo"/>
-              </a:rPr>
-              <a:t>    </a:t>
-            </a:r>
-            <a:r>
-              <a:rPr sz="825">
-                <a:solidFill>
-                  <a:srgbClr val="D73A49"/>
-                </a:solidFill>
-                <a:latin typeface="Menlo"/>
-                <a:ea typeface="Menlo"/>
-              </a:rPr>
-              <a:t>public</a:t>
-            </a:r>
-            <a:r>
-              <a:rPr sz="825">
-                <a:solidFill>
-                  <a:srgbClr val="24292E"/>
-                </a:solidFill>
-                <a:latin typeface="Menlo"/>
-                <a:ea typeface="Menlo"/>
-              </a:rPr>
-              <a:t> Receipt </a:t>
-            </a:r>
-            <a:r>
-              <a:rPr sz="825">
-                <a:solidFill>
-                  <a:srgbClr val="6F42C1"/>
-                </a:solidFill>
-                <a:latin typeface="Menlo"/>
-                <a:ea typeface="Menlo"/>
-              </a:rPr>
-              <a:t>pay</a:t>
-            </a:r>
-            <a:r>
-              <a:rPr sz="825">
-                <a:solidFill>
-                  <a:srgbClr val="24292E"/>
-                </a:solidFill>
-                <a:latin typeface="Menlo"/>
-                <a:ea typeface="Menlo"/>
-              </a:rPr>
-              <a:t>(Money </a:t>
-            </a:r>
-            <a:r>
-              <a:rPr sz="825">
-                <a:solidFill>
-                  <a:srgbClr val="E36209"/>
-                </a:solidFill>
-                <a:latin typeface="Menlo"/>
-                <a:ea typeface="Menlo"/>
-              </a:rPr>
-              <a:t>amount</a:t>
-            </a:r>
-            <a:r>
-              <a:rPr sz="825">
-                <a:solidFill>
-                  <a:srgbClr val="24292E"/>
-                </a:solidFill>
-                <a:latin typeface="Menlo"/>
-                <a:ea typeface="Menlo"/>
-              </a:rPr>
-              <a:t>) {</a:t>
-            </a:r>
-            <a:endParaRPr/>
-          </a:p>
-          <a:p>
-            <a:pPr>
-              <a:lnSpc>
-                <a:spcPct val="140000"/>
-              </a:lnSpc>
-            </a:pPr>
-            <a:r>
-              <a:rPr sz="825">
-                <a:solidFill>
-                  <a:srgbClr val="24292E"/>
-                </a:solidFill>
-                <a:latin typeface="Menlo"/>
-                <a:ea typeface="Menlo"/>
-              </a:rPr>
-              <a:t>        </a:t>
-            </a:r>
-            <a:r>
-              <a:rPr sz="825">
-                <a:solidFill>
-                  <a:srgbClr val="D73A49"/>
-                </a:solidFill>
-                <a:latin typeface="Menlo"/>
-                <a:ea typeface="Menlo"/>
-              </a:rPr>
-              <a:t>return</a:t>
-            </a:r>
-            <a:r>
-              <a:rPr sz="825">
-                <a:solidFill>
-                  <a:srgbClr val="24292E"/>
-                </a:solidFill>
-                <a:latin typeface="Menlo"/>
-                <a:ea typeface="Menlo"/>
-              </a:rPr>
-              <a:t> award.</a:t>
-            </a:r>
-            <a:r>
-              <a:rPr sz="825">
-                <a:solidFill>
-                  <a:srgbClr val="6F42C1"/>
-                </a:solidFill>
-                <a:latin typeface="Menlo"/>
-                <a:ea typeface="Menlo"/>
-              </a:rPr>
-              <a:t>deduct</a:t>
-            </a:r>
-            <a:r>
-              <a:rPr sz="825">
-                <a:solidFill>
-                  <a:srgbClr val="24292E"/>
-                </a:solidFill>
-                <a:latin typeface="Menlo"/>
-                <a:ea typeface="Menlo"/>
-              </a:rPr>
-              <a:t>(amount);</a:t>
-            </a:r>
-            <a:endParaRPr/>
-          </a:p>
-          <a:p>
-            <a:pPr>
-              <a:lnSpc>
-                <a:spcPct val="140000"/>
-              </a:lnSpc>
-            </a:pPr>
-            <a:r>
-              <a:rPr sz="825">
-                <a:solidFill>
-                  <a:srgbClr val="24292E"/>
-                </a:solidFill>
-                <a:latin typeface="Menlo"/>
-                <a:ea typeface="Menlo"/>
-              </a:rPr>
-              <a:t>    }</a:t>
-            </a:r>
-            <a:endParaRPr/>
-          </a:p>
-          <a:p>
-            <a:pPr>
-              <a:lnSpc>
-                <a:spcPct val="140000"/>
-              </a:lnSpc>
-            </a:pPr>
-            <a:r>
-              <a:rPr sz="825">
-                <a:solidFill>
-                  <a:srgbClr val="24292E"/>
-                </a:solidFill>
-                <a:latin typeface="Menlo"/>
-                <a:ea typeface="Menlo"/>
-              </a:rPr>
-              <a:t>}</a:t>
-            </a:r>
-            <a:endParaRPr/>
-          </a:p>
-          <a:p>
-            <a:pPr>
-              <a:lnSpc>
-                <a:spcPct val="140000"/>
-              </a:lnSpc>
-            </a:pPr>
-            <a:r>
-              <a:rPr sz="825">
-                <a:solidFill>
-                  <a:srgbClr val="E5E7EB"/>
-                </a:solidFill>
-                <a:latin typeface="Menlo"/>
-                <a:ea typeface="Menlo"/>
-              </a:rPr>
-              <a:t> </a:t>
-            </a:r>
-            <a:endParaRPr/>
-          </a:p>
-          <a:p>
-            <a:pPr>
-              <a:lnSpc>
-                <a:spcPct val="140000"/>
-              </a:lnSpc>
-            </a:pPr>
-            <a:r>
-              <a:rPr sz="825">
-                <a:solidFill>
-                  <a:srgbClr val="6A737D"/>
-                </a:solidFill>
-                <a:latin typeface="Menlo"/>
-                <a:ea typeface="Menlo"/>
-              </a:rPr>
-              <a:t>// no existing line edited.</a:t>
-            </a:r>
-            <a:endParaRPr/>
-          </a:p>
-          <a:p>
-            <a:pPr>
-              <a:lnSpc>
-                <a:spcPct val="140000"/>
-              </a:lnSpc>
-            </a:pPr>
-            <a:r>
-              <a:rPr sz="825">
-                <a:solidFill>
-                  <a:srgbClr val="6A737D"/>
-                </a:solidFill>
-                <a:latin typeface="Menlo"/>
-                <a:ea typeface="Menlo"/>
-              </a:rPr>
-              <a:t>// no existing test rewritten.</a:t>
+              <a:t># no existing test rewritten.</a:t>
             </a:r>
             <a:endParaRPr/>
           </a:p>
@@ -23151,7 +18655,7 @@
   <p:cSld>
     <p:spTree>
       <p:nvGrpSpPr>
-        <p:cNvPr id="484" name="" descr="&lt;Slide style={{ background: '#FFFFFF', padding: 0 }}&gt;&#10;  &lt;Box style={{ padding: '22px 40px 6px 40px', flexDirection: 'row', alignItems: 'center', justifyContent: 'space-between' }}&gt;&#10;    &lt;Text style={{ fontSize: 32, fontWeight: 'bold', color: '#0E3F8C' }}&gt;Exercise 2.1 — The Class That Does Everything&lt;/Text&gt;&#10;    &lt;Text style={{ fontSize: 14, color: '#1E4FA8', fontWeight: 'bold' }}&gt;30 / 38&lt;/Text&gt;&#10;  &lt;/Box&gt;&#10;  &lt;Box style={{ flex: 1, padding: '10px 40px 0 40px', flexDirection: 'row', gap: 26 }}&gt;&#10;    &lt;Box style={{ flex: 3, flexDirection: 'column', gap: 9 }}&gt;&#10;      &lt;Box style={{ flexDirection: 'row', alignItems: 'center', gap: 9 }}&gt;&#10;        &lt;Box style={{ padding: '4px 12px', background: '#D9534F', borderRadius: 6 }}&gt;&#10;          &lt;Text style={{ fontSize: 13, color: '#FFFFFF', fontWeight: 'bold' }}&gt;BEFORE&lt;/Text&gt;&#10;        &lt;/Box&gt;&#10;        &lt;Text style={{ fontSize: 16, color: '#4A5568' }}&gt;One class, six unrelated reasons to change.&lt;/Text&gt;&#10;      &lt;/Box&gt;&#10;      &lt;CodeBlock code={`public class Order {&#10;    void placeOrder()      { ... }&#10;    void chargeCustomer()  { ... }&#10;    void notifyRider()     { ... }&#10;    void printReceipt()    { ... }&#10;    void updateInventory() { ... }&#10;    void sendSms()         { ... }&#10;    void applyDiscount()   { ... }&#10;}`} language='java' width={540} fontSize={12} /&gt;&#10;      &lt;Box style={{ padding: '12px 16px', background: '#FDF3F3', borderRadius: 9, borderLeft: '4px solid #D9534F' }}&gt;&#10;        &lt;Text style={{ fontSize: 15, color: '#4A5568', lineHeight: 1.5 }}&gt;Your task: &lt;Text style={{ fontWeight: 'bold', color: '#D9534F' }}&gt;list the distinct responsibilities&lt;/Text&gt; — not the methods.&lt;/Text&gt;&#10;      &lt;/Box&gt;&#10;    &lt;/Box&gt;&#10;    &lt;Box style={{ flex: 2, flexDirection: 'column', gap: 12, justifyContent: 'center' }}&gt;&#10;      &lt;Box style={{ padding: '20px 22px', background: '#0E3F8C', borderRadius: 12, flexDirection: 'column', gap: 12 }}&gt;&#10;        &lt;Text style={{ fontSize: 15, color: '#7FA2D6', letterSpacing: 1 }}&gt;A HINT YOU WILL NEED LATER&lt;/Text&gt;&#10;        &lt;Text style={{ fontSize: 20, fontWeight: 'bold', color: '#FFFFFF', lineHeight: 1.35 }}&gt;A responsibility is a reason to change.&lt;/Text&gt;&#10;        &lt;Text style={{ fontSize: 15, color: '#C5D4EA', lineHeight: 1.5 }}&gt;Two methods that change for the same reason belong together. Two that change for different reasons do not.&lt;/Text&gt;&#10;      &lt;/Box&gt;&#10;      &lt;Box style={{ padding: '14px 17px', background: '#F7F9FC', borderRadius: 10, border: '1px dashed #D9534F' }}&gt;&#10;        &lt;Text style={{ fontSize: 15, color: '#4A5568', lineHeight: 1.5 }}&gt;&lt;Text style={{ fontWeight: 'bold', color: '#D9534F' }}&gt;Remember this class.&lt;/Text&gt; We meet it again in Week 11, when GRASP tells us how to fix it properly.&lt;/Text&gt;&#10;      &lt;/Box&gt;&#10;    &lt;/Box&gt;&#10;  &lt;/Box&gt;&#10;  &lt;Box style={{ height: 44, background: '#0E3F8C', padding: '0 40px', flexDirection: 'row', alignItems: 'center', justifyContent: 'center' }}&gt;&#10;    &lt;Text style={{ fontSize: 17, color: '#FFFFFF', fontWeight: '600' }}&gt;90 minutes. Work in pairs first, then report back as a group.&lt;/Text&gt;&#10;  &lt;/Box&gt;&#10;&lt;/Slide&gt;"/>
+        <p:cNvPr id="484" name="" descr="&lt;Slide style={{ background: '#FFFFFF', padding: 0 }}&gt;&#10;  &lt;Box style={{ padding: '22px 40px 6px 40px', flexDirection: 'row', alignItems: 'center', justifyContent: 'space-between' }}&gt;&#10;    &lt;Text style={{ fontSize: 32, fontWeight: 'bold', color: '#0E3F8C' }}&gt;Exercise 2.1 — The Class That Does Everything&lt;/Text&gt;&#10;    &lt;Text style={{ fontSize: 14, color: '#1E4FA8', fontWeight: 'bold' }}&gt;30 / 38&lt;/Text&gt;&#10;  &lt;/Box&gt;&#10;  &lt;Box style={{ flex: 1, padding: '10px 40px 0 40px', flexDirection: 'row', gap: 26 }}&gt;&#10;    &lt;Box style={{ flex: 3, flexDirection: 'column', gap: 9 }}&gt;&#10;      &lt;Box style={{ flexDirection: 'row', alignItems: 'center', gap: 9 }}&gt;&#10;        &lt;Box style={{ padding: '4px 12px', background: '#D9534F', borderRadius: 6 }}&gt;&#10;          &lt;Text style={{ fontSize: 13, color: '#FFFFFF', fontWeight: 'bold' }}&gt;BEFORE&lt;/Text&gt;&#10;        &lt;/Box&gt;&#10;        &lt;Text style={{ fontSize: 16, color: '#4A5568' }}&gt;One class, six unrelated reasons to change.&lt;/Text&gt;&#10;      &lt;/Box&gt;&#10;      &lt;CodeBlock code={`Class Order&#10;    + placeOrder()&#10;    + chargeCustomer()&#10;    + notifyRider()&#10;    + printReceipt()&#10;    + updateInventory()&#10;    + sendSms()&#10;    + applyDiscount()`} language='text' width={540} fontSize={12} /&gt;&#10;      &lt;Box style={{ padding: '12px 16px', background: '#FDF3F3', borderRadius: 9, borderLeft: '4px solid #D9534F' }}&gt;&#10;        &lt;Text style={{ fontSize: 15, color: '#4A5568', lineHeight: 1.5 }}&gt;Your task: &lt;Text style={{ fontWeight: 'bold', color: '#D9534F' }}&gt;list the distinct responsibilities&lt;/Text&gt; — not the methods.&lt;/Text&gt;&#10;      &lt;/Box&gt;&#10;    &lt;/Box&gt;&#10;    &lt;Box style={{ flex: 2, flexDirection: 'column', gap: 12, justifyContent: 'center' }}&gt;&#10;      &lt;Box style={{ padding: '20px 22px', background: '#0E3F8C', borderRadius: 12, flexDirection: 'column', gap: 12 }}&gt;&#10;        &lt;Text style={{ fontSize: 15, color: '#7FA2D6', letterSpacing: 1 }}&gt;A HINT YOU WILL NEED LATER&lt;/Text&gt;&#10;        &lt;Text style={{ fontSize: 20, fontWeight: 'bold', color: '#FFFFFF', lineHeight: 1.35 }}&gt;A responsibility is a reason to change.&lt;/Text&gt;&#10;        &lt;Text style={{ fontSize: 15, color: '#C5D4EA', lineHeight: 1.5 }}&gt;Two methods that change for the same reason belong together. Two that change for different reasons do not.&lt;/Text&gt;&#10;      &lt;/Box&gt;&#10;      &lt;Box style={{ padding: '14px 17px', background: '#F7F9FC', borderRadius: 10, border: '1px dashed #D9534F' }}&gt;&#10;        &lt;Text style={{ fontSize: 15, color: '#4A5568', lineHeight: 1.5 }}&gt;&lt;Text style={{ fontWeight: 'bold', color: '#D9534F' }}&gt;Remember this class.&lt;/Text&gt; We meet it again in Week 11, when GRASP tells us how to fix it properly.&lt;/Text&gt;&#10;      &lt;/Box&gt;&#10;    &lt;/Box&gt;&#10;  &lt;/Box&gt;&#10;  &lt;Box style={{ height: 44, background: '#0E3F8C', padding: '0 40px', flexDirection: 'row', alignItems: 'center', justifyContent: 'center' }}&gt;&#10;    &lt;Text style={{ fontSize: 17, color: '#FFFFFF', fontWeight: '600' }}&gt;90 minutes. Work in pairs first, then report back as a group.&lt;/Text&gt;&#10;  &lt;/Box&gt;&#10;&lt;/Slide&gt;"/>
         <p:cNvGrpSpPr/>
         <p:nvPr/>
       </p:nvGrpSpPr>
@@ -23361,7 +18865,7 @@
         </p:nvSpPr>
         <p:spPr>
           <a:xfrm rot="0" flipH="0" flipV="0">
-            <a:off x="419100" y="3133725"/>
+            <a:off x="419100" y="2943225"/>
             <a:ext cx="6705600" cy="485775"/>
           </a:xfrm>
           <a:prstGeom prst="roundRect">
@@ -23387,7 +18891,7 @@
         </p:nvSpPr>
         <p:spPr>
           <a:xfrm rot="0" flipH="0" flipV="0">
-            <a:off x="419100" y="3133725"/>
+            <a:off x="419100" y="2943225"/>
             <a:ext cx="6705600" cy="485775"/>
           </a:xfrm>
           <a:custGeom>
@@ -23444,7 +18948,7 @@
         </p:nvSpPr>
         <p:spPr>
           <a:xfrm rot="0" flipH="0" flipV="0">
-            <a:off x="571500" y="3248025"/>
+            <a:off x="571500" y="3057525"/>
             <a:ext cx="6362700" cy="257175"/>
           </a:xfrm>
           <a:prstGeom prst="rect"/>
@@ -23770,11 +19274,11 @@
         <p:spPr>
           <a:xfrm rot="0" flipH="0" flipV="0">
             <a:off x="381000" y="1047750"/>
-            <a:ext cx="6705600" cy="2000250"/>
+            <a:ext cx="6705600" cy="1809750"/>
           </a:xfrm>
           <a:prstGeom prst="roundRect">
             <a:avLst>
-              <a:gd name="adj" fmla="val 3810"/>
+              <a:gd name="adj" fmla="val 4211"/>
             </a:avLst>
           </a:prstGeom>
           <a:solidFill>
@@ -23796,7 +19300,7 @@
         <p:spPr>
           <a:xfrm rot="0" flipH="0" flipV="0">
             <a:off x="533400" y="1181100"/>
-            <a:ext cx="6400800" cy="1733550"/>
+            <a:ext cx="6400800" cy="1543050"/>
           </a:xfrm>
           <a:prstGeom prst="rect"/>
         </p:spPr>
@@ -23813,62 +19317,102 @@
             <a:r>
               <a:rPr sz="900">
                 <a:solidFill>
-                  <a:srgbClr val="D73A49"/>
+                  <a:srgbClr val="E5E7EB"/>
                 </a:solidFill>
                 <a:latin typeface="Menlo"/>
                 <a:ea typeface="Menlo"/>
               </a:rPr>
-              <a:t>public</a:t>
-            </a:r>
+              <a:t>Class Order</a:t>
+            </a:r>
+            <a:endParaRPr/>
+          </a:p>
+          <a:p>
+            <a:pPr>
+              <a:lnSpc>
+                <a:spcPct val="140000"/>
+              </a:lnSpc>
+            </a:pPr>
             <a:r>
               <a:rPr sz="900">
                 <a:solidFill>
-                  <a:srgbClr val="24292E"/>
+                  <a:srgbClr val="E5E7EB"/>
                 </a:solidFill>
                 <a:latin typeface="Menlo"/>
                 <a:ea typeface="Menlo"/>
               </a:rPr>
-              <a:t> </a:t>
-            </a:r>
+              <a:t>    + placeOrder()</a:t>
+            </a:r>
+            <a:endParaRPr/>
+          </a:p>
+          <a:p>
+            <a:pPr>
+              <a:lnSpc>
+                <a:spcPct val="140000"/>
+              </a:lnSpc>
+            </a:pPr>
             <a:r>
               <a:rPr sz="900">
                 <a:solidFill>
-                  <a:srgbClr val="D73A49"/>
+                  <a:srgbClr val="E5E7EB"/>
                 </a:solidFill>
                 <a:latin typeface="Menlo"/>
                 <a:ea typeface="Menlo"/>
               </a:rPr>
-              <a:t>class</a:t>
-            </a:r>
+              <a:t>    + chargeCustomer()</a:t>
+            </a:r>
+            <a:endParaRPr/>
+          </a:p>
+          <a:p>
+            <a:pPr>
+              <a:lnSpc>
+                <a:spcPct val="140000"/>
+              </a:lnSpc>
+            </a:pPr>
             <a:r>
               <a:rPr sz="900">
                 <a:solidFill>
-                  <a:srgbClr val="24292E"/>
+                  <a:srgbClr val="E5E7EB"/>
                 </a:solidFill>
                 <a:latin typeface="Menlo"/>
                 <a:ea typeface="Menlo"/>
               </a:rPr>
-              <a:t> </a:t>
-            </a:r>
+              <a:t>    + notifyRider()</a:t>
+            </a:r>
+            <a:endParaRPr/>
+          </a:p>
+          <a:p>
+            <a:pPr>
+              <a:lnSpc>
+                <a:spcPct val="140000"/>
+              </a:lnSpc>
+            </a:pPr>
             <a:r>
               <a:rPr sz="900">
                 <a:solidFill>
-                  <a:srgbClr val="6F42C1"/>
+                  <a:srgbClr val="E5E7EB"/>
                 </a:solidFill>
                 <a:latin typeface="Menlo"/>
                 <a:ea typeface="Menlo"/>
               </a:rPr>
-              <a:t>Order</a:t>
-            </a:r>
+              <a:t>    + printReceipt()</a:t>
+            </a:r>
+            <a:endParaRPr/>
+          </a:p>
+          <a:p>
+            <a:pPr>
+              <a:lnSpc>
+                <a:spcPct val="140000"/>
+              </a:lnSpc>
+            </a:pPr>
             <a:r>
               <a:rPr sz="900">
                 <a:solidFill>
-                  <a:srgbClr val="24292E"/>
+                  <a:srgbClr val="E5E7EB"/>
                 </a:solidFill>
                 <a:latin typeface="Menlo"/>
                 <a:ea typeface="Menlo"/>
               </a:rPr>
-              <a:t> {</a:t>
+              <a:t>    + updateInventory()</a:t>
             </a:r>
             <a:endParaRPr/>
           </a:p>
@@ -23881,418 +19425,30 @@
             <a:r>
               <a:rPr sz="900">
                 <a:solidFill>
-                  <a:srgbClr val="24292E"/>
+                  <a:srgbClr val="E5E7EB"/>
                 </a:solidFill>
                 <a:latin typeface="Menlo"/>
                 <a:ea typeface="Menlo"/>
               </a:rPr>
-              <a:t>    </a:t>
-            </a:r>
+              <a:t>    + sendSms()</a:t>
+            </a:r>
+            <a:endParaRPr/>
+          </a:p>
+          <a:p>
+            <a:pPr>
+              <a:lnSpc>
+                <a:spcPct val="140000"/>
+              </a:lnSpc>
+            </a:pPr>
             <a:r>
               <a:rPr sz="900">
                 <a:solidFill>
-                  <a:srgbClr val="D73A49"/>
+                  <a:srgbClr val="E5E7EB"/>
                 </a:solidFill>
                 <a:latin typeface="Menlo"/>
                 <a:ea typeface="Menlo"/>
               </a:rPr>
-              <a:t>void</a:t>
-            </a:r>
-            <a:r>
-              <a:rPr sz="900">
-                <a:solidFill>
-                  <a:srgbClr val="24292E"/>
-                </a:solidFill>
-                <a:latin typeface="Menlo"/>
-                <a:ea typeface="Menlo"/>
-              </a:rPr>
-              <a:t> </a:t>
-            </a:r>
-            <a:r>
-              <a:rPr sz="900">
-                <a:solidFill>
-                  <a:srgbClr val="6F42C1"/>
-                </a:solidFill>
-                <a:latin typeface="Menlo"/>
-                <a:ea typeface="Menlo"/>
-              </a:rPr>
-              <a:t>placeOrder</a:t>
-            </a:r>
-            <a:r>
-              <a:rPr sz="900">
-                <a:solidFill>
-                  <a:srgbClr val="24292E"/>
-                </a:solidFill>
-                <a:latin typeface="Menlo"/>
-                <a:ea typeface="Menlo"/>
-              </a:rPr>
-              <a:t>()      { ... }</a:t>
-            </a:r>
-            <a:endParaRPr/>
-          </a:p>
-          <a:p>
-            <a:pPr>
-              <a:lnSpc>
-                <a:spcPct val="140000"/>
-              </a:lnSpc>
-            </a:pPr>
-            <a:r>
-              <a:rPr sz="900">
-                <a:solidFill>
-                  <a:srgbClr val="24292E"/>
-                </a:solidFill>
-                <a:latin typeface="Menlo"/>
-                <a:ea typeface="Menlo"/>
-              </a:rPr>
-              <a:t>    </a:t>
-            </a:r>
-            <a:r>
-              <a:rPr sz="900">
-                <a:solidFill>
-                  <a:srgbClr val="D73A49"/>
-                </a:solidFill>
-                <a:latin typeface="Menlo"/>
-                <a:ea typeface="Menlo"/>
-              </a:rPr>
-              <a:t>void</a:t>
-            </a:r>
-            <a:r>
-              <a:rPr sz="900">
-                <a:solidFill>
-                  <a:srgbClr val="24292E"/>
-                </a:solidFill>
-                <a:latin typeface="Menlo"/>
-                <a:ea typeface="Menlo"/>
-              </a:rPr>
-              <a:t> </a:t>
-            </a:r>
-            <a:r>
-              <a:rPr sz="900">
-                <a:solidFill>
-                  <a:srgbClr val="6F42C1"/>
-                </a:solidFill>
-                <a:latin typeface="Menlo"/>
-                <a:ea typeface="Menlo"/>
-              </a:rPr>
-              <a:t>chargeCustomer</a:t>
-            </a:r>
-            <a:r>
-              <a:rPr sz="900">
-                <a:solidFill>
-                  <a:srgbClr val="24292E"/>
-                </a:solidFill>
-                <a:latin typeface="Menlo"/>
-                <a:ea typeface="Menlo"/>
-              </a:rPr>
-              <a:t>()  { ... }</a:t>
-            </a:r>
-            <a:endParaRPr/>
-          </a:p>
-          <a:p>
-            <a:pPr>
-              <a:lnSpc>
-                <a:spcPct val="140000"/>
-              </a:lnSpc>
-            </a:pPr>
-            <a:r>
-              <a:rPr sz="900">
-                <a:solidFill>
-                  <a:srgbClr val="24292E"/>
-                </a:solidFill>
-                <a:latin typeface="Menlo"/>
-                <a:ea typeface="Menlo"/>
-              </a:rPr>
-              <a:t>    </a:t>
-            </a:r>
-            <a:r>
-              <a:rPr sz="900">
-                <a:solidFill>
-                  <a:srgbClr val="D73A49"/>
-                </a:solidFill>
-                <a:latin typeface="Menlo"/>
-                <a:ea typeface="Menlo"/>
-              </a:rPr>
-              <a:t>void</a:t>
-            </a:r>
-            <a:r>
-              <a:rPr sz="900">
-                <a:solidFill>
-                  <a:srgbClr val="24292E"/>
-                </a:solidFill>
-                <a:latin typeface="Menlo"/>
-                <a:ea typeface="Menlo"/>
-              </a:rPr>
-              <a:t> </a:t>
-            </a:r>
-            <a:r>
-              <a:rPr sz="900">
-                <a:solidFill>
-                  <a:srgbClr val="6F42C1"/>
-                </a:solidFill>
-                <a:latin typeface="Menlo"/>
-                <a:ea typeface="Menlo"/>
-              </a:rPr>
-              <a:t>notifyRider</a:t>
-            </a:r>
-            <a:r>
-              <a:rPr sz="900">
-                <a:solidFill>
-                  <a:srgbClr val="24292E"/>
-                </a:solidFill>
-                <a:latin typeface="Menlo"/>
-                <a:ea typeface="Menlo"/>
-              </a:rPr>
-              <a:t>()     { ... }</a:t>
-            </a:r>
-            <a:endParaRPr/>
-          </a:p>
-          <a:p>
-            <a:pPr>
-              <a:lnSpc>
-                <a:spcPct val="140000"/>
-              </a:lnSpc>
-            </a:pPr>
-            <a:r>
-              <a:rPr sz="900">
-                <a:solidFill>
-                  <a:srgbClr val="24292E"/>
-                </a:solidFill>
-                <a:latin typeface="Menlo"/>
-                <a:ea typeface="Menlo"/>
-              </a:rPr>
-              <a:t>    </a:t>
-            </a:r>
-            <a:r>
-              <a:rPr sz="900">
-                <a:solidFill>
-                  <a:srgbClr val="D73A49"/>
-                </a:solidFill>
-                <a:latin typeface="Menlo"/>
-                <a:ea typeface="Menlo"/>
-              </a:rPr>
-              <a:t>void</a:t>
-            </a:r>
-            <a:r>
-              <a:rPr sz="900">
-                <a:solidFill>
-                  <a:srgbClr val="24292E"/>
-                </a:solidFill>
-                <a:latin typeface="Menlo"/>
-                <a:ea typeface="Menlo"/>
-              </a:rPr>
-              <a:t> </a:t>
-            </a:r>
-            <a:r>
-              <a:rPr sz="900">
-                <a:solidFill>
-                  <a:srgbClr val="6F42C1"/>
-                </a:solidFill>
-                <a:latin typeface="Menlo"/>
-                <a:ea typeface="Menlo"/>
-              </a:rPr>
-              <a:t>printReceipt</a:t>
-            </a:r>
-            <a:r>
-              <a:rPr sz="900">
-                <a:solidFill>
-                  <a:srgbClr val="24292E"/>
-                </a:solidFill>
-                <a:latin typeface="Menlo"/>
-                <a:ea typeface="Menlo"/>
-              </a:rPr>
-              <a:t>()    { ... }</a:t>
-            </a:r>
-            <a:endParaRPr/>
-          </a:p>
-          <a:p>
-            <a:pPr>
-              <a:lnSpc>
-                <a:spcPct val="140000"/>
-              </a:lnSpc>
-            </a:pPr>
-            <a:r>
-              <a:rPr sz="900">
-                <a:solidFill>
-                  <a:srgbClr val="24292E"/>
-                </a:solidFill>
-                <a:latin typeface="Menlo"/>
-                <a:ea typeface="Menlo"/>
-              </a:rPr>
-              <a:t>    </a:t>
-            </a:r>
-            <a:r>
-              <a:rPr sz="900">
-                <a:solidFill>
-                  <a:srgbClr val="D73A49"/>
-                </a:solidFill>
-                <a:latin typeface="Menlo"/>
-                <a:ea typeface="Menlo"/>
-              </a:rPr>
-              <a:t>void</a:t>
-            </a:r>
-            <a:r>
-              <a:rPr sz="900">
-                <a:solidFill>
-                  <a:srgbClr val="24292E"/>
-                </a:solidFill>
-                <a:latin typeface="Menlo"/>
-                <a:ea typeface="Menlo"/>
-              </a:rPr>
-              <a:t> </a:t>
-            </a:r>
-            <a:r>
-              <a:rPr sz="900">
-                <a:solidFill>
-                  <a:srgbClr val="6F42C1"/>
-                </a:solidFill>
-                <a:latin typeface="Menlo"/>
-                <a:ea typeface="Menlo"/>
-              </a:rPr>
-              <a:t>updateInventory</a:t>
-            </a:r>
-            <a:r>
-              <a:rPr sz="900">
-                <a:solidFill>
-                  <a:srgbClr val="24292E"/>
-                </a:solidFill>
-                <a:latin typeface="Menlo"/>
-                <a:ea typeface="Menlo"/>
-              </a:rPr>
-              <a:t>() { ... }</a:t>
-            </a:r>
-            <a:endParaRPr/>
-          </a:p>
-          <a:p>
-            <a:pPr>
-              <a:lnSpc>
-                <a:spcPct val="140000"/>
-              </a:lnSpc>
-            </a:pPr>
-            <a:r>
-              <a:rPr sz="900">
-                <a:solidFill>
-                  <a:srgbClr val="24292E"/>
-                </a:solidFill>
-                <a:latin typeface="Menlo"/>
-                <a:ea typeface="Menlo"/>
-              </a:rPr>
-              <a:t>    </a:t>
-            </a:r>
-            <a:r>
-              <a:rPr sz="900">
-                <a:solidFill>
-                  <a:srgbClr val="D73A49"/>
-                </a:solidFill>
-                <a:latin typeface="Menlo"/>
-                <a:ea typeface="Menlo"/>
-              </a:rPr>
-              <a:t>void</a:t>
-            </a:r>
-            <a:r>
-              <a:rPr sz="900">
-                <a:solidFill>
-                  <a:srgbClr val="24292E"/>
-                </a:solidFill>
-                <a:latin typeface="Menlo"/>
-                <a:ea typeface="Menlo"/>
-              </a:rPr>
-              <a:t> </a:t>
-            </a:r>
-            <a:r>
-              <a:rPr sz="900">
-                <a:solidFill>
-                  <a:srgbClr val="6F42C1"/>
-                </a:solidFill>
-                <a:latin typeface="Menlo"/>
-                <a:ea typeface="Menlo"/>
-              </a:rPr>
-              <a:t>sendSms</a:t>
-            </a:r>
-            <a:r>
-              <a:rPr sz="900">
-                <a:solidFill>
-                  <a:srgbClr val="24292E"/>
-                </a:solidFill>
-                <a:latin typeface="Menlo"/>
-                <a:ea typeface="Menlo"/>
-              </a:rPr>
-              <a:t>()         { ... }</a:t>
-            </a:r>
-            <a:endParaRPr/>
-          </a:p>
-          <a:p>
-            <a:pPr>
-              <a:lnSpc>
-                <a:spcPct val="140000"/>
-              </a:lnSpc>
-            </a:pPr>
-            <a:r>
-              <a:rPr sz="900">
-                <a:solidFill>
-                  <a:srgbClr val="24292E"/>
-                </a:solidFill>
-                <a:latin typeface="Menlo"/>
-                <a:ea typeface="Menlo"/>
-              </a:rPr>
-              <a:t>    </a:t>
-            </a:r>
-            <a:r>
-              <a:rPr sz="900">
-                <a:solidFill>
-                  <a:srgbClr val="D73A49"/>
-                </a:solidFill>
-                <a:latin typeface="Menlo"/>
-                <a:ea typeface="Menlo"/>
-              </a:rPr>
-              <a:t>void</a:t>
-            </a:r>
-            <a:r>
-              <a:rPr sz="900">
-                <a:solidFill>
-                  <a:srgbClr val="24292E"/>
-                </a:solidFill>
-                <a:latin typeface="Menlo"/>
-                <a:ea typeface="Menlo"/>
-              </a:rPr>
-              <a:t> </a:t>
-            </a:r>
-            <a:r>
-              <a:rPr sz="900">
-                <a:solidFill>
-                  <a:srgbClr val="6F42C1"/>
-                </a:solidFill>
-                <a:latin typeface="Menlo"/>
-                <a:ea typeface="Menlo"/>
-              </a:rPr>
-              <a:t>applyDiscount</a:t>
-            </a:r>
-            <a:r>
-              <a:rPr sz="900">
-                <a:solidFill>
-                  <a:srgbClr val="24292E"/>
-                </a:solidFill>
-                <a:latin typeface="Menlo"/>
-                <a:ea typeface="Menlo"/>
-              </a:rPr>
-              <a:t>()   { ... }</a:t>
-            </a:r>
-            <a:endParaRPr/>
-          </a:p>
-          <a:p>
-            <a:pPr>
-              <a:lnSpc>
-                <a:spcPct val="140000"/>
-              </a:lnSpc>
-            </a:pPr>
-            <a:r>
-              <a:rPr sz="900">
-                <a:solidFill>
-                  <a:srgbClr val="24292E"/>
-                </a:solidFill>
-                <a:latin typeface="Menlo"/>
-                <a:ea typeface="Menlo"/>
-              </a:rPr>
-              <a:t>}</a:t>
+              <a:t>    + applyDiscount()</a:t>
             </a:r>
             <a:endParaRPr/>
           </a:p>
@@ -34504,7 +29660,7 @@
   <p:cSld>
     <p:spTree>
       <p:nvGrpSpPr>
-        <p:cNvPr id="820" name="" descr="&lt;Slide style={{ background: '#FFFFFF', padding: 0 }}&gt;&#10;  &lt;Box style={{ height: 72, background: '#1E4FA8', padding: '0 40px', flexDirection: 'row', alignItems: 'center', justifyContent: 'space-between' }}&gt;&#10;    &lt;Text style={{ fontSize: 15, color: '#B9CDF0', letterSpacing: 1 }}&gt;ISAD · INFORMATION SYSTEMS ANALYSIS &amp;amp; DESIGN&lt;/Text&gt;&#10;    &lt;Text style={{ fontSize: 15, color: '#B9CDF0' }}&gt;W02 · OBJECTS&lt;/Text&gt;&#10;  &lt;/Box&gt;&#10;  &lt;Box style={{ padding: '22px 40px 0 40px' }}&gt;&#10;    &lt;Text style={{ fontSize: 34, fontWeight: 'bold', color: '#0E3F8C' }}&gt;From Real Objects to Software Objects&lt;/Text&gt;&#10;  &lt;/Box&gt;&#10;  &lt;Box style={{ flex: 1, padding: '14px 40px 0 40px', flexDirection: 'row', gap: 26 }}&gt;&#10;    &lt;Box style={{ flex: 5, justifyContent: 'center', alignItems: 'center' }}&gt;&#10;      &lt;svg width={580} height={340} viewBox='0 0 580 340'&gt;&#10;        &lt;text x='140' y='30' textAnchor='middle' fill='#8B97A8' fontSize='15' letterSpacing='1'&gt;IN THE WORLD&lt;/text&gt;&#10;        &lt;text x='440' y='30' textAnchor='middle' fill='#8B97A8' fontSize='15' letterSpacing='1'&gt;IN CODE&lt;/text&gt;&#10;        &lt;rect x='30' y='48' width='220' height='52' rx='10' fill='#E8EFF8' stroke='#3D7BD9' strokeWidth='2' /&gt;&#10;        &lt;text x='140' y='80' textAnchor='middle' fill='#1A2230' fontSize='17'&gt;A real order on a tray&lt;/text&gt;&#10;        &lt;rect x='30' y='112' width='220' height='52' rx='10' fill='#E8EFF8' stroke='#3D7BD9' strokeWidth='2' /&gt;&#10;        &lt;text x='140' y='144' textAnchor='middle' fill='#1A2230' fontSize='17'&gt;Its items, its total&lt;/text&gt;&#10;        &lt;rect x='30' y='176' width='220' height='52' rx='10' fill='#E8EFF8' stroke='#3D7BD9' strokeWidth='2' /&gt;&#10;        &lt;text x='140' y='208' textAnchor='middle' fill='#1A2230' fontSize='17'&gt;It can be paid, cancelled&lt;/text&gt;&#10;        &lt;rect x='30' y='240' width='220' height='52' rx='10' fill='#E8EFF8' stroke='#3D7BD9' strokeWidth='2' /&gt;&#10;        &lt;text x='140' y='272' textAnchor='middle' fill='#1A2230' fontSize='17'&gt;This order, not that one&lt;/text&gt;&#10;        &lt;line x1='256' y1='74' x2='324' y2='74' stroke='#3D7BD9' strokeWidth='2' markerEnd='url(#arrow08)' /&gt;&#10;        &lt;line x1='256' y1='138' x2='324' y2='138' stroke='#3D7BD9' strokeWidth='2' markerEnd='url(#arrow08)' /&gt;&#10;        &lt;line x1='256' y1='202' x2='324' y2='202' stroke='#3D7BD9' strokeWidth='2' markerEnd='url(#arrow08)' /&gt;&#10;        &lt;line x1='256' y1='266' x2='324' y2='266' stroke='#3D7BD9' strokeWidth='2' markerEnd='url(#arrow08)' /&gt;&#10;        &lt;rect x='330' y='48' width='220' height='52' rx='10' fill='#F0F5FC' stroke='#1E4FA8' strokeWidth='2' /&gt;&#10;        &lt;text x='440' y='80' textAnchor='middle' fill='#0E3F8C' fontSize='17' fontWeight='bold'&gt;Order order = new Order();&lt;/text&gt;&#10;        &lt;rect x='330' y='112' width='220' height='52' rx='10' fill='#F0F5FC' stroke='#1E4FA8' strokeWidth='2' /&gt;&#10;        &lt;text x='440' y='144' textAnchor='middle' fill='#0E3F8C' fontSize='17' fontWeight='bold'&gt;fields: lines, status&lt;/text&gt;&#10;        &lt;rect x='330' y='176' width='220' height='52' rx='10' fill='#F0F5FC' stroke='#1E4FA8' strokeWidth='2' /&gt;&#10;        &lt;text x='440' y='208' textAnchor='middle' fill='#0E3F8C' fontSize='17' fontWeight='bold'&gt;methods: pay(), cancel()&lt;/text&gt;&#10;        &lt;rect x='330' y='240' width='220' height='52' rx='10' fill='#F0F5FC' stroke='#1E4FA8' strokeWidth='2' /&gt;&#10;        &lt;text x='440' y='272' textAnchor='middle' fill='#0E3F8C' fontSize='17' fontWeight='bold'&gt;a distinct reference&lt;/text&gt;&#10;        &lt;defs&gt;&#10;          &lt;marker id='arrow08' markerWidth='9' markerHeight='9' refX='8' refY='4.5' orient='auto'&gt;&#10;            &lt;path d='M0,0 L9,4.5 L0,9 z' fill='#3D7BD9' /&gt;&#10;          &lt;/marker&gt;&#10;        &lt;/defs&gt;&#10;        &lt;text x='290' y='322' textAnchor='middle' fill='#4A5568' fontSize='15'&gt;Attributes become fields. Things it can do become methods.&lt;/text&gt;&#10;      &lt;/svg&gt;&#10;    &lt;/Box&gt;&#10;    &lt;Box style={{ flex: 4, flexDirection: 'column', gap: 12, justifyContent: 'center' }}&gt;&#10;      &lt;Box style={{ padding: '18px 20px', background: '#F0F5FC', borderRadius: 10, borderLeft: '4px solid #1E4FA8' }}&gt;&#10;        &lt;Text style={{ fontSize: 17, fontWeight: 'bold', color: '#0E3F8C', lineHeight: 1.4 }}&gt;We model the part of the world the system cares about.&lt;/Text&gt;&#10;      &lt;/Box&gt;&#10;      &lt;Box style={{ padding: '18px 20px', background: '#F7F9FC', borderRadius: 10, border: '1px solid #E5E7EB' }}&gt;&#10;        &lt;Text style={{ fontSize: 16, color: '#4A5568', lineHeight: 1.55 }}&gt;A customer has a name, a phone and a dorm — but CampusBites only stores what the delivery needs.&lt;/Text&gt;&#10;      &lt;/Box&gt;&#10;      &lt;Box style={{ padding: '18px 20px', background: '#FDF3F3', borderRadius: 10, borderLeft: '4px solid #D9534F' }}&gt;&#10;        &lt;Text style={{ fontSize: 16, color: '#4A5568', lineHeight: 1.55 }}&gt;&lt;Text style={{ fontWeight: 'bold', color: '#D9534F' }}&gt;Choosing what to leave out&lt;/Text&gt; is the analyst's first real decision.&lt;/Text&gt;&#10;      &lt;/Box&gt;&#10;    &lt;/Box&gt;&#10;  &lt;/Box&gt;&#10;  &lt;Box style={{ height: 40, padding: '0 40px', flexDirection: 'row', alignItems: 'center', justifyContent: 'space-between' }}&gt;&#10;    &lt;Text style={{ fontSize: 13, color: '#8B97A8' }}&gt;ISAD · Fall 2026&lt;/Text&gt;&#10;    &lt;Text style={{ fontSize: 14, color: '#1E4FA8', fontWeight: 'bold' }}&gt;08 / 38&lt;/Text&gt;&#10;  &lt;/Box&gt;&#10;&lt;/Slide&gt;"/>
+        <p:cNvPr id="820" name="" descr="&lt;Slide style={{ background: '#FFFFFF', padding: 0 }}&gt;&#10;  &lt;Box style={{ height: 72, background: '#1E4FA8', padding: '0 40px', flexDirection: 'row', alignItems: 'center', justifyContent: 'space-between' }}&gt;&#10;    &lt;Text style={{ fontSize: 15, color: '#B9CDF0', letterSpacing: 1 }}&gt;ISAD · INFORMATION SYSTEMS ANALYSIS &amp;amp; DESIGN&lt;/Text&gt;&#10;    &lt;Text style={{ fontSize: 15, color: '#B9CDF0' }}&gt;W02 · OBJECTS&lt;/Text&gt;&#10;  &lt;/Box&gt;&#10;  &lt;Box style={{ padding: '22px 40px 0 40px' }}&gt;&#10;    &lt;Text style={{ fontSize: 34, fontWeight: 'bold', color: '#0E3F8C' }}&gt;From Real Objects to Software Objects&lt;/Text&gt;&#10;  &lt;/Box&gt;&#10;  &lt;Box style={{ flex: 1, padding: '14px 40px 0 40px', flexDirection: 'row', gap: 26 }}&gt;&#10;    &lt;Box style={{ flex: 5, justifyContent: 'center', alignItems: 'center' }}&gt;&#10;      &lt;svg width={580} height={340} viewBox='0 0 580 340'&gt;&#10;        &lt;text x='140' y='30' textAnchor='middle' fill='#8B97A8' fontSize='15' letterSpacing='1'&gt;IN THE WORLD&lt;/text&gt;&#10;        &lt;text x='440' y='30' textAnchor='middle' fill='#8B97A8' fontSize='15' letterSpacing='1'&gt;IN CODE&lt;/text&gt;&#10;        &lt;rect x='30' y='48' width='220' height='52' rx='10' fill='#E8EFF8' stroke='#3D7BD9' strokeWidth='2' /&gt;&#10;        &lt;text x='140' y='80' textAnchor='middle' fill='#1A2230' fontSize='17'&gt;A real order on a tray&lt;/text&gt;&#10;        &lt;rect x='30' y='112' width='220' height='52' rx='10' fill='#E8EFF8' stroke='#3D7BD9' strokeWidth='2' /&gt;&#10;        &lt;text x='140' y='144' textAnchor='middle' fill='#1A2230' fontSize='17'&gt;Its items, its total&lt;/text&gt;&#10;        &lt;rect x='30' y='176' width='220' height='52' rx='10' fill='#E8EFF8' stroke='#3D7BD9' strokeWidth='2' /&gt;&#10;        &lt;text x='140' y='208' textAnchor='middle' fill='#1A2230' fontSize='17'&gt;It can be paid, cancelled&lt;/text&gt;&#10;        &lt;rect x='30' y='240' width='220' height='52' rx='10' fill='#E8EFF8' stroke='#3D7BD9' strokeWidth='2' /&gt;&#10;        &lt;text x='140' y='272' textAnchor='middle' fill='#1A2230' fontSize='17'&gt;This order, not that one&lt;/text&gt;&#10;        &lt;line x1='256' y1='74' x2='324' y2='74' stroke='#3D7BD9' strokeWidth='2' markerEnd='url(#arrow08)' /&gt;&#10;        &lt;line x1='256' y1='138' x2='324' y2='138' stroke='#3D7BD9' strokeWidth='2' markerEnd='url(#arrow08)' /&gt;&#10;        &lt;line x1='256' y1='202' x2='324' y2='202' stroke='#3D7BD9' strokeWidth='2' markerEnd='url(#arrow08)' /&gt;&#10;        &lt;line x1='256' y1='266' x2='324' y2='266' stroke='#3D7BD9' strokeWidth='2' markerEnd='url(#arrow08)' /&gt;&#10;        &lt;rect x='330' y='48' width='220' height='52' rx='10' fill='#F0F5FC' stroke='#1E4FA8' strokeWidth='2' /&gt;&#10;        &lt;text x='440' y='80' textAnchor='middle' fill='#0E3F8C' fontSize='17' fontWeight='bold'&gt;order = a new Order&lt;/text&gt;&#10;        &lt;rect x='330' y='112' width='220' height='52' rx='10' fill='#F0F5FC' stroke='#1E4FA8' strokeWidth='2' /&gt;&#10;        &lt;text x='440' y='144' textAnchor='middle' fill='#0E3F8C' fontSize='17' fontWeight='bold'&gt;fields: lines, status&lt;/text&gt;&#10;        &lt;rect x='330' y='176' width='220' height='52' rx='10' fill='#F0F5FC' stroke='#1E4FA8' strokeWidth='2' /&gt;&#10;        &lt;text x='440' y='208' textAnchor='middle' fill='#0E3F8C' fontSize='17' fontWeight='bold'&gt;methods: pay(), cancel()&lt;/text&gt;&#10;        &lt;rect x='330' y='240' width='220' height='52' rx='10' fill='#F0F5FC' stroke='#1E4FA8' strokeWidth='2' /&gt;&#10;        &lt;text x='440' y='272' textAnchor='middle' fill='#0E3F8C' fontSize='17' fontWeight='bold'&gt;a distinct reference&lt;/text&gt;&#10;        &lt;defs&gt;&#10;          &lt;marker id='arrow08' markerWidth='9' markerHeight='9' refX='8' refY='4.5' orient='auto'&gt;&#10;            &lt;path d='M0,0 L9,4.5 L0,9 z' fill='#3D7BD9' /&gt;&#10;          &lt;/marker&gt;&#10;        &lt;/defs&gt;&#10;        &lt;text x='290' y='322' textAnchor='middle' fill='#4A5568' fontSize='15'&gt;Attributes become fields. Things it can do become methods.&lt;/text&gt;&#10;      &lt;/svg&gt;&#10;    &lt;/Box&gt;&#10;    &lt;Box style={{ flex: 4, flexDirection: 'column', gap: 12, justifyContent: 'center' }}&gt;&#10;      &lt;Box style={{ padding: '18px 20px', background: '#F0F5FC', borderRadius: 10, borderLeft: '4px solid #1E4FA8' }}&gt;&#10;        &lt;Text style={{ fontSize: 17, fontWeight: 'bold', color: '#0E3F8C', lineHeight: 1.4 }}&gt;We model the part of the world the system cares about.&lt;/Text&gt;&#10;      &lt;/Box&gt;&#10;      &lt;Box style={{ padding: '18px 20px', background: '#F7F9FC', borderRadius: 10, border: '1px solid #E5E7EB' }}&gt;&#10;        &lt;Text style={{ fontSize: 16, color: '#4A5568', lineHeight: 1.55 }}&gt;A customer has a name, a phone and a dorm — but CampusBites only stores what the delivery needs.&lt;/Text&gt;&#10;      &lt;/Box&gt;&#10;      &lt;Box style={{ padding: '18px 20px', background: '#FDF3F3', borderRadius: 10, borderLeft: '4px solid #D9534F' }}&gt;&#10;        &lt;Text style={{ fontSize: 16, color: '#4A5568', lineHeight: 1.55 }}&gt;&lt;Text style={{ fontWeight: 'bold', color: '#D9534F' }}&gt;Choosing what to leave out&lt;/Text&gt; is the analyst's first real decision.&lt;/Text&gt;&#10;      &lt;/Box&gt;&#10;    &lt;/Box&gt;&#10;  &lt;/Box&gt;&#10;  &lt;Box style={{ height: 40, padding: '0 40px', flexDirection: 'row', alignItems: 'center', justifyContent: 'space-between' }}&gt;&#10;    &lt;Text style={{ fontSize: 13, color: '#8B97A8' }}&gt;ISAD · Fall 2026&lt;/Text&gt;&#10;    &lt;Text style={{ fontSize: 14, color: '#1E4FA8', fontWeight: 'bold' }}&gt;08 / 38&lt;/Text&gt;&#10;  &lt;/Box&gt;&#10;&lt;/Slide&gt;"/>
         <p:cNvGrpSpPr/>
         <p:nvPr/>
       </p:nvGrpSpPr>

--- a/01-slides/W02-Object-Oriented-Foundations.pptx
+++ b/01-slides/W02-Object-Oriented-Foundations.pptx
@@ -4413,7 +4413,7 @@
   <p:cSld>
     <p:spTree>
       <p:nvGrpSpPr>
-        <p:cNvPr id="120" name="" descr="&lt;Slide style={{ background: '#FFFFFF', padding: 0 }}&gt;&#10;  &lt;Box style={{ height: 72, background: '#1E4FA8', padding: '0 40px', flexDirection: 'row', alignItems: 'center', justifyContent: 'space-between' }}&gt;&#10;    &lt;Text style={{ fontSize: 15, color: '#B9CDF0', letterSpacing: 1 }}&gt;ISAD · INFORMATION SYSTEMS ANALYSIS &amp;amp; DESIGN&lt;/Text&gt;&#10;    &lt;Text style={{ fontSize: 15, color: '#B9CDF0' }}&gt;W02 · ENCAPSULATION&lt;/Text&gt;&#10;  &lt;/Box&gt;&#10;  &lt;Box style={{ padding: '20px 40px 0 40px' }}&gt;&#10;    &lt;Text style={{ fontSize: 32, fontWeight: 'bold', color: '#0E3F8C' }}&gt;Encapsulation in Java&lt;/Text&gt;&#10;  &lt;/Box&gt;&#10;  &lt;Box style={{ flex: 1, padding: '16px 40px 0 40px', flexDirection: 'row', gap: 26 }}&gt;&#10;    &lt;Box style={{ flex: 3, justifyContent: 'center' }}&gt;&#10;      &lt;CodeBlock code={`Class Order&#10;    - lines : OrderLine[0..*]&#10;    - status : OrderStatus = DRAFT&#10;&#10;    + addItem(item, qty)&#10;        if status is not DRAFT&#10;            refuse - order already placed&#10;        lines.add(a new OrderLine(item, qty))&#10;&#10;    + total() : Money&#10;        sum = ZERO&#10;        for each line in lines&#10;            sum = sum + line.subtotal()&#10;        return sum`} language='text' width={580} fontSize={13} /&gt;&#10;    &lt;/Box&gt;&#10;    &lt;Box style={{ flex: 2, flexDirection: 'column', gap: 11, justifyContent: 'center' }}&gt;&#10;      {[&#10;        ['lock', 'private fields', 'Nobody outside can set status to a nonsense value.'],&#10;        ['user-check', 'guarded method', 'addItem() refuses once the order is placed.'],&#10;        ['calculator', 'computed, not stored', 'total() is derived — there is no stale copy to drift.'],&#10;      ].map(([icon, t, d]) =&gt; (&#10;        &lt;Box key={t} style={{ flexDirection: 'row', gap: 12, alignItems: 'flex-start', padding: '14px 16px', background: '#F7F9FC', borderRadius: 10, border: '1px solid #E5E7EB' }}&gt;&#10;          &lt;Box style={{ width: 38, height: 38, borderRadius: 9, background: '#E8EFF8', justifyContent: 'center', alignItems: 'center' }}&gt;&#10;            &lt;FAIcon name={icon} style={{ fill: '#1E4FA8', width: 19, height: 19 }} /&gt;&#10;          &lt;/Box&gt;&#10;          &lt;Box style={{ flex: 1, flexDirection: 'column', gap: 2 }}&gt;&#10;            &lt;Text style={{ fontSize: 16, fontWeight: 'bold', color: '#0E3F8C' }}&gt;{t}&lt;/Text&gt;&#10;            &lt;Text style={{ fontSize: 14, color: '#4A5568', lineHeight: 1.45 }}&gt;{d}&lt;/Text&gt;&#10;          &lt;/Box&gt;&#10;        &lt;/Box&gt;&#10;      ))}&#10;    &lt;/Box&gt;&#10;  &lt;/Box&gt;&#10;  &lt;Box style={{ height: 40, padding: '0 40px', flexDirection: 'row', alignItems: 'center', justifyContent: 'space-between' }}&gt;&#10;    &lt;Text style={{ fontSize: 13, color: '#8B97A8' }}&gt;Generic types omitted for slide width; your lab code uses List&amp;lt;OrderLine&amp;gt;.&lt;/Text&gt;&#10;    &lt;Text style={{ fontSize: 14, color: '#1E4FA8', fontWeight: 'bold' }}&gt;14 / 38&lt;/Text&gt;&#10;  &lt;/Box&gt;&#10;&lt;/Slide&gt;"/>
+        <p:cNvPr id="120" name="" descr="&lt;Slide style={{ background: '#FFFFFF', padding: 0 }}&gt;&#10;  &lt;Box style={{ height: 72, background: '#1E4FA8', padding: '0 40px', flexDirection: 'row', alignItems: 'center', justifyContent: 'space-between' }}&gt;&#10;    &lt;Text style={{ fontSize: 15, color: '#B9CDF0', letterSpacing: 1 }}&gt;ISAD · INFORMATION SYSTEMS ANALYSIS &amp;amp; DESIGN&lt;/Text&gt;&#10;    &lt;Text style={{ fontSize: 15, color: '#B9CDF0' }}&gt;W02 · ENCAPSULATION&lt;/Text&gt;&#10;  &lt;/Box&gt;&#10;  &lt;Box style={{ padding: '20px 40px 0 40px' }}&gt;&#10;    &lt;Text style={{ fontSize: 32, fontWeight: 'bold', color: '#0E3F8C' }}&gt;Encapsulation on Paper&lt;/Text&gt;&#10;  &lt;/Box&gt;&#10;  &lt;Box style={{ flex: 1, padding: '16px 40px 0 40px', flexDirection: 'row', gap: 26 }}&gt;&#10;    &lt;Box style={{ flex: 3, justifyContent: 'center' }}&gt;&#10;      &lt;CodeBlock code={`Class Order&#10;    - lines : OrderLine[0..*]&#10;    - status : OrderStatus = DRAFT&#10;&#10;    + addItem(item, qty)&#10;        if status is not DRAFT&#10;            refuse - order already placed&#10;        lines.add(a new OrderLine(item, qty))&#10;&#10;    + total() : Money&#10;        sum = ZERO&#10;        for each line in lines&#10;            sum = sum + line.subtotal()&#10;        return sum`} language='text' width={580} fontSize={13} /&gt;&#10;    &lt;/Box&gt;&#10;    &lt;Box style={{ flex: 2, flexDirection: 'column', gap: 11, justifyContent: 'center' }}&gt;&#10;      {[&#10;        ['lock', 'private fields', 'Nobody outside can set status to a nonsense value.'],&#10;        ['user-check', 'guarded method', 'addItem() refuses once the order is placed.'],&#10;        ['calculator', 'computed, not stored', 'total() is derived — there is no stale copy to drift.'],&#10;      ].map(([icon, t, d]) =&gt; (&#10;        &lt;Box key={t} style={{ flexDirection: 'row', gap: 12, alignItems: 'flex-start', padding: '14px 16px', background: '#F7F9FC', borderRadius: 10, border: '1px solid #E5E7EB' }}&gt;&#10;          &lt;Box style={{ width: 38, height: 38, borderRadius: 9, background: '#E8EFF8', justifyContent: 'center', alignItems: 'center' }}&gt;&#10;            &lt;FAIcon name={icon} style={{ fill: '#1E4FA8', width: 19, height: 19 }} /&gt;&#10;          &lt;/Box&gt;&#10;          &lt;Box style={{ flex: 1, flexDirection: 'column', gap: 2 }}&gt;&#10;            &lt;Text style={{ fontSize: 16, fontWeight: 'bold', color: '#0E3F8C' }}&gt;{t}&lt;/Text&gt;&#10;            &lt;Text style={{ fontSize: 14, color: '#4A5568', lineHeight: 1.45 }}&gt;{d}&lt;/Text&gt;&#10;          &lt;/Box&gt;&#10;        &lt;/Box&gt;&#10;      ))}&#10;    &lt;/Box&gt;&#10;  &lt;/Box&gt;&#10;  &lt;Box style={{ height: 40, padding: '0 40px', flexDirection: 'row', alignItems: 'center', justifyContent: 'space-between' }}&gt;&#10;    &lt;Text style={{ fontSize: 13, color: '#8B97A8' }}&gt;Generic types omitted for slide width; your lab code uses List&amp;lt;OrderLine&amp;gt;.&lt;/Text&gt;&#10;    &lt;Text style={{ fontSize: 14, color: '#1E4FA8', fontWeight: 'bold' }}&gt;14 / 38&lt;/Text&gt;&#10;  &lt;/Box&gt;&#10;&lt;/Slide&gt;"/>
         <p:cNvGrpSpPr/>
         <p:nvPr/>
       </p:nvGrpSpPr>
@@ -4572,7 +4572,7 @@
                 <a:latin typeface="Microsoft YaHei"/>
                 <a:ea typeface="Microsoft YaHei"/>
               </a:rPr>
-              <a:t>Encapsulation in Java</a:t>
+              <a:t>Encapsulation on Paper</a:t>
             </a:r>
             <a:endParaRPr/>
           </a:p>
@@ -11954,7 +11954,7 @@
   <p:cSld>
     <p:spTree>
       <p:nvGrpSpPr>
-        <p:cNvPr id="334" name="" descr="&lt;Slide style={{ background: '#FFFFFF', padding: 0 }}&gt;&#10;  &lt;Box style={{ height: 72, background: '#1E4FA8', padding: '0 40px', flexDirection: 'row', alignItems: 'center', justifyContent: 'space-between' }}&gt;&#10;    &lt;Text style={{ fontSize: 15, color: '#B9CDF0', letterSpacing: 1 }}&gt;ISAD · INFORMATION SYSTEMS ANALYSIS &amp;amp; DESIGN&lt;/Text&gt;&#10;    &lt;Text style={{ fontSize: 15, color: '#B9CDF0' }}&gt;W02 · REUSE&lt;/Text&gt;&#10;  &lt;/Box&gt;&#10;  &lt;Box style={{ padding: '20px 40px 0 40px' }}&gt;&#10;    &lt;Text style={{ fontSize: 32, fontWeight: 'bold', color: '#0E3F8C' }}&gt;Composition in Java&lt;/Text&gt;&#10;  &lt;/Box&gt;&#10;  &lt;Box style={{ flex: 1, padding: '14px 40px 0 40px', flexDirection: 'row', gap: 26 }}&gt;&#10;    &lt;Box style={{ flex: 1, flexDirection: 'column', gap: 10 }}&gt;&#10;      &lt;Box style={{ flexDirection: 'row', alignItems: 'center', gap: 9 }}&gt;&#10;        &lt;FAIcon name='times-circle' style={{ fill: '#D9534F', width: 19, height: 19 }} /&gt;&#10;        &lt;Text style={{ fontSize: 16, fontWeight: 'bold', color: '#D9534F' }}&gt;Inheriting for convenience&lt;/Text&gt;&#10;      &lt;/Box&gt;&#10;      &lt;CodeBlock code={`# &quot;an order is just a list of lines&quot;&#10;Class Order extends List&#10;    + place()&#10;&#10;# now Order inherits 20+ list operations&#10;# that make no sense for an order&#10;order.sort(...)&#10;order.clear()      # wipes a paid order&#10;order.addAll(...)  # bypasses the guard`} language='text' width={520} fontSize={12} /&gt;&#10;    &lt;/Box&gt;&#10;    &lt;Box style={{ flex: 1, flexDirection: 'column', gap: 10 }}&gt;&#10;      &lt;Box style={{ flexDirection: 'row', alignItems: 'center', gap: 9 }}&gt;&#10;        &lt;FAIcon name='check-circle' style={{ fill: '#1E4FA8', width: 19, height: 19 }} /&gt;&#10;        &lt;Text style={{ fontSize: 16, fontWeight: 'bold', color: '#0E3F8C' }}&gt;Composing with collaborators&lt;/Text&gt;&#10;      &lt;/Box&gt;&#10;      &lt;CodeBlock code={`Class Order&#10;    - lines : OrderLine[0..*]&#10;    - payment : PaymentMethod&#10;    - route : DeliveryRoute&#10;&#10;    + total() : Money&#10;    + pay() : Receipt&#10;        return payment.pay(total())&#10;&#10;# Order offers only what an order does&#10;order.pay()        # yes&#10;order.clear()      # no such operation`} language='text' width={520} fontSize={12} /&gt;&#10;    &lt;/Box&gt;&#10;  &lt;/Box&gt;&#10;  &lt;Box style={{ height: 44, background: '#0E3F8C', padding: '0 40px', flexDirection: 'row', alignItems: 'center', justifyContent: 'center' }}&gt;&#10;    &lt;Text style={{ fontSize: 17, color: '#FFFFFF', fontWeight: '600' }}&gt;Inheritance reuses everything — including the parts that make no sense. Composition lets you choose.&lt;/Text&gt;&#10;  &lt;/Box&gt;&#10;&lt;/Slide&gt;"/>
+        <p:cNvPr id="334" name="" descr="&lt;Slide style={{ background: '#FFFFFF', padding: 0 }}&gt;&#10;  &lt;Box style={{ height: 72, background: '#1E4FA8', padding: '0 40px', flexDirection: 'row', alignItems: 'center', justifyContent: 'space-between' }}&gt;&#10;    &lt;Text style={{ fontSize: 15, color: '#B9CDF0', letterSpacing: 1 }}&gt;ISAD · INFORMATION SYSTEMS ANALYSIS &amp;amp; DESIGN&lt;/Text&gt;&#10;    &lt;Text style={{ fontSize: 15, color: '#B9CDF0' }}&gt;W02 · REUSE&lt;/Text&gt;&#10;  &lt;/Box&gt;&#10;  &lt;Box style={{ padding: '20px 40px 0 40px' }}&gt;&#10;    &lt;Text style={{ fontSize: 32, fontWeight: 'bold', color: '#0E3F8C' }}&gt;Composition on Paper&lt;/Text&gt;&#10;  &lt;/Box&gt;&#10;  &lt;Box style={{ flex: 1, padding: '14px 40px 0 40px', flexDirection: 'row', gap: 26 }}&gt;&#10;    &lt;Box style={{ flex: 1, flexDirection: 'column', gap: 10 }}&gt;&#10;      &lt;Box style={{ flexDirection: 'row', alignItems: 'center', gap: 9 }}&gt;&#10;        &lt;FAIcon name='times-circle' style={{ fill: '#D9534F', width: 19, height: 19 }} /&gt;&#10;        &lt;Text style={{ fontSize: 16, fontWeight: 'bold', color: '#D9534F' }}&gt;Inheriting for convenience&lt;/Text&gt;&#10;      &lt;/Box&gt;&#10;      &lt;CodeBlock code={`# &quot;an order is just a list of lines&quot;&#10;Class Order extends List&#10;    + place()&#10;&#10;# now Order inherits 20+ list operations&#10;# that make no sense for an order&#10;order.sort(...)&#10;order.clear()      # wipes a paid order&#10;order.addAll(...)  # bypasses the guard`} language='text' width={520} fontSize={12} /&gt;&#10;    &lt;/Box&gt;&#10;    &lt;Box style={{ flex: 1, flexDirection: 'column', gap: 10 }}&gt;&#10;      &lt;Box style={{ flexDirection: 'row', alignItems: 'center', gap: 9 }}&gt;&#10;        &lt;FAIcon name='check-circle' style={{ fill: '#1E4FA8', width: 19, height: 19 }} /&gt;&#10;        &lt;Text style={{ fontSize: 16, fontWeight: 'bold', color: '#0E3F8C' }}&gt;Composing with collaborators&lt;/Text&gt;&#10;      &lt;/Box&gt;&#10;      &lt;CodeBlock code={`Class Order&#10;    - lines : OrderLine[0..*]&#10;    - payment : PaymentMethod&#10;    - route : DeliveryRoute&#10;&#10;    + total() : Money&#10;    + pay() : Receipt&#10;        return payment.pay(total())&#10;&#10;# Order offers only what an order does&#10;order.pay()        # yes&#10;order.clear()      # no such operation`} language='text' width={520} fontSize={12} /&gt;&#10;    &lt;/Box&gt;&#10;  &lt;/Box&gt;&#10;  &lt;Box style={{ height: 44, background: '#0E3F8C', padding: '0 40px', flexDirection: 'row', alignItems: 'center', justifyContent: 'center' }}&gt;&#10;    &lt;Text style={{ fontSize: 17, color: '#FFFFFF', fontWeight: '600' }}&gt;Inheritance reuses everything — including the parts that make no sense. Composition lets you choose.&lt;/Text&gt;&#10;  &lt;/Box&gt;&#10;&lt;/Slide&gt;"/>
         <p:cNvGrpSpPr/>
         <p:nvPr/>
       </p:nvGrpSpPr>
@@ -12113,7 +12113,7 @@
                 <a:latin typeface="Microsoft YaHei"/>
                 <a:ea typeface="Microsoft YaHei"/>
               </a:rPr>
-              <a:t>Composition in Java</a:t>
+              <a:t>Composition on Paper</a:t>
             </a:r>
             <a:endParaRPr/>
           </a:p>
@@ -14029,7 +14029,7 @@
   <p:cSld>
     <p:spTree>
       <p:nvGrpSpPr>
-        <p:cNvPr id="390" name="" descr="&lt;Slide style={{ background: '#FFFFFF', padding: 0 }}&gt;&#10;  &lt;Box style={{ padding: '22px 40px 6px 40px', flexDirection: 'row', alignItems: 'center', justifyContent: 'space-between' }}&gt;&#10;    &lt;Text style={{ fontSize: 33, fontWeight: 'bold', color: '#0E3F8C' }}&gt;PaymentMethod — Polymorphism in Java&lt;/Text&gt;&#10;    &lt;Text style={{ fontSize: 14, color: '#1E4FA8', fontWeight: 'bold' }}&gt;25 / 38&lt;/Text&gt;&#10;  &lt;/Box&gt;&#10;  &lt;Box style={{ flex: 1, padding: '10px 40px 0 40px', flexDirection: 'row', gap: 26 }}&gt;&#10;    &lt;Box style={{ flex: 3, justifyContent: 'center' }}&gt;&#10;      &lt;CodeBlock code={`PaymentMethod (interface)&#10;    + pay(amount) : Receipt&#10;&#10;Class CampusCard implements PaymentMethod&#10;    + pay(amount) : Receipt&#10;        return cardTerminal.deduct(amount)&#10;&#10;Class Wallet implements PaymentMethod&#10;    + pay(amount) : Receipt&#10;        return balance.debit(amount)&#10;&#10;Class Cash implements PaymentMethod&#10;    + pay(amount) : Receipt&#10;        return Receipt.payOnDelivery(amount)&#10;&#10;# the call site - one stable line&#10;r = method.pay(order.total())`} language='text' width={580} fontSize={11} /&gt;&#10;    &lt;/Box&gt;&#10;    &lt;Box style={{ flex: 2, flexDirection: 'column', gap: 12, justifyContent: 'center' }}&gt;&#10;      &lt;Box style={{ padding: '20px 22px', background: '#0E3F8C', borderRadius: 12, flexDirection: 'column', gap: 12 }}&gt;&#10;        &lt;Text style={{ fontSize: 16, color: '#7FA2D6', letterSpacing: 1 }}&gt;THE ONE LINE THAT MATTERS&lt;/Text&gt;&#10;        &lt;Text style={{ fontSize: 17, color: '#FFFFFF', lineHeight: 1.4, fontWeight: 'bold' }}&gt;method.pay(order.total())&lt;/Text&gt;&#10;        &lt;Box style={{ width: 44, height: 4, background: '#FFC107' }} /&gt;&#10;        &lt;Text style={{ fontSize: 15, color: '#C5D4EA', lineHeight: 1.5 }}&gt;It does not say which payment type. It does not need to. Adding a fourth method changes nothing here.&lt;/Text&gt;&#10;      &lt;/Box&gt;&#10;      &lt;Box style={{ padding: '14px 17px', background: '#F0F5FC', borderRadius: 10, border: '1px solid #3D7BD9' }}&gt;&#10;        &lt;Text style={{ fontSize: 15, color: '#4A5568', lineHeight: 1.5 }}&gt;&lt;Text style={{ fontWeight: 'bold', color: '#0E3F8C' }}&gt;The interface is the contract.&lt;/Text&gt; Each class decides how to honour it.&lt;/Text&gt;&#10;      &lt;/Box&gt;&#10;      &lt;Box style={{ padding: '14px 17px', background: '#FDF3F3', borderRadius: 10, borderLeft: '4px solid #D9534F' }}&gt;&#10;        &lt;Text style={{ fontSize: 15, color: '#4A5568', lineHeight: 1.5 }}&gt;No &lt;Text style={{ fontWeight: 'bold', color: '#D9534F' }}&gt;if&lt;/Text&gt; and no &lt;Text style={{ fontWeight: 'bold', color: '#D9534F' }}&gt;switch&lt;/Text&gt; anywhere in Order.&lt;/Text&gt;&#10;      &lt;/Box&gt;&#10;    &lt;/Box&gt;&#10;  &lt;/Box&gt;&#10;  &lt;Box style={{ height: 44, background: '#0E3F8C', padding: '0 40px', flexDirection: 'row', alignItems: 'center', justifyContent: 'center' }}&gt;&#10;    &lt;Text style={{ fontSize: 17, color: '#FFFFFF', fontWeight: '600' }}&gt;CampusBites uses this exact shape. Your M1 models will too.&lt;/Text&gt;&#10;  &lt;/Box&gt;&#10;&lt;/Slide&gt;"/>
+        <p:cNvPr id="390" name="" descr="&lt;Slide style={{ background: '#FFFFFF', padding: 0 }}&gt;&#10;  &lt;Box style={{ padding: '22px 40px 6px 40px', flexDirection: 'row', alignItems: 'center', justifyContent: 'space-between' }}&gt;&#10;    &lt;Text style={{ fontSize: 33, fontWeight: 'bold', color: '#0E3F8C' }}&gt;PaymentMethod — Polymorphism on Paper&lt;/Text&gt;&#10;    &lt;Text style={{ fontSize: 14, color: '#1E4FA8', fontWeight: 'bold' }}&gt;25 / 38&lt;/Text&gt;&#10;  &lt;/Box&gt;&#10;  &lt;Box style={{ flex: 1, padding: '10px 40px 0 40px', flexDirection: 'row', gap: 26 }}&gt;&#10;    &lt;Box style={{ flex: 3, justifyContent: 'center' }}&gt;&#10;      &lt;CodeBlock code={`PaymentMethod (interface)&#10;    + pay(amount) : Receipt&#10;&#10;Class CampusCard implements PaymentMethod&#10;    + pay(amount) : Receipt&#10;        return cardTerminal.deduct(amount)&#10;&#10;Class Wallet implements PaymentMethod&#10;    + pay(amount) : Receipt&#10;        return balance.debit(amount)&#10;&#10;Class Cash implements PaymentMethod&#10;    + pay(amount) : Receipt&#10;        return Receipt.payOnDelivery(amount)&#10;&#10;# the call site - one stable line&#10;r = method.pay(order.total())`} language='text' width={580} fontSize={11} /&gt;&#10;    &lt;/Box&gt;&#10;    &lt;Box style={{ flex: 2, flexDirection: 'column', gap: 12, justifyContent: 'center' }}&gt;&#10;      &lt;Box style={{ padding: '20px 22px', background: '#0E3F8C', borderRadius: 12, flexDirection: 'column', gap: 12 }}&gt;&#10;        &lt;Text style={{ fontSize: 16, color: '#7FA2D6', letterSpacing: 1 }}&gt;THE ONE LINE THAT MATTERS&lt;/Text&gt;&#10;        &lt;Text style={{ fontSize: 17, color: '#FFFFFF', lineHeight: 1.4, fontWeight: 'bold' }}&gt;method.pay(order.total())&lt;/Text&gt;&#10;        &lt;Box style={{ width: 44, height: 4, background: '#FFC107' }} /&gt;&#10;        &lt;Text style={{ fontSize: 15, color: '#C5D4EA', lineHeight: 1.5 }}&gt;It does not say which payment type. It does not need to. Adding a fourth method changes nothing here.&lt;/Text&gt;&#10;      &lt;/Box&gt;&#10;      &lt;Box style={{ padding: '14px 17px', background: '#F0F5FC', borderRadius: 10, border: '1px solid #3D7BD9' }}&gt;&#10;        &lt;Text style={{ fontSize: 15, color: '#4A5568', lineHeight: 1.5 }}&gt;&lt;Text style={{ fontWeight: 'bold', color: '#0E3F8C' }}&gt;The interface is the contract.&lt;/Text&gt; Each class decides how to honour it.&lt;/Text&gt;&#10;      &lt;/Box&gt;&#10;      &lt;Box style={{ padding: '14px 17px', background: '#FDF3F3', borderRadius: 10, borderLeft: '4px solid #D9534F' }}&gt;&#10;        &lt;Text style={{ fontSize: 15, color: '#4A5568', lineHeight: 1.5 }}&gt;No &lt;Text style={{ fontWeight: 'bold', color: '#D9534F' }}&gt;if&lt;/Text&gt; and no &lt;Text style={{ fontWeight: 'bold', color: '#D9534F' }}&gt;switch&lt;/Text&gt; anywhere in Order.&lt;/Text&gt;&#10;      &lt;/Box&gt;&#10;    &lt;/Box&gt;&#10;  &lt;/Box&gt;&#10;  &lt;Box style={{ height: 44, background: '#0E3F8C', padding: '0 40px', flexDirection: 'row', alignItems: 'center', justifyContent: 'center' }}&gt;&#10;    &lt;Text style={{ fontSize: 17, color: '#FFFFFF', fontWeight: '600' }}&gt;CampusBites uses this exact shape. Your M1 models will too.&lt;/Text&gt;&#10;  &lt;/Box&gt;&#10;&lt;/Slide&gt;"/>
         <p:cNvGrpSpPr/>
         <p:nvPr/>
       </p:nvGrpSpPr>
@@ -14074,7 +14074,7 @@
         <p:spPr>
           <a:xfrm rot="0" flipH="0" flipV="0">
             <a:off x="381000" y="209550"/>
-            <a:ext cx="6257925" cy="381000"/>
+            <a:ext cx="6534150" cy="381000"/>
           </a:xfrm>
           <a:prstGeom prst="rect"/>
         </p:spPr>
@@ -14094,7 +14094,7 @@
                 <a:latin typeface="Microsoft YaHei"/>
                 <a:ea typeface="Microsoft YaHei"/>
               </a:rPr>
-              <a:t>PaymentMethod — Polymorphism in Java</a:t>
+              <a:t>PaymentMethod — Polymorphism on Paper</a:t>
             </a:r>
             <a:endParaRPr/>
           </a:p>

--- a/01-slides/W02-Object-Oriented-Foundations.pptx
+++ b/01-slides/W02-Object-Oriented-Foundations.pptx
@@ -4413,7 +4413,7 @@
   <p:cSld>
     <p:spTree>
       <p:nvGrpSpPr>
-        <p:cNvPr id="120" name="" descr="&lt;Slide style={{ background: '#FFFFFF', padding: 0 }}&gt;&#10;  &lt;Box style={{ height: 72, background: '#1E4FA8', padding: '0 40px', flexDirection: 'row', alignItems: 'center', justifyContent: 'space-between' }}&gt;&#10;    &lt;Text style={{ fontSize: 15, color: '#B9CDF0', letterSpacing: 1 }}&gt;ISAD · INFORMATION SYSTEMS ANALYSIS &amp;amp; DESIGN&lt;/Text&gt;&#10;    &lt;Text style={{ fontSize: 15, color: '#B9CDF0' }}&gt;W02 · ENCAPSULATION&lt;/Text&gt;&#10;  &lt;/Box&gt;&#10;  &lt;Box style={{ padding: '20px 40px 0 40px' }}&gt;&#10;    &lt;Text style={{ fontSize: 32, fontWeight: 'bold', color: '#0E3F8C' }}&gt;Encapsulation on Paper&lt;/Text&gt;&#10;  &lt;/Box&gt;&#10;  &lt;Box style={{ flex: 1, padding: '16px 40px 0 40px', flexDirection: 'row', gap: 26 }}&gt;&#10;    &lt;Box style={{ flex: 3, justifyContent: 'center' }}&gt;&#10;      &lt;CodeBlock code={`Class Order&#10;    - lines : OrderLine[0..*]&#10;    - status : OrderStatus = DRAFT&#10;&#10;    + addItem(item, qty)&#10;        if status is not DRAFT&#10;            refuse - order already placed&#10;        lines.add(a new OrderLine(item, qty))&#10;&#10;    + total() : Money&#10;        sum = ZERO&#10;        for each line in lines&#10;            sum = sum + line.subtotal()&#10;        return sum`} language='text' width={580} fontSize={13} /&gt;&#10;    &lt;/Box&gt;&#10;    &lt;Box style={{ flex: 2, flexDirection: 'column', gap: 11, justifyContent: 'center' }}&gt;&#10;      {[&#10;        ['lock', 'private fields', 'Nobody outside can set status to a nonsense value.'],&#10;        ['user-check', 'guarded method', 'addItem() refuses once the order is placed.'],&#10;        ['calculator', 'computed, not stored', 'total() is derived — there is no stale copy to drift.'],&#10;      ].map(([icon, t, d]) =&gt; (&#10;        &lt;Box key={t} style={{ flexDirection: 'row', gap: 12, alignItems: 'flex-start', padding: '14px 16px', background: '#F7F9FC', borderRadius: 10, border: '1px solid #E5E7EB' }}&gt;&#10;          &lt;Box style={{ width: 38, height: 38, borderRadius: 9, background: '#E8EFF8', justifyContent: 'center', alignItems: 'center' }}&gt;&#10;            &lt;FAIcon name={icon} style={{ fill: '#1E4FA8', width: 19, height: 19 }} /&gt;&#10;          &lt;/Box&gt;&#10;          &lt;Box style={{ flex: 1, flexDirection: 'column', gap: 2 }}&gt;&#10;            &lt;Text style={{ fontSize: 16, fontWeight: 'bold', color: '#0E3F8C' }}&gt;{t}&lt;/Text&gt;&#10;            &lt;Text style={{ fontSize: 14, color: '#4A5568', lineHeight: 1.45 }}&gt;{d}&lt;/Text&gt;&#10;          &lt;/Box&gt;&#10;        &lt;/Box&gt;&#10;      ))}&#10;    &lt;/Box&gt;&#10;  &lt;/Box&gt;&#10;  &lt;Box style={{ height: 40, padding: '0 40px', flexDirection: 'row', alignItems: 'center', justifyContent: 'space-between' }}&gt;&#10;    &lt;Text style={{ fontSize: 13, color: '#8B97A8' }}&gt;Generic types omitted for slide width; your lab code uses List&amp;lt;OrderLine&amp;gt;.&lt;/Text&gt;&#10;    &lt;Text style={{ fontSize: 14, color: '#1E4FA8', fontWeight: 'bold' }}&gt;14 / 38&lt;/Text&gt;&#10;  &lt;/Box&gt;&#10;&lt;/Slide&gt;"/>
+        <p:cNvPr id="120" name="" descr="&lt;Slide style={{ background: '#FFFFFF', padding: 0 }}&gt;&#10;  &lt;Box style={{ height: 72, background: '#1E4FA8', padding: '0 40px', flexDirection: 'row', alignItems: 'center', justifyContent: 'space-between' }}&gt;&#10;    &lt;Text style={{ fontSize: 15, color: '#B9CDF0', letterSpacing: 1 }}&gt;ISAD · INFORMATION SYSTEMS ANALYSIS &amp;amp; DESIGN&lt;/Text&gt;&#10;    &lt;Text style={{ fontSize: 15, color: '#B9CDF0' }}&gt;W02 · ENCAPSULATION&lt;/Text&gt;&#10;  &lt;/Box&gt;&#10;  &lt;Box style={{ padding: '20px 40px 0 40px' }}&gt;&#10;    &lt;Text style={{ fontSize: 32, fontWeight: 'bold', color: '#0E3F8C' }}&gt;Encapsulation on Paper&lt;/Text&gt;&#10;  &lt;/Box&gt;&#10;  &lt;Box style={{ flex: 1, padding: '16px 40px 0 40px', flexDirection: 'row', gap: 26 }}&gt;&#10;    &lt;Box style={{ flex: 3, justifyContent: 'center' }}&gt;&#10;      &lt;CodeBlock theme='one-dark-pro' code={`Class Order&#10;    - lines : OrderLine[0..*]&#10;    - status : OrderStatus = DRAFT&#10;&#10;    + addItem(item, qty)&#10;        if status is not DRAFT&#10;            refuse - order already placed&#10;        lines.add(a new OrderLine(item, qty))&#10;&#10;    + total() : Money&#10;        sum = ZERO&#10;        for each line in lines&#10;            sum = sum + line.subtotal()&#10;        return sum`} language='text' width={580} fontSize={13} /&gt;&#10;    &lt;/Box&gt;&#10;    &lt;Box style={{ flex: 2, flexDirection: 'column', gap: 11, justifyContent: 'center' }}&gt;&#10;      {[&#10;        ['lock', 'private fields', 'Nobody outside can set status to a nonsense value.'],&#10;        ['user-check', 'guarded method', 'addItem() refuses once the order is placed.'],&#10;        ['calculator', 'computed, not stored', 'total() is derived — there is no stale copy to drift.'],&#10;      ].map(([icon, t, d]) =&gt; (&#10;        &lt;Box key={t} style={{ flexDirection: 'row', gap: 12, alignItems: 'flex-start', padding: '14px 16px', background: '#F7F9FC', borderRadius: 10, border: '1px solid #E5E7EB' }}&gt;&#10;          &lt;Box style={{ width: 38, height: 38, borderRadius: 9, background: '#E8EFF8', justifyContent: 'center', alignItems: 'center' }}&gt;&#10;            &lt;FAIcon name={icon} style={{ fill: '#1E4FA8', width: 19, height: 19 }} /&gt;&#10;          &lt;/Box&gt;&#10;          &lt;Box style={{ flex: 1, flexDirection: 'column', gap: 2 }}&gt;&#10;            &lt;Text style={{ fontSize: 16, fontWeight: 'bold', color: '#0E3F8C' }}&gt;{t}&lt;/Text&gt;&#10;            &lt;Text style={{ fontSize: 14, color: '#4A5568', lineHeight: 1.45 }}&gt;{d}&lt;/Text&gt;&#10;          &lt;/Box&gt;&#10;        &lt;/Box&gt;&#10;      ))}&#10;    &lt;/Box&gt;&#10;  &lt;/Box&gt;&#10;  &lt;Box style={{ height: 40, padding: '0 40px', flexDirection: 'row', alignItems: 'center', justifyContent: 'space-between' }}&gt;&#10;    &lt;Text style={{ fontSize: 13, color: '#8B97A8' }}&gt;Generic types omitted for slide width; your lab code uses List&amp;lt;OrderLine&amp;gt;.&lt;/Text&gt;&#10;    &lt;Text style={{ fontSize: 14, color: '#1E4FA8', fontWeight: 'bold' }}&gt;14 / 38&lt;/Text&gt;&#10;  &lt;/Box&gt;&#10;&lt;/Slide&gt;"/>
         <p:cNvGrpSpPr/>
         <p:nvPr/>
       </p:nvGrpSpPr>
@@ -5130,16 +5130,16 @@
         </p:nvSpPr>
         <p:spPr>
           <a:xfrm rot="0" flipH="0" flipV="0">
-            <a:off x="381000" y="2352675"/>
-            <a:ext cx="6705600" cy="3181350"/>
+            <a:off x="381000" y="2762250"/>
+            <a:ext cx="6705600" cy="2352675"/>
           </a:xfrm>
           <a:prstGeom prst="roundRect">
             <a:avLst>
-              <a:gd name="adj" fmla="val 2395"/>
+              <a:gd name="adj" fmla="val 3239"/>
             </a:avLst>
           </a:prstGeom>
           <a:solidFill>
-            <a:srgbClr val="F6F8FA"/>
+            <a:srgbClr val="0E1116"/>
           </a:solidFill>
           <a:ln/>
         </p:spPr>
@@ -5156,8 +5156,8 @@
         </p:nvSpPr>
         <p:spPr>
           <a:xfrm rot="0" flipH="0" flipV="0">
-            <a:off x="533400" y="2486025"/>
-            <a:ext cx="6400800" cy="2914650"/>
+            <a:off x="533400" y="2895600"/>
+            <a:ext cx="6400800" cy="2085975"/>
           </a:xfrm>
           <a:prstGeom prst="rect"/>
         </p:spPr>
@@ -5166,11 +5166,7 @@
             <a:normAutofit/>
           </a:bodyPr>
           <a:p>
-            <a:pPr>
-              <a:lnSpc>
-                <a:spcPct val="140000"/>
-              </a:lnSpc>
-            </a:pPr>
+            <a:pPr/>
             <a:r>
               <a:rPr sz="975">
                 <a:solidFill>
@@ -5179,221 +5175,18 @@
                 <a:latin typeface="Menlo"/>
                 <a:ea typeface="Menlo"/>
               </a:rPr>
-              <a:t>Class Order</a:t>
-            </a:r>
-            <a:endParaRPr/>
-          </a:p>
-          <a:p>
-            <a:pPr>
-              <a:lnSpc>
-                <a:spcPct val="140000"/>
-              </a:lnSpc>
-            </a:pPr>
-            <a:r>
-              <a:rPr sz="975">
-                <a:solidFill>
-                  <a:srgbClr val="E5E7EB"/>
-                </a:solidFill>
-                <a:latin typeface="Menlo"/>
-                <a:ea typeface="Menlo"/>
-              </a:rPr>
-              <a:t>    - lines : OrderLine[0..*]</a:t>
-            </a:r>
-            <a:endParaRPr/>
-          </a:p>
-          <a:p>
-            <a:pPr>
-              <a:lnSpc>
-                <a:spcPct val="140000"/>
-              </a:lnSpc>
-            </a:pPr>
-            <a:r>
-              <a:rPr sz="975">
-                <a:solidFill>
-                  <a:srgbClr val="E5E7EB"/>
-                </a:solidFill>
-                <a:latin typeface="Menlo"/>
-                <a:ea typeface="Menlo"/>
-              </a:rPr>
-              <a:t>    - status : OrderStatus = DRAFT</a:t>
-            </a:r>
-            <a:endParaRPr/>
-          </a:p>
-          <a:p>
-            <a:pPr>
-              <a:lnSpc>
-                <a:spcPct val="140000"/>
-              </a:lnSpc>
-            </a:pPr>
-            <a:endParaRPr/>
-          </a:p>
-          <a:p>
-            <a:pPr>
-              <a:lnSpc>
-                <a:spcPct val="140000"/>
-              </a:lnSpc>
-            </a:pPr>
-            <a:r>
-              <a:rPr sz="975">
-                <a:solidFill>
-                  <a:srgbClr val="E5E7EB"/>
-                </a:solidFill>
-                <a:latin typeface="Menlo"/>
-                <a:ea typeface="Menlo"/>
-              </a:rPr>
-              <a:t>    + addItem(item, qty)</a:t>
-            </a:r>
-            <a:endParaRPr/>
-          </a:p>
-          <a:p>
-            <a:pPr>
-              <a:lnSpc>
-                <a:spcPct val="140000"/>
-              </a:lnSpc>
-            </a:pPr>
-            <a:r>
-              <a:rPr sz="975">
-                <a:solidFill>
-                  <a:srgbClr val="E5E7EB"/>
-                </a:solidFill>
-                <a:latin typeface="Menlo"/>
-                <a:ea typeface="Menlo"/>
-              </a:rPr>
-              <a:t>        if status is not DRAFT</a:t>
-            </a:r>
-            <a:endParaRPr/>
-          </a:p>
-          <a:p>
-            <a:pPr>
-              <a:lnSpc>
-                <a:spcPct val="140000"/>
-              </a:lnSpc>
-            </a:pPr>
-            <a:r>
-              <a:rPr sz="975">
-                <a:solidFill>
-                  <a:srgbClr val="E5E7EB"/>
-                </a:solidFill>
-                <a:latin typeface="Menlo"/>
-                <a:ea typeface="Menlo"/>
-              </a:rPr>
-              <a:t>            refuse - order already placed</a:t>
-            </a:r>
-            <a:endParaRPr/>
-          </a:p>
-          <a:p>
-            <a:pPr>
-              <a:lnSpc>
-                <a:spcPct val="140000"/>
-              </a:lnSpc>
-            </a:pPr>
-            <a:r>
-              <a:rPr sz="975">
-                <a:solidFill>
-                  <a:srgbClr val="E5E7EB"/>
-                </a:solidFill>
-                <a:latin typeface="Menlo"/>
-                <a:ea typeface="Menlo"/>
-              </a:rPr>
-              <a:t>        lines.add(a new OrderLine(item, qty))</a:t>
-            </a:r>
-            <a:endParaRPr/>
-          </a:p>
-          <a:p>
-            <a:pPr>
-              <a:lnSpc>
-                <a:spcPct val="140000"/>
-              </a:lnSpc>
-            </a:pPr>
-            <a:endParaRPr/>
-          </a:p>
-          <a:p>
-            <a:pPr>
-              <a:lnSpc>
-                <a:spcPct val="140000"/>
-              </a:lnSpc>
-            </a:pPr>
-            <a:r>
-              <a:rPr sz="975">
-                <a:solidFill>
-                  <a:srgbClr val="E5E7EB"/>
-                </a:solidFill>
-                <a:latin typeface="Menlo"/>
-                <a:ea typeface="Menlo"/>
-              </a:rPr>
-              <a:t>    + total() : Money</a:t>
-            </a:r>
-            <a:endParaRPr/>
-          </a:p>
-          <a:p>
-            <a:pPr>
-              <a:lnSpc>
-                <a:spcPct val="140000"/>
-              </a:lnSpc>
-            </a:pPr>
-            <a:r>
-              <a:rPr sz="975">
-                <a:solidFill>
-                  <a:srgbClr val="E5E7EB"/>
-                </a:solidFill>
-                <a:latin typeface="Menlo"/>
-                <a:ea typeface="Menlo"/>
-              </a:rPr>
-              <a:t>        sum = ZERO</a:t>
-            </a:r>
-            <a:endParaRPr/>
-          </a:p>
-          <a:p>
-            <a:pPr>
-              <a:lnSpc>
-                <a:spcPct val="140000"/>
-              </a:lnSpc>
-            </a:pPr>
-            <a:r>
-              <a:rPr sz="975">
-                <a:solidFill>
-                  <a:srgbClr val="E5E7EB"/>
-                </a:solidFill>
-                <a:latin typeface="Menlo"/>
-                <a:ea typeface="Menlo"/>
-              </a:rPr>
-              <a:t>        for each line in lines</a:t>
-            </a:r>
-            <a:endParaRPr/>
-          </a:p>
-          <a:p>
-            <a:pPr>
-              <a:lnSpc>
-                <a:spcPct val="140000"/>
-              </a:lnSpc>
-            </a:pPr>
-            <a:r>
-              <a:rPr sz="975">
-                <a:solidFill>
-                  <a:srgbClr val="E5E7EB"/>
-                </a:solidFill>
-                <a:latin typeface="Menlo"/>
-                <a:ea typeface="Menlo"/>
-              </a:rPr>
-              <a:t>            sum = sum + line.subtotal()</a:t>
-            </a:r>
-            <a:endParaRPr/>
-          </a:p>
-          <a:p>
-            <a:pPr>
-              <a:lnSpc>
-                <a:spcPct val="140000"/>
-              </a:lnSpc>
-            </a:pPr>
-            <a:r>
-              <a:rPr sz="975">
-                <a:solidFill>
-                  <a:srgbClr val="E5E7EB"/>
-                </a:solidFill>
-                <a:latin typeface="Menlo"/>
-                <a:ea typeface="Menlo"/>
-              </a:rPr>
-              <a:t>        return sum</a:t>
+              <a:t>Class Order
+    - lines : OrderLine[0..*]
+    - status : OrderStatus = DRAFT
+    + addItem(item, qty)
+        if status is not DRAFT
+            refuse - order already placed
+        lines.add(a new OrderLine(item, qty))
+    + total() : Money
+        sum = ZERO
+        for each line in lines
+            sum = sum + line.subtotal()
+        return sum</a:t>
             </a:r>
             <a:endParaRPr/>
           </a:p>
@@ -5409,7 +5202,7 @@
   <p:cSld>
     <p:spTree>
       <p:nvGrpSpPr>
-        <p:cNvPr id="145" name="" descr="&lt;Slide style={{ background: '#FFFFFF', padding: 0 }}&gt;&#10;  &lt;Box style={{ height: 72, background: '#1E4FA8', padding: '0 40px', flexDirection: 'row', alignItems: 'center', justifyContent: 'space-between' }}&gt;&#10;    &lt;Text style={{ fontSize: 15, color: '#B9CDF0', letterSpacing: 1 }}&gt;ISAD · INFORMATION SYSTEMS ANALYSIS &amp;amp; DESIGN&lt;/Text&gt;&#10;    &lt;Text style={{ fontSize: 15, color: '#B9CDF0' }}&gt;W02 · ENCAPSULATION&lt;/Text&gt;&#10;  &lt;/Box&gt;&#10;  &lt;Box style={{ padding: '20px 40px 0 40px' }}&gt;&#10;    &lt;Text style={{ fontSize: 32, fontWeight: 'bold', color: '#0E3F8C' }}&gt;The Getter / Setter Debate&lt;/Text&gt;&#10;  &lt;/Box&gt;&#10;  &lt;Box style={{ flex: 1, padding: '16px 40px 0 40px', flexDirection: 'row', gap: 26 }}&gt;&#10;    &lt;Box style={{ flex: 3, flexDirection: 'column', gap: 12 }}&gt;&#10;      &lt;Box style={{ flex: 1, padding: '16px 18px', background: '#FDF3F3', borderRadius: 12, border: '1px solid #D9534F', flexDirection: 'column' }}&gt;&#10;        &lt;Box style={{ flexDirection: 'row', alignItems: 'center', gap: 10, marginBottom: 8 }}&gt;&#10;          &lt;FAIcon name='times-circle' style={{ fill: '#D9534F', width: 20, height: 20 }} /&gt;&#10;          &lt;Text style={{ fontSize: 16, fontWeight: 'bold', color: '#D9534F' }}&gt;Expose the fields — every caller re-implements the rule&lt;/Text&gt;&#10;        &lt;/Box&gt;&#10;        &lt;CodeBlock code={`Class Order&#10;    + lines : OrderLine[0..*]&#10;    + status : OrderStatus&#10;&#10;# every caller must know the rule&#10;if order.status is DRAFT&#10;    order.lines.add(a new OrderLine(item, qty))&#10;# one caller forgets the check.&#10;# now the order is wrong.`} language='text' width={520} fontSize={12} /&gt;&#10;      &lt;/Box&gt;&#10;    &lt;/Box&gt;&#10;    &lt;Box style={{ flex: 2, flexDirection: 'column', gap: 12 }}&gt;&#10;      &lt;Box style={{ padding: '16px 18px', background: '#F0F5FC', borderRadius: 12, border: '1px solid #3D7BD9', flexDirection: 'column' }}&gt;&#10;        &lt;Box style={{ flexDirection: 'row', alignItems: 'center', gap: 10, marginBottom: 8 }}&gt;&#10;          &lt;FAIcon name='check-circle' style={{ fill: '#1E4FA8', width: 20, height: 20 }} /&gt;&#10;          &lt;Text style={{ fontSize: 16, fontWeight: 'bold', color: '#0E3F8C' }}&gt;Ask the object — the rule has one home&lt;/Text&gt;&#10;        &lt;/Box&gt;&#10;        &lt;CodeBlock code={`# the rule lives with the data&#10;order.addItem(item, qty)`} language='text' width={330} fontSize={12} /&gt;&#10;      &lt;/Box&gt;&#10;      &lt;Box style={{ flex: 1, padding: '20px 22px', background: '#0E3F8C', borderRadius: 12, flexDirection: 'column', justifyContent: 'center', gap: 12 }}&gt;&#10;        &lt;Text style={{ fontSize: 20, fontWeight: 'bold', color: '#FFFFFF', lineHeight: 1.35 }}&gt;A getter for everything is just public fields with extra steps.&lt;/Text&gt;&#10;        &lt;Text style={{ fontSize: 15, color: '#C5D4EA', lineHeight: 1.5 }}&gt;Ask what the object should &lt;Text style={{ fontWeight: 'bold', color: '#FFC107' }}&gt;do&lt;/Text&gt;, not what it should &lt;Text style={{ fontWeight: 'bold', color: '#FFC107' }}&gt;reveal&lt;/Text&gt;.&lt;/Text&gt;&#10;      &lt;/Box&gt;&#10;    &lt;/Box&gt;&#10;  &lt;/Box&gt;&#10;  &lt;Box style={{ height: 40, padding: '0 40px', flexDirection: 'row', alignItems: 'center', justifyContent: 'space-between' }}&gt;&#10;    &lt;Text style={{ fontSize: 13, color: '#8B97A8' }}&gt;Getters for reporting are fine. Getters that let callers enforce rules are not.&lt;/Text&gt;&#10;    &lt;Text style={{ fontSize: 14, color: '#1E4FA8', fontWeight: 'bold' }}&gt;15 / 38&lt;/Text&gt;&#10;  &lt;/Box&gt;&#10;&lt;/Slide&gt;"/>
+        <p:cNvPr id="145" name="" descr="&lt;Slide style={{ background: '#FFFFFF', padding: 0 }}&gt;&#10;  &lt;Box style={{ height: 72, background: '#1E4FA8', padding: '0 40px', flexDirection: 'row', alignItems: 'center', justifyContent: 'space-between' }}&gt;&#10;    &lt;Text style={{ fontSize: 15, color: '#B9CDF0', letterSpacing: 1 }}&gt;ISAD · INFORMATION SYSTEMS ANALYSIS &amp;amp; DESIGN&lt;/Text&gt;&#10;    &lt;Text style={{ fontSize: 15, color: '#B9CDF0' }}&gt;W02 · ENCAPSULATION&lt;/Text&gt;&#10;  &lt;/Box&gt;&#10;  &lt;Box style={{ padding: '20px 40px 0 40px' }}&gt;&#10;    &lt;Text style={{ fontSize: 32, fontWeight: 'bold', color: '#0E3F8C' }}&gt;The Getter / Setter Debate&lt;/Text&gt;&#10;  &lt;/Box&gt;&#10;  &lt;Box style={{ flex: 1, padding: '16px 40px 0 40px', flexDirection: 'row', gap: 26 }}&gt;&#10;    &lt;Box style={{ flex: 3, flexDirection: 'column', gap: 12 }}&gt;&#10;      &lt;Box style={{ flex: 1, padding: '16px 18px', background: '#FDF3F3', borderRadius: 12, border: '1px solid #D9534F', flexDirection: 'column' }}&gt;&#10;        &lt;Box style={{ flexDirection: 'row', alignItems: 'center', gap: 10, marginBottom: 8 }}&gt;&#10;          &lt;FAIcon name='times-circle' style={{ fill: '#D9534F', width: 20, height: 20 }} /&gt;&#10;          &lt;Text style={{ fontSize: 16, fontWeight: 'bold', color: '#D9534F' }}&gt;Expose the fields — every caller re-implements the rule&lt;/Text&gt;&#10;        &lt;/Box&gt;&#10;        &lt;CodeBlock theme='one-dark-pro' code={`Class Order&#10;    + lines : OrderLine[0..*]&#10;    + status : OrderStatus&#10;&#10;# every caller must know the rule&#10;if order.status is DRAFT&#10;    order.lines.add(a new OrderLine(item, qty))&#10;# one caller forgets the check.&#10;# now the order is wrong.`} language='text' width={520} fontSize={12} /&gt;&#10;      &lt;/Box&gt;&#10;    &lt;/Box&gt;&#10;    &lt;Box style={{ flex: 2, flexDirection: 'column', gap: 12 }}&gt;&#10;      &lt;Box style={{ padding: '16px 18px', background: '#F0F5FC', borderRadius: 12, border: '1px solid #3D7BD9', flexDirection: 'column' }}&gt;&#10;        &lt;Box style={{ flexDirection: 'row', alignItems: 'center', gap: 10, marginBottom: 8 }}&gt;&#10;          &lt;FAIcon name='check-circle' style={{ fill: '#1E4FA8', width: 20, height: 20 }} /&gt;&#10;          &lt;Text style={{ fontSize: 16, fontWeight: 'bold', color: '#0E3F8C' }}&gt;Ask the object — the rule has one home&lt;/Text&gt;&#10;        &lt;/Box&gt;&#10;        &lt;CodeBlock theme='one-dark-pro' code={`# the rule lives with the data&#10;order.addItem(item, qty)`} language='text' width={330} fontSize={12} /&gt;&#10;      &lt;/Box&gt;&#10;      &lt;Box style={{ flex: 1, padding: '20px 22px', background: '#0E3F8C', borderRadius: 12, flexDirection: 'column', justifyContent: 'center', gap: 12 }}&gt;&#10;        &lt;Text style={{ fontSize: 20, fontWeight: 'bold', color: '#FFFFFF', lineHeight: 1.35 }}&gt;A getter for everything is just public fields with extra steps.&lt;/Text&gt;&#10;        &lt;Text style={{ fontSize: 15, color: '#C5D4EA', lineHeight: 1.5 }}&gt;Ask what the object should &lt;Text style={{ fontWeight: 'bold', color: '#FFC107' }}&gt;do&lt;/Text&gt;, not what it should &lt;Text style={{ fontWeight: 'bold', color: '#FFC107' }}&gt;reveal&lt;/Text&gt;.&lt;/Text&gt;&#10;      &lt;/Box&gt;&#10;    &lt;/Box&gt;&#10;  &lt;/Box&gt;&#10;  &lt;Box style={{ height: 40, padding: '0 40px', flexDirection: 'row', alignItems: 'center', justifyContent: 'space-between' }}&gt;&#10;    &lt;Text style={{ fontSize: 13, color: '#8B97A8' }}&gt;Getters for reporting are fine. Getters that let callers enforce rules are not.&lt;/Text&gt;&#10;    &lt;Text style={{ fontSize: 14, color: '#1E4FA8', fontWeight: 'bold' }}&gt;15 / 38&lt;/Text&gt;&#10;  &lt;/Box&gt;&#10;&lt;/Slide&gt;"/>
         <p:cNvGrpSpPr/>
         <p:nvPr/>
       </p:nvGrpSpPr>
@@ -5680,11 +5473,11 @@
         <p:spPr>
           <a:xfrm rot="0" flipH="0" flipV="0">
             <a:off x="7334250" y="1400175"/>
-            <a:ext cx="4476750" cy="1228725"/>
+            <a:ext cx="4476750" cy="1114425"/>
           </a:xfrm>
           <a:prstGeom prst="roundRect">
             <a:avLst>
-              <a:gd name="adj" fmla="val 9302"/>
+              <a:gd name="adj" fmla="val 10256"/>
             </a:avLst>
           </a:prstGeom>
           <a:solidFill>
@@ -5776,12 +5569,12 @@
         </p:nvSpPr>
         <p:spPr>
           <a:xfrm rot="0" flipH="0" flipV="0">
-            <a:off x="7334250" y="2743200"/>
-            <a:ext cx="4476750" cy="3733800"/>
+            <a:off x="7334250" y="2628900"/>
+            <a:ext cx="4476750" cy="3848100"/>
           </a:xfrm>
           <a:prstGeom prst="roundRect">
             <a:avLst>
-              <a:gd name="adj" fmla="val 3061"/>
+              <a:gd name="adj" fmla="val 2970"/>
             </a:avLst>
           </a:prstGeom>
           <a:solidFill>
@@ -5802,7 +5595,7 @@
         </p:nvSpPr>
         <p:spPr>
           <a:xfrm rot="0" flipH="0" flipV="0">
-            <a:off x="7543800" y="4114800"/>
+            <a:off x="7543800" y="4057650"/>
             <a:ext cx="4057650" cy="619125"/>
           </a:xfrm>
           <a:prstGeom prst="rect"/>
@@ -5839,7 +5632,7 @@
         </p:nvSpPr>
         <p:spPr>
           <a:xfrm rot="0" flipH="0" flipV="0">
-            <a:off x="7543800" y="4848225"/>
+            <a:off x="7543800" y="4791075"/>
             <a:ext cx="4057650" cy="257175"/>
           </a:xfrm>
           <a:prstGeom prst="rect"/>
@@ -5985,15 +5778,15 @@
         <p:spPr>
           <a:xfrm rot="0" flipH="0" flipV="0">
             <a:off x="552450" y="1819275"/>
-            <a:ext cx="6362700" cy="2000250"/>
+            <a:ext cx="6362700" cy="1504950"/>
           </a:xfrm>
           <a:prstGeom prst="roundRect">
             <a:avLst>
-              <a:gd name="adj" fmla="val 3810"/>
+              <a:gd name="adj" fmla="val 5063"/>
             </a:avLst>
           </a:prstGeom>
           <a:solidFill>
-            <a:srgbClr val="F6F8FA"/>
+            <a:srgbClr val="0E1116"/>
           </a:solidFill>
           <a:ln/>
         </p:spPr>
@@ -6011,7 +5804,7 @@
         <p:spPr>
           <a:xfrm rot="0" flipH="0" flipV="0">
             <a:off x="704850" y="1952625"/>
-            <a:ext cx="6057900" cy="1733550"/>
+            <a:ext cx="6057900" cy="1238250"/>
           </a:xfrm>
           <a:prstGeom prst="rect"/>
         </p:spPr>
@@ -6020,11 +5813,7 @@
             <a:normAutofit/>
           </a:bodyPr>
           <a:p>
-            <a:pPr>
-              <a:lnSpc>
-                <a:spcPct val="140000"/>
-              </a:lnSpc>
-            </a:pPr>
+            <a:pPr/>
             <a:r>
               <a:rPr sz="900">
                 <a:solidFill>
@@ -6033,141 +5822,14 @@
                 <a:latin typeface="Menlo"/>
                 <a:ea typeface="Menlo"/>
               </a:rPr>
-              <a:t>Class Order</a:t>
-            </a:r>
-            <a:endParaRPr/>
-          </a:p>
-          <a:p>
-            <a:pPr>
-              <a:lnSpc>
-                <a:spcPct val="140000"/>
-              </a:lnSpc>
-            </a:pPr>
-            <a:r>
-              <a:rPr sz="900">
-                <a:solidFill>
-                  <a:srgbClr val="E5E7EB"/>
-                </a:solidFill>
-                <a:latin typeface="Menlo"/>
-                <a:ea typeface="Menlo"/>
-              </a:rPr>
-              <a:t>    + lines : OrderLine[0..*]</a:t>
-            </a:r>
-            <a:endParaRPr/>
-          </a:p>
-          <a:p>
-            <a:pPr>
-              <a:lnSpc>
-                <a:spcPct val="140000"/>
-              </a:lnSpc>
-            </a:pPr>
-            <a:r>
-              <a:rPr sz="900">
-                <a:solidFill>
-                  <a:srgbClr val="E5E7EB"/>
-                </a:solidFill>
-                <a:latin typeface="Menlo"/>
-                <a:ea typeface="Menlo"/>
-              </a:rPr>
-              <a:t>    + status : OrderStatus</a:t>
-            </a:r>
-            <a:endParaRPr/>
-          </a:p>
-          <a:p>
-            <a:pPr>
-              <a:lnSpc>
-                <a:spcPct val="140000"/>
-              </a:lnSpc>
-            </a:pPr>
-            <a:endParaRPr/>
-          </a:p>
-          <a:p>
-            <a:pPr>
-              <a:lnSpc>
-                <a:spcPct val="140000"/>
-              </a:lnSpc>
-            </a:pPr>
-            <a:r>
-              <a:rPr sz="900">
-                <a:solidFill>
-                  <a:srgbClr val="E5E7EB"/>
-                </a:solidFill>
-                <a:latin typeface="Menlo"/>
-                <a:ea typeface="Menlo"/>
-              </a:rPr>
-              <a:t># every caller must know the rule</a:t>
-            </a:r>
-            <a:endParaRPr/>
-          </a:p>
-          <a:p>
-            <a:pPr>
-              <a:lnSpc>
-                <a:spcPct val="140000"/>
-              </a:lnSpc>
-            </a:pPr>
-            <a:r>
-              <a:rPr sz="900">
-                <a:solidFill>
-                  <a:srgbClr val="E5E7EB"/>
-                </a:solidFill>
-                <a:latin typeface="Menlo"/>
-                <a:ea typeface="Menlo"/>
-              </a:rPr>
-              <a:t>if order.status is DRAFT</a:t>
-            </a:r>
-            <a:endParaRPr/>
-          </a:p>
-          <a:p>
-            <a:pPr>
-              <a:lnSpc>
-                <a:spcPct val="140000"/>
-              </a:lnSpc>
-            </a:pPr>
-            <a:r>
-              <a:rPr sz="900">
-                <a:solidFill>
-                  <a:srgbClr val="E5E7EB"/>
-                </a:solidFill>
-                <a:latin typeface="Menlo"/>
-                <a:ea typeface="Menlo"/>
-              </a:rPr>
-              <a:t>    order.lines.add(a new OrderLine(item, qty))</a:t>
-            </a:r>
-            <a:endParaRPr/>
-          </a:p>
-          <a:p>
-            <a:pPr>
-              <a:lnSpc>
-                <a:spcPct val="140000"/>
-              </a:lnSpc>
-            </a:pPr>
-            <a:r>
-              <a:rPr sz="900">
-                <a:solidFill>
-                  <a:srgbClr val="E5E7EB"/>
-                </a:solidFill>
-                <a:latin typeface="Menlo"/>
-                <a:ea typeface="Menlo"/>
-              </a:rPr>
-              <a:t># one caller forgets the check.</a:t>
-            </a:r>
-            <a:endParaRPr/>
-          </a:p>
-          <a:p>
-            <a:pPr>
-              <a:lnSpc>
-                <a:spcPct val="140000"/>
-              </a:lnSpc>
-            </a:pPr>
-            <a:r>
-              <a:rPr sz="900">
-                <a:solidFill>
-                  <a:srgbClr val="E5E7EB"/>
-                </a:solidFill>
-                <a:latin typeface="Menlo"/>
-                <a:ea typeface="Menlo"/>
-              </a:rPr>
-              <a:t># now the order is wrong.</a:t>
+              <a:t>Class Order
+    + lines : OrderLine[0..*]
+    + status : OrderStatus
+# every caller must know the rule
+if order.status is DRAFT
+    order.lines.add(a new OrderLine(item, qty))
+# one caller forgets the check.
+# now the order is wrong.</a:t>
             </a:r>
             <a:endParaRPr/>
           </a:p>
@@ -6182,15 +5844,15 @@
         <p:spPr>
           <a:xfrm rot="0" flipH="0" flipV="0">
             <a:off x="7505700" y="1819275"/>
-            <a:ext cx="4133850" cy="657225"/>
+            <a:ext cx="4133850" cy="542925"/>
           </a:xfrm>
           <a:prstGeom prst="roundRect">
             <a:avLst>
-              <a:gd name="adj" fmla="val 11594"/>
+              <a:gd name="adj" fmla="val 14035"/>
             </a:avLst>
           </a:prstGeom>
           <a:solidFill>
-            <a:srgbClr val="F6F8FA"/>
+            <a:srgbClr val="0E1116"/>
           </a:solidFill>
           <a:ln/>
         </p:spPr>
@@ -6208,7 +5870,7 @@
         <p:spPr>
           <a:xfrm rot="0" flipH="0" flipV="0">
             <a:off x="7658100" y="1952625"/>
-            <a:ext cx="3829050" cy="390525"/>
+            <a:ext cx="3829050" cy="276225"/>
           </a:xfrm>
           <a:prstGeom prst="rect"/>
         </p:spPr>
@@ -6217,11 +5879,7 @@
             <a:normAutofit/>
           </a:bodyPr>
           <a:p>
-            <a:pPr>
-              <a:lnSpc>
-                <a:spcPct val="140000"/>
-              </a:lnSpc>
-            </a:pPr>
+            <a:pPr/>
             <a:r>
               <a:rPr sz="900">
                 <a:solidFill>
@@ -6230,25 +5888,8 @@
                 <a:latin typeface="Menlo"/>
                 <a:ea typeface="Menlo"/>
               </a:rPr>
-              <a:t># the rule lives with the data</a:t>
-            </a:r>
-            <a:endParaRPr/>
-          </a:p>
-          <a:p>
-            <a:pPr>
-              <a:lnSpc>
-                <a:spcPct val="140000"/>
-              </a:lnSpc>
-            </a:pPr>
-            <a:r>
-              <a:rPr sz="900">
-                <a:solidFill>
-                  <a:srgbClr val="E5E7EB"/>
-                </a:solidFill>
-                <a:latin typeface="Menlo"/>
-                <a:ea typeface="Menlo"/>
-              </a:rPr>
-              <a:t>order.addItem(item, qty)</a:t>
+              <a:t># the rule lives with the data
+order.addItem(item, qty)</a:t>
             </a:r>
             <a:endParaRPr/>
           </a:p>
@@ -9928,7 +9569,7 @@
   <p:cSld>
     <p:spTree>
       <p:nvGrpSpPr>
-        <p:cNvPr id="278" name="" descr="&lt;Slide style={{ background: '#FFFFFF', padding: 0 }}&gt;&#10;  &lt;Box style={{ height: 72, background: '#1E4FA8', padding: '0 40px', flexDirection: 'row', alignItems: 'center', justifyContent: 'space-between' }}&gt;&#10;    &lt;Text style={{ fontSize: 15, color: '#B9CDF0', letterSpacing: 1 }}&gt;ISAD · INFORMATION SYSTEMS ANALYSIS &amp;amp; DESIGN&lt;/Text&gt;&#10;    &lt;Text style={{ fontSize: 15, color: '#B9CDF0' }}&gt;W02 · REUSE&lt;/Text&gt;&#10;  &lt;/Box&gt;&#10;  &lt;Box style={{ padding: '20px 40px 0 40px' }}&gt;&#10;    &lt;Text style={{ fontSize: 32, fontWeight: 'bold', color: '#0E3F8C' }}&gt;The Circle–Ellipse Trap&lt;/Text&gt;&#10;  &lt;/Box&gt;&#10;  &lt;Box style={{ flex: 1, padding: '14px 40px 0 40px', flexDirection: 'row', gap: 26 }}&gt;&#10;    &lt;Box style={{ flex: 3, justifyContent: 'center' }}&gt;&#10;      &lt;CodeBlock code={`Class Ellipse&#10;    + setMajorAxis(a)&#10;    + setMinorAxis(b)&#10;&#10;# In geometry, a circle IS an ellipse.&#10;Class Circle extends Ellipse&#10;    + setMajorAxis(a)&#10;        set both axes to a        # stay round&#10;    + setMinorAxis(b)&#10;        refuse - a circle cannot  # breaks the promise&#10;&#10;# ...so why does this break?&#10;e = a new Circle&#10;e.setMinorAxis(3.0)              # fails`} language='text' width={560} fontSize={12} /&gt;&#10;    &lt;/Box&gt;&#10;    &lt;Box style={{ flex: 2, flexDirection: 'column', gap: 11, justifyContent: 'center' }}&gt;&#10;      &lt;Box style={{ padding: '16px 18px', background: '#FDF3F3', borderRadius: 10, borderLeft: '4px solid #D9534F' }}&gt;&#10;        &lt;Text style={{ fontSize: 17, fontWeight: 'bold', color: '#D9534F', marginBottom: 5 }}&gt;What went wrong&lt;/Text&gt;&#10;        &lt;Text style={{ fontSize: 15, color: '#4A5568', lineHeight: 1.5 }}&gt;The subclass &lt;Text style={{ fontWeight: 'bold', color: '#1A2230' }}&gt;refuses&lt;/Text&gt; a method the parent promises. Code written against Ellipse now breaks on a Circle.&lt;/Text&gt;&#10;      &lt;/Box&gt;&#10;      {[&#10;        ['shapes', 'True in maths, false in code', 'A circle has fewer degrees of freedom than an ellipse.'],&#10;        ['unlink', 'Substitutability is the real test', 'Not &quot;is it a kind of&quot; but &quot;can it stand in anywhere?&quot;'],&#10;        ['clock', 'Liskov, Week 12', 'This has a name: the Liskov Substitution Principle.'],&#10;      ].map(([icon, t, d]) =&gt; (&#10;        &lt;Box key={t} style={{ flexDirection: 'row', gap: 12, alignItems: 'flex-start', padding: '13px 16px', background: '#F7F9FC', borderRadius: 10, border: '1px solid #E5E7EB' }}&gt;&#10;          &lt;Box style={{ width: 36, height: 36, borderRadius: 9, background: '#E8EFF8', justifyContent: 'center', alignItems: 'center' }}&gt;&#10;            &lt;FAIcon name={icon} style={{ fill: '#1E4FA8', width: 18, height: 18 }} /&gt;&#10;          &lt;/Box&gt;&#10;          &lt;Box style={{ flex: 1, flexDirection: 'column', gap: 2 }}&gt;&#10;            &lt;Text style={{ fontSize: 15, fontWeight: 'bold', color: '#1A2230' }}&gt;{t}&lt;/Text&gt;&#10;            &lt;Text style={{ fontSize: 13, color: '#4A5568', lineHeight: 1.45 }}&gt;{d}&lt;/Text&gt;&#10;          &lt;/Box&gt;&#10;        &lt;/Box&gt;&#10;      ))}&#10;    &lt;/Box&gt;&#10;  &lt;/Box&gt;&#10;  &lt;Box style={{ height: 40, padding: '0 40px', flexDirection: 'row', alignItems: 'center', justifyContent: 'space-between' }}&gt;&#10;    &lt;Text style={{ fontSize: 13, color: '#8B97A8' }}&gt;Full treatment in Week 12 (LSP). Today: notice that &quot;is-a&quot; is not enough.&lt;/Text&gt;&#10;    &lt;Text style={{ fontSize: 14, color: '#1E4FA8', fontWeight: 'bold' }}&gt;20 / 38&lt;/Text&gt;&#10;  &lt;/Box&gt;&#10;&lt;/Slide&gt;"/>
+        <p:cNvPr id="278" name="" descr="&lt;Slide style={{ background: '#FFFFFF', padding: 0 }}&gt;&#10;  &lt;Box style={{ height: 72, background: '#1E4FA8', padding: '0 40px', flexDirection: 'row', alignItems: 'center', justifyContent: 'space-between' }}&gt;&#10;    &lt;Text style={{ fontSize: 15, color: '#B9CDF0', letterSpacing: 1 }}&gt;ISAD · INFORMATION SYSTEMS ANALYSIS &amp;amp; DESIGN&lt;/Text&gt;&#10;    &lt;Text style={{ fontSize: 15, color: '#B9CDF0' }}&gt;W02 · REUSE&lt;/Text&gt;&#10;  &lt;/Box&gt;&#10;  &lt;Box style={{ padding: '20px 40px 0 40px' }}&gt;&#10;    &lt;Text style={{ fontSize: 32, fontWeight: 'bold', color: '#0E3F8C' }}&gt;The Circle–Ellipse Trap&lt;/Text&gt;&#10;  &lt;/Box&gt;&#10;  &lt;Box style={{ flex: 1, padding: '14px 40px 0 40px', flexDirection: 'row', gap: 26 }}&gt;&#10;    &lt;Box style={{ flex: 3, justifyContent: 'center' }}&gt;&#10;      &lt;CodeBlock theme='one-dark-pro' code={`Class Ellipse&#10;    + setMajorAxis(a)&#10;    + setMinorAxis(b)&#10;&#10;# In geometry, a circle IS an ellipse.&#10;Class Circle extends Ellipse&#10;    + setMajorAxis(a)&#10;        set both axes to a        # stay round&#10;    + setMinorAxis(b)&#10;        refuse - a circle cannot  # breaks the promise&#10;&#10;# ...so why does this break?&#10;e = a new Circle&#10;e.setMinorAxis(3.0)              # fails`} language='text' width={560} fontSize={12} /&gt;&#10;    &lt;/Box&gt;&#10;    &lt;Box style={{ flex: 2, flexDirection: 'column', gap: 11, justifyContent: 'center' }}&gt;&#10;      &lt;Box style={{ padding: '16px 18px', background: '#FDF3F3', borderRadius: 10, borderLeft: '4px solid #D9534F' }}&gt;&#10;        &lt;Text style={{ fontSize: 17, fontWeight: 'bold', color: '#D9534F', marginBottom: 5 }}&gt;What went wrong&lt;/Text&gt;&#10;        &lt;Text style={{ fontSize: 15, color: '#4A5568', lineHeight: 1.5 }}&gt;The subclass &lt;Text style={{ fontWeight: 'bold', color: '#1A2230' }}&gt;refuses&lt;/Text&gt; a method the parent promises. Code written against Ellipse now breaks on a Circle.&lt;/Text&gt;&#10;      &lt;/Box&gt;&#10;      {[&#10;        ['shapes', 'True in maths, false in code', 'A circle has fewer degrees of freedom than an ellipse.'],&#10;        ['unlink', 'Substitutability is the real test', 'Not &quot;is it a kind of&quot; but &quot;can it stand in anywhere?&quot;'],&#10;        ['clock', 'Liskov, Week 12', 'This has a name: the Liskov Substitution Principle.'],&#10;      ].map(([icon, t, d]) =&gt; (&#10;        &lt;Box key={t} style={{ flexDirection: 'row', gap: 12, alignItems: 'flex-start', padding: '13px 16px', background: '#F7F9FC', borderRadius: 10, border: '1px solid #E5E7EB' }}&gt;&#10;          &lt;Box style={{ width: 36, height: 36, borderRadius: 9, background: '#E8EFF8', justifyContent: 'center', alignItems: 'center' }}&gt;&#10;            &lt;FAIcon name={icon} style={{ fill: '#1E4FA8', width: 18, height: 18 }} /&gt;&#10;          &lt;/Box&gt;&#10;          &lt;Box style={{ flex: 1, flexDirection: 'column', gap: 2 }}&gt;&#10;            &lt;Text style={{ fontSize: 15, fontWeight: 'bold', color: '#1A2230' }}&gt;{t}&lt;/Text&gt;&#10;            &lt;Text style={{ fontSize: 13, color: '#4A5568', lineHeight: 1.45 }}&gt;{d}&lt;/Text&gt;&#10;          &lt;/Box&gt;&#10;        &lt;/Box&gt;&#10;      ))}&#10;    &lt;/Box&gt;&#10;  &lt;/Box&gt;&#10;  &lt;Box style={{ height: 40, padding: '0 40px', flexDirection: 'row', alignItems: 'center', justifyContent: 'space-between' }}&gt;&#10;    &lt;Text style={{ fontSize: 13, color: '#8B97A8' }}&gt;Full treatment in Week 12 (LSP). Today: notice that &quot;is-a&quot; is not enough.&lt;/Text&gt;&#10;    &lt;Text style={{ fontSize: 14, color: '#1E4FA8', fontWeight: 'bold' }}&gt;20 / 38&lt;/Text&gt;&#10;  &lt;/Box&gt;&#10;&lt;/Slide&gt;"/>
         <p:cNvGrpSpPr/>
         <p:nvPr/>
       </p:nvGrpSpPr>
@@ -10820,16 +10461,16 @@
         </p:nvSpPr>
         <p:spPr>
           <a:xfrm rot="0" flipH="0" flipV="0">
-            <a:off x="381000" y="2447925"/>
-            <a:ext cx="6705600" cy="2962275"/>
+            <a:off x="381000" y="2838450"/>
+            <a:ext cx="6705600" cy="2190750"/>
           </a:xfrm>
           <a:prstGeom prst="roundRect">
             <a:avLst>
-              <a:gd name="adj" fmla="val 2572"/>
+              <a:gd name="adj" fmla="val 3478"/>
             </a:avLst>
           </a:prstGeom>
           <a:solidFill>
-            <a:srgbClr val="F6F8FA"/>
+            <a:srgbClr val="0E1116"/>
           </a:solidFill>
           <a:ln/>
         </p:spPr>
@@ -10846,8 +10487,8 @@
         </p:nvSpPr>
         <p:spPr>
           <a:xfrm rot="0" flipH="0" flipV="0">
-            <a:off x="533400" y="2581275"/>
-            <a:ext cx="6400800" cy="2695575"/>
+            <a:off x="533400" y="2971800"/>
+            <a:ext cx="6400800" cy="1924050"/>
           </a:xfrm>
           <a:prstGeom prst="rect"/>
         </p:spPr>
@@ -10856,11 +10497,7 @@
             <a:normAutofit/>
           </a:bodyPr>
           <a:p>
-            <a:pPr>
-              <a:lnSpc>
-                <a:spcPct val="140000"/>
-              </a:lnSpc>
-            </a:pPr>
+            <a:pPr/>
             <a:r>
               <a:rPr sz="900">
                 <a:solidFill>
@@ -10869,221 +10506,18 @@
                 <a:latin typeface="Menlo"/>
                 <a:ea typeface="Menlo"/>
               </a:rPr>
-              <a:t>Class Ellipse</a:t>
-            </a:r>
-            <a:endParaRPr/>
-          </a:p>
-          <a:p>
-            <a:pPr>
-              <a:lnSpc>
-                <a:spcPct val="140000"/>
-              </a:lnSpc>
-            </a:pPr>
-            <a:r>
-              <a:rPr sz="900">
-                <a:solidFill>
-                  <a:srgbClr val="E5E7EB"/>
-                </a:solidFill>
-                <a:latin typeface="Menlo"/>
-                <a:ea typeface="Menlo"/>
-              </a:rPr>
-              <a:t>    + setMajorAxis(a)</a:t>
-            </a:r>
-            <a:endParaRPr/>
-          </a:p>
-          <a:p>
-            <a:pPr>
-              <a:lnSpc>
-                <a:spcPct val="140000"/>
-              </a:lnSpc>
-            </a:pPr>
-            <a:r>
-              <a:rPr sz="900">
-                <a:solidFill>
-                  <a:srgbClr val="E5E7EB"/>
-                </a:solidFill>
-                <a:latin typeface="Menlo"/>
-                <a:ea typeface="Menlo"/>
-              </a:rPr>
-              <a:t>    + setMinorAxis(b)</a:t>
-            </a:r>
-            <a:endParaRPr/>
-          </a:p>
-          <a:p>
-            <a:pPr>
-              <a:lnSpc>
-                <a:spcPct val="140000"/>
-              </a:lnSpc>
-            </a:pPr>
-            <a:endParaRPr/>
-          </a:p>
-          <a:p>
-            <a:pPr>
-              <a:lnSpc>
-                <a:spcPct val="140000"/>
-              </a:lnSpc>
-            </a:pPr>
-            <a:r>
-              <a:rPr sz="900">
-                <a:solidFill>
-                  <a:srgbClr val="E5E7EB"/>
-                </a:solidFill>
-                <a:latin typeface="Menlo"/>
-                <a:ea typeface="Menlo"/>
-              </a:rPr>
-              <a:t># In geometry, a circle IS an ellipse.</a:t>
-            </a:r>
-            <a:endParaRPr/>
-          </a:p>
-          <a:p>
-            <a:pPr>
-              <a:lnSpc>
-                <a:spcPct val="140000"/>
-              </a:lnSpc>
-            </a:pPr>
-            <a:r>
-              <a:rPr sz="900">
-                <a:solidFill>
-                  <a:srgbClr val="E5E7EB"/>
-                </a:solidFill>
-                <a:latin typeface="Menlo"/>
-                <a:ea typeface="Menlo"/>
-              </a:rPr>
-              <a:t>Class Circle extends Ellipse</a:t>
-            </a:r>
-            <a:endParaRPr/>
-          </a:p>
-          <a:p>
-            <a:pPr>
-              <a:lnSpc>
-                <a:spcPct val="140000"/>
-              </a:lnSpc>
-            </a:pPr>
-            <a:r>
-              <a:rPr sz="900">
-                <a:solidFill>
-                  <a:srgbClr val="E5E7EB"/>
-                </a:solidFill>
-                <a:latin typeface="Menlo"/>
-                <a:ea typeface="Menlo"/>
-              </a:rPr>
-              <a:t>    + setMajorAxis(a)</a:t>
-            </a:r>
-            <a:endParaRPr/>
-          </a:p>
-          <a:p>
-            <a:pPr>
-              <a:lnSpc>
-                <a:spcPct val="140000"/>
-              </a:lnSpc>
-            </a:pPr>
-            <a:r>
-              <a:rPr sz="900">
-                <a:solidFill>
-                  <a:srgbClr val="E5E7EB"/>
-                </a:solidFill>
-                <a:latin typeface="Menlo"/>
-                <a:ea typeface="Menlo"/>
-              </a:rPr>
-              <a:t>        set both axes to a        # stay round</a:t>
-            </a:r>
-            <a:endParaRPr/>
-          </a:p>
-          <a:p>
-            <a:pPr>
-              <a:lnSpc>
-                <a:spcPct val="140000"/>
-              </a:lnSpc>
-            </a:pPr>
-            <a:r>
-              <a:rPr sz="900">
-                <a:solidFill>
-                  <a:srgbClr val="E5E7EB"/>
-                </a:solidFill>
-                <a:latin typeface="Menlo"/>
-                <a:ea typeface="Menlo"/>
-              </a:rPr>
-              <a:t>    + setMinorAxis(b)</a:t>
-            </a:r>
-            <a:endParaRPr/>
-          </a:p>
-          <a:p>
-            <a:pPr>
-              <a:lnSpc>
-                <a:spcPct val="140000"/>
-              </a:lnSpc>
-            </a:pPr>
-            <a:r>
-              <a:rPr sz="900">
-                <a:solidFill>
-                  <a:srgbClr val="E5E7EB"/>
-                </a:solidFill>
-                <a:latin typeface="Menlo"/>
-                <a:ea typeface="Menlo"/>
-              </a:rPr>
-              <a:t>        refuse - a circle cannot  # breaks the promise</a:t>
-            </a:r>
-            <a:endParaRPr/>
-          </a:p>
-          <a:p>
-            <a:pPr>
-              <a:lnSpc>
-                <a:spcPct val="140000"/>
-              </a:lnSpc>
-            </a:pPr>
-            <a:endParaRPr/>
-          </a:p>
-          <a:p>
-            <a:pPr>
-              <a:lnSpc>
-                <a:spcPct val="140000"/>
-              </a:lnSpc>
-            </a:pPr>
-            <a:r>
-              <a:rPr sz="900">
-                <a:solidFill>
-                  <a:srgbClr val="E5E7EB"/>
-                </a:solidFill>
-                <a:latin typeface="Menlo"/>
-                <a:ea typeface="Menlo"/>
-              </a:rPr>
-              <a:t># ...so why does this break?</a:t>
-            </a:r>
-            <a:endParaRPr/>
-          </a:p>
-          <a:p>
-            <a:pPr>
-              <a:lnSpc>
-                <a:spcPct val="140000"/>
-              </a:lnSpc>
-            </a:pPr>
-            <a:r>
-              <a:rPr sz="900">
-                <a:solidFill>
-                  <a:srgbClr val="E5E7EB"/>
-                </a:solidFill>
-                <a:latin typeface="Menlo"/>
-                <a:ea typeface="Menlo"/>
-              </a:rPr>
-              <a:t>e = a new Circle</a:t>
-            </a:r>
-            <a:endParaRPr/>
-          </a:p>
-          <a:p>
-            <a:pPr>
-              <a:lnSpc>
-                <a:spcPct val="140000"/>
-              </a:lnSpc>
-            </a:pPr>
-            <a:r>
-              <a:rPr sz="900">
-                <a:solidFill>
-                  <a:srgbClr val="E5E7EB"/>
-                </a:solidFill>
-                <a:latin typeface="Menlo"/>
-                <a:ea typeface="Menlo"/>
-              </a:rPr>
-              <a:t>e.setMinorAxis(3.0)              # fails</a:t>
+              <a:t>Class Ellipse
+    + setMajorAxis(a)
+    + setMinorAxis(b)
+# In geometry, a circle IS an ellipse.
+Class Circle extends Ellipse
+    + setMajorAxis(a)
+        set both axes to a        # stay round
+    + setMinorAxis(b)
+        refuse - a circle cannot  # breaks the promise
+# ...so why does this break?
+e = a new Circle
+e.setMinorAxis(3.0)              # fails</a:t>
             </a:r>
             <a:endParaRPr/>
           </a:p>
@@ -11954,7 +11388,7 @@
   <p:cSld>
     <p:spTree>
       <p:nvGrpSpPr>
-        <p:cNvPr id="334" name="" descr="&lt;Slide style={{ background: '#FFFFFF', padding: 0 }}&gt;&#10;  &lt;Box style={{ height: 72, background: '#1E4FA8', padding: '0 40px', flexDirection: 'row', alignItems: 'center', justifyContent: 'space-between' }}&gt;&#10;    &lt;Text style={{ fontSize: 15, color: '#B9CDF0', letterSpacing: 1 }}&gt;ISAD · INFORMATION SYSTEMS ANALYSIS &amp;amp; DESIGN&lt;/Text&gt;&#10;    &lt;Text style={{ fontSize: 15, color: '#B9CDF0' }}&gt;W02 · REUSE&lt;/Text&gt;&#10;  &lt;/Box&gt;&#10;  &lt;Box style={{ padding: '20px 40px 0 40px' }}&gt;&#10;    &lt;Text style={{ fontSize: 32, fontWeight: 'bold', color: '#0E3F8C' }}&gt;Composition on Paper&lt;/Text&gt;&#10;  &lt;/Box&gt;&#10;  &lt;Box style={{ flex: 1, padding: '14px 40px 0 40px', flexDirection: 'row', gap: 26 }}&gt;&#10;    &lt;Box style={{ flex: 1, flexDirection: 'column', gap: 10 }}&gt;&#10;      &lt;Box style={{ flexDirection: 'row', alignItems: 'center', gap: 9 }}&gt;&#10;        &lt;FAIcon name='times-circle' style={{ fill: '#D9534F', width: 19, height: 19 }} /&gt;&#10;        &lt;Text style={{ fontSize: 16, fontWeight: 'bold', color: '#D9534F' }}&gt;Inheriting for convenience&lt;/Text&gt;&#10;      &lt;/Box&gt;&#10;      &lt;CodeBlock code={`# &quot;an order is just a list of lines&quot;&#10;Class Order extends List&#10;    + place()&#10;&#10;# now Order inherits 20+ list operations&#10;# that make no sense for an order&#10;order.sort(...)&#10;order.clear()      # wipes a paid order&#10;order.addAll(...)  # bypasses the guard`} language='text' width={520} fontSize={12} /&gt;&#10;    &lt;/Box&gt;&#10;    &lt;Box style={{ flex: 1, flexDirection: 'column', gap: 10 }}&gt;&#10;      &lt;Box style={{ flexDirection: 'row', alignItems: 'center', gap: 9 }}&gt;&#10;        &lt;FAIcon name='check-circle' style={{ fill: '#1E4FA8', width: 19, height: 19 }} /&gt;&#10;        &lt;Text style={{ fontSize: 16, fontWeight: 'bold', color: '#0E3F8C' }}&gt;Composing with collaborators&lt;/Text&gt;&#10;      &lt;/Box&gt;&#10;      &lt;CodeBlock code={`Class Order&#10;    - lines : OrderLine[0..*]&#10;    - payment : PaymentMethod&#10;    - route : DeliveryRoute&#10;&#10;    + total() : Money&#10;    + pay() : Receipt&#10;        return payment.pay(total())&#10;&#10;# Order offers only what an order does&#10;order.pay()        # yes&#10;order.clear()      # no such operation`} language='text' width={520} fontSize={12} /&gt;&#10;    &lt;/Box&gt;&#10;  &lt;/Box&gt;&#10;  &lt;Box style={{ height: 44, background: '#0E3F8C', padding: '0 40px', flexDirection: 'row', alignItems: 'center', justifyContent: 'center' }}&gt;&#10;    &lt;Text style={{ fontSize: 17, color: '#FFFFFF', fontWeight: '600' }}&gt;Inheritance reuses everything — including the parts that make no sense. Composition lets you choose.&lt;/Text&gt;&#10;  &lt;/Box&gt;&#10;&lt;/Slide&gt;"/>
+        <p:cNvPr id="334" name="" descr="&lt;Slide style={{ background: '#FFFFFF', padding: 0 }}&gt;&#10;  &lt;Box style={{ height: 72, background: '#1E4FA8', padding: '0 40px', flexDirection: 'row', alignItems: 'center', justifyContent: 'space-between' }}&gt;&#10;    &lt;Text style={{ fontSize: 15, color: '#B9CDF0', letterSpacing: 1 }}&gt;ISAD · INFORMATION SYSTEMS ANALYSIS &amp;amp; DESIGN&lt;/Text&gt;&#10;    &lt;Text style={{ fontSize: 15, color: '#B9CDF0' }}&gt;W02 · REUSE&lt;/Text&gt;&#10;  &lt;/Box&gt;&#10;  &lt;Box style={{ padding: '20px 40px 0 40px' }}&gt;&#10;    &lt;Text style={{ fontSize: 32, fontWeight: 'bold', color: '#0E3F8C' }}&gt;Composition on Paper&lt;/Text&gt;&#10;  &lt;/Box&gt;&#10;  &lt;Box style={{ flex: 1, padding: '14px 40px 0 40px', flexDirection: 'row', gap: 26 }}&gt;&#10;    &lt;Box style={{ flex: 1, flexDirection: 'column', gap: 10 }}&gt;&#10;      &lt;Box style={{ flexDirection: 'row', alignItems: 'center', gap: 9 }}&gt;&#10;        &lt;FAIcon name='times-circle' style={{ fill: '#D9534F', width: 19, height: 19 }} /&gt;&#10;        &lt;Text style={{ fontSize: 16, fontWeight: 'bold', color: '#D9534F' }}&gt;Inheriting for convenience&lt;/Text&gt;&#10;      &lt;/Box&gt;&#10;      &lt;CodeBlock theme='one-dark-pro' code={`# &quot;an order is just a list of lines&quot;&#10;Class Order extends List&#10;    + place()&#10;&#10;# now Order inherits 20+ list operations&#10;# that make no sense for an order&#10;order.sort(...)&#10;order.clear()      # wipes a paid order&#10;order.addAll(...)  # bypasses the guard`} language='text' width={520} fontSize={12} /&gt;&#10;    &lt;/Box&gt;&#10;    &lt;Box style={{ flex: 1, flexDirection: 'column', gap: 10 }}&gt;&#10;      &lt;Box style={{ flexDirection: 'row', alignItems: 'center', gap: 9 }}&gt;&#10;        &lt;FAIcon name='check-circle' style={{ fill: '#1E4FA8', width: 19, height: 19 }} /&gt;&#10;        &lt;Text style={{ fontSize: 16, fontWeight: 'bold', color: '#0E3F8C' }}&gt;Composing with collaborators&lt;/Text&gt;&#10;      &lt;/Box&gt;&#10;      &lt;CodeBlock theme='one-dark-pro' code={`Class Order&#10;    - lines : OrderLine[0..*]&#10;    - payment : PaymentMethod&#10;    - route : DeliveryRoute&#10;&#10;    + total() : Money&#10;    + pay() : Receipt&#10;        return payment.pay(total())&#10;&#10;# Order offers only what an order does&#10;order.pay()        # yes&#10;order.clear()      # no such operation`} language='text' width={520} fontSize={12} /&gt;&#10;    &lt;/Box&gt;&#10;  &lt;/Box&gt;&#10;  &lt;Box style={{ height: 44, background: '#0E3F8C', padding: '0 40px', flexDirection: 'row', alignItems: 'center', justifyContent: 'center' }}&gt;&#10;    &lt;Text style={{ fontSize: 17, color: '#FFFFFF', fontWeight: '600' }}&gt;Inheritance reuses everything — including the parts that make no sense. Composition lets you choose.&lt;/Text&gt;&#10;  &lt;/Box&gt;&#10;&lt;/Slide&gt;"/>
         <p:cNvGrpSpPr/>
         <p:nvPr/>
       </p:nvGrpSpPr>
@@ -12319,15 +11753,15 @@
         <p:spPr>
           <a:xfrm rot="0" flipH="0" flipV="0">
             <a:off x="381000" y="1666875"/>
-            <a:ext cx="5591175" cy="2000250"/>
+            <a:ext cx="5591175" cy="1504950"/>
           </a:xfrm>
           <a:prstGeom prst="roundRect">
             <a:avLst>
-              <a:gd name="adj" fmla="val 3810"/>
+              <a:gd name="adj" fmla="val 5063"/>
             </a:avLst>
           </a:prstGeom>
           <a:solidFill>
-            <a:srgbClr val="F6F8FA"/>
+            <a:srgbClr val="0E1116"/>
           </a:solidFill>
           <a:ln/>
         </p:spPr>
@@ -12345,7 +11779,7 @@
         <p:spPr>
           <a:xfrm rot="0" flipH="0" flipV="0">
             <a:off x="533400" y="1800225"/>
-            <a:ext cx="5286375" cy="1733550"/>
+            <a:ext cx="5286375" cy="1238250"/>
           </a:xfrm>
           <a:prstGeom prst="rect"/>
         </p:spPr>
@@ -12354,11 +11788,7 @@
             <a:normAutofit/>
           </a:bodyPr>
           <a:p>
-            <a:pPr>
-              <a:lnSpc>
-                <a:spcPct val="140000"/>
-              </a:lnSpc>
-            </a:pPr>
+            <a:pPr/>
             <a:r>
               <a:rPr sz="900">
                 <a:solidFill>
@@ -12367,141 +11797,14 @@
                 <a:latin typeface="Menlo"/>
                 <a:ea typeface="Menlo"/>
               </a:rPr>
-              <a:t># "an order is just a list of lines"</a:t>
-            </a:r>
-            <a:endParaRPr/>
-          </a:p>
-          <a:p>
-            <a:pPr>
-              <a:lnSpc>
-                <a:spcPct val="140000"/>
-              </a:lnSpc>
-            </a:pPr>
-            <a:r>
-              <a:rPr sz="900">
-                <a:solidFill>
-                  <a:srgbClr val="E5E7EB"/>
-                </a:solidFill>
-                <a:latin typeface="Menlo"/>
-                <a:ea typeface="Menlo"/>
-              </a:rPr>
-              <a:t>Class Order extends List</a:t>
-            </a:r>
-            <a:endParaRPr/>
-          </a:p>
-          <a:p>
-            <a:pPr>
-              <a:lnSpc>
-                <a:spcPct val="140000"/>
-              </a:lnSpc>
-            </a:pPr>
-            <a:r>
-              <a:rPr sz="900">
-                <a:solidFill>
-                  <a:srgbClr val="E5E7EB"/>
-                </a:solidFill>
-                <a:latin typeface="Menlo"/>
-                <a:ea typeface="Menlo"/>
-              </a:rPr>
-              <a:t>    + place()</a:t>
-            </a:r>
-            <a:endParaRPr/>
-          </a:p>
-          <a:p>
-            <a:pPr>
-              <a:lnSpc>
-                <a:spcPct val="140000"/>
-              </a:lnSpc>
-            </a:pPr>
-            <a:endParaRPr/>
-          </a:p>
-          <a:p>
-            <a:pPr>
-              <a:lnSpc>
-                <a:spcPct val="140000"/>
-              </a:lnSpc>
-            </a:pPr>
-            <a:r>
-              <a:rPr sz="900">
-                <a:solidFill>
-                  <a:srgbClr val="E5E7EB"/>
-                </a:solidFill>
-                <a:latin typeface="Menlo"/>
-                <a:ea typeface="Menlo"/>
-              </a:rPr>
-              <a:t># now Order inherits 20+ list operations</a:t>
-            </a:r>
-            <a:endParaRPr/>
-          </a:p>
-          <a:p>
-            <a:pPr>
-              <a:lnSpc>
-                <a:spcPct val="140000"/>
-              </a:lnSpc>
-            </a:pPr>
-            <a:r>
-              <a:rPr sz="900">
-                <a:solidFill>
-                  <a:srgbClr val="E5E7EB"/>
-                </a:solidFill>
-                <a:latin typeface="Menlo"/>
-                <a:ea typeface="Menlo"/>
-              </a:rPr>
-              <a:t># that make no sense for an order</a:t>
-            </a:r>
-            <a:endParaRPr/>
-          </a:p>
-          <a:p>
-            <a:pPr>
-              <a:lnSpc>
-                <a:spcPct val="140000"/>
-              </a:lnSpc>
-            </a:pPr>
-            <a:r>
-              <a:rPr sz="900">
-                <a:solidFill>
-                  <a:srgbClr val="E5E7EB"/>
-                </a:solidFill>
-                <a:latin typeface="Menlo"/>
-                <a:ea typeface="Menlo"/>
-              </a:rPr>
-              <a:t>order.sort(...)</a:t>
-            </a:r>
-            <a:endParaRPr/>
-          </a:p>
-          <a:p>
-            <a:pPr>
-              <a:lnSpc>
-                <a:spcPct val="140000"/>
-              </a:lnSpc>
-            </a:pPr>
-            <a:r>
-              <a:rPr sz="900">
-                <a:solidFill>
-                  <a:srgbClr val="E5E7EB"/>
-                </a:solidFill>
-                <a:latin typeface="Menlo"/>
-                <a:ea typeface="Menlo"/>
-              </a:rPr>
-              <a:t>order.clear()      # wipes a paid order</a:t>
-            </a:r>
-            <a:endParaRPr/>
-          </a:p>
-          <a:p>
-            <a:pPr>
-              <a:lnSpc>
-                <a:spcPct val="140000"/>
-              </a:lnSpc>
-            </a:pPr>
-            <a:r>
-              <a:rPr sz="900">
-                <a:solidFill>
-                  <a:srgbClr val="E5E7EB"/>
-                </a:solidFill>
-                <a:latin typeface="Menlo"/>
-                <a:ea typeface="Menlo"/>
-              </a:rPr>
-              <a:t>order.addAll(...)  # bypasses the guard</a:t>
+              <a:t># "an order is just a list of lines"
+Class Order extends List
+    + place()
+# now Order inherits 20+ list operations
+# that make no sense for an order
+order.sort(...)
+order.clear()      # wipes a paid order
+order.addAll(...)  # bypasses the guard</a:t>
             </a:r>
             <a:endParaRPr/>
           </a:p>
@@ -12516,15 +11819,15 @@
         <p:spPr>
           <a:xfrm rot="0" flipH="0" flipV="0">
             <a:off x="6219825" y="1666875"/>
-            <a:ext cx="5591175" cy="2571750"/>
+            <a:ext cx="5591175" cy="1914525"/>
           </a:xfrm>
           <a:prstGeom prst="roundRect">
             <a:avLst>
-              <a:gd name="adj" fmla="val 2963"/>
+              <a:gd name="adj" fmla="val 3980"/>
             </a:avLst>
           </a:prstGeom>
           <a:solidFill>
-            <a:srgbClr val="F6F8FA"/>
+            <a:srgbClr val="0E1116"/>
           </a:solidFill>
           <a:ln/>
         </p:spPr>
@@ -12542,7 +11845,7 @@
         <p:spPr>
           <a:xfrm rot="0" flipH="0" flipV="0">
             <a:off x="6372225" y="1800225"/>
-            <a:ext cx="5286375" cy="2305050"/>
+            <a:ext cx="5286375" cy="1647825"/>
           </a:xfrm>
           <a:prstGeom prst="rect"/>
         </p:spPr>
@@ -12551,11 +11854,7 @@
             <a:normAutofit/>
           </a:bodyPr>
           <a:p>
-            <a:pPr>
-              <a:lnSpc>
-                <a:spcPct val="140000"/>
-              </a:lnSpc>
-            </a:pPr>
+            <a:pPr/>
             <a:r>
               <a:rPr sz="900">
                 <a:solidFill>
@@ -12564,185 +11863,16 @@
                 <a:latin typeface="Menlo"/>
                 <a:ea typeface="Menlo"/>
               </a:rPr>
-              <a:t>Class Order</a:t>
-            </a:r>
-            <a:endParaRPr/>
-          </a:p>
-          <a:p>
-            <a:pPr>
-              <a:lnSpc>
-                <a:spcPct val="140000"/>
-              </a:lnSpc>
-            </a:pPr>
-            <a:r>
-              <a:rPr sz="900">
-                <a:solidFill>
-                  <a:srgbClr val="E5E7EB"/>
-                </a:solidFill>
-                <a:latin typeface="Menlo"/>
-                <a:ea typeface="Menlo"/>
-              </a:rPr>
-              <a:t>    - lines : OrderLine[0..*]</a:t>
-            </a:r>
-            <a:endParaRPr/>
-          </a:p>
-          <a:p>
-            <a:pPr>
-              <a:lnSpc>
-                <a:spcPct val="140000"/>
-              </a:lnSpc>
-            </a:pPr>
-            <a:r>
-              <a:rPr sz="900">
-                <a:solidFill>
-                  <a:srgbClr val="E5E7EB"/>
-                </a:solidFill>
-                <a:latin typeface="Menlo"/>
-                <a:ea typeface="Menlo"/>
-              </a:rPr>
-              <a:t>    - payment : PaymentMethod</a:t>
-            </a:r>
-            <a:endParaRPr/>
-          </a:p>
-          <a:p>
-            <a:pPr>
-              <a:lnSpc>
-                <a:spcPct val="140000"/>
-              </a:lnSpc>
-            </a:pPr>
-            <a:r>
-              <a:rPr sz="900">
-                <a:solidFill>
-                  <a:srgbClr val="E5E7EB"/>
-                </a:solidFill>
-                <a:latin typeface="Menlo"/>
-                <a:ea typeface="Menlo"/>
-              </a:rPr>
-              <a:t>    - route : DeliveryRoute</a:t>
-            </a:r>
-            <a:endParaRPr/>
-          </a:p>
-          <a:p>
-            <a:pPr>
-              <a:lnSpc>
-                <a:spcPct val="140000"/>
-              </a:lnSpc>
-            </a:pPr>
-            <a:endParaRPr/>
-          </a:p>
-          <a:p>
-            <a:pPr>
-              <a:lnSpc>
-                <a:spcPct val="140000"/>
-              </a:lnSpc>
-            </a:pPr>
-            <a:r>
-              <a:rPr sz="900">
-                <a:solidFill>
-                  <a:srgbClr val="E5E7EB"/>
-                </a:solidFill>
-                <a:latin typeface="Menlo"/>
-                <a:ea typeface="Menlo"/>
-              </a:rPr>
-              <a:t>    + total() : Money</a:t>
-            </a:r>
-            <a:endParaRPr/>
-          </a:p>
-          <a:p>
-            <a:pPr>
-              <a:lnSpc>
-                <a:spcPct val="140000"/>
-              </a:lnSpc>
-            </a:pPr>
-            <a:r>
-              <a:rPr sz="900">
-                <a:solidFill>
-                  <a:srgbClr val="E5E7EB"/>
-                </a:solidFill>
-                <a:latin typeface="Menlo"/>
-                <a:ea typeface="Menlo"/>
-              </a:rPr>
-              <a:t>    + pay() : Receipt</a:t>
-            </a:r>
-            <a:endParaRPr/>
-          </a:p>
-          <a:p>
-            <a:pPr>
-              <a:lnSpc>
-                <a:spcPct val="140000"/>
-              </a:lnSpc>
-            </a:pPr>
-            <a:r>
-              <a:rPr sz="900">
-                <a:solidFill>
-                  <a:srgbClr val="E5E7EB"/>
-                </a:solidFill>
-                <a:latin typeface="Menlo"/>
-                <a:ea typeface="Menlo"/>
-              </a:rPr>
-              <a:t>        return payment.pay(total())</a:t>
-            </a:r>
-            <a:endParaRPr/>
-          </a:p>
-          <a:p>
-            <a:pPr>
-              <a:lnSpc>
-                <a:spcPct val="140000"/>
-              </a:lnSpc>
-            </a:pPr>
-            <a:endParaRPr/>
-          </a:p>
-          <a:p>
-            <a:pPr>
-              <a:lnSpc>
-                <a:spcPct val="140000"/>
-              </a:lnSpc>
-            </a:pPr>
-            <a:r>
-              <a:rPr sz="900">
-                <a:solidFill>
-                  <a:srgbClr val="E5E7EB"/>
-                </a:solidFill>
-                <a:latin typeface="Menlo"/>
-                <a:ea typeface="Menlo"/>
-              </a:rPr>
-              <a:t># Order offers only what an order does</a:t>
-            </a:r>
-            <a:endParaRPr/>
-          </a:p>
-          <a:p>
-            <a:pPr>
-              <a:lnSpc>
-                <a:spcPct val="140000"/>
-              </a:lnSpc>
-            </a:pPr>
-            <a:r>
-              <a:rPr sz="900">
-                <a:solidFill>
-                  <a:srgbClr val="E5E7EB"/>
-                </a:solidFill>
-                <a:latin typeface="Menlo"/>
-                <a:ea typeface="Menlo"/>
-              </a:rPr>
-              <a:t>order.pay()        # yes</a:t>
-            </a:r>
-            <a:endParaRPr/>
-          </a:p>
-          <a:p>
-            <a:pPr>
-              <a:lnSpc>
-                <a:spcPct val="140000"/>
-              </a:lnSpc>
-            </a:pPr>
-            <a:r>
-              <a:rPr sz="900">
-                <a:solidFill>
-                  <a:srgbClr val="E5E7EB"/>
-                </a:solidFill>
-                <a:latin typeface="Menlo"/>
-                <a:ea typeface="Menlo"/>
-              </a:rPr>
-              <a:t>order.clear()      # no such operation</a:t>
+              <a:t>Class Order
+    - lines : OrderLine[0..*]
+    - payment : PaymentMethod
+    - route : DeliveryRoute
+    + total() : Money
+    + pay() : Receipt
+        return payment.pay(total())
+# Order offers only what an order does
+order.pay()        # yes
+order.clear()      # no such operation</a:t>
             </a:r>
             <a:endParaRPr/>
           </a:p>
@@ -14029,7 +13159,7 @@
   <p:cSld>
     <p:spTree>
       <p:nvGrpSpPr>
-        <p:cNvPr id="390" name="" descr="&lt;Slide style={{ background: '#FFFFFF', padding: 0 }}&gt;&#10;  &lt;Box style={{ padding: '22px 40px 6px 40px', flexDirection: 'row', alignItems: 'center', justifyContent: 'space-between' }}&gt;&#10;    &lt;Text style={{ fontSize: 33, fontWeight: 'bold', color: '#0E3F8C' }}&gt;PaymentMethod — Polymorphism on Paper&lt;/Text&gt;&#10;    &lt;Text style={{ fontSize: 14, color: '#1E4FA8', fontWeight: 'bold' }}&gt;25 / 38&lt;/Text&gt;&#10;  &lt;/Box&gt;&#10;  &lt;Box style={{ flex: 1, padding: '10px 40px 0 40px', flexDirection: 'row', gap: 26 }}&gt;&#10;    &lt;Box style={{ flex: 3, justifyContent: 'center' }}&gt;&#10;      &lt;CodeBlock code={`PaymentMethod (interface)&#10;    + pay(amount) : Receipt&#10;&#10;Class CampusCard implements PaymentMethod&#10;    + pay(amount) : Receipt&#10;        return cardTerminal.deduct(amount)&#10;&#10;Class Wallet implements PaymentMethod&#10;    + pay(amount) : Receipt&#10;        return balance.debit(amount)&#10;&#10;Class Cash implements PaymentMethod&#10;    + pay(amount) : Receipt&#10;        return Receipt.payOnDelivery(amount)&#10;&#10;# the call site - one stable line&#10;r = method.pay(order.total())`} language='text' width={580} fontSize={11} /&gt;&#10;    &lt;/Box&gt;&#10;    &lt;Box style={{ flex: 2, flexDirection: 'column', gap: 12, justifyContent: 'center' }}&gt;&#10;      &lt;Box style={{ padding: '20px 22px', background: '#0E3F8C', borderRadius: 12, flexDirection: 'column', gap: 12 }}&gt;&#10;        &lt;Text style={{ fontSize: 16, color: '#7FA2D6', letterSpacing: 1 }}&gt;THE ONE LINE THAT MATTERS&lt;/Text&gt;&#10;        &lt;Text style={{ fontSize: 17, color: '#FFFFFF', lineHeight: 1.4, fontWeight: 'bold' }}&gt;method.pay(order.total())&lt;/Text&gt;&#10;        &lt;Box style={{ width: 44, height: 4, background: '#FFC107' }} /&gt;&#10;        &lt;Text style={{ fontSize: 15, color: '#C5D4EA', lineHeight: 1.5 }}&gt;It does not say which payment type. It does not need to. Adding a fourth method changes nothing here.&lt;/Text&gt;&#10;      &lt;/Box&gt;&#10;      &lt;Box style={{ padding: '14px 17px', background: '#F0F5FC', borderRadius: 10, border: '1px solid #3D7BD9' }}&gt;&#10;        &lt;Text style={{ fontSize: 15, color: '#4A5568', lineHeight: 1.5 }}&gt;&lt;Text style={{ fontWeight: 'bold', color: '#0E3F8C' }}&gt;The interface is the contract.&lt;/Text&gt; Each class decides how to honour it.&lt;/Text&gt;&#10;      &lt;/Box&gt;&#10;      &lt;Box style={{ padding: '14px 17px', background: '#FDF3F3', borderRadius: 10, borderLeft: '4px solid #D9534F' }}&gt;&#10;        &lt;Text style={{ fontSize: 15, color: '#4A5568', lineHeight: 1.5 }}&gt;No &lt;Text style={{ fontWeight: 'bold', color: '#D9534F' }}&gt;if&lt;/Text&gt; and no &lt;Text style={{ fontWeight: 'bold', color: '#D9534F' }}&gt;switch&lt;/Text&gt; anywhere in Order.&lt;/Text&gt;&#10;      &lt;/Box&gt;&#10;    &lt;/Box&gt;&#10;  &lt;/Box&gt;&#10;  &lt;Box style={{ height: 44, background: '#0E3F8C', padding: '0 40px', flexDirection: 'row', alignItems: 'center', justifyContent: 'center' }}&gt;&#10;    &lt;Text style={{ fontSize: 17, color: '#FFFFFF', fontWeight: '600' }}&gt;CampusBites uses this exact shape. Your M1 models will too.&lt;/Text&gt;&#10;  &lt;/Box&gt;&#10;&lt;/Slide&gt;"/>
+        <p:cNvPr id="390" name="" descr="&lt;Slide style={{ background: '#FFFFFF', padding: 0 }}&gt;&#10;  &lt;Box style={{ padding: '22px 40px 6px 40px', flexDirection: 'row', alignItems: 'center', justifyContent: 'space-between' }}&gt;&#10;    &lt;Text style={{ fontSize: 33, fontWeight: 'bold', color: '#0E3F8C' }}&gt;PaymentMethod — Polymorphism on Paper&lt;/Text&gt;&#10;    &lt;Text style={{ fontSize: 14, color: '#1E4FA8', fontWeight: 'bold' }}&gt;25 / 38&lt;/Text&gt;&#10;  &lt;/Box&gt;&#10;  &lt;Box style={{ flex: 1, padding: '10px 40px 0 40px', flexDirection: 'row', gap: 26 }}&gt;&#10;    &lt;Box style={{ flex: 3, justifyContent: 'center' }}&gt;&#10;      &lt;CodeBlock theme='one-dark-pro' code={`PaymentMethod (interface)&#10;    + pay(amount) : Receipt&#10;&#10;Class CampusCard implements PaymentMethod&#10;    + pay(amount) : Receipt&#10;        return cardTerminal.deduct(amount)&#10;&#10;Class Wallet implements PaymentMethod&#10;    + pay(amount) : Receipt&#10;        return balance.debit(amount)&#10;&#10;Class Cash implements PaymentMethod&#10;    + pay(amount) : Receipt&#10;        return Receipt.payOnDelivery(amount)&#10;&#10;# the call site - one stable line&#10;r = method.pay(order.total())`} language='text' width={580} fontSize={11} /&gt;&#10;    &lt;/Box&gt;&#10;    &lt;Box style={{ flex: 2, flexDirection: 'column', gap: 12, justifyContent: 'center' }}&gt;&#10;      &lt;Box style={{ padding: '20px 22px', background: '#0E3F8C', borderRadius: 12, flexDirection: 'column', gap: 12 }}&gt;&#10;        &lt;Text style={{ fontSize: 16, color: '#7FA2D6', letterSpacing: 1 }}&gt;THE ONE LINE THAT MATTERS&lt;/Text&gt;&#10;        &lt;Text style={{ fontSize: 17, color: '#FFFFFF', lineHeight: 1.4, fontWeight: 'bold' }}&gt;method.pay(order.total())&lt;/Text&gt;&#10;        &lt;Box style={{ width: 44, height: 4, background: '#FFC107' }} /&gt;&#10;        &lt;Text style={{ fontSize: 15, color: '#C5D4EA', lineHeight: 1.5 }}&gt;It does not say which payment type. It does not need to. Adding a fourth method changes nothing here.&lt;/Text&gt;&#10;      &lt;/Box&gt;&#10;      &lt;Box style={{ padding: '14px 17px', background: '#F0F5FC', borderRadius: 10, border: '1px solid #3D7BD9' }}&gt;&#10;        &lt;Text style={{ fontSize: 15, color: '#4A5568', lineHeight: 1.5 }}&gt;&lt;Text style={{ fontWeight: 'bold', color: '#0E3F8C' }}&gt;The interface is the contract.&lt;/Text&gt; Each class decides how to honour it.&lt;/Text&gt;&#10;      &lt;/Box&gt;&#10;      &lt;Box style={{ padding: '14px 17px', background: '#FDF3F3', borderRadius: 10, borderLeft: '4px solid #D9534F' }}&gt;&#10;        &lt;Text style={{ fontSize: 15, color: '#4A5568', lineHeight: 1.5 }}&gt;No &lt;Text style={{ fontWeight: 'bold', color: '#D9534F' }}&gt;if&lt;/Text&gt; and no &lt;Text style={{ fontWeight: 'bold', color: '#D9534F' }}&gt;switch&lt;/Text&gt; anywhere in Order.&lt;/Text&gt;&#10;      &lt;/Box&gt;&#10;    &lt;/Box&gt;&#10;  &lt;/Box&gt;&#10;  &lt;Box style={{ height: 44, background: '#0E3F8C', padding: '0 40px', flexDirection: 'row', alignItems: 'center', justifyContent: 'center' }}&gt;&#10;    &lt;Text style={{ fontSize: 17, color: '#FFFFFF', fontWeight: '600' }}&gt;CampusBites uses this exact shape. Your M1 models will too.&lt;/Text&gt;&#10;  &lt;/Box&gt;&#10;&lt;/Slide&gt;"/>
         <p:cNvGrpSpPr/>
         <p:nvPr/>
       </p:nvGrpSpPr>
@@ -14595,16 +13725,16 @@
         </p:nvSpPr>
         <p:spPr>
           <a:xfrm rot="0" flipH="0" flipV="0">
-            <a:off x="381000" y="1962150"/>
-            <a:ext cx="6705600" cy="3267075"/>
+            <a:off x="381000" y="2390775"/>
+            <a:ext cx="6705600" cy="2409825"/>
           </a:xfrm>
           <a:prstGeom prst="roundRect">
             <a:avLst>
-              <a:gd name="adj" fmla="val 2332"/>
+              <a:gd name="adj" fmla="val 3162"/>
             </a:avLst>
           </a:prstGeom>
           <a:solidFill>
-            <a:srgbClr val="F6F8FA"/>
+            <a:srgbClr val="0E1116"/>
           </a:solidFill>
           <a:ln/>
         </p:spPr>
@@ -14621,8 +13751,8 @@
         </p:nvSpPr>
         <p:spPr>
           <a:xfrm rot="0" flipH="0" flipV="0">
-            <a:off x="533400" y="2095500"/>
-            <a:ext cx="6400800" cy="3000375"/>
+            <a:off x="533400" y="2524125"/>
+            <a:ext cx="6400800" cy="2143125"/>
           </a:xfrm>
           <a:prstGeom prst="rect"/>
         </p:spPr>
@@ -14631,11 +13761,7 @@
             <a:normAutofit/>
           </a:bodyPr>
           <a:p>
-            <a:pPr>
-              <a:lnSpc>
-                <a:spcPct val="140000"/>
-              </a:lnSpc>
-            </a:pPr>
+            <a:pPr/>
             <a:r>
               <a:rPr sz="825">
                 <a:solidFill>
@@ -14644,255 +13770,19 @@
                 <a:latin typeface="Menlo"/>
                 <a:ea typeface="Menlo"/>
               </a:rPr>
-              <a:t>PaymentMethod (interface)</a:t>
-            </a:r>
-            <a:endParaRPr/>
-          </a:p>
-          <a:p>
-            <a:pPr>
-              <a:lnSpc>
-                <a:spcPct val="140000"/>
-              </a:lnSpc>
-            </a:pPr>
-            <a:r>
-              <a:rPr sz="825">
-                <a:solidFill>
-                  <a:srgbClr val="E5E7EB"/>
-                </a:solidFill>
-                <a:latin typeface="Menlo"/>
-                <a:ea typeface="Menlo"/>
-              </a:rPr>
-              <a:t>    + pay(amount) : Receipt</a:t>
-            </a:r>
-            <a:endParaRPr/>
-          </a:p>
-          <a:p>
-            <a:pPr>
-              <a:lnSpc>
-                <a:spcPct val="140000"/>
-              </a:lnSpc>
-            </a:pPr>
-            <a:endParaRPr/>
-          </a:p>
-          <a:p>
-            <a:pPr>
-              <a:lnSpc>
-                <a:spcPct val="140000"/>
-              </a:lnSpc>
-            </a:pPr>
-            <a:r>
-              <a:rPr sz="825">
-                <a:solidFill>
-                  <a:srgbClr val="E5E7EB"/>
-                </a:solidFill>
-                <a:latin typeface="Menlo"/>
-                <a:ea typeface="Menlo"/>
-              </a:rPr>
-              <a:t>Class CampusCard implements PaymentMethod</a:t>
-            </a:r>
-            <a:endParaRPr/>
-          </a:p>
-          <a:p>
-            <a:pPr>
-              <a:lnSpc>
-                <a:spcPct val="140000"/>
-              </a:lnSpc>
-            </a:pPr>
-            <a:r>
-              <a:rPr sz="825">
-                <a:solidFill>
-                  <a:srgbClr val="E5E7EB"/>
-                </a:solidFill>
-                <a:latin typeface="Menlo"/>
-                <a:ea typeface="Menlo"/>
-              </a:rPr>
-              <a:t>    + pay(amount) : Receipt</a:t>
-            </a:r>
-            <a:endParaRPr/>
-          </a:p>
-          <a:p>
-            <a:pPr>
-              <a:lnSpc>
-                <a:spcPct val="140000"/>
-              </a:lnSpc>
-            </a:pPr>
-            <a:r>
-              <a:rPr sz="825">
-                <a:solidFill>
-                  <a:srgbClr val="E5E7EB"/>
-                </a:solidFill>
-                <a:latin typeface="Menlo"/>
-                <a:ea typeface="Menlo"/>
-              </a:rPr>
-              <a:t>        return cardTerminal.deduct(amount)</a:t>
-            </a:r>
-            <a:endParaRPr/>
-          </a:p>
-          <a:p>
-            <a:pPr>
-              <a:lnSpc>
-                <a:spcPct val="140000"/>
-              </a:lnSpc>
-            </a:pPr>
-            <a:endParaRPr/>
-          </a:p>
-          <a:p>
-            <a:pPr>
-              <a:lnSpc>
-                <a:spcPct val="140000"/>
-              </a:lnSpc>
-            </a:pPr>
-            <a:r>
-              <a:rPr sz="825">
-                <a:solidFill>
-                  <a:srgbClr val="E5E7EB"/>
-                </a:solidFill>
-                <a:latin typeface="Menlo"/>
-                <a:ea typeface="Menlo"/>
-              </a:rPr>
-              <a:t>Class Wallet implements PaymentMethod</a:t>
-            </a:r>
-            <a:endParaRPr/>
-          </a:p>
-          <a:p>
-            <a:pPr>
-              <a:lnSpc>
-                <a:spcPct val="140000"/>
-              </a:lnSpc>
-            </a:pPr>
-            <a:r>
-              <a:rPr sz="825">
-                <a:solidFill>
-                  <a:srgbClr val="E5E7EB"/>
-                </a:solidFill>
-                <a:latin typeface="Menlo"/>
-                <a:ea typeface="Menlo"/>
-              </a:rPr>
-              <a:t>    + pay(amount) : Receipt</a:t>
-            </a:r>
-            <a:endParaRPr/>
-          </a:p>
-          <a:p>
-            <a:pPr>
-              <a:lnSpc>
-                <a:spcPct val="140000"/>
-              </a:lnSpc>
-            </a:pPr>
-            <a:r>
-              <a:rPr sz="825">
-                <a:solidFill>
-                  <a:srgbClr val="E5E7EB"/>
-                </a:solidFill>
-                <a:latin typeface="Menlo"/>
-                <a:ea typeface="Menlo"/>
-              </a:rPr>
-              <a:t>        return balance.debit(amount)</a:t>
-            </a:r>
-            <a:endParaRPr/>
-          </a:p>
-          <a:p>
-            <a:pPr>
-              <a:lnSpc>
-                <a:spcPct val="140000"/>
-              </a:lnSpc>
-            </a:pPr>
-            <a:endParaRPr/>
-          </a:p>
-          <a:p>
-            <a:pPr>
-              <a:lnSpc>
-                <a:spcPct val="140000"/>
-              </a:lnSpc>
-            </a:pPr>
-            <a:r>
-              <a:rPr sz="825">
-                <a:solidFill>
-                  <a:srgbClr val="E5E7EB"/>
-                </a:solidFill>
-                <a:latin typeface="Menlo"/>
-                <a:ea typeface="Menlo"/>
-              </a:rPr>
-              <a:t>Class Cash implements PaymentMethod</a:t>
-            </a:r>
-            <a:endParaRPr/>
-          </a:p>
-          <a:p>
-            <a:pPr>
-              <a:lnSpc>
-                <a:spcPct val="140000"/>
-              </a:lnSpc>
-            </a:pPr>
-            <a:r>
-              <a:rPr sz="825">
-                <a:solidFill>
-                  <a:srgbClr val="E5E7EB"/>
-                </a:solidFill>
-                <a:latin typeface="Menlo"/>
-                <a:ea typeface="Menlo"/>
-              </a:rPr>
-              <a:t>    + pay(amount) : Receipt</a:t>
-            </a:r>
-            <a:endParaRPr/>
-          </a:p>
-          <a:p>
-            <a:pPr>
-              <a:lnSpc>
-                <a:spcPct val="140000"/>
-              </a:lnSpc>
-            </a:pPr>
-            <a:r>
-              <a:rPr sz="825">
-                <a:solidFill>
-                  <a:srgbClr val="E5E7EB"/>
-                </a:solidFill>
-                <a:latin typeface="Menlo"/>
-                <a:ea typeface="Menlo"/>
-              </a:rPr>
-              <a:t>        return Receipt.payOnDelivery(amount)</a:t>
-            </a:r>
-            <a:endParaRPr/>
-          </a:p>
-          <a:p>
-            <a:pPr>
-              <a:lnSpc>
-                <a:spcPct val="140000"/>
-              </a:lnSpc>
-            </a:pPr>
-            <a:endParaRPr/>
-          </a:p>
-          <a:p>
-            <a:pPr>
-              <a:lnSpc>
-                <a:spcPct val="140000"/>
-              </a:lnSpc>
-            </a:pPr>
-            <a:r>
-              <a:rPr sz="825">
-                <a:solidFill>
-                  <a:srgbClr val="E5E7EB"/>
-                </a:solidFill>
-                <a:latin typeface="Menlo"/>
-                <a:ea typeface="Menlo"/>
-              </a:rPr>
-              <a:t># the call site - one stable line</a:t>
-            </a:r>
-            <a:endParaRPr/>
-          </a:p>
-          <a:p>
-            <a:pPr>
-              <a:lnSpc>
-                <a:spcPct val="140000"/>
-              </a:lnSpc>
-            </a:pPr>
-            <a:r>
-              <a:rPr sz="825">
-                <a:solidFill>
-                  <a:srgbClr val="E5E7EB"/>
-                </a:solidFill>
-                <a:latin typeface="Menlo"/>
-                <a:ea typeface="Menlo"/>
-              </a:rPr>
-              <a:t>r = method.pay(order.total())</a:t>
+              <a:t>PaymentMethod (interface)
+    + pay(amount) : Receipt
+Class CampusCard implements PaymentMethod
+    + pay(amount) : Receipt
+        return cardTerminal.deduct(amount)
+Class Wallet implements PaymentMethod
+    + pay(amount) : Receipt
+        return balance.debit(amount)
+Class Cash implements PaymentMethod
+    + pay(amount) : Receipt
+        return Receipt.payOnDelivery(amount)
+# the call site - one stable line
+r = method.pay(order.total())</a:t>
             </a:r>
             <a:endParaRPr/>
           </a:p>
@@ -16121,7 +15011,7 @@
   <p:cSld>
     <p:spTree>
       <p:nvGrpSpPr>
-        <p:cNvPr id="418" name="" descr="&lt;Slide style={{ background: '#FFFFFF', padding: 0 }}&gt;&#10;  &lt;Box style={{ height: 72, background: '#1E4FA8', padding: '0 40px', flexDirection: 'row', alignItems: 'center', justifyContent: 'space-between' }}&gt;&#10;    &lt;Text style={{ fontSize: 15, color: '#B9CDF0', letterSpacing: 1 }}&gt;ISAD · INFORMATION SYSTEMS ANALYSIS &amp;amp; DESIGN&lt;/Text&gt;&#10;    &lt;Text style={{ fontSize: 15, color: '#B9CDF0' }}&gt;W02 · INTERFACES&lt;/Text&gt;&#10;  &lt;/Box&gt;&#10;  &lt;Box style={{ padding: '22px 40px 0 40px' }}&gt;&#10;    &lt;Text style={{ fontSize: 32, fontWeight: 'bold', color: '#0E3F8C' }}&gt;Program to an Interface&lt;/Text&gt;&#10;  &lt;/Box&gt;&#10;  &lt;Box style={{ flex: 1, padding: '18px 40px 0 40px', flexDirection: 'row', gap: 26 }}&gt;&#10;    &lt;Box style={{ flex: 3, flexDirection: 'column', gap: 12 }}&gt;&#10;      &lt;Box style={{ flex: 1, padding: '16px 18px', background: '#FDF3F3', borderRadius: 12, border: '1px solid #D9534F', flexDirection: 'column' }}&gt;&#10;        &lt;Box style={{ flexDirection: 'row', alignItems: 'center', gap: 10, marginBottom: 8 }}&gt;&#10;          &lt;FAIcon name='times-circle' style={{ fill: '#D9534F', width: 20, height: 20 }} /&gt;&#10;          &lt;Text style={{ fontSize: 16, fontWeight: 'bold', color: '#D9534F' }}&gt;Dependent on a concrete class&lt;/Text&gt;&#10;        &lt;/Box&gt;&#10;        &lt;CodeBlock code={`Class OrderService&#10;    - card : CampusCard       # one type only&#10;&#10;    + checkout(order)&#10;        card.pay(order.total())&#10;&#10;# adding Wallet means editing OrderService&#10;# and re-testing everything`} language='text' width={520} fontSize={12} /&gt;&#10;      &lt;/Box&gt;&#10;    &lt;/Box&gt;&#10;    &lt;Box style={{ flex: 3, flexDirection: 'column', gap: 12 }}&gt;&#10;      &lt;Box style={{ flex: 1, padding: '16px 18px', background: '#F0F5FC', borderRadius: 12, border: '1px solid #1E4FA8', flexDirection: 'column' }}&gt;&#10;        &lt;Box style={{ flexDirection: 'row', alignItems: 'center', gap: 10, marginBottom: 8 }}&gt;&#10;          &lt;FAIcon name='check-circle' style={{ fill: '#1E4FA8', width: 20, height: 20 }} /&gt;&#10;          &lt;Text style={{ fontSize: 16, fontWeight: 'bold', color: '#0E3F8C' }}&gt;Dependent on an interface&lt;/Text&gt;&#10;        &lt;/Box&gt;&#10;        &lt;CodeBlock code={`Class OrderService&#10;    - method : PaymentMethod  # any type&#10;&#10;    + checkout(order)&#10;        method.pay(order.total())&#10;&#10;# adding Wallet changes nothing here.&#10;# new class, same contract.`} language='text' width={520} fontSize={12} /&gt;&#10;      &lt;/Box&gt;&#10;    &lt;/Box&gt;&#10;  &lt;/Box&gt;&#10;  &lt;Box style={{ height: 52, padding: '0 40px', flexDirection: 'row', alignItems: 'center', gap: 14 }}&gt;&#10;    &lt;FAIcon name='lightbulb' style={{ fill: '#FFC107', width: 22, height: 22 }} /&gt;&#10;    &lt;Text style={{ fontSize: 17, color: '#4A5568' }}&gt;Declare the variable by what it must &lt;Text style={{ fontWeight: 'bold', color: '#0E3F8C' }}&gt;do&lt;/Text&gt;, not by what it &lt;Text style={{ fontWeight: 'bold', color: '#0E3F8C' }}&gt;is&lt;/Text&gt;.&lt;/Text&gt;&#10;    &lt;Text style={{ fontSize: 14, color: '#1E4FA8', fontWeight: 'bold', marginLeft: 'auto' }}&gt;27 / 38&lt;/Text&gt;&#10;  &lt;/Box&gt;&#10;&lt;/Slide&gt;"/>
+        <p:cNvPr id="418" name="" descr="&lt;Slide style={{ background: '#FFFFFF', padding: 0 }}&gt;&#10;  &lt;Box style={{ height: 72, background: '#1E4FA8', padding: '0 40px', flexDirection: 'row', alignItems: 'center', justifyContent: 'space-between' }}&gt;&#10;    &lt;Text style={{ fontSize: 15, color: '#B9CDF0', letterSpacing: 1 }}&gt;ISAD · INFORMATION SYSTEMS ANALYSIS &amp;amp; DESIGN&lt;/Text&gt;&#10;    &lt;Text style={{ fontSize: 15, color: '#B9CDF0' }}&gt;W02 · INTERFACES&lt;/Text&gt;&#10;  &lt;/Box&gt;&#10;  &lt;Box style={{ padding: '22px 40px 0 40px' }}&gt;&#10;    &lt;Text style={{ fontSize: 32, fontWeight: 'bold', color: '#0E3F8C' }}&gt;Program to an Interface&lt;/Text&gt;&#10;  &lt;/Box&gt;&#10;  &lt;Box style={{ flex: 1, padding: '18px 40px 0 40px', flexDirection: 'row', gap: 26 }}&gt;&#10;    &lt;Box style={{ flex: 3, flexDirection: 'column', gap: 12 }}&gt;&#10;      &lt;Box style={{ flex: 1, padding: '16px 18px', background: '#FDF3F3', borderRadius: 12, border: '1px solid #D9534F', flexDirection: 'column' }}&gt;&#10;        &lt;Box style={{ flexDirection: 'row', alignItems: 'center', gap: 10, marginBottom: 8 }}&gt;&#10;          &lt;FAIcon name='times-circle' style={{ fill: '#D9534F', width: 20, height: 20 }} /&gt;&#10;          &lt;Text style={{ fontSize: 16, fontWeight: 'bold', color: '#D9534F' }}&gt;Dependent on a concrete class&lt;/Text&gt;&#10;        &lt;/Box&gt;&#10;        &lt;CodeBlock theme='one-dark-pro' code={`Class OrderService&#10;    - card : CampusCard       # one type only&#10;&#10;    + checkout(order)&#10;        card.pay(order.total())&#10;&#10;# adding Wallet means editing OrderService&#10;# and re-testing everything`} language='text' width={520} fontSize={12} /&gt;&#10;      &lt;/Box&gt;&#10;    &lt;/Box&gt;&#10;    &lt;Box style={{ flex: 3, flexDirection: 'column', gap: 12 }}&gt;&#10;      &lt;Box style={{ flex: 1, padding: '16px 18px', background: '#F0F5FC', borderRadius: 12, border: '1px solid #1E4FA8', flexDirection: 'column' }}&gt;&#10;        &lt;Box style={{ flexDirection: 'row', alignItems: 'center', gap: 10, marginBottom: 8 }}&gt;&#10;          &lt;FAIcon name='check-circle' style={{ fill: '#1E4FA8', width: 20, height: 20 }} /&gt;&#10;          &lt;Text style={{ fontSize: 16, fontWeight: 'bold', color: '#0E3F8C' }}&gt;Dependent on an interface&lt;/Text&gt;&#10;        &lt;/Box&gt;&#10;        &lt;CodeBlock theme='one-dark-pro' code={`Class OrderService&#10;    - method : PaymentMethod  # any type&#10;&#10;    + checkout(order)&#10;        method.pay(order.total())&#10;&#10;# adding Wallet changes nothing here.&#10;# new class, same contract.`} language='text' width={520} fontSize={12} /&gt;&#10;      &lt;/Box&gt;&#10;    &lt;/Box&gt;&#10;  &lt;/Box&gt;&#10;  &lt;Box style={{ height: 52, padding: '0 40px', flexDirection: 'row', alignItems: 'center', gap: 14 }}&gt;&#10;    &lt;FAIcon name='lightbulb' style={{ fill: '#FFC107', width: 22, height: 22 }} /&gt;&#10;    &lt;Text style={{ fontSize: 17, color: '#4A5568' }}&gt;Declare the variable by what it must &lt;Text style={{ fontWeight: 'bold', color: '#0E3F8C' }}&gt;do&lt;/Text&gt;, not by what it &lt;Text style={{ fontWeight: 'bold', color: '#0E3F8C' }}&gt;is&lt;/Text&gt;.&lt;/Text&gt;&#10;    &lt;Text style={{ fontSize: 14, color: '#1E4FA8', fontWeight: 'bold', marginLeft: 'auto' }}&gt;27 / 38&lt;/Text&gt;&#10;  &lt;/Box&gt;&#10;&lt;/Slide&gt;"/>
         <p:cNvGrpSpPr/>
         <p:nvPr/>
       </p:nvGrpSpPr>
@@ -16630,15 +15520,15 @@
         <p:spPr>
           <a:xfrm rot="0" flipH="0" flipV="0">
             <a:off x="552450" y="1857375"/>
-            <a:ext cx="5248275" cy="1809750"/>
+            <a:ext cx="5248275" cy="1371600"/>
           </a:xfrm>
           <a:prstGeom prst="roundRect">
             <a:avLst>
-              <a:gd name="adj" fmla="val 4211"/>
+              <a:gd name="adj" fmla="val 5556"/>
             </a:avLst>
           </a:prstGeom>
           <a:solidFill>
-            <a:srgbClr val="F6F8FA"/>
+            <a:srgbClr val="0E1116"/>
           </a:solidFill>
           <a:ln/>
         </p:spPr>
@@ -16656,7 +15546,7 @@
         <p:spPr>
           <a:xfrm rot="0" flipH="0" flipV="0">
             <a:off x="704850" y="1990725"/>
-            <a:ext cx="4943475" cy="1543050"/>
+            <a:ext cx="4943475" cy="1104900"/>
           </a:xfrm>
           <a:prstGeom prst="rect"/>
         </p:spPr>
@@ -16665,11 +15555,7 @@
             <a:normAutofit/>
           </a:bodyPr>
           <a:p>
-            <a:pPr>
-              <a:lnSpc>
-                <a:spcPct val="140000"/>
-              </a:lnSpc>
-            </a:pPr>
+            <a:pPr/>
             <a:r>
               <a:rPr sz="900">
                 <a:solidFill>
@@ -16678,113 +15564,12 @@
                 <a:latin typeface="Menlo"/>
                 <a:ea typeface="Menlo"/>
               </a:rPr>
-              <a:t>Class OrderService</a:t>
-            </a:r>
-            <a:endParaRPr/>
-          </a:p>
-          <a:p>
-            <a:pPr>
-              <a:lnSpc>
-                <a:spcPct val="140000"/>
-              </a:lnSpc>
-            </a:pPr>
-            <a:r>
-              <a:rPr sz="900">
-                <a:solidFill>
-                  <a:srgbClr val="E5E7EB"/>
-                </a:solidFill>
-                <a:latin typeface="Menlo"/>
-                <a:ea typeface="Menlo"/>
-              </a:rPr>
-              <a:t>    - card : CampusCard       # one type only</a:t>
-            </a:r>
-            <a:endParaRPr/>
-          </a:p>
-          <a:p>
-            <a:pPr>
-              <a:lnSpc>
-                <a:spcPct val="140000"/>
-              </a:lnSpc>
-            </a:pPr>
-            <a:endParaRPr/>
-          </a:p>
-          <a:p>
-            <a:pPr>
-              <a:lnSpc>
-                <a:spcPct val="140000"/>
-              </a:lnSpc>
-            </a:pPr>
-            <a:r>
-              <a:rPr sz="900">
-                <a:solidFill>
-                  <a:srgbClr val="E5E7EB"/>
-                </a:solidFill>
-                <a:latin typeface="Menlo"/>
-                <a:ea typeface="Menlo"/>
-              </a:rPr>
-              <a:t>    + checkout(order)</a:t>
-            </a:r>
-            <a:endParaRPr/>
-          </a:p>
-          <a:p>
-            <a:pPr>
-              <a:lnSpc>
-                <a:spcPct val="140000"/>
-              </a:lnSpc>
-            </a:pPr>
-            <a:r>
-              <a:rPr sz="900">
-                <a:solidFill>
-                  <a:srgbClr val="E5E7EB"/>
-                </a:solidFill>
-                <a:latin typeface="Menlo"/>
-                <a:ea typeface="Menlo"/>
-              </a:rPr>
-              <a:t>        card.pay(order.total())</a:t>
-            </a:r>
-            <a:endParaRPr/>
-          </a:p>
-          <a:p>
-            <a:pPr>
-              <a:lnSpc>
-                <a:spcPct val="140000"/>
-              </a:lnSpc>
-            </a:pPr>
-            <a:endParaRPr/>
-          </a:p>
-          <a:p>
-            <a:pPr>
-              <a:lnSpc>
-                <a:spcPct val="140000"/>
-              </a:lnSpc>
-            </a:pPr>
-            <a:r>
-              <a:rPr sz="900">
-                <a:solidFill>
-                  <a:srgbClr val="E5E7EB"/>
-                </a:solidFill>
-                <a:latin typeface="Menlo"/>
-                <a:ea typeface="Menlo"/>
-              </a:rPr>
-              <a:t># adding Wallet means editing OrderService</a:t>
-            </a:r>
-            <a:endParaRPr/>
-          </a:p>
-          <a:p>
-            <a:pPr>
-              <a:lnSpc>
-                <a:spcPct val="140000"/>
-              </a:lnSpc>
-            </a:pPr>
-            <a:r>
-              <a:rPr sz="900">
-                <a:solidFill>
-                  <a:srgbClr val="E5E7EB"/>
-                </a:solidFill>
-                <a:latin typeface="Menlo"/>
-                <a:ea typeface="Menlo"/>
-              </a:rPr>
-              <a:t># and re-testing everything</a:t>
+              <a:t>Class OrderService
+    - card : CampusCard       # one type only
+    + checkout(order)
+        card.pay(order.total())
+# adding Wallet means editing OrderService
+# and re-testing everything</a:t>
             </a:r>
             <a:endParaRPr/>
           </a:p>
@@ -16799,15 +15584,15 @@
         <p:spPr>
           <a:xfrm rot="0" flipH="0" flipV="0">
             <a:off x="6391275" y="1857375"/>
-            <a:ext cx="5248275" cy="1809750"/>
+            <a:ext cx="5248275" cy="1371600"/>
           </a:xfrm>
           <a:prstGeom prst="roundRect">
             <a:avLst>
-              <a:gd name="adj" fmla="val 4211"/>
+              <a:gd name="adj" fmla="val 5556"/>
             </a:avLst>
           </a:prstGeom>
           <a:solidFill>
-            <a:srgbClr val="F6F8FA"/>
+            <a:srgbClr val="0E1116"/>
           </a:solidFill>
           <a:ln/>
         </p:spPr>
@@ -16825,7 +15610,7 @@
         <p:spPr>
           <a:xfrm rot="0" flipH="0" flipV="0">
             <a:off x="6543675" y="1990725"/>
-            <a:ext cx="4943475" cy="1543050"/>
+            <a:ext cx="4943475" cy="1104900"/>
           </a:xfrm>
           <a:prstGeom prst="rect"/>
         </p:spPr>
@@ -16834,11 +15619,7 @@
             <a:normAutofit/>
           </a:bodyPr>
           <a:p>
-            <a:pPr>
-              <a:lnSpc>
-                <a:spcPct val="140000"/>
-              </a:lnSpc>
-            </a:pPr>
+            <a:pPr/>
             <a:r>
               <a:rPr sz="900">
                 <a:solidFill>
@@ -16847,113 +15628,12 @@
                 <a:latin typeface="Menlo"/>
                 <a:ea typeface="Menlo"/>
               </a:rPr>
-              <a:t>Class OrderService</a:t>
-            </a:r>
-            <a:endParaRPr/>
-          </a:p>
-          <a:p>
-            <a:pPr>
-              <a:lnSpc>
-                <a:spcPct val="140000"/>
-              </a:lnSpc>
-            </a:pPr>
-            <a:r>
-              <a:rPr sz="900">
-                <a:solidFill>
-                  <a:srgbClr val="E5E7EB"/>
-                </a:solidFill>
-                <a:latin typeface="Menlo"/>
-                <a:ea typeface="Menlo"/>
-              </a:rPr>
-              <a:t>    - method : PaymentMethod  # any type</a:t>
-            </a:r>
-            <a:endParaRPr/>
-          </a:p>
-          <a:p>
-            <a:pPr>
-              <a:lnSpc>
-                <a:spcPct val="140000"/>
-              </a:lnSpc>
-            </a:pPr>
-            <a:endParaRPr/>
-          </a:p>
-          <a:p>
-            <a:pPr>
-              <a:lnSpc>
-                <a:spcPct val="140000"/>
-              </a:lnSpc>
-            </a:pPr>
-            <a:r>
-              <a:rPr sz="900">
-                <a:solidFill>
-                  <a:srgbClr val="E5E7EB"/>
-                </a:solidFill>
-                <a:latin typeface="Menlo"/>
-                <a:ea typeface="Menlo"/>
-              </a:rPr>
-              <a:t>    + checkout(order)</a:t>
-            </a:r>
-            <a:endParaRPr/>
-          </a:p>
-          <a:p>
-            <a:pPr>
-              <a:lnSpc>
-                <a:spcPct val="140000"/>
-              </a:lnSpc>
-            </a:pPr>
-            <a:r>
-              <a:rPr sz="900">
-                <a:solidFill>
-                  <a:srgbClr val="E5E7EB"/>
-                </a:solidFill>
-                <a:latin typeface="Menlo"/>
-                <a:ea typeface="Menlo"/>
-              </a:rPr>
-              <a:t>        method.pay(order.total())</a:t>
-            </a:r>
-            <a:endParaRPr/>
-          </a:p>
-          <a:p>
-            <a:pPr>
-              <a:lnSpc>
-                <a:spcPct val="140000"/>
-              </a:lnSpc>
-            </a:pPr>
-            <a:endParaRPr/>
-          </a:p>
-          <a:p>
-            <a:pPr>
-              <a:lnSpc>
-                <a:spcPct val="140000"/>
-              </a:lnSpc>
-            </a:pPr>
-            <a:r>
-              <a:rPr sz="900">
-                <a:solidFill>
-                  <a:srgbClr val="E5E7EB"/>
-                </a:solidFill>
-                <a:latin typeface="Menlo"/>
-                <a:ea typeface="Menlo"/>
-              </a:rPr>
-              <a:t># adding Wallet changes nothing here.</a:t>
-            </a:r>
-            <a:endParaRPr/>
-          </a:p>
-          <a:p>
-            <a:pPr>
-              <a:lnSpc>
-                <a:spcPct val="140000"/>
-              </a:lnSpc>
-            </a:pPr>
-            <a:r>
-              <a:rPr sz="900">
-                <a:solidFill>
-                  <a:srgbClr val="E5E7EB"/>
-                </a:solidFill>
-                <a:latin typeface="Menlo"/>
-                <a:ea typeface="Menlo"/>
-              </a:rPr>
-              <a:t># new class, same contract.</a:t>
+              <a:t>Class OrderService
+    - method : PaymentMethod  # any type
+    + checkout(order)
+        method.pay(order.total())
+# adding Wallet changes nothing here.
+# new class, same contract.</a:t>
             </a:r>
             <a:endParaRPr/>
           </a:p>
@@ -16969,7 +15649,7 @@
   <p:cSld>
     <p:spTree>
       <p:nvGrpSpPr>
-        <p:cNvPr id="437" name="" descr="&lt;Slide style={{ background: '#FFFFFF', padding: 0 }}&gt;&#10;  &lt;Box style={{ height: 72, background: '#1E4FA8', padding: '0 40px', flexDirection: 'row', alignItems: 'center', justifyContent: 'space-between' }}&gt;&#10;    &lt;Text style={{ fontSize: 15, color: '#B9CDF0', letterSpacing: 1 }}&gt;ISAD · INFORMATION SYSTEMS ANALYSIS &amp;amp; DESIGN&lt;/Text&gt;&#10;    &lt;Text style={{ fontSize: 15, color: '#B9CDF0' }}&gt;W02 · PAYOFF&lt;/Text&gt;&#10;  &lt;/Box&gt;&#10;  &lt;Box style={{ padding: '20px 40px 0 40px', flexDirection: 'row', alignItems: 'center', justifyContent: 'space-between' }}&gt;&#10;    &lt;Text style={{ fontSize: 32, fontWeight: 'bold', color: '#0E3F8C' }}&gt;Closing the Loop from Week 01&lt;/Text&gt;&#10;    &lt;Box style={{ padding: '5px 14px', background: '#E8EFF8', borderRadius: 14 }}&gt;&#10;      &lt;Text style={{ fontSize: 13, color: '#1E4FA8', fontWeight: 'bold' }}&gt;W01 PROBLEM → W02 TOOL&lt;/Text&gt;&#10;    &lt;/Box&gt;&#10;  &lt;/Box&gt;&#10;  &lt;Box style={{ flex: 1, padding: '14px 40px 0 40px', flexDirection: 'row', gap: 22 }}&gt;&#10;    &lt;Box style={{ flex: 1, flexDirection: 'column', gap: 9 }}&gt;&#10;      &lt;Box style={{ flexDirection: 'row', alignItems: 'center', gap: 9 }}&gt;&#10;        &lt;FAIcon name='times-circle' style={{ fill: '#D9534F', width: 18, height: 18 }} /&gt;&#10;        &lt;Text style={{ fontSize: 16, fontWeight: 'bold', color: '#D9534F' }}&gt;Last week: the smell&lt;/Text&gt;&#10;      &lt;/Box&gt;&#10;      &lt;CodeBlock code={`if type = CARD    -&gt; chargeCard(order)&#10;if type = WECHAT  -&gt; chargeWechat(order)&#10;if type = ALIPAY  -&gt; chargeAlipay(order)&#10;otherwise         -&gt; refuse: no such type&#10;&#10;# every new type = edit this method&#10;# and re-test every branch`} language='text' width={500} fontSize={11} /&gt;&#10;    &lt;/Box&gt;&#10;    &lt;Box style={{ width: 52, justifyContent: 'center', alignItems: 'center' }}&gt;&#10;      &lt;FAIcon name='long-arrow-alt-right' style={{ fill: '#3D7BD9', width: 34, height: 34 }} /&gt;&#10;    &lt;/Box&gt;&#10;    &lt;Box style={{ flex: 1, flexDirection: 'column', gap: 9 }}&gt;&#10;      &lt;Box style={{ flexDirection: 'row', alignItems: 'center', gap: 9 }}&gt;&#10;        &lt;FAIcon name='check-circle' style={{ fill: '#1E4FA8', width: 18, height: 18 }} /&gt;&#10;        &lt;Text style={{ fontSize: 16, fontWeight: 'bold', color: '#0E3F8C' }}&gt;This week: the tool&lt;/Text&gt;&#10;      &lt;/Box&gt;&#10;      &lt;CodeBlock code={`r = method.pay(order.total())&#10;&#10;# a new payment type?&#10;Class Bursary implements PaymentMethod&#10;    + pay(amount) : Receipt&#10;        return award.deduct(amount)&#10;&#10;# no existing line edited.&#10;# no existing test rewritten.`} language='text' width={500} fontSize={11} /&gt;&#10;    &lt;/Box&gt;&#10;  &lt;/Box&gt;&#10;  &lt;Box style={{ height: 48, background: '#0E3F8C', padding: '0 40px', flexDirection: 'row', alignItems: 'center', justifyContent: 'center' }}&gt;&#10;    &lt;Text style={{ fontSize: 17, color: '#FFFFFF', fontWeight: '600' }}&gt;Same problem, one week apart. That gap is what this course is training.&lt;/Text&gt;&#10;  &lt;/Box&gt;&#10;&lt;/Slide&gt;"/>
+        <p:cNvPr id="437" name="" descr="&lt;Slide style={{ background: '#FFFFFF', padding: 0 }}&gt;&#10;  &lt;Box style={{ height: 72, background: '#1E4FA8', padding: '0 40px', flexDirection: 'row', alignItems: 'center', justifyContent: 'space-between' }}&gt;&#10;    &lt;Text style={{ fontSize: 15, color: '#B9CDF0', letterSpacing: 1 }}&gt;ISAD · INFORMATION SYSTEMS ANALYSIS &amp;amp; DESIGN&lt;/Text&gt;&#10;    &lt;Text style={{ fontSize: 15, color: '#B9CDF0' }}&gt;W02 · PAYOFF&lt;/Text&gt;&#10;  &lt;/Box&gt;&#10;  &lt;Box style={{ padding: '20px 40px 0 40px', flexDirection: 'row', alignItems: 'center', justifyContent: 'space-between' }}&gt;&#10;    &lt;Text style={{ fontSize: 32, fontWeight: 'bold', color: '#0E3F8C' }}&gt;Closing the Loop from Week 01&lt;/Text&gt;&#10;    &lt;Box style={{ padding: '5px 14px', background: '#E8EFF8', borderRadius: 14 }}&gt;&#10;      &lt;Text style={{ fontSize: 13, color: '#1E4FA8', fontWeight: 'bold' }}&gt;W01 PROBLEM → W02 TOOL&lt;/Text&gt;&#10;    &lt;/Box&gt;&#10;  &lt;/Box&gt;&#10;  &lt;Box style={{ flex: 1, padding: '14px 40px 0 40px', flexDirection: 'row', gap: 22 }}&gt;&#10;    &lt;Box style={{ flex: 1, flexDirection: 'column', gap: 9 }}&gt;&#10;      &lt;Box style={{ flexDirection: 'row', alignItems: 'center', gap: 9 }}&gt;&#10;        &lt;FAIcon name='times-circle' style={{ fill: '#D9534F', width: 18, height: 18 }} /&gt;&#10;        &lt;Text style={{ fontSize: 16, fontWeight: 'bold', color: '#D9534F' }}&gt;Last week: the smell&lt;/Text&gt;&#10;      &lt;/Box&gt;&#10;      &lt;CodeBlock theme='one-dark-pro' code={`if type = CARD    -&gt; chargeCard(order)&#10;if type = WECHAT  -&gt; chargeWechat(order)&#10;if type = ALIPAY  -&gt; chargeAlipay(order)&#10;otherwise         -&gt; refuse: no such type&#10;&#10;# every new type = edit this method&#10;# and re-test every branch`} language='text' width={500} fontSize={11} /&gt;&#10;    &lt;/Box&gt;&#10;    &lt;Box style={{ width: 52, justifyContent: 'center', alignItems: 'center' }}&gt;&#10;      &lt;FAIcon name='long-arrow-alt-right' style={{ fill: '#3D7BD9', width: 34, height: 34 }} /&gt;&#10;    &lt;/Box&gt;&#10;    &lt;Box style={{ flex: 1, flexDirection: 'column', gap: 9 }}&gt;&#10;      &lt;Box style={{ flexDirection: 'row', alignItems: 'center', gap: 9 }}&gt;&#10;        &lt;FAIcon name='check-circle' style={{ fill: '#1E4FA8', width: 18, height: 18 }} /&gt;&#10;        &lt;Text style={{ fontSize: 16, fontWeight: 'bold', color: '#0E3F8C' }}&gt;This week: the tool&lt;/Text&gt;&#10;      &lt;/Box&gt;&#10;      &lt;CodeBlock theme='one-dark-pro' code={`r = method.pay(order.total())&#10;&#10;# a new payment type?&#10;Class Bursary implements PaymentMethod&#10;    + pay(amount) : Receipt&#10;        return award.deduct(amount)&#10;&#10;# no existing line edited.&#10;# no existing test rewritten.`} language='text' width={500} fontSize={11} /&gt;&#10;    &lt;/Box&gt;&#10;  &lt;/Box&gt;&#10;  &lt;Box style={{ height: 48, background: '#0E3F8C', padding: '0 40px', flexDirection: 'row', alignItems: 'center', justifyContent: 'center' }}&gt;&#10;    &lt;Text style={{ fontSize: 17, color: '#FFFFFF', fontWeight: '600' }}&gt;Same problem, one week apart. That gap is what this course is training.&lt;/Text&gt;&#10;  &lt;/Box&gt;&#10;&lt;/Slide&gt;"/>
         <p:cNvGrpSpPr/>
         <p:nvPr/>
       </p:nvGrpSpPr>
@@ -17426,15 +16106,15 @@
         <p:spPr>
           <a:xfrm rot="0" flipH="0" flipV="0">
             <a:off x="381000" y="1657350"/>
-            <a:ext cx="5257800" cy="1504950"/>
+            <a:ext cx="5257800" cy="1152525"/>
           </a:xfrm>
           <a:prstGeom prst="roundRect">
             <a:avLst>
-              <a:gd name="adj" fmla="val 5063"/>
+              <a:gd name="adj" fmla="val 6612"/>
             </a:avLst>
           </a:prstGeom>
           <a:solidFill>
-            <a:srgbClr val="F6F8FA"/>
+            <a:srgbClr val="0E1116"/>
           </a:solidFill>
           <a:ln/>
         </p:spPr>
@@ -17452,7 +16132,7 @@
         <p:spPr>
           <a:xfrm rot="0" flipH="0" flipV="0">
             <a:off x="533400" y="1790700"/>
-            <a:ext cx="4953000" cy="1238250"/>
+            <a:ext cx="4953000" cy="885825"/>
           </a:xfrm>
           <a:prstGeom prst="rect"/>
         </p:spPr>
@@ -17461,11 +16141,7 @@
             <a:normAutofit/>
           </a:bodyPr>
           <a:p>
-            <a:pPr>
-              <a:lnSpc>
-                <a:spcPct val="140000"/>
-              </a:lnSpc>
-            </a:pPr>
+            <a:pPr/>
             <a:r>
               <a:rPr sz="825">
                 <a:solidFill>
@@ -17474,105 +16150,12 @@
                 <a:latin typeface="Menlo"/>
                 <a:ea typeface="Menlo"/>
               </a:rPr>
-              <a:t>if type = CARD    -&gt; chargeCard(order)</a:t>
-            </a:r>
-            <a:endParaRPr/>
-          </a:p>
-          <a:p>
-            <a:pPr>
-              <a:lnSpc>
-                <a:spcPct val="140000"/>
-              </a:lnSpc>
-            </a:pPr>
-            <a:r>
-              <a:rPr sz="825">
-                <a:solidFill>
-                  <a:srgbClr val="E5E7EB"/>
-                </a:solidFill>
-                <a:latin typeface="Menlo"/>
-                <a:ea typeface="Menlo"/>
-              </a:rPr>
-              <a:t>if type = WECHAT  -&gt; chargeWechat(order)</a:t>
-            </a:r>
-            <a:endParaRPr/>
-          </a:p>
-          <a:p>
-            <a:pPr>
-              <a:lnSpc>
-                <a:spcPct val="140000"/>
-              </a:lnSpc>
-            </a:pPr>
-            <a:r>
-              <a:rPr sz="825">
-                <a:solidFill>
-                  <a:srgbClr val="E5E7EB"/>
-                </a:solidFill>
-                <a:latin typeface="Menlo"/>
-                <a:ea typeface="Menlo"/>
-              </a:rPr>
-              <a:t>if type = ALIPAY  -&gt; chargeAlipay(order)</a:t>
-            </a:r>
-            <a:endParaRPr/>
-          </a:p>
-          <a:p>
-            <a:pPr>
-              <a:lnSpc>
-                <a:spcPct val="140000"/>
-              </a:lnSpc>
-            </a:pPr>
-            <a:r>
-              <a:rPr sz="825">
-                <a:solidFill>
-                  <a:srgbClr val="E5E7EB"/>
-                </a:solidFill>
-                <a:latin typeface="Menlo"/>
-                <a:ea typeface="Menlo"/>
-              </a:rPr>
-              <a:t>otherwise         -&gt; refuse: no such type</a:t>
-            </a:r>
-            <a:endParaRPr/>
-          </a:p>
-          <a:p>
-            <a:pPr>
-              <a:lnSpc>
-                <a:spcPct val="140000"/>
-              </a:lnSpc>
-            </a:pPr>
-            <a:endParaRPr/>
-          </a:p>
-          <a:p>
-            <a:pPr>
-              <a:lnSpc>
-                <a:spcPct val="140000"/>
-              </a:lnSpc>
-            </a:pPr>
-            <a:r>
-              <a:rPr sz="825">
-                <a:solidFill>
-                  <a:srgbClr val="E5E7EB"/>
-                </a:solidFill>
-                <a:latin typeface="Menlo"/>
-                <a:ea typeface="Menlo"/>
-              </a:rPr>
-              <a:t># every new type = edit this method</a:t>
-            </a:r>
-            <a:endParaRPr/>
-          </a:p>
-          <a:p>
-            <a:pPr>
-              <a:lnSpc>
-                <a:spcPct val="140000"/>
-              </a:lnSpc>
-            </a:pPr>
-            <a:r>
-              <a:rPr sz="825">
-                <a:solidFill>
-                  <a:srgbClr val="E5E7EB"/>
-                </a:solidFill>
-                <a:latin typeface="Menlo"/>
-                <a:ea typeface="Menlo"/>
-              </a:rPr>
-              <a:t># and re-test every branch</a:t>
+              <a:t>if type = CARD    -&gt; chargeCard(order)
+if type = WECHAT  -&gt; chargeWechat(order)
+if type = ALIPAY  -&gt; chargeAlipay(order)
+otherwise         -&gt; refuse: no such type
+# every new type = edit this method
+# and re-test every branch</a:t>
             </a:r>
             <a:endParaRPr/>
           </a:p>
@@ -17587,15 +16170,15 @@
         <p:spPr>
           <a:xfrm rot="0" flipH="0" flipV="0">
             <a:off x="6553200" y="1657350"/>
-            <a:ext cx="5257800" cy="1857375"/>
+            <a:ext cx="5257800" cy="1400175"/>
           </a:xfrm>
           <a:prstGeom prst="roundRect">
             <a:avLst>
-              <a:gd name="adj" fmla="val 4103"/>
+              <a:gd name="adj" fmla="val 5442"/>
             </a:avLst>
           </a:prstGeom>
           <a:solidFill>
-            <a:srgbClr val="F6F8FA"/>
+            <a:srgbClr val="0E1116"/>
           </a:solidFill>
           <a:ln/>
         </p:spPr>
@@ -17613,7 +16196,7 @@
         <p:spPr>
           <a:xfrm rot="0" flipH="0" flipV="0">
             <a:off x="6705600" y="1790700"/>
-            <a:ext cx="4953000" cy="1590675"/>
+            <a:ext cx="4953000" cy="1133475"/>
           </a:xfrm>
           <a:prstGeom prst="rect"/>
         </p:spPr>
@@ -17622,11 +16205,7 @@
             <a:normAutofit/>
           </a:bodyPr>
           <a:p>
-            <a:pPr>
-              <a:lnSpc>
-                <a:spcPct val="140000"/>
-              </a:lnSpc>
-            </a:pPr>
+            <a:pPr/>
             <a:r>
               <a:rPr sz="825">
                 <a:solidFill>
@@ -17635,131 +16214,13 @@
                 <a:latin typeface="Menlo"/>
                 <a:ea typeface="Menlo"/>
               </a:rPr>
-              <a:t>r = method.pay(order.total())</a:t>
-            </a:r>
-            <a:endParaRPr/>
-          </a:p>
-          <a:p>
-            <a:pPr>
-              <a:lnSpc>
-                <a:spcPct val="140000"/>
-              </a:lnSpc>
-            </a:pPr>
-            <a:endParaRPr/>
-          </a:p>
-          <a:p>
-            <a:pPr>
-              <a:lnSpc>
-                <a:spcPct val="140000"/>
-              </a:lnSpc>
-            </a:pPr>
-            <a:r>
-              <a:rPr sz="825">
-                <a:solidFill>
-                  <a:srgbClr val="E5E7EB"/>
-                </a:solidFill>
-                <a:latin typeface="Menlo"/>
-                <a:ea typeface="Menlo"/>
-              </a:rPr>
-              <a:t># a new payment type?</a:t>
-            </a:r>
-            <a:endParaRPr/>
-          </a:p>
-          <a:p>
-            <a:pPr>
-              <a:lnSpc>
-                <a:spcPct val="140000"/>
-              </a:lnSpc>
-            </a:pPr>
-            <a:r>
-              <a:rPr sz="825">
-                <a:solidFill>
-                  <a:srgbClr val="E5E7EB"/>
-                </a:solidFill>
-                <a:latin typeface="Menlo"/>
-                <a:ea typeface="Menlo"/>
-              </a:rPr>
-              <a:t>Class Bursary implements PaymentMethod</a:t>
-            </a:r>
-            <a:endParaRPr/>
-          </a:p>
-          <a:p>
-            <a:pPr>
-              <a:lnSpc>
-                <a:spcPct val="140000"/>
-              </a:lnSpc>
-            </a:pPr>
-            <a:r>
-              <a:rPr sz="825">
-                <a:solidFill>
-                  <a:srgbClr val="E5E7EB"/>
-                </a:solidFill>
-                <a:latin typeface="Menlo"/>
-                <a:ea typeface="Menlo"/>
-              </a:rPr>
-              <a:t>    + pay(amount) : Receipt</a:t>
-            </a:r>
-            <a:endParaRPr/>
-          </a:p>
-          <a:p>
-            <a:pPr>
-              <a:lnSpc>
-                <a:spcPct val="140000"/>
-              </a:lnSpc>
-            </a:pPr>
-            <a:r>
-              <a:rPr sz="825">
-                <a:solidFill>
-                  <a:srgbClr val="E5E7EB"/>
-                </a:solidFill>
-                <a:latin typeface="Menlo"/>
-                <a:ea typeface="Menlo"/>
-              </a:rPr>
-              <a:t>        return award.deduct(amount)</a:t>
-            </a:r>
-            <a:endParaRPr/>
-          </a:p>
-          <a:p>
-            <a:pPr>
-              <a:lnSpc>
-                <a:spcPct val="140000"/>
-              </a:lnSpc>
-            </a:pPr>
-            <a:endParaRPr/>
-          </a:p>
-          <a:p>
-            <a:pPr>
-              <a:lnSpc>
-                <a:spcPct val="140000"/>
-              </a:lnSpc>
-            </a:pPr>
-            <a:r>
-              <a:rPr sz="825">
-                <a:solidFill>
-                  <a:srgbClr val="E5E7EB"/>
-                </a:solidFill>
-                <a:latin typeface="Menlo"/>
-                <a:ea typeface="Menlo"/>
-              </a:rPr>
-              <a:t># no existing line edited.</a:t>
-            </a:r>
-            <a:endParaRPr/>
-          </a:p>
-          <a:p>
-            <a:pPr>
-              <a:lnSpc>
-                <a:spcPct val="140000"/>
-              </a:lnSpc>
-            </a:pPr>
-            <a:r>
-              <a:rPr sz="825">
-                <a:solidFill>
-                  <a:srgbClr val="E5E7EB"/>
-                </a:solidFill>
-                <a:latin typeface="Menlo"/>
-                <a:ea typeface="Menlo"/>
-              </a:rPr>
-              <a:t># no existing test rewritten.</a:t>
+              <a:t>r = method.pay(order.total())
+# a new payment type?
+Class Bursary implements PaymentMethod
+    + pay(amount) : Receipt
+        return award.deduct(amount)
+# no existing line edited.
+# no existing test rewritten.</a:t>
             </a:r>
             <a:endParaRPr/>
           </a:p>
@@ -18655,7 +17116,7 @@
   <p:cSld>
     <p:spTree>
       <p:nvGrpSpPr>
-        <p:cNvPr id="484" name="" descr="&lt;Slide style={{ background: '#FFFFFF', padding: 0 }}&gt;&#10;  &lt;Box style={{ padding: '22px 40px 6px 40px', flexDirection: 'row', alignItems: 'center', justifyContent: 'space-between' }}&gt;&#10;    &lt;Text style={{ fontSize: 32, fontWeight: 'bold', color: '#0E3F8C' }}&gt;Exercise 2.1 — The Class That Does Everything&lt;/Text&gt;&#10;    &lt;Text style={{ fontSize: 14, color: '#1E4FA8', fontWeight: 'bold' }}&gt;30 / 38&lt;/Text&gt;&#10;  &lt;/Box&gt;&#10;  &lt;Box style={{ flex: 1, padding: '10px 40px 0 40px', flexDirection: 'row', gap: 26 }}&gt;&#10;    &lt;Box style={{ flex: 3, flexDirection: 'column', gap: 9 }}&gt;&#10;      &lt;Box style={{ flexDirection: 'row', alignItems: 'center', gap: 9 }}&gt;&#10;        &lt;Box style={{ padding: '4px 12px', background: '#D9534F', borderRadius: 6 }}&gt;&#10;          &lt;Text style={{ fontSize: 13, color: '#FFFFFF', fontWeight: 'bold' }}&gt;BEFORE&lt;/Text&gt;&#10;        &lt;/Box&gt;&#10;        &lt;Text style={{ fontSize: 16, color: '#4A5568' }}&gt;One class, six unrelated reasons to change.&lt;/Text&gt;&#10;      &lt;/Box&gt;&#10;      &lt;CodeBlock code={`Class Order&#10;    + placeOrder()&#10;    + chargeCustomer()&#10;    + notifyRider()&#10;    + printReceipt()&#10;    + updateInventory()&#10;    + sendSms()&#10;    + applyDiscount()`} language='text' width={540} fontSize={12} /&gt;&#10;      &lt;Box style={{ padding: '12px 16px', background: '#FDF3F3', borderRadius: 9, borderLeft: '4px solid #D9534F' }}&gt;&#10;        &lt;Text style={{ fontSize: 15, color: '#4A5568', lineHeight: 1.5 }}&gt;Your task: &lt;Text style={{ fontWeight: 'bold', color: '#D9534F' }}&gt;list the distinct responsibilities&lt;/Text&gt; — not the methods.&lt;/Text&gt;&#10;      &lt;/Box&gt;&#10;    &lt;/Box&gt;&#10;    &lt;Box style={{ flex: 2, flexDirection: 'column', gap: 12, justifyContent: 'center' }}&gt;&#10;      &lt;Box style={{ padding: '20px 22px', background: '#0E3F8C', borderRadius: 12, flexDirection: 'column', gap: 12 }}&gt;&#10;        &lt;Text style={{ fontSize: 15, color: '#7FA2D6', letterSpacing: 1 }}&gt;A HINT YOU WILL NEED LATER&lt;/Text&gt;&#10;        &lt;Text style={{ fontSize: 20, fontWeight: 'bold', color: '#FFFFFF', lineHeight: 1.35 }}&gt;A responsibility is a reason to change.&lt;/Text&gt;&#10;        &lt;Text style={{ fontSize: 15, color: '#C5D4EA', lineHeight: 1.5 }}&gt;Two methods that change for the same reason belong together. Two that change for different reasons do not.&lt;/Text&gt;&#10;      &lt;/Box&gt;&#10;      &lt;Box style={{ padding: '14px 17px', background: '#F7F9FC', borderRadius: 10, border: '1px dashed #D9534F' }}&gt;&#10;        &lt;Text style={{ fontSize: 15, color: '#4A5568', lineHeight: 1.5 }}&gt;&lt;Text style={{ fontWeight: 'bold', color: '#D9534F' }}&gt;Remember this class.&lt;/Text&gt; We meet it again in Week 11, when GRASP tells us how to fix it properly.&lt;/Text&gt;&#10;      &lt;/Box&gt;&#10;    &lt;/Box&gt;&#10;  &lt;/Box&gt;&#10;  &lt;Box style={{ height: 44, background: '#0E3F8C', padding: '0 40px', flexDirection: 'row', alignItems: 'center', justifyContent: 'center' }}&gt;&#10;    &lt;Text style={{ fontSize: 17, color: '#FFFFFF', fontWeight: '600' }}&gt;90 minutes. Work in pairs first, then report back as a group.&lt;/Text&gt;&#10;  &lt;/Box&gt;&#10;&lt;/Slide&gt;"/>
+        <p:cNvPr id="484" name="" descr="&lt;Slide style={{ background: '#FFFFFF', padding: 0 }}&gt;&#10;  &lt;Box style={{ padding: '22px 40px 6px 40px', flexDirection: 'row', alignItems: 'center', justifyContent: 'space-between' }}&gt;&#10;    &lt;Text style={{ fontSize: 32, fontWeight: 'bold', color: '#0E3F8C' }}&gt;Exercise 2.1 — The Class That Does Everything&lt;/Text&gt;&#10;    &lt;Text style={{ fontSize: 14, color: '#1E4FA8', fontWeight: 'bold' }}&gt;30 / 38&lt;/Text&gt;&#10;  &lt;/Box&gt;&#10;  &lt;Box style={{ flex: 1, padding: '10px 40px 0 40px', flexDirection: 'row', gap: 26 }}&gt;&#10;    &lt;Box style={{ flex: 3, flexDirection: 'column', gap: 9 }}&gt;&#10;      &lt;Box style={{ flexDirection: 'row', alignItems: 'center', gap: 9 }}&gt;&#10;        &lt;Box style={{ padding: '4px 12px', background: '#D9534F', borderRadius: 6 }}&gt;&#10;          &lt;Text style={{ fontSize: 13, color: '#FFFFFF', fontWeight: 'bold' }}&gt;BEFORE&lt;/Text&gt;&#10;        &lt;/Box&gt;&#10;        &lt;Text style={{ fontSize: 16, color: '#4A5568' }}&gt;One class, six unrelated reasons to change.&lt;/Text&gt;&#10;      &lt;/Box&gt;&#10;      &lt;CodeBlock theme='one-dark-pro' code={`Class Order&#10;    + placeOrder()&#10;    + chargeCustomer()&#10;    + notifyRider()&#10;    + printReceipt()&#10;    + updateInventory()&#10;    + sendSms()&#10;    + applyDiscount()`} language='text' width={540} fontSize={12} /&gt;&#10;      &lt;Box style={{ padding: '12px 16px', background: '#FDF3F3', borderRadius: 9, borderLeft: '4px solid #D9534F' }}&gt;&#10;        &lt;Text style={{ fontSize: 15, color: '#4A5568', lineHeight: 1.5 }}&gt;Your task: &lt;Text style={{ fontWeight: 'bold', color: '#D9534F' }}&gt;list the distinct responsibilities&lt;/Text&gt; — not the methods.&lt;/Text&gt;&#10;      &lt;/Box&gt;&#10;    &lt;/Box&gt;&#10;    &lt;Box style={{ flex: 2, flexDirection: 'column', gap: 12, justifyContent: 'center' }}&gt;&#10;      &lt;Box style={{ padding: '20px 22px', background: '#0E3F8C', borderRadius: 12, flexDirection: 'column', gap: 12 }}&gt;&#10;        &lt;Text style={{ fontSize: 15, color: '#7FA2D6', letterSpacing: 1 }}&gt;A HINT YOU WILL NEED LATER&lt;/Text&gt;&#10;        &lt;Text style={{ fontSize: 20, fontWeight: 'bold', color: '#FFFFFF', lineHeight: 1.35 }}&gt;A responsibility is a reason to change.&lt;/Text&gt;&#10;        &lt;Text style={{ fontSize: 15, color: '#C5D4EA', lineHeight: 1.5 }}&gt;Two methods that change for the same reason belong together. Two that change for different reasons do not.&lt;/Text&gt;&#10;      &lt;/Box&gt;&#10;      &lt;Box style={{ padding: '14px 17px', background: '#F7F9FC', borderRadius: 10, border: '1px dashed #D9534F' }}&gt;&#10;        &lt;Text style={{ fontSize: 15, color: '#4A5568', lineHeight: 1.5 }}&gt;&lt;Text style={{ fontWeight: 'bold', color: '#D9534F' }}&gt;Remember this class.&lt;/Text&gt; We meet it again in Week 11, when GRASP tells us how to fix it properly.&lt;/Text&gt;&#10;      &lt;/Box&gt;&#10;    &lt;/Box&gt;&#10;  &lt;/Box&gt;&#10;  &lt;Box style={{ height: 44, background: '#0E3F8C', padding: '0 40px', flexDirection: 'row', alignItems: 'center', justifyContent: 'center' }}&gt;&#10;    &lt;Text style={{ fontSize: 17, color: '#FFFFFF', fontWeight: '600' }}&gt;90 minutes. Work in pairs first, then report back as a group.&lt;/Text&gt;&#10;  &lt;/Box&gt;&#10;&lt;/Slide&gt;"/>
         <p:cNvGrpSpPr/>
         <p:nvPr/>
       </p:nvGrpSpPr>
@@ -18865,7 +17326,7 @@
         </p:nvSpPr>
         <p:spPr>
           <a:xfrm rot="0" flipH="0" flipV="0">
-            <a:off x="419100" y="2943225"/>
+            <a:off x="419100" y="2505075"/>
             <a:ext cx="6705600" cy="485775"/>
           </a:xfrm>
           <a:prstGeom prst="roundRect">
@@ -18891,7 +17352,7 @@
         </p:nvSpPr>
         <p:spPr>
           <a:xfrm rot="0" flipH="0" flipV="0">
-            <a:off x="419100" y="2943225"/>
+            <a:off x="419100" y="2505075"/>
             <a:ext cx="6705600" cy="485775"/>
           </a:xfrm>
           <a:custGeom>
@@ -18948,7 +17409,7 @@
         </p:nvSpPr>
         <p:spPr>
           <a:xfrm rot="0" flipH="0" flipV="0">
-            <a:off x="571500" y="3057525"/>
+            <a:off x="571500" y="2619375"/>
             <a:ext cx="6362700" cy="257175"/>
           </a:xfrm>
           <a:prstGeom prst="rect"/>
@@ -19274,15 +17735,15 @@
         <p:spPr>
           <a:xfrm rot="0" flipH="0" flipV="0">
             <a:off x="381000" y="1047750"/>
-            <a:ext cx="6705600" cy="1809750"/>
+            <a:ext cx="6705600" cy="1371600"/>
           </a:xfrm>
           <a:prstGeom prst="roundRect">
             <a:avLst>
-              <a:gd name="adj" fmla="val 4211"/>
+              <a:gd name="adj" fmla="val 5556"/>
             </a:avLst>
           </a:prstGeom>
           <a:solidFill>
-            <a:srgbClr val="F6F8FA"/>
+            <a:srgbClr val="0E1116"/>
           </a:solidFill>
           <a:ln/>
         </p:spPr>
@@ -19300,7 +17761,7 @@
         <p:spPr>
           <a:xfrm rot="0" flipH="0" flipV="0">
             <a:off x="533400" y="1181100"/>
-            <a:ext cx="6400800" cy="1543050"/>
+            <a:ext cx="6400800" cy="1104900"/>
           </a:xfrm>
           <a:prstGeom prst="rect"/>
         </p:spPr>
@@ -19309,11 +17770,7 @@
             <a:normAutofit/>
           </a:bodyPr>
           <a:p>
-            <a:pPr>
-              <a:lnSpc>
-                <a:spcPct val="140000"/>
-              </a:lnSpc>
-            </a:pPr>
+            <a:pPr/>
             <a:r>
               <a:rPr sz="900">
                 <a:solidFill>
@@ -19322,133 +17779,14 @@
                 <a:latin typeface="Menlo"/>
                 <a:ea typeface="Menlo"/>
               </a:rPr>
-              <a:t>Class Order</a:t>
-            </a:r>
-            <a:endParaRPr/>
-          </a:p>
-          <a:p>
-            <a:pPr>
-              <a:lnSpc>
-                <a:spcPct val="140000"/>
-              </a:lnSpc>
-            </a:pPr>
-            <a:r>
-              <a:rPr sz="900">
-                <a:solidFill>
-                  <a:srgbClr val="E5E7EB"/>
-                </a:solidFill>
-                <a:latin typeface="Menlo"/>
-                <a:ea typeface="Menlo"/>
-              </a:rPr>
-              <a:t>    + placeOrder()</a:t>
-            </a:r>
-            <a:endParaRPr/>
-          </a:p>
-          <a:p>
-            <a:pPr>
-              <a:lnSpc>
-                <a:spcPct val="140000"/>
-              </a:lnSpc>
-            </a:pPr>
-            <a:r>
-              <a:rPr sz="900">
-                <a:solidFill>
-                  <a:srgbClr val="E5E7EB"/>
-                </a:solidFill>
-                <a:latin typeface="Menlo"/>
-                <a:ea typeface="Menlo"/>
-              </a:rPr>
-              <a:t>    + chargeCustomer()</a:t>
-            </a:r>
-            <a:endParaRPr/>
-          </a:p>
-          <a:p>
-            <a:pPr>
-              <a:lnSpc>
-                <a:spcPct val="140000"/>
-              </a:lnSpc>
-            </a:pPr>
-            <a:r>
-              <a:rPr sz="900">
-                <a:solidFill>
-                  <a:srgbClr val="E5E7EB"/>
-                </a:solidFill>
-                <a:latin typeface="Menlo"/>
-                <a:ea typeface="Menlo"/>
-              </a:rPr>
-              <a:t>    + notifyRider()</a:t>
-            </a:r>
-            <a:endParaRPr/>
-          </a:p>
-          <a:p>
-            <a:pPr>
-              <a:lnSpc>
-                <a:spcPct val="140000"/>
-              </a:lnSpc>
-            </a:pPr>
-            <a:r>
-              <a:rPr sz="900">
-                <a:solidFill>
-                  <a:srgbClr val="E5E7EB"/>
-                </a:solidFill>
-                <a:latin typeface="Menlo"/>
-                <a:ea typeface="Menlo"/>
-              </a:rPr>
-              <a:t>    + printReceipt()</a:t>
-            </a:r>
-            <a:endParaRPr/>
-          </a:p>
-          <a:p>
-            <a:pPr>
-              <a:lnSpc>
-                <a:spcPct val="140000"/>
-              </a:lnSpc>
-            </a:pPr>
-            <a:r>
-              <a:rPr sz="900">
-                <a:solidFill>
-                  <a:srgbClr val="E5E7EB"/>
-                </a:solidFill>
-                <a:latin typeface="Menlo"/>
-                <a:ea typeface="Menlo"/>
-              </a:rPr>
-              <a:t>    + updateInventory()</a:t>
-            </a:r>
-            <a:endParaRPr/>
-          </a:p>
-          <a:p>
-            <a:pPr>
-              <a:lnSpc>
-                <a:spcPct val="140000"/>
-              </a:lnSpc>
-            </a:pPr>
-            <a:r>
-              <a:rPr sz="900">
-                <a:solidFill>
-                  <a:srgbClr val="E5E7EB"/>
-                </a:solidFill>
-                <a:latin typeface="Menlo"/>
-                <a:ea typeface="Menlo"/>
-              </a:rPr>
-              <a:t>    + sendSms()</a:t>
-            </a:r>
-            <a:endParaRPr/>
-          </a:p>
-          <a:p>
-            <a:pPr>
-              <a:lnSpc>
-                <a:spcPct val="140000"/>
-              </a:lnSpc>
-            </a:pPr>
-            <a:r>
-              <a:rPr sz="900">
-                <a:solidFill>
-                  <a:srgbClr val="E5E7EB"/>
-                </a:solidFill>
-                <a:latin typeface="Menlo"/>
-                <a:ea typeface="Menlo"/>
-              </a:rPr>
-              <a:t>    + applyDiscount()</a:t>
+              <a:t>Class Order
+    + placeOrder()
+    + chargeCustomer()
+    + notifyRider()
+    + printReceipt()
+    + updateInventory()
+    + sendSms()
+    + applyDiscount()</a:t>
             </a:r>
             <a:endParaRPr/>
           </a:p>
